--- a/고성모_포트폴리오_PPT.pptx
+++ b/고성모_포트폴리오_PPT.pptx
@@ -13,12 +13,9 @@
     <p:sldId id="261" r:id="rId7"/>
     <p:sldId id="262" r:id="rId8"/>
     <p:sldId id="263" r:id="rId9"/>
-    <p:sldId id="264" r:id="rId10"/>
-    <p:sldId id="265" r:id="rId11"/>
-    <p:sldId id="266" r:id="rId12"/>
   </p:sldIdLst>
   <p:notesMasterIdLst>
-    <p:notesMasterId r:id="rId13"/>
+    <p:notesMasterId r:id="rId10"/>
   </p:notesMasterIdLst>
   <p:sldSz cx="12192000" cy="6858000"/>
   <p:notesSz cx="6858000" cy="12192000"/>
@@ -554,182 +551,6 @@
 </p:notes>
 </file>
 
-<file path=ppt/notesSlides/notesSlide10.xml><?xml version="1.0" encoding="utf-8"?>
-<p:notes xmlns:a="http://schemas.openxmlformats.org/drawingml/2006/main" xmlns:r="http://schemas.openxmlformats.org/officeDocument/2006/relationships" xmlns:p="http://schemas.openxmlformats.org/presentationml/2006/main">
-  <p:cSld>
-    <p:spTree>
-      <p:nvGrpSpPr>
-        <p:cNvPr id="1" name=""/>
-        <p:cNvGrpSpPr/>
-        <p:nvPr/>
-      </p:nvGrpSpPr>
-      <p:grpSpPr>
-        <a:xfrm>
-          <a:off x="0" y="0"/>
-          <a:ext cx="0" cy="0"/>
-          <a:chOff x="0" y="0"/>
-          <a:chExt cx="0" cy="0"/>
-        </a:xfrm>
-      </p:grpSpPr>
-      <p:sp>
-        <p:nvSpPr>
-          <p:cNvPr id="2" name="Slide Image Placeholder 1"/>
-          <p:cNvSpPr>
-            <a:spLocks noGrp="1" noRot="1" noChangeAspect="1"/>
-          </p:cNvSpPr>
-          <p:nvPr>
-            <p:ph type="sldImg"/>
-          </p:nvPr>
-        </p:nvSpPr>
-        <p:spPr/>
-      </p:sp>
-      <p:sp>
-        <p:nvSpPr>
-          <p:cNvPr id="3" name="Notes Placeholder 2"/>
-          <p:cNvSpPr>
-            <a:spLocks noGrp="1"/>
-          </p:cNvSpPr>
-          <p:nvPr>
-            <p:ph type="body" idx="1"/>
-          </p:nvPr>
-        </p:nvSpPr>
-        <p:spPr/>
-        <p:txBody>
-          <a:bodyPr/>
-          <a:lstStyle/>
-          <a:p>
-            <a:r>
-              <a:rPr lang="en-US" dirty="0"/>
-              <a:t/>
-            </a:r>
-            <a:endParaRPr lang="en-US" dirty="0"/>
-          </a:p>
-        </p:txBody>
-      </p:sp>
-      <p:sp>
-        <p:nvSpPr>
-          <p:cNvPr id="4" name="Slide Number Placeholder 3"/>
-          <p:cNvSpPr>
-            <a:spLocks noGrp="1"/>
-          </p:cNvSpPr>
-          <p:nvPr>
-            <p:ph type="sldNum" sz="quarter" idx="10"/>
-          </p:nvPr>
-        </p:nvSpPr>
-        <p:spPr/>
-        <p:txBody>
-          <a:bodyPr/>
-          <a:lstStyle/>
-          <a:p>
-            <a:fld id="{F7021451-1387-4CA6-816F-3879F97B5CBC}" type="slidenum">
-              <a:rPr lang="en-US"/>
-              <a:t>10</a:t>
-            </a:fld>
-            <a:endParaRPr lang="en-US"/>
-          </a:p>
-        </p:txBody>
-      </p:sp>
-    </p:spTree>
-    <p:extLst>
-      <p:ext uri="{BB962C8B-B14F-4D97-AF65-F5344CB8AC3E}">
-        <p14:creationId xmlns:p14="http://schemas.microsoft.com/office/powerpoint/2010/main" val="1024086991"/>
-      </p:ext>
-    </p:extLst>
-  </p:cSld>
-  <p:clrMapOvr>
-    <a:masterClrMapping/>
-  </p:clrMapOvr>
-</p:notes>
-</file>
-
-<file path=ppt/notesSlides/notesSlide11.xml><?xml version="1.0" encoding="utf-8"?>
-<p:notes xmlns:a="http://schemas.openxmlformats.org/drawingml/2006/main" xmlns:r="http://schemas.openxmlformats.org/officeDocument/2006/relationships" xmlns:p="http://schemas.openxmlformats.org/presentationml/2006/main">
-  <p:cSld>
-    <p:spTree>
-      <p:nvGrpSpPr>
-        <p:cNvPr id="1" name=""/>
-        <p:cNvGrpSpPr/>
-        <p:nvPr/>
-      </p:nvGrpSpPr>
-      <p:grpSpPr>
-        <a:xfrm>
-          <a:off x="0" y="0"/>
-          <a:ext cx="0" cy="0"/>
-          <a:chOff x="0" y="0"/>
-          <a:chExt cx="0" cy="0"/>
-        </a:xfrm>
-      </p:grpSpPr>
-      <p:sp>
-        <p:nvSpPr>
-          <p:cNvPr id="2" name="Slide Image Placeholder 1"/>
-          <p:cNvSpPr>
-            <a:spLocks noGrp="1" noRot="1" noChangeAspect="1"/>
-          </p:cNvSpPr>
-          <p:nvPr>
-            <p:ph type="sldImg"/>
-          </p:nvPr>
-        </p:nvSpPr>
-        <p:spPr/>
-      </p:sp>
-      <p:sp>
-        <p:nvSpPr>
-          <p:cNvPr id="3" name="Notes Placeholder 2"/>
-          <p:cNvSpPr>
-            <a:spLocks noGrp="1"/>
-          </p:cNvSpPr>
-          <p:nvPr>
-            <p:ph type="body" idx="1"/>
-          </p:nvPr>
-        </p:nvSpPr>
-        <p:spPr/>
-        <p:txBody>
-          <a:bodyPr/>
-          <a:lstStyle/>
-          <a:p>
-            <a:r>
-              <a:rPr lang="en-US" dirty="0"/>
-              <a:t/>
-            </a:r>
-            <a:endParaRPr lang="en-US" dirty="0"/>
-          </a:p>
-        </p:txBody>
-      </p:sp>
-      <p:sp>
-        <p:nvSpPr>
-          <p:cNvPr id="4" name="Slide Number Placeholder 3"/>
-          <p:cNvSpPr>
-            <a:spLocks noGrp="1"/>
-          </p:cNvSpPr>
-          <p:nvPr>
-            <p:ph type="sldNum" sz="quarter" idx="10"/>
-          </p:nvPr>
-        </p:nvSpPr>
-        <p:spPr/>
-        <p:txBody>
-          <a:bodyPr/>
-          <a:lstStyle/>
-          <a:p>
-            <a:fld id="{F7021451-1387-4CA6-816F-3879F97B5CBC}" type="slidenum">
-              <a:rPr lang="en-US"/>
-              <a:t>11</a:t>
-            </a:fld>
-            <a:endParaRPr lang="en-US"/>
-          </a:p>
-        </p:txBody>
-      </p:sp>
-    </p:spTree>
-    <p:extLst>
-      <p:ext uri="{BB962C8B-B14F-4D97-AF65-F5344CB8AC3E}">
-        <p14:creationId xmlns:p14="http://schemas.microsoft.com/office/powerpoint/2010/main" val="1024086991"/>
-      </p:ext>
-    </p:extLst>
-  </p:cSld>
-  <p:clrMapOvr>
-    <a:masterClrMapping/>
-  </p:clrMapOvr>
-</p:notes>
-</file>
-
 <file path=ppt/notesSlides/notesSlide2.xml><?xml version="1.0" encoding="utf-8"?>
 <p:notes xmlns:a="http://schemas.openxmlformats.org/drawingml/2006/main" xmlns:r="http://schemas.openxmlformats.org/officeDocument/2006/relationships" xmlns:p="http://schemas.openxmlformats.org/presentationml/2006/main">
   <p:cSld>
@@ -1328,94 +1149,6 @@
             <a:fld id="{F7021451-1387-4CA6-816F-3879F97B5CBC}" type="slidenum">
               <a:rPr lang="en-US"/>
               <a:t>8</a:t>
-            </a:fld>
-            <a:endParaRPr lang="en-US"/>
-          </a:p>
-        </p:txBody>
-      </p:sp>
-    </p:spTree>
-    <p:extLst>
-      <p:ext uri="{BB962C8B-B14F-4D97-AF65-F5344CB8AC3E}">
-        <p14:creationId xmlns:p14="http://schemas.microsoft.com/office/powerpoint/2010/main" val="1024086991"/>
-      </p:ext>
-    </p:extLst>
-  </p:cSld>
-  <p:clrMapOvr>
-    <a:masterClrMapping/>
-  </p:clrMapOvr>
-</p:notes>
-</file>
-
-<file path=ppt/notesSlides/notesSlide9.xml><?xml version="1.0" encoding="utf-8"?>
-<p:notes xmlns:a="http://schemas.openxmlformats.org/drawingml/2006/main" xmlns:r="http://schemas.openxmlformats.org/officeDocument/2006/relationships" xmlns:p="http://schemas.openxmlformats.org/presentationml/2006/main">
-  <p:cSld>
-    <p:spTree>
-      <p:nvGrpSpPr>
-        <p:cNvPr id="1" name=""/>
-        <p:cNvGrpSpPr/>
-        <p:nvPr/>
-      </p:nvGrpSpPr>
-      <p:grpSpPr>
-        <a:xfrm>
-          <a:off x="0" y="0"/>
-          <a:ext cx="0" cy="0"/>
-          <a:chOff x="0" y="0"/>
-          <a:chExt cx="0" cy="0"/>
-        </a:xfrm>
-      </p:grpSpPr>
-      <p:sp>
-        <p:nvSpPr>
-          <p:cNvPr id="2" name="Slide Image Placeholder 1"/>
-          <p:cNvSpPr>
-            <a:spLocks noGrp="1" noRot="1" noChangeAspect="1"/>
-          </p:cNvSpPr>
-          <p:nvPr>
-            <p:ph type="sldImg"/>
-          </p:nvPr>
-        </p:nvSpPr>
-        <p:spPr/>
-      </p:sp>
-      <p:sp>
-        <p:nvSpPr>
-          <p:cNvPr id="3" name="Notes Placeholder 2"/>
-          <p:cNvSpPr>
-            <a:spLocks noGrp="1"/>
-          </p:cNvSpPr>
-          <p:nvPr>
-            <p:ph type="body" idx="1"/>
-          </p:nvPr>
-        </p:nvSpPr>
-        <p:spPr/>
-        <p:txBody>
-          <a:bodyPr/>
-          <a:lstStyle/>
-          <a:p>
-            <a:r>
-              <a:rPr lang="en-US" dirty="0"/>
-              <a:t/>
-            </a:r>
-            <a:endParaRPr lang="en-US" dirty="0"/>
-          </a:p>
-        </p:txBody>
-      </p:sp>
-      <p:sp>
-        <p:nvSpPr>
-          <p:cNvPr id="4" name="Slide Number Placeholder 3"/>
-          <p:cNvSpPr>
-            <a:spLocks noGrp="1"/>
-          </p:cNvSpPr>
-          <p:nvPr>
-            <p:ph type="sldNum" sz="quarter" idx="10"/>
-          </p:nvPr>
-        </p:nvSpPr>
-        <p:spPr/>
-        <p:txBody>
-          <a:bodyPr/>
-          <a:lstStyle/>
-          <a:p>
-            <a:fld id="{F7021451-1387-4CA6-816F-3879F97B5CBC}" type="slidenum">
-              <a:rPr lang="en-US"/>
-              <a:t>9</a:t>
             </a:fld>
             <a:endParaRPr lang="en-US"/>
           </a:p>
@@ -1773,7 +1506,7 @@
         </p:nvSpPr>
         <p:spPr>
           <a:xfrm>
-            <a:off x="640080" y="1371600"/>
+            <a:off x="640080" y="1417320"/>
             <a:ext cx="9144000" cy="365760"/>
           </a:xfrm>
           <a:prstGeom prst="rect">
@@ -1790,7 +1523,7 @@
               <a:buNone/>
             </a:pPr>
             <a:r>
-              <a:rPr lang="en-US" sz="1300" spc="400" kern="0" dirty="0">
+              <a:rPr lang="en-US" sz="1300" spc="300" kern="0" dirty="0">
                 <a:solidFill>
                   <a:srgbClr val="9AA0D8"/>
                 </a:solidFill>
@@ -1798,7 +1531,7 @@
                 <a:ea typeface="Arial" pitchFamily="34" charset="-122"/>
                 <a:cs typeface="Arial" pitchFamily="34" charset="-120"/>
               </a:rPr>
-              <a:t>DEVELOPER PORTFOLIO · 2026</a:t>
+              <a:t>DEVELOPER PORTFOLIO  2026</a:t>
             </a:r>
             <a:endParaRPr lang="en-US" sz="1300" dirty="0"/>
           </a:p>
@@ -1812,7 +1545,7 @@
         </p:nvSpPr>
         <p:spPr>
           <a:xfrm>
-            <a:off x="640080" y="1783080"/>
+            <a:off x="640080" y="1828800"/>
             <a:ext cx="9144000" cy="1005840"/>
           </a:xfrm>
           <a:prstGeom prst="rect">
@@ -1851,7 +1584,7 @@
         </p:nvSpPr>
         <p:spPr>
           <a:xfrm>
-            <a:off x="640080" y="2926080"/>
+            <a:off x="640080" y="2971800"/>
             <a:ext cx="10515600" cy="457200"/>
           </a:xfrm>
           <a:prstGeom prst="rect">
@@ -1876,7 +1609,7 @@
                 <a:ea typeface="Arial" pitchFamily="34" charset="-122"/>
                 <a:cs typeface="Arial" pitchFamily="34" charset="-120"/>
               </a:rPr>
-              <a:t>게임 · 임베디드 · 로보틱스 · 웹을 넘나드는 소프트웨어 개발자</a:t>
+              <a:t>게임, 임베디드, 로보틱스, 웹을 다루는 소프트웨어 개발자</a:t>
             </a:r>
             <a:endParaRPr lang="en-US" sz="1900" dirty="0"/>
           </a:p>
@@ -1890,7 +1623,7 @@
         </p:nvSpPr>
         <p:spPr>
           <a:xfrm>
-            <a:off x="640080" y="3611880"/>
+            <a:off x="640080" y="3657600"/>
             <a:ext cx="10424160" cy="457200"/>
           </a:xfrm>
           <a:prstGeom prst="rect">
@@ -1915,7 +1648,7 @@
                 <a:ea typeface="Arial" pitchFamily="34" charset="-122"/>
                 <a:cs typeface="Arial" pitchFamily="34" charset="-120"/>
               </a:rPr>
-              <a:t>복잡한 시스템을 구조로 나누고, 하드웨어부터 게임 로직까지 직접 동작시키는 것에 집중합니다.</a:t>
+              <a:t>복잡한 시스템을 구조로 나누고, 하드웨어부터 게임 로직까지 직접 동작시키는 데 집중합니다.</a:t>
             </a:r>
             <a:endParaRPr lang="en-US" sz="1300" dirty="0"/>
           </a:p>
@@ -1929,8 +1662,8 @@
         </p:nvSpPr>
         <p:spPr>
           <a:xfrm>
-            <a:off x="640080" y="4343400"/>
-            <a:ext cx="2194560" cy="457200"/>
+            <a:off x="640080" y="4389120"/>
+            <a:ext cx="2103120" cy="457200"/>
           </a:xfrm>
           <a:prstGeom prst="roundRect">
             <a:avLst>
@@ -1956,8 +1689,8 @@
         </p:nvSpPr>
         <p:spPr>
           <a:xfrm>
-            <a:off x="640080" y="4343400"/>
-            <a:ext cx="2194560" cy="457200"/>
+            <a:off x="640080" y="4389120"/>
+            <a:ext cx="2103120" cy="457200"/>
           </a:xfrm>
           <a:prstGeom prst="rect">
             <a:avLst/>
@@ -1981,7 +1714,7 @@
                 <a:ea typeface="Arial" pitchFamily="34" charset="-122"/>
                 <a:cs typeface="Arial" pitchFamily="34" charset="-120"/>
               </a:rPr>
-              <a:t>Unity · C#</a:t>
+              <a:t>Unity, C#</a:t>
             </a:r>
             <a:endParaRPr lang="en-US" sz="1200" dirty="0"/>
           </a:p>
@@ -1995,8 +1728,8 @@
         </p:nvSpPr>
         <p:spPr>
           <a:xfrm>
-            <a:off x="3090672" y="4343400"/>
-            <a:ext cx="2011680" cy="457200"/>
+            <a:off x="2999232" y="4389120"/>
+            <a:ext cx="1920240" cy="457200"/>
           </a:xfrm>
           <a:prstGeom prst="roundRect">
             <a:avLst>
@@ -2022,8 +1755,8 @@
         </p:nvSpPr>
         <p:spPr>
           <a:xfrm>
-            <a:off x="3090672" y="4343400"/>
-            <a:ext cx="2011680" cy="457200"/>
+            <a:off x="2999232" y="4389120"/>
+            <a:ext cx="1920240" cy="457200"/>
           </a:xfrm>
           <a:prstGeom prst="rect">
             <a:avLst/>
@@ -2047,7 +1780,7 @@
                 <a:ea typeface="Arial" pitchFamily="34" charset="-122"/>
                 <a:cs typeface="Arial" pitchFamily="34" charset="-120"/>
               </a:rPr>
-              <a:t>ESP-IDF · C</a:t>
+              <a:t>ESP-IDF, C</a:t>
             </a:r>
             <a:endParaRPr lang="en-US" sz="1200" dirty="0"/>
           </a:p>
@@ -2061,7 +1794,7 @@
         </p:nvSpPr>
         <p:spPr>
           <a:xfrm>
-            <a:off x="5358384" y="4343400"/>
+            <a:off x="5175504" y="4389120"/>
             <a:ext cx="2651760" cy="457200"/>
           </a:xfrm>
           <a:prstGeom prst="roundRect">
@@ -2088,7 +1821,7 @@
         </p:nvSpPr>
         <p:spPr>
           <a:xfrm>
-            <a:off x="5358384" y="4343400"/>
+            <a:off x="5175504" y="4389120"/>
             <a:ext cx="2651760" cy="457200"/>
           </a:xfrm>
           <a:prstGeom prst="rect">
@@ -2127,7 +1860,7 @@
         </p:nvSpPr>
         <p:spPr>
           <a:xfrm>
-            <a:off x="8266176" y="4343400"/>
+            <a:off x="8083296" y="4389120"/>
             <a:ext cx="2194560" cy="457200"/>
           </a:xfrm>
           <a:prstGeom prst="roundRect">
@@ -2154,7 +1887,7 @@
         </p:nvSpPr>
         <p:spPr>
           <a:xfrm>
-            <a:off x="8266176" y="4343400"/>
+            <a:off x="8083296" y="4389120"/>
             <a:ext cx="2194560" cy="457200"/>
           </a:xfrm>
           <a:prstGeom prst="rect">
@@ -2179,7 +1912,7 @@
                 <a:ea typeface="Arial" pitchFamily="34" charset="-122"/>
                 <a:cs typeface="Arial" pitchFamily="34" charset="-120"/>
               </a:rPr>
-              <a:t>웹 · JS · PHP</a:t>
+              <a:t>웹 (JS, PHP)</a:t>
             </a:r>
             <a:endParaRPr lang="en-US" sz="1200" dirty="0"/>
           </a:p>
@@ -2241,7 +1974,7 @@
                 <a:ea typeface="Arial" pitchFamily="34" charset="-122"/>
                 <a:cs typeface="Arial" pitchFamily="34" charset="-120"/>
               </a:rPr>
-              <a:t>SUNGMO KO · Software Developer</a:t>
+              <a:t>SUNGMO KO</a:t>
             </a:r>
             <a:endParaRPr lang="en-US" sz="1100" dirty="0"/>
           </a:p>
@@ -2280,1805 +2013,9 @@
                 <a:ea typeface="Arial" pitchFamily="34" charset="-122"/>
                 <a:cs typeface="Arial" pitchFamily="34" charset="-120"/>
               </a:rPr>
-              <a:t>Game · Embedded · Robotics</a:t>
+              <a:t>Game, Embedded, Robotics</a:t>
             </a:r>
             <a:endParaRPr lang="en-US" sz="1100" dirty="0"/>
-          </a:p>
-        </p:txBody>
-      </p:sp>
-    </p:spTree>
-  </p:cSld>
-  <p:clrMapOvr>
-    <a:masterClrMapping/>
-  </p:clrMapOvr>
-</p:sld>
-</file>
-
-<file path=ppt/slides/slide10.xml><?xml version="1.0" encoding="utf-8"?>
-<p:sld xmlns:a="http://schemas.openxmlformats.org/drawingml/2006/main" xmlns:r="http://schemas.openxmlformats.org/officeDocument/2006/relationships" xmlns:p="http://schemas.openxmlformats.org/presentationml/2006/main">
-  <p:cSld name="Slide 10">
-    <p:bg>
-      <p:bgPr>
-        <a:solidFill>
-          <a:srgbClr val="FFFFFF"/>
-        </a:solidFill>
-      </p:bgPr>
-    </p:bg>
-    <p:spTree>
-      <p:nvGrpSpPr>
-        <p:cNvPr id="1" name=""/>
-        <p:cNvGrpSpPr/>
-        <p:nvPr/>
-      </p:nvGrpSpPr>
-      <p:grpSpPr>
-        <a:xfrm>
-          <a:off x="0" y="0"/>
-          <a:ext cx="0" cy="0"/>
-          <a:chOff x="0" y="0"/>
-          <a:chExt cx="0" cy="0"/>
-        </a:xfrm>
-      </p:grpSpPr>
-      <p:sp>
-        <p:nvSpPr>
-          <p:cNvPr id="2" name="Text 0"/>
-          <p:cNvSpPr/>
-          <p:nvPr/>
-        </p:nvSpPr>
-        <p:spPr>
-          <a:xfrm>
-            <a:off x="640080" y="384048"/>
-            <a:ext cx="10908792" cy="566928"/>
-          </a:xfrm>
-          <a:prstGeom prst="rect">
-            <a:avLst/>
-          </a:prstGeom>
-          <a:noFill/>
-          <a:ln/>
-        </p:spPr>
-        <p:txBody>
-          <a:bodyPr wrap="square" lIns="0" tIns="0" rIns="0" bIns="0" rtlCol="0" anchor="ctr"/>
-          <a:lstStyle/>
-          <a:p>
-            <a:pPr indent="0" marL="0">
-              <a:buNone/>
-            </a:pPr>
-            <a:r>
-              <a:rPr lang="en-US" sz="2600" b="1" dirty="0">
-                <a:solidFill>
-                  <a:srgbClr val="1B1B21"/>
-                </a:solidFill>
-                <a:latin typeface="Arial" pitchFamily="34" charset="0"/>
-                <a:ea typeface="Arial" pitchFamily="34" charset="-122"/>
-                <a:cs typeface="Arial" pitchFamily="34" charset="-120"/>
-              </a:rPr>
-              <a:t>경력 · 이력</a:t>
-            </a:r>
-            <a:endParaRPr lang="en-US" sz="2600" dirty="0"/>
-          </a:p>
-        </p:txBody>
-      </p:sp>
-      <p:sp>
-        <p:nvSpPr>
-          <p:cNvPr id="3" name="Text 1"/>
-          <p:cNvSpPr/>
-          <p:nvPr/>
-        </p:nvSpPr>
-        <p:spPr>
-          <a:xfrm>
-            <a:off x="640080" y="969264"/>
-            <a:ext cx="10908792" cy="384048"/>
-          </a:xfrm>
-          <a:prstGeom prst="rect">
-            <a:avLst/>
-          </a:prstGeom>
-          <a:noFill/>
-          <a:ln/>
-        </p:spPr>
-        <p:txBody>
-          <a:bodyPr wrap="square" lIns="0" tIns="0" rIns="0" bIns="0" rtlCol="0" anchor="ctr"/>
-          <a:lstStyle/>
-          <a:p>
-            <a:pPr indent="0" marL="0">
-              <a:buNone/>
-            </a:pPr>
-            <a:r>
-              <a:rPr lang="en-US" sz="1250" dirty="0">
-                <a:solidFill>
-                  <a:srgbClr val="565663"/>
-                </a:solidFill>
-                <a:latin typeface="Arial" pitchFamily="34" charset="0"/>
-                <a:ea typeface="Arial" pitchFamily="34" charset="-122"/>
-                <a:cs typeface="Arial" pitchFamily="34" charset="-120"/>
-              </a:rPr>
-              <a:t>전자·제조 현장에서 소프트웨어로 — 하드웨어를 몸으로 익힌 배경이 임베디드·개발의 강점으로 이어집니다.</a:t>
-            </a:r>
-            <a:endParaRPr lang="en-US" sz="1250" dirty="0"/>
-          </a:p>
-        </p:txBody>
-      </p:sp>
-      <p:sp>
-        <p:nvSpPr>
-          <p:cNvPr id="4" name="Text 2"/>
-          <p:cNvSpPr/>
-          <p:nvPr/>
-        </p:nvSpPr>
-        <p:spPr>
-          <a:xfrm>
-            <a:off x="640080" y="1463040"/>
-            <a:ext cx="5486400" cy="320040"/>
-          </a:xfrm>
-          <a:prstGeom prst="rect">
-            <a:avLst/>
-          </a:prstGeom>
-          <a:noFill/>
-          <a:ln/>
-        </p:spPr>
-        <p:txBody>
-          <a:bodyPr wrap="square" lIns="0" tIns="0" rIns="0" bIns="0" rtlCol="0" anchor="ctr"/>
-          <a:lstStyle/>
-          <a:p>
-            <a:pPr indent="0" marL="0">
-              <a:buNone/>
-            </a:pPr>
-            <a:r>
-              <a:rPr lang="en-US" sz="1300" b="1" dirty="0">
-                <a:solidFill>
-                  <a:srgbClr val="33386E"/>
-                </a:solidFill>
-                <a:latin typeface="Arial" pitchFamily="34" charset="0"/>
-                <a:ea typeface="Arial" pitchFamily="34" charset="-122"/>
-                <a:cs typeface="Arial" pitchFamily="34" charset="-120"/>
-              </a:rPr>
-              <a:t>학력</a:t>
-            </a:r>
-            <a:endParaRPr lang="en-US" sz="1300" dirty="0"/>
-          </a:p>
-        </p:txBody>
-      </p:sp>
-      <p:graphicFrame>
-        <p:nvGraphicFramePr>
-          <p:cNvPr id="11" name="Table 0"/>
-          <p:cNvGraphicFramePr>
-            <a:graphicFrameLocks noGrp="1"/>
-          </p:cNvGraphicFramePr>
-          <p:nvPr>
-            <p:extLst>
-              <p:ext uri="{D42A27DB-BD31-4B8C-83A1-F6EECF244321}">
-                <p14:modId xmlns:p14="http://schemas.microsoft.com/office/powerpoint/2010/main" val="1579011935"/>
-              </p:ext>
-            </p:extLst>
-          </p:nvPr>
-        </p:nvGraphicFramePr>
-        <p:xfrm>
-          <a:off x="640080" y="1783080"/>
-          <a:ext cx="10908792" cy="914400"/>
-        </p:xfrm>
-        <a:graphic>
-          <a:graphicData uri="http://schemas.openxmlformats.org/drawingml/2006/table">
-            <a:tbl>
-              <a:tblPr/>
-              <a:tblGrid>
-                <a:gridCol w="3291840"/>
-                <a:gridCol w="7616952"/>
-              </a:tblGrid>
-              <a:tr h="420624">
-                <a:tc>
-                  <a:txBody>
-                    <a:bodyPr/>
-                    <a:lstStyle/>
-                    <a:p>
-                      <a:pPr indent="0" marL="0">
-                        <a:buNone/>
-                      </a:pPr>
-                      <a:r>
-                        <a:rPr lang="en-US" sz="1150" b="1" dirty="0">
-                          <a:solidFill>
-                            <a:srgbClr val="FFFFFF"/>
-                          </a:solidFill>
-                          <a:latin typeface="Arial" pitchFamily="34" charset="0"/>
-                          <a:ea typeface="Arial" pitchFamily="34" charset="-122"/>
-                          <a:cs typeface="Arial" pitchFamily="34" charset="-120"/>
-                        </a:rPr>
-                        <a:t>기간</a:t>
-                      </a:r>
-                      <a:endParaRPr lang="en-US" sz="1150" dirty="0">
-                        <a:latin typeface="Arial" charset="0"/>
-                        <a:ea typeface="Arial" charset="0"/>
-                        <a:cs typeface="Arial" charset="0"/>
-                      </a:endParaRPr>
-                    </a:p>
-                  </a:txBody>
-                  <a:tcPr marL="76200" marR="76200" marT="25400" marB="25400" anchor="ctr">
-                    <a:lnL w="6350" cap="flat" cmpd="sng" algn="ctr">
-                      <a:solidFill>
-                        <a:srgbClr val="E3E3EA"/>
-                      </a:solidFill>
-                      <a:prstDash val="solid"/>
-                      <a:round/>
-                      <a:headEnd type="none" w="med" len="med"/>
-                      <a:tailEnd type="none" w="med" len="med"/>
-                    </a:lnL>
-                    <a:lnR w="6350" cap="flat" cmpd="sng" algn="ctr">
-                      <a:solidFill>
-                        <a:srgbClr val="E3E3EA"/>
-                      </a:solidFill>
-                      <a:prstDash val="solid"/>
-                      <a:round/>
-                      <a:headEnd type="none" w="med" len="med"/>
-                      <a:tailEnd type="none" w="med" len="med"/>
-                    </a:lnR>
-                    <a:lnT w="6350" cap="flat" cmpd="sng" algn="ctr">
-                      <a:solidFill>
-                        <a:srgbClr val="E3E3EA"/>
-                      </a:solidFill>
-                      <a:prstDash val="solid"/>
-                      <a:round/>
-                      <a:headEnd type="none" w="med" len="med"/>
-                      <a:tailEnd type="none" w="med" len="med"/>
-                    </a:lnT>
-                    <a:lnB w="6350" cap="flat" cmpd="sng" algn="ctr">
-                      <a:solidFill>
-                        <a:srgbClr val="E3E3EA"/>
-                      </a:solidFill>
-                      <a:prstDash val="solid"/>
-                      <a:round/>
-                      <a:headEnd type="none" w="med" len="med"/>
-                      <a:tailEnd type="none" w="med" len="med"/>
-                    </a:lnB>
-                    <a:solidFill>
-                      <a:srgbClr val="33386E"/>
-                    </a:solidFill>
-                  </a:tcPr>
-                </a:tc>
-                <a:tc>
-                  <a:txBody>
-                    <a:bodyPr/>
-                    <a:lstStyle/>
-                    <a:p>
-                      <a:pPr indent="0" marL="0">
-                        <a:buNone/>
-                      </a:pPr>
-                      <a:r>
-                        <a:rPr lang="en-US" sz="1150" b="1" dirty="0">
-                          <a:solidFill>
-                            <a:srgbClr val="FFFFFF"/>
-                          </a:solidFill>
-                          <a:latin typeface="Arial" pitchFamily="34" charset="0"/>
-                          <a:ea typeface="Arial" pitchFamily="34" charset="-122"/>
-                          <a:cs typeface="Arial" pitchFamily="34" charset="-120"/>
-                        </a:rPr>
-                        <a:t>학교 · 학과</a:t>
-                      </a:r>
-                      <a:endParaRPr lang="en-US" sz="1150" dirty="0">
-                        <a:latin typeface="Arial" charset="0"/>
-                        <a:ea typeface="Arial" charset="0"/>
-                        <a:cs typeface="Arial" charset="0"/>
-                      </a:endParaRPr>
-                    </a:p>
-                  </a:txBody>
-                  <a:tcPr marL="76200" marR="76200" marT="25400" marB="25400" anchor="ctr">
-                    <a:lnL w="6350" cap="flat" cmpd="sng" algn="ctr">
-                      <a:solidFill>
-                        <a:srgbClr val="E3E3EA"/>
-                      </a:solidFill>
-                      <a:prstDash val="solid"/>
-                      <a:round/>
-                      <a:headEnd type="none" w="med" len="med"/>
-                      <a:tailEnd type="none" w="med" len="med"/>
-                    </a:lnL>
-                    <a:lnR w="6350" cap="flat" cmpd="sng" algn="ctr">
-                      <a:solidFill>
-                        <a:srgbClr val="E3E3EA"/>
-                      </a:solidFill>
-                      <a:prstDash val="solid"/>
-                      <a:round/>
-                      <a:headEnd type="none" w="med" len="med"/>
-                      <a:tailEnd type="none" w="med" len="med"/>
-                    </a:lnR>
-                    <a:lnT w="6350" cap="flat" cmpd="sng" algn="ctr">
-                      <a:solidFill>
-                        <a:srgbClr val="E3E3EA"/>
-                      </a:solidFill>
-                      <a:prstDash val="solid"/>
-                      <a:round/>
-                      <a:headEnd type="none" w="med" len="med"/>
-                      <a:tailEnd type="none" w="med" len="med"/>
-                    </a:lnT>
-                    <a:lnB w="6350" cap="flat" cmpd="sng" algn="ctr">
-                      <a:solidFill>
-                        <a:srgbClr val="E3E3EA"/>
-                      </a:solidFill>
-                      <a:prstDash val="solid"/>
-                      <a:round/>
-                      <a:headEnd type="none" w="med" len="med"/>
-                      <a:tailEnd type="none" w="med" len="med"/>
-                    </a:lnB>
-                    <a:solidFill>
-                      <a:srgbClr val="33386E"/>
-                    </a:solidFill>
-                  </a:tcPr>
-                </a:tc>
-              </a:tr>
-              <a:tr h="420624">
-                <a:tc>
-                  <a:txBody>
-                    <a:bodyPr/>
-                    <a:lstStyle/>
-                    <a:p>
-                      <a:pPr indent="0" marL="0">
-                        <a:buNone/>
-                      </a:pPr>
-                      <a:r>
-                        <a:rPr lang="en-US" sz="1150" dirty="0">
-                          <a:solidFill>
-                            <a:srgbClr val="1B1B21"/>
-                          </a:solidFill>
-                          <a:latin typeface="Arial" pitchFamily="34" charset="0"/>
-                          <a:ea typeface="Arial" pitchFamily="34" charset="-122"/>
-                          <a:cs typeface="Arial" pitchFamily="34" charset="-120"/>
-                        </a:rPr>
-                        <a:t>2024.03 – 2027.02 (졸업예정)</a:t>
-                      </a:r>
-                      <a:endParaRPr lang="en-US" sz="1150" dirty="0">
-                        <a:latin typeface="Arial" charset="0"/>
-                        <a:ea typeface="Arial" charset="0"/>
-                        <a:cs typeface="Arial" charset="0"/>
-                      </a:endParaRPr>
-                    </a:p>
-                  </a:txBody>
-                  <a:tcPr marL="76200" marR="76200" marT="25400" marB="25400" anchor="ctr">
-                    <a:lnL w="6350" cap="flat" cmpd="sng" algn="ctr">
-                      <a:solidFill>
-                        <a:srgbClr val="E3E3EA"/>
-                      </a:solidFill>
-                      <a:prstDash val="solid"/>
-                      <a:round/>
-                      <a:headEnd type="none" w="med" len="med"/>
-                      <a:tailEnd type="none" w="med" len="med"/>
-                    </a:lnL>
-                    <a:lnR w="6350" cap="flat" cmpd="sng" algn="ctr">
-                      <a:solidFill>
-                        <a:srgbClr val="E3E3EA"/>
-                      </a:solidFill>
-                      <a:prstDash val="solid"/>
-                      <a:round/>
-                      <a:headEnd type="none" w="med" len="med"/>
-                      <a:tailEnd type="none" w="med" len="med"/>
-                    </a:lnR>
-                    <a:lnT w="6350" cap="flat" cmpd="sng" algn="ctr">
-                      <a:solidFill>
-                        <a:srgbClr val="E3E3EA"/>
-                      </a:solidFill>
-                      <a:prstDash val="solid"/>
-                      <a:round/>
-                      <a:headEnd type="none" w="med" len="med"/>
-                      <a:tailEnd type="none" w="med" len="med"/>
-                    </a:lnT>
-                    <a:lnB w="6350" cap="flat" cmpd="sng" algn="ctr">
-                      <a:solidFill>
-                        <a:srgbClr val="E3E3EA"/>
-                      </a:solidFill>
-                      <a:prstDash val="solid"/>
-                      <a:round/>
-                      <a:headEnd type="none" w="med" len="med"/>
-                      <a:tailEnd type="none" w="med" len="med"/>
-                    </a:lnB>
-                  </a:tcPr>
-                </a:tc>
-                <a:tc>
-                  <a:txBody>
-                    <a:bodyPr/>
-                    <a:lstStyle/>
-                    <a:p>
-                      <a:pPr indent="0" marL="0">
-                        <a:buNone/>
-                      </a:pPr>
-                      <a:r>
-                        <a:rPr lang="en-US" sz="1150" dirty="0">
-                          <a:solidFill>
-                            <a:srgbClr val="1B1B21"/>
-                          </a:solidFill>
-                          <a:latin typeface="Arial" pitchFamily="34" charset="0"/>
-                          <a:ea typeface="Arial" pitchFamily="34" charset="-122"/>
-                          <a:cs typeface="Arial" pitchFamily="34" charset="-120"/>
-                        </a:rPr>
-                        <a:t>영남이공대학교 소프트웨어융합과</a:t>
-                      </a:r>
-                      <a:endParaRPr lang="en-US" sz="1150" dirty="0">
-                        <a:latin typeface="Arial" charset="0"/>
-                        <a:ea typeface="Arial" charset="0"/>
-                        <a:cs typeface="Arial" charset="0"/>
-                      </a:endParaRPr>
-                    </a:p>
-                  </a:txBody>
-                  <a:tcPr marL="76200" marR="76200" marT="25400" marB="25400" anchor="ctr">
-                    <a:lnL w="6350" cap="flat" cmpd="sng" algn="ctr">
-                      <a:solidFill>
-                        <a:srgbClr val="E3E3EA"/>
-                      </a:solidFill>
-                      <a:prstDash val="solid"/>
-                      <a:round/>
-                      <a:headEnd type="none" w="med" len="med"/>
-                      <a:tailEnd type="none" w="med" len="med"/>
-                    </a:lnL>
-                    <a:lnR w="6350" cap="flat" cmpd="sng" algn="ctr">
-                      <a:solidFill>
-                        <a:srgbClr val="E3E3EA"/>
-                      </a:solidFill>
-                      <a:prstDash val="solid"/>
-                      <a:round/>
-                      <a:headEnd type="none" w="med" len="med"/>
-                      <a:tailEnd type="none" w="med" len="med"/>
-                    </a:lnR>
-                    <a:lnT w="6350" cap="flat" cmpd="sng" algn="ctr">
-                      <a:solidFill>
-                        <a:srgbClr val="E3E3EA"/>
-                      </a:solidFill>
-                      <a:prstDash val="solid"/>
-                      <a:round/>
-                      <a:headEnd type="none" w="med" len="med"/>
-                      <a:tailEnd type="none" w="med" len="med"/>
-                    </a:lnT>
-                    <a:lnB w="6350" cap="flat" cmpd="sng" algn="ctr">
-                      <a:solidFill>
-                        <a:srgbClr val="E3E3EA"/>
-                      </a:solidFill>
-                      <a:prstDash val="solid"/>
-                      <a:round/>
-                      <a:headEnd type="none" w="med" len="med"/>
-                      <a:tailEnd type="none" w="med" len="med"/>
-                    </a:lnB>
-                  </a:tcPr>
-                </a:tc>
-              </a:tr>
-              <a:tr h="420624">
-                <a:tc>
-                  <a:txBody>
-                    <a:bodyPr/>
-                    <a:lstStyle/>
-                    <a:p>
-                      <a:pPr indent="0" marL="0">
-                        <a:buNone/>
-                      </a:pPr>
-                      <a:r>
-                        <a:rPr lang="en-US" sz="1150" dirty="0">
-                          <a:solidFill>
-                            <a:srgbClr val="1B1B21"/>
-                          </a:solidFill>
-                          <a:latin typeface="Arial" pitchFamily="34" charset="0"/>
-                          <a:ea typeface="Arial" pitchFamily="34" charset="-122"/>
-                          <a:cs typeface="Arial" pitchFamily="34" charset="-120"/>
-                        </a:rPr>
-                        <a:t>2017.03 – 2020.01</a:t>
-                      </a:r>
-                      <a:endParaRPr lang="en-US" sz="1150" dirty="0">
-                        <a:latin typeface="Arial" charset="0"/>
-                        <a:ea typeface="Arial" charset="0"/>
-                        <a:cs typeface="Arial" charset="0"/>
-                      </a:endParaRPr>
-                    </a:p>
-                  </a:txBody>
-                  <a:tcPr marL="76200" marR="76200" marT="25400" marB="25400" anchor="ctr">
-                    <a:lnL w="6350" cap="flat" cmpd="sng" algn="ctr">
-                      <a:solidFill>
-                        <a:srgbClr val="E3E3EA"/>
-                      </a:solidFill>
-                      <a:prstDash val="solid"/>
-                      <a:round/>
-                      <a:headEnd type="none" w="med" len="med"/>
-                      <a:tailEnd type="none" w="med" len="med"/>
-                    </a:lnL>
-                    <a:lnR w="6350" cap="flat" cmpd="sng" algn="ctr">
-                      <a:solidFill>
-                        <a:srgbClr val="E3E3EA"/>
-                      </a:solidFill>
-                      <a:prstDash val="solid"/>
-                      <a:round/>
-                      <a:headEnd type="none" w="med" len="med"/>
-                      <a:tailEnd type="none" w="med" len="med"/>
-                    </a:lnR>
-                    <a:lnT w="6350" cap="flat" cmpd="sng" algn="ctr">
-                      <a:solidFill>
-                        <a:srgbClr val="E3E3EA"/>
-                      </a:solidFill>
-                      <a:prstDash val="solid"/>
-                      <a:round/>
-                      <a:headEnd type="none" w="med" len="med"/>
-                      <a:tailEnd type="none" w="med" len="med"/>
-                    </a:lnT>
-                    <a:lnB w="6350" cap="flat" cmpd="sng" algn="ctr">
-                      <a:solidFill>
-                        <a:srgbClr val="E3E3EA"/>
-                      </a:solidFill>
-                      <a:prstDash val="solid"/>
-                      <a:round/>
-                      <a:headEnd type="none" w="med" len="med"/>
-                      <a:tailEnd type="none" w="med" len="med"/>
-                    </a:lnB>
-                  </a:tcPr>
-                </a:tc>
-                <a:tc>
-                  <a:txBody>
-                    <a:bodyPr/>
-                    <a:lstStyle/>
-                    <a:p>
-                      <a:pPr indent="0" marL="0">
-                        <a:buNone/>
-                      </a:pPr>
-                      <a:r>
-                        <a:rPr lang="en-US" sz="1150" dirty="0">
-                          <a:solidFill>
-                            <a:srgbClr val="1B1B21"/>
-                          </a:solidFill>
-                          <a:latin typeface="Arial" pitchFamily="34" charset="0"/>
-                          <a:ea typeface="Arial" pitchFamily="34" charset="-122"/>
-                          <a:cs typeface="Arial" pitchFamily="34" charset="-120"/>
-                        </a:rPr>
-                        <a:t>경북기계공업고등학교 전자과</a:t>
-                      </a:r>
-                      <a:endParaRPr lang="en-US" sz="1150" dirty="0">
-                        <a:latin typeface="Arial" charset="0"/>
-                        <a:ea typeface="Arial" charset="0"/>
-                        <a:cs typeface="Arial" charset="0"/>
-                      </a:endParaRPr>
-                    </a:p>
-                  </a:txBody>
-                  <a:tcPr marL="76200" marR="76200" marT="25400" marB="25400" anchor="ctr">
-                    <a:lnL w="6350" cap="flat" cmpd="sng" algn="ctr">
-                      <a:solidFill>
-                        <a:srgbClr val="E3E3EA"/>
-                      </a:solidFill>
-                      <a:prstDash val="solid"/>
-                      <a:round/>
-                      <a:headEnd type="none" w="med" len="med"/>
-                      <a:tailEnd type="none" w="med" len="med"/>
-                    </a:lnL>
-                    <a:lnR w="6350" cap="flat" cmpd="sng" algn="ctr">
-                      <a:solidFill>
-                        <a:srgbClr val="E3E3EA"/>
-                      </a:solidFill>
-                      <a:prstDash val="solid"/>
-                      <a:round/>
-                      <a:headEnd type="none" w="med" len="med"/>
-                      <a:tailEnd type="none" w="med" len="med"/>
-                    </a:lnR>
-                    <a:lnT w="6350" cap="flat" cmpd="sng" algn="ctr">
-                      <a:solidFill>
-                        <a:srgbClr val="E3E3EA"/>
-                      </a:solidFill>
-                      <a:prstDash val="solid"/>
-                      <a:round/>
-                      <a:headEnd type="none" w="med" len="med"/>
-                      <a:tailEnd type="none" w="med" len="med"/>
-                    </a:lnT>
-                    <a:lnB w="6350" cap="flat" cmpd="sng" algn="ctr">
-                      <a:solidFill>
-                        <a:srgbClr val="E3E3EA"/>
-                      </a:solidFill>
-                      <a:prstDash val="solid"/>
-                      <a:round/>
-                      <a:headEnd type="none" w="med" len="med"/>
-                      <a:tailEnd type="none" w="med" len="med"/>
-                    </a:lnB>
-                  </a:tcPr>
-                </a:tc>
-              </a:tr>
-            </a:tbl>
-          </a:graphicData>
-        </a:graphic>
-      </p:graphicFrame>
-      <p:sp>
-        <p:nvSpPr>
-          <p:cNvPr id="6" name="Text 3"/>
-          <p:cNvSpPr/>
-          <p:nvPr/>
-        </p:nvSpPr>
-        <p:spPr>
-          <a:xfrm>
-            <a:off x="640080" y="3200400"/>
-            <a:ext cx="5486400" cy="320040"/>
-          </a:xfrm>
-          <a:prstGeom prst="rect">
-            <a:avLst/>
-          </a:prstGeom>
-          <a:noFill/>
-          <a:ln/>
-        </p:spPr>
-        <p:txBody>
-          <a:bodyPr wrap="square" lIns="0" tIns="0" rIns="0" bIns="0" rtlCol="0" anchor="ctr"/>
-          <a:lstStyle/>
-          <a:p>
-            <a:pPr indent="0" marL="0">
-              <a:buNone/>
-            </a:pPr>
-            <a:r>
-              <a:rPr lang="en-US" sz="1300" b="1" dirty="0">
-                <a:solidFill>
-                  <a:srgbClr val="33386E"/>
-                </a:solidFill>
-                <a:latin typeface="Arial" pitchFamily="34" charset="0"/>
-                <a:ea typeface="Arial" pitchFamily="34" charset="-122"/>
-                <a:cs typeface="Arial" pitchFamily="34" charset="-120"/>
-              </a:rPr>
-              <a:t>직장 경력</a:t>
-            </a:r>
-            <a:endParaRPr lang="en-US" sz="1300" dirty="0"/>
-          </a:p>
-        </p:txBody>
-      </p:sp>
-      <p:graphicFrame>
-        <p:nvGraphicFramePr>
-          <p:cNvPr id="21" name="Table 1"/>
-          <p:cNvGraphicFramePr>
-            <a:graphicFrameLocks noGrp="1"/>
-          </p:cNvGraphicFramePr>
-          <p:nvPr>
-            <p:extLst>
-              <p:ext uri="{D42A27DB-BD31-4B8C-83A1-F6EECF244321}">
-                <p14:modId xmlns:p14="http://schemas.microsoft.com/office/powerpoint/2010/main" val="1579011935"/>
-              </p:ext>
-            </p:extLst>
-          </p:nvPr>
-        </p:nvGraphicFramePr>
-        <p:xfrm>
-          <a:off x="640080" y="3520440"/>
-          <a:ext cx="10908792" cy="914400"/>
-        </p:xfrm>
-        <a:graphic>
-          <a:graphicData uri="http://schemas.openxmlformats.org/drawingml/2006/table">
-            <a:tbl>
-              <a:tblPr/>
-              <a:tblGrid>
-                <a:gridCol w="3291840"/>
-                <a:gridCol w="3108960"/>
-                <a:gridCol w="4507992"/>
-              </a:tblGrid>
-              <a:tr h="420624">
-                <a:tc>
-                  <a:txBody>
-                    <a:bodyPr/>
-                    <a:lstStyle/>
-                    <a:p>
-                      <a:pPr indent="0" marL="0">
-                        <a:buNone/>
-                      </a:pPr>
-                      <a:r>
-                        <a:rPr lang="en-US" sz="1150" b="1" dirty="0">
-                          <a:solidFill>
-                            <a:srgbClr val="FFFFFF"/>
-                          </a:solidFill>
-                          <a:latin typeface="Arial" pitchFamily="34" charset="0"/>
-                          <a:ea typeface="Arial" pitchFamily="34" charset="-122"/>
-                          <a:cs typeface="Arial" pitchFamily="34" charset="-120"/>
-                        </a:rPr>
-                        <a:t>기간</a:t>
-                      </a:r>
-                      <a:endParaRPr lang="en-US" sz="1150" dirty="0">
-                        <a:latin typeface="Arial" charset="0"/>
-                        <a:ea typeface="Arial" charset="0"/>
-                        <a:cs typeface="Arial" charset="0"/>
-                      </a:endParaRPr>
-                    </a:p>
-                  </a:txBody>
-                  <a:tcPr marL="76200" marR="76200" marT="25400" marB="25400" anchor="ctr">
-                    <a:lnL w="6350" cap="flat" cmpd="sng" algn="ctr">
-                      <a:solidFill>
-                        <a:srgbClr val="E3E3EA"/>
-                      </a:solidFill>
-                      <a:prstDash val="solid"/>
-                      <a:round/>
-                      <a:headEnd type="none" w="med" len="med"/>
-                      <a:tailEnd type="none" w="med" len="med"/>
-                    </a:lnL>
-                    <a:lnR w="6350" cap="flat" cmpd="sng" algn="ctr">
-                      <a:solidFill>
-                        <a:srgbClr val="E3E3EA"/>
-                      </a:solidFill>
-                      <a:prstDash val="solid"/>
-                      <a:round/>
-                      <a:headEnd type="none" w="med" len="med"/>
-                      <a:tailEnd type="none" w="med" len="med"/>
-                    </a:lnR>
-                    <a:lnT w="6350" cap="flat" cmpd="sng" algn="ctr">
-                      <a:solidFill>
-                        <a:srgbClr val="E3E3EA"/>
-                      </a:solidFill>
-                      <a:prstDash val="solid"/>
-                      <a:round/>
-                      <a:headEnd type="none" w="med" len="med"/>
-                      <a:tailEnd type="none" w="med" len="med"/>
-                    </a:lnT>
-                    <a:lnB w="6350" cap="flat" cmpd="sng" algn="ctr">
-                      <a:solidFill>
-                        <a:srgbClr val="E3E3EA"/>
-                      </a:solidFill>
-                      <a:prstDash val="solid"/>
-                      <a:round/>
-                      <a:headEnd type="none" w="med" len="med"/>
-                      <a:tailEnd type="none" w="med" len="med"/>
-                    </a:lnB>
-                    <a:solidFill>
-                      <a:srgbClr val="33386E"/>
-                    </a:solidFill>
-                  </a:tcPr>
-                </a:tc>
-                <a:tc>
-                  <a:txBody>
-                    <a:bodyPr/>
-                    <a:lstStyle/>
-                    <a:p>
-                      <a:pPr indent="0" marL="0">
-                        <a:buNone/>
-                      </a:pPr>
-                      <a:r>
-                        <a:rPr lang="en-US" sz="1150" b="1" dirty="0">
-                          <a:solidFill>
-                            <a:srgbClr val="FFFFFF"/>
-                          </a:solidFill>
-                          <a:latin typeface="Arial" pitchFamily="34" charset="0"/>
-                          <a:ea typeface="Arial" pitchFamily="34" charset="-122"/>
-                          <a:cs typeface="Arial" pitchFamily="34" charset="-120"/>
-                        </a:rPr>
-                        <a:t>회사</a:t>
-                      </a:r>
-                      <a:endParaRPr lang="en-US" sz="1150" dirty="0">
-                        <a:latin typeface="Arial" charset="0"/>
-                        <a:ea typeface="Arial" charset="0"/>
-                        <a:cs typeface="Arial" charset="0"/>
-                      </a:endParaRPr>
-                    </a:p>
-                  </a:txBody>
-                  <a:tcPr marL="76200" marR="76200" marT="25400" marB="25400" anchor="ctr">
-                    <a:lnL w="6350" cap="flat" cmpd="sng" algn="ctr">
-                      <a:solidFill>
-                        <a:srgbClr val="E3E3EA"/>
-                      </a:solidFill>
-                      <a:prstDash val="solid"/>
-                      <a:round/>
-                      <a:headEnd type="none" w="med" len="med"/>
-                      <a:tailEnd type="none" w="med" len="med"/>
-                    </a:lnL>
-                    <a:lnR w="6350" cap="flat" cmpd="sng" algn="ctr">
-                      <a:solidFill>
-                        <a:srgbClr val="E3E3EA"/>
-                      </a:solidFill>
-                      <a:prstDash val="solid"/>
-                      <a:round/>
-                      <a:headEnd type="none" w="med" len="med"/>
-                      <a:tailEnd type="none" w="med" len="med"/>
-                    </a:lnR>
-                    <a:lnT w="6350" cap="flat" cmpd="sng" algn="ctr">
-                      <a:solidFill>
-                        <a:srgbClr val="E3E3EA"/>
-                      </a:solidFill>
-                      <a:prstDash val="solid"/>
-                      <a:round/>
-                      <a:headEnd type="none" w="med" len="med"/>
-                      <a:tailEnd type="none" w="med" len="med"/>
-                    </a:lnT>
-                    <a:lnB w="6350" cap="flat" cmpd="sng" algn="ctr">
-                      <a:solidFill>
-                        <a:srgbClr val="E3E3EA"/>
-                      </a:solidFill>
-                      <a:prstDash val="solid"/>
-                      <a:round/>
-                      <a:headEnd type="none" w="med" len="med"/>
-                      <a:tailEnd type="none" w="med" len="med"/>
-                    </a:lnB>
-                    <a:solidFill>
-                      <a:srgbClr val="33386E"/>
-                    </a:solidFill>
-                  </a:tcPr>
-                </a:tc>
-                <a:tc>
-                  <a:txBody>
-                    <a:bodyPr/>
-                    <a:lstStyle/>
-                    <a:p>
-                      <a:pPr indent="0" marL="0">
-                        <a:buNone/>
-                      </a:pPr>
-                      <a:r>
-                        <a:rPr lang="en-US" sz="1150" b="1" dirty="0">
-                          <a:solidFill>
-                            <a:srgbClr val="FFFFFF"/>
-                          </a:solidFill>
-                          <a:latin typeface="Arial" pitchFamily="34" charset="0"/>
-                          <a:ea typeface="Arial" pitchFamily="34" charset="-122"/>
-                          <a:cs typeface="Arial" pitchFamily="34" charset="-120"/>
-                        </a:rPr>
-                        <a:t>담당 업무</a:t>
-                      </a:r>
-                      <a:endParaRPr lang="en-US" sz="1150" dirty="0">
-                        <a:latin typeface="Arial" charset="0"/>
-                        <a:ea typeface="Arial" charset="0"/>
-                        <a:cs typeface="Arial" charset="0"/>
-                      </a:endParaRPr>
-                    </a:p>
-                  </a:txBody>
-                  <a:tcPr marL="76200" marR="76200" marT="25400" marB="25400" anchor="ctr">
-                    <a:lnL w="6350" cap="flat" cmpd="sng" algn="ctr">
-                      <a:solidFill>
-                        <a:srgbClr val="E3E3EA"/>
-                      </a:solidFill>
-                      <a:prstDash val="solid"/>
-                      <a:round/>
-                      <a:headEnd type="none" w="med" len="med"/>
-                      <a:tailEnd type="none" w="med" len="med"/>
-                    </a:lnL>
-                    <a:lnR w="6350" cap="flat" cmpd="sng" algn="ctr">
-                      <a:solidFill>
-                        <a:srgbClr val="E3E3EA"/>
-                      </a:solidFill>
-                      <a:prstDash val="solid"/>
-                      <a:round/>
-                      <a:headEnd type="none" w="med" len="med"/>
-                      <a:tailEnd type="none" w="med" len="med"/>
-                    </a:lnR>
-                    <a:lnT w="6350" cap="flat" cmpd="sng" algn="ctr">
-                      <a:solidFill>
-                        <a:srgbClr val="E3E3EA"/>
-                      </a:solidFill>
-                      <a:prstDash val="solid"/>
-                      <a:round/>
-                      <a:headEnd type="none" w="med" len="med"/>
-                      <a:tailEnd type="none" w="med" len="med"/>
-                    </a:lnT>
-                    <a:lnB w="6350" cap="flat" cmpd="sng" algn="ctr">
-                      <a:solidFill>
-                        <a:srgbClr val="E3E3EA"/>
-                      </a:solidFill>
-                      <a:prstDash val="solid"/>
-                      <a:round/>
-                      <a:headEnd type="none" w="med" len="med"/>
-                      <a:tailEnd type="none" w="med" len="med"/>
-                    </a:lnB>
-                    <a:solidFill>
-                      <a:srgbClr val="33386E"/>
-                    </a:solidFill>
-                  </a:tcPr>
-                </a:tc>
-              </a:tr>
-              <a:tr h="420624">
-                <a:tc>
-                  <a:txBody>
-                    <a:bodyPr/>
-                    <a:lstStyle/>
-                    <a:p>
-                      <a:pPr indent="0" marL="0">
-                        <a:buNone/>
-                      </a:pPr>
-                      <a:r>
-                        <a:rPr lang="en-US" sz="1150" dirty="0">
-                          <a:solidFill>
-                            <a:srgbClr val="1B1B21"/>
-                          </a:solidFill>
-                          <a:latin typeface="Arial" pitchFamily="34" charset="0"/>
-                          <a:ea typeface="Arial" pitchFamily="34" charset="-122"/>
-                          <a:cs typeface="Arial" pitchFamily="34" charset="-120"/>
-                        </a:rPr>
-                        <a:t>2019.09 – 2023.12</a:t>
-                      </a:r>
-                      <a:endParaRPr lang="en-US" sz="1150" dirty="0">
-                        <a:latin typeface="Arial" charset="0"/>
-                        <a:ea typeface="Arial" charset="0"/>
-                        <a:cs typeface="Arial" charset="0"/>
-                      </a:endParaRPr>
-                    </a:p>
-                  </a:txBody>
-                  <a:tcPr marL="76200" marR="76200" marT="25400" marB="25400" anchor="ctr">
-                    <a:lnL w="6350" cap="flat" cmpd="sng" algn="ctr">
-                      <a:solidFill>
-                        <a:srgbClr val="E3E3EA"/>
-                      </a:solidFill>
-                      <a:prstDash val="solid"/>
-                      <a:round/>
-                      <a:headEnd type="none" w="med" len="med"/>
-                      <a:tailEnd type="none" w="med" len="med"/>
-                    </a:lnL>
-                    <a:lnR w="6350" cap="flat" cmpd="sng" algn="ctr">
-                      <a:solidFill>
-                        <a:srgbClr val="E3E3EA"/>
-                      </a:solidFill>
-                      <a:prstDash val="solid"/>
-                      <a:round/>
-                      <a:headEnd type="none" w="med" len="med"/>
-                      <a:tailEnd type="none" w="med" len="med"/>
-                    </a:lnR>
-                    <a:lnT w="6350" cap="flat" cmpd="sng" algn="ctr">
-                      <a:solidFill>
-                        <a:srgbClr val="E3E3EA"/>
-                      </a:solidFill>
-                      <a:prstDash val="solid"/>
-                      <a:round/>
-                      <a:headEnd type="none" w="med" len="med"/>
-                      <a:tailEnd type="none" w="med" len="med"/>
-                    </a:lnT>
-                    <a:lnB w="6350" cap="flat" cmpd="sng" algn="ctr">
-                      <a:solidFill>
-                        <a:srgbClr val="E3E3EA"/>
-                      </a:solidFill>
-                      <a:prstDash val="solid"/>
-                      <a:round/>
-                      <a:headEnd type="none" w="med" len="med"/>
-                      <a:tailEnd type="none" w="med" len="med"/>
-                    </a:lnB>
-                  </a:tcPr>
-                </a:tc>
-                <a:tc>
-                  <a:txBody>
-                    <a:bodyPr/>
-                    <a:lstStyle/>
-                    <a:p>
-                      <a:pPr indent="0" marL="0">
-                        <a:buNone/>
-                      </a:pPr>
-                      <a:r>
-                        <a:rPr lang="en-US" sz="1150" dirty="0">
-                          <a:solidFill>
-                            <a:srgbClr val="1B1B21"/>
-                          </a:solidFill>
-                          <a:latin typeface="Arial" pitchFamily="34" charset="0"/>
-                          <a:ea typeface="Arial" pitchFamily="34" charset="-122"/>
-                          <a:cs typeface="Arial" pitchFamily="34" charset="-120"/>
-                        </a:rPr>
-                        <a:t>(주)K&amp;P 2공장</a:t>
-                      </a:r>
-                      <a:endParaRPr lang="en-US" sz="1150" dirty="0">
-                        <a:latin typeface="Arial" charset="0"/>
-                        <a:ea typeface="Arial" charset="0"/>
-                        <a:cs typeface="Arial" charset="0"/>
-                      </a:endParaRPr>
-                    </a:p>
-                  </a:txBody>
-                  <a:tcPr marL="76200" marR="76200" marT="25400" marB="25400" anchor="ctr">
-                    <a:lnL w="6350" cap="flat" cmpd="sng" algn="ctr">
-                      <a:solidFill>
-                        <a:srgbClr val="E3E3EA"/>
-                      </a:solidFill>
-                      <a:prstDash val="solid"/>
-                      <a:round/>
-                      <a:headEnd type="none" w="med" len="med"/>
-                      <a:tailEnd type="none" w="med" len="med"/>
-                    </a:lnL>
-                    <a:lnR w="6350" cap="flat" cmpd="sng" algn="ctr">
-                      <a:solidFill>
-                        <a:srgbClr val="E3E3EA"/>
-                      </a:solidFill>
-                      <a:prstDash val="solid"/>
-                      <a:round/>
-                      <a:headEnd type="none" w="med" len="med"/>
-                      <a:tailEnd type="none" w="med" len="med"/>
-                    </a:lnR>
-                    <a:lnT w="6350" cap="flat" cmpd="sng" algn="ctr">
-                      <a:solidFill>
-                        <a:srgbClr val="E3E3EA"/>
-                      </a:solidFill>
-                      <a:prstDash val="solid"/>
-                      <a:round/>
-                      <a:headEnd type="none" w="med" len="med"/>
-                      <a:tailEnd type="none" w="med" len="med"/>
-                    </a:lnT>
-                    <a:lnB w="6350" cap="flat" cmpd="sng" algn="ctr">
-                      <a:solidFill>
-                        <a:srgbClr val="E3E3EA"/>
-                      </a:solidFill>
-                      <a:prstDash val="solid"/>
-                      <a:round/>
-                      <a:headEnd type="none" w="med" len="med"/>
-                      <a:tailEnd type="none" w="med" len="med"/>
-                    </a:lnB>
-                  </a:tcPr>
-                </a:tc>
-                <a:tc>
-                  <a:txBody>
-                    <a:bodyPr/>
-                    <a:lstStyle/>
-                    <a:p>
-                      <a:pPr indent="0" marL="0">
-                        <a:buNone/>
-                      </a:pPr>
-                      <a:r>
-                        <a:rPr lang="en-US" sz="1150" dirty="0">
-                          <a:solidFill>
-                            <a:srgbClr val="1B1B21"/>
-                          </a:solidFill>
-                          <a:latin typeface="Arial" pitchFamily="34" charset="0"/>
-                          <a:ea typeface="Arial" pitchFamily="34" charset="-122"/>
-                          <a:cs typeface="Arial" pitchFamily="34" charset="-120"/>
-                        </a:rPr>
-                        <a:t>전자제품 조립(SMT) 생산</a:t>
-                      </a:r>
-                      <a:endParaRPr lang="en-US" sz="1150" dirty="0">
-                        <a:latin typeface="Arial" charset="0"/>
-                        <a:ea typeface="Arial" charset="0"/>
-                        <a:cs typeface="Arial" charset="0"/>
-                      </a:endParaRPr>
-                    </a:p>
-                  </a:txBody>
-                  <a:tcPr marL="76200" marR="76200" marT="25400" marB="25400" anchor="ctr">
-                    <a:lnL w="6350" cap="flat" cmpd="sng" algn="ctr">
-                      <a:solidFill>
-                        <a:srgbClr val="E3E3EA"/>
-                      </a:solidFill>
-                      <a:prstDash val="solid"/>
-                      <a:round/>
-                      <a:headEnd type="none" w="med" len="med"/>
-                      <a:tailEnd type="none" w="med" len="med"/>
-                    </a:lnL>
-                    <a:lnR w="6350" cap="flat" cmpd="sng" algn="ctr">
-                      <a:solidFill>
-                        <a:srgbClr val="E3E3EA"/>
-                      </a:solidFill>
-                      <a:prstDash val="solid"/>
-                      <a:round/>
-                      <a:headEnd type="none" w="med" len="med"/>
-                      <a:tailEnd type="none" w="med" len="med"/>
-                    </a:lnR>
-                    <a:lnT w="6350" cap="flat" cmpd="sng" algn="ctr">
-                      <a:solidFill>
-                        <a:srgbClr val="E3E3EA"/>
-                      </a:solidFill>
-                      <a:prstDash val="solid"/>
-                      <a:round/>
-                      <a:headEnd type="none" w="med" len="med"/>
-                      <a:tailEnd type="none" w="med" len="med"/>
-                    </a:lnT>
-                    <a:lnB w="6350" cap="flat" cmpd="sng" algn="ctr">
-                      <a:solidFill>
-                        <a:srgbClr val="E3E3EA"/>
-                      </a:solidFill>
-                      <a:prstDash val="solid"/>
-                      <a:round/>
-                      <a:headEnd type="none" w="med" len="med"/>
-                      <a:tailEnd type="none" w="med" len="med"/>
-                    </a:lnB>
-                  </a:tcPr>
-                </a:tc>
-              </a:tr>
-              <a:tr h="420624">
-                <a:tc>
-                  <a:txBody>
-                    <a:bodyPr/>
-                    <a:lstStyle/>
-                    <a:p>
-                      <a:pPr indent="0" marL="0">
-                        <a:buNone/>
-                      </a:pPr>
-                      <a:r>
-                        <a:rPr lang="en-US" sz="1150" dirty="0">
-                          <a:solidFill>
-                            <a:srgbClr val="1B1B21"/>
-                          </a:solidFill>
-                          <a:latin typeface="Arial" pitchFamily="34" charset="0"/>
-                          <a:ea typeface="Arial" pitchFamily="34" charset="-122"/>
-                          <a:cs typeface="Arial" pitchFamily="34" charset="-120"/>
-                        </a:rPr>
-                        <a:t>2023.12 – 2024.02</a:t>
-                      </a:r>
-                      <a:endParaRPr lang="en-US" sz="1150" dirty="0">
-                        <a:latin typeface="Arial" charset="0"/>
-                        <a:ea typeface="Arial" charset="0"/>
-                        <a:cs typeface="Arial" charset="0"/>
-                      </a:endParaRPr>
-                    </a:p>
-                  </a:txBody>
-                  <a:tcPr marL="76200" marR="76200" marT="25400" marB="25400" anchor="ctr">
-                    <a:lnL w="6350" cap="flat" cmpd="sng" algn="ctr">
-                      <a:solidFill>
-                        <a:srgbClr val="E3E3EA"/>
-                      </a:solidFill>
-                      <a:prstDash val="solid"/>
-                      <a:round/>
-                      <a:headEnd type="none" w="med" len="med"/>
-                      <a:tailEnd type="none" w="med" len="med"/>
-                    </a:lnL>
-                    <a:lnR w="6350" cap="flat" cmpd="sng" algn="ctr">
-                      <a:solidFill>
-                        <a:srgbClr val="E3E3EA"/>
-                      </a:solidFill>
-                      <a:prstDash val="solid"/>
-                      <a:round/>
-                      <a:headEnd type="none" w="med" len="med"/>
-                      <a:tailEnd type="none" w="med" len="med"/>
-                    </a:lnR>
-                    <a:lnT w="6350" cap="flat" cmpd="sng" algn="ctr">
-                      <a:solidFill>
-                        <a:srgbClr val="E3E3EA"/>
-                      </a:solidFill>
-                      <a:prstDash val="solid"/>
-                      <a:round/>
-                      <a:headEnd type="none" w="med" len="med"/>
-                      <a:tailEnd type="none" w="med" len="med"/>
-                    </a:lnT>
-                    <a:lnB w="6350" cap="flat" cmpd="sng" algn="ctr">
-                      <a:solidFill>
-                        <a:srgbClr val="E3E3EA"/>
-                      </a:solidFill>
-                      <a:prstDash val="solid"/>
-                      <a:round/>
-                      <a:headEnd type="none" w="med" len="med"/>
-                      <a:tailEnd type="none" w="med" len="med"/>
-                    </a:lnB>
-                  </a:tcPr>
-                </a:tc>
-                <a:tc>
-                  <a:txBody>
-                    <a:bodyPr/>
-                    <a:lstStyle/>
-                    <a:p>
-                      <a:pPr indent="0" marL="0">
-                        <a:buNone/>
-                      </a:pPr>
-                      <a:r>
-                        <a:rPr lang="en-US" sz="1150" dirty="0">
-                          <a:solidFill>
-                            <a:srgbClr val="1B1B21"/>
-                          </a:solidFill>
-                          <a:latin typeface="Arial" pitchFamily="34" charset="0"/>
-                          <a:ea typeface="Arial" pitchFamily="34" charset="-122"/>
-                          <a:cs typeface="Arial" pitchFamily="34" charset="-120"/>
-                        </a:rPr>
-                        <a:t>(주)대동공업 (계약직)</a:t>
-                      </a:r>
-                      <a:endParaRPr lang="en-US" sz="1150" dirty="0">
-                        <a:latin typeface="Arial" charset="0"/>
-                        <a:ea typeface="Arial" charset="0"/>
-                        <a:cs typeface="Arial" charset="0"/>
-                      </a:endParaRPr>
-                    </a:p>
-                  </a:txBody>
-                  <a:tcPr marL="76200" marR="76200" marT="25400" marB="25400" anchor="ctr">
-                    <a:lnL w="6350" cap="flat" cmpd="sng" algn="ctr">
-                      <a:solidFill>
-                        <a:srgbClr val="E3E3EA"/>
-                      </a:solidFill>
-                      <a:prstDash val="solid"/>
-                      <a:round/>
-                      <a:headEnd type="none" w="med" len="med"/>
-                      <a:tailEnd type="none" w="med" len="med"/>
-                    </a:lnL>
-                    <a:lnR w="6350" cap="flat" cmpd="sng" algn="ctr">
-                      <a:solidFill>
-                        <a:srgbClr val="E3E3EA"/>
-                      </a:solidFill>
-                      <a:prstDash val="solid"/>
-                      <a:round/>
-                      <a:headEnd type="none" w="med" len="med"/>
-                      <a:tailEnd type="none" w="med" len="med"/>
-                    </a:lnR>
-                    <a:lnT w="6350" cap="flat" cmpd="sng" algn="ctr">
-                      <a:solidFill>
-                        <a:srgbClr val="E3E3EA"/>
-                      </a:solidFill>
-                      <a:prstDash val="solid"/>
-                      <a:round/>
-                      <a:headEnd type="none" w="med" len="med"/>
-                      <a:tailEnd type="none" w="med" len="med"/>
-                    </a:lnT>
-                    <a:lnB w="6350" cap="flat" cmpd="sng" algn="ctr">
-                      <a:solidFill>
-                        <a:srgbClr val="E3E3EA"/>
-                      </a:solidFill>
-                      <a:prstDash val="solid"/>
-                      <a:round/>
-                      <a:headEnd type="none" w="med" len="med"/>
-                      <a:tailEnd type="none" w="med" len="med"/>
-                    </a:lnB>
-                  </a:tcPr>
-                </a:tc>
-                <a:tc>
-                  <a:txBody>
-                    <a:bodyPr/>
-                    <a:lstStyle/>
-                    <a:p>
-                      <a:pPr indent="0" marL="0">
-                        <a:buNone/>
-                      </a:pPr>
-                      <a:r>
-                        <a:rPr lang="en-US" sz="1150" dirty="0">
-                          <a:solidFill>
-                            <a:srgbClr val="1B1B21"/>
-                          </a:solidFill>
-                          <a:latin typeface="Arial" pitchFamily="34" charset="0"/>
-                          <a:ea typeface="Arial" pitchFamily="34" charset="-122"/>
-                          <a:cs typeface="Arial" pitchFamily="34" charset="-120"/>
-                        </a:rPr>
-                        <a:t>소형 트랙터 엔진·미션 조립반 · 단순 조립</a:t>
-                      </a:r>
-                      <a:endParaRPr lang="en-US" sz="1150" dirty="0">
-                        <a:latin typeface="Arial" charset="0"/>
-                        <a:ea typeface="Arial" charset="0"/>
-                        <a:cs typeface="Arial" charset="0"/>
-                      </a:endParaRPr>
-                    </a:p>
-                  </a:txBody>
-                  <a:tcPr marL="76200" marR="76200" marT="25400" marB="25400" anchor="ctr">
-                    <a:lnL w="6350" cap="flat" cmpd="sng" algn="ctr">
-                      <a:solidFill>
-                        <a:srgbClr val="E3E3EA"/>
-                      </a:solidFill>
-                      <a:prstDash val="solid"/>
-                      <a:round/>
-                      <a:headEnd type="none" w="med" len="med"/>
-                      <a:tailEnd type="none" w="med" len="med"/>
-                    </a:lnL>
-                    <a:lnR w="6350" cap="flat" cmpd="sng" algn="ctr">
-                      <a:solidFill>
-                        <a:srgbClr val="E3E3EA"/>
-                      </a:solidFill>
-                      <a:prstDash val="solid"/>
-                      <a:round/>
-                      <a:headEnd type="none" w="med" len="med"/>
-                      <a:tailEnd type="none" w="med" len="med"/>
-                    </a:lnR>
-                    <a:lnT w="6350" cap="flat" cmpd="sng" algn="ctr">
-                      <a:solidFill>
-                        <a:srgbClr val="E3E3EA"/>
-                      </a:solidFill>
-                      <a:prstDash val="solid"/>
-                      <a:round/>
-                      <a:headEnd type="none" w="med" len="med"/>
-                      <a:tailEnd type="none" w="med" len="med"/>
-                    </a:lnT>
-                    <a:lnB w="6350" cap="flat" cmpd="sng" algn="ctr">
-                      <a:solidFill>
-                        <a:srgbClr val="E3E3EA"/>
-                      </a:solidFill>
-                      <a:prstDash val="solid"/>
-                      <a:round/>
-                      <a:headEnd type="none" w="med" len="med"/>
-                      <a:tailEnd type="none" w="med" len="med"/>
-                    </a:lnB>
-                  </a:tcPr>
-                </a:tc>
-              </a:tr>
-            </a:tbl>
-          </a:graphicData>
-        </a:graphic>
-      </p:graphicFrame>
-      <p:sp>
-        <p:nvSpPr>
-          <p:cNvPr id="8" name="Text 4"/>
-          <p:cNvSpPr/>
-          <p:nvPr/>
-        </p:nvSpPr>
-        <p:spPr>
-          <a:xfrm>
-            <a:off x="640080" y="4892040"/>
-            <a:ext cx="10908792" cy="365760"/>
-          </a:xfrm>
-          <a:prstGeom prst="rect">
-            <a:avLst/>
-          </a:prstGeom>
-          <a:noFill/>
-          <a:ln/>
-        </p:spPr>
-        <p:txBody>
-          <a:bodyPr wrap="square" lIns="0" tIns="0" rIns="0" bIns="0" rtlCol="0" anchor="ctr"/>
-          <a:lstStyle/>
-          <a:p>
-            <a:pPr indent="0" marL="0">
-              <a:buNone/>
-            </a:pPr>
-            <a:r>
-              <a:rPr lang="en-US" sz="1300" b="1" dirty="0">
-                <a:solidFill>
-                  <a:srgbClr val="33386E"/>
-                </a:solidFill>
-                <a:latin typeface="Arial" pitchFamily="34" charset="0"/>
-                <a:ea typeface="Arial" pitchFamily="34" charset="-122"/>
-                <a:cs typeface="Arial" pitchFamily="34" charset="-120"/>
-              </a:rPr>
-              <a:t>자격증  </a:t>
-            </a:r>
-            <a:pPr indent="0" marL="0">
-              <a:buNone/>
-            </a:pPr>
-            <a:r>
-              <a:rPr lang="en-US" sz="1200" dirty="0">
-                <a:solidFill>
-                  <a:srgbClr val="1B1B21"/>
-                </a:solidFill>
-                <a:latin typeface="Arial" pitchFamily="34" charset="0"/>
-                <a:ea typeface="Arial" pitchFamily="34" charset="-122"/>
-                <a:cs typeface="Arial" pitchFamily="34" charset="-120"/>
-              </a:rPr>
-              <a:t>전자기능사 · 전자캐드기능사 · 전자기기기능사</a:t>
-            </a:r>
-            <a:endParaRPr lang="en-US" sz="1300" dirty="0"/>
-          </a:p>
-        </p:txBody>
-      </p:sp>
-      <p:sp>
-        <p:nvSpPr>
-          <p:cNvPr id="9" name="Shape 5"/>
-          <p:cNvSpPr/>
-          <p:nvPr/>
-        </p:nvSpPr>
-        <p:spPr>
-          <a:xfrm>
-            <a:off x="640080" y="5349240"/>
-            <a:ext cx="10908792" cy="914400"/>
-          </a:xfrm>
-          <a:prstGeom prst="roundRect">
-            <a:avLst>
-              <a:gd name="adj" fmla="val 8000"/>
-            </a:avLst>
-          </a:prstGeom>
-          <a:solidFill>
-            <a:srgbClr val="F8ECE7"/>
-          </a:solidFill>
-          <a:ln w="12700">
-            <a:solidFill>
-              <a:srgbClr val="E7C9BE"/>
-            </a:solidFill>
-            <a:prstDash val="solid"/>
-          </a:ln>
-        </p:spPr>
-      </p:sp>
-      <p:sp>
-        <p:nvSpPr>
-          <p:cNvPr id="10" name="Text 6"/>
-          <p:cNvSpPr/>
-          <p:nvPr/>
-        </p:nvSpPr>
-        <p:spPr>
-          <a:xfrm>
-            <a:off x="914400" y="5440680"/>
-            <a:ext cx="10360152" cy="731520"/>
-          </a:xfrm>
-          <a:prstGeom prst="rect">
-            <a:avLst/>
-          </a:prstGeom>
-          <a:noFill/>
-          <a:ln/>
-        </p:spPr>
-        <p:txBody>
-          <a:bodyPr wrap="square" lIns="0" tIns="0" rIns="0" bIns="0" rtlCol="0" anchor="ctr"/>
-          <a:lstStyle/>
-          <a:p>
-            <a:pPr indent="0" marL="0">
-              <a:buNone/>
-            </a:pPr>
-            <a:r>
-              <a:rPr lang="en-US" sz="1150" b="1" dirty="0">
-                <a:solidFill>
-                  <a:srgbClr val="B1462C"/>
-                </a:solidFill>
-                <a:latin typeface="Arial" pitchFamily="34" charset="0"/>
-                <a:ea typeface="Arial" pitchFamily="34" charset="-122"/>
-                <a:cs typeface="Arial" pitchFamily="34" charset="-120"/>
-              </a:rPr>
-              <a:t>배경 → 강점   </a:t>
-            </a:r>
-            <a:pPr indent="0" marL="0">
-              <a:buNone/>
-            </a:pPr>
-            <a:r>
-              <a:rPr lang="en-US" sz="1150" dirty="0">
-                <a:solidFill>
-                  <a:srgbClr val="1B1B21"/>
-                </a:solidFill>
-                <a:latin typeface="Arial" pitchFamily="34" charset="0"/>
-                <a:ea typeface="Arial" pitchFamily="34" charset="-122"/>
-                <a:cs typeface="Arial" pitchFamily="34" charset="-120"/>
-              </a:rPr>
-              <a:t>전자과·전자 기능사 3종·SMT/엔진 조립 현장 경력으로 하드웨어에 대한 실물 감각을 쌓고, 그 위에 소프트웨어를 얹어 임베디드·게임·로보틱스로 확장 — ‘하드웨어를 이해하는 소프트웨어 개발자’의 실제 뿌리.</a:t>
-            </a:r>
-            <a:endParaRPr lang="en-US" sz="1150" dirty="0"/>
-          </a:p>
-        </p:txBody>
-      </p:sp>
-    </p:spTree>
-  </p:cSld>
-  <p:clrMapOvr>
-    <a:masterClrMapping/>
-  </p:clrMapOvr>
-</p:sld>
-</file>
-
-<file path=ppt/slides/slide11.xml><?xml version="1.0" encoding="utf-8"?>
-<p:sld xmlns:a="http://schemas.openxmlformats.org/drawingml/2006/main" xmlns:r="http://schemas.openxmlformats.org/officeDocument/2006/relationships" xmlns:p="http://schemas.openxmlformats.org/presentationml/2006/main">
-  <p:cSld name="Slide 11">
-    <p:bg>
-      <p:bgPr>
-        <a:solidFill>
-          <a:srgbClr val="141525"/>
-        </a:solidFill>
-      </p:bgPr>
-    </p:bg>
-    <p:spTree>
-      <p:nvGrpSpPr>
-        <p:cNvPr id="1" name=""/>
-        <p:cNvGrpSpPr/>
-        <p:nvPr/>
-      </p:nvGrpSpPr>
-      <p:grpSpPr>
-        <a:xfrm>
-          <a:off x="0" y="0"/>
-          <a:ext cx="0" cy="0"/>
-          <a:chOff x="0" y="0"/>
-          <a:chExt cx="0" cy="0"/>
-        </a:xfrm>
-      </p:grpSpPr>
-      <p:sp>
-        <p:nvSpPr>
-          <p:cNvPr id="2" name="Text 0"/>
-          <p:cNvSpPr/>
-          <p:nvPr/>
-        </p:nvSpPr>
-        <p:spPr>
-          <a:xfrm>
-            <a:off x="640080" y="1554480"/>
-            <a:ext cx="10058400" cy="822960"/>
-          </a:xfrm>
-          <a:prstGeom prst="rect">
-            <a:avLst/>
-          </a:prstGeom>
-          <a:noFill/>
-          <a:ln/>
-        </p:spPr>
-        <p:txBody>
-          <a:bodyPr wrap="square" lIns="0" tIns="0" rIns="0" bIns="0" rtlCol="0" anchor="ctr"/>
-          <a:lstStyle/>
-          <a:p>
-            <a:pPr indent="0" marL="0">
-              <a:buNone/>
-            </a:pPr>
-            <a:r>
-              <a:rPr lang="en-US" sz="4000" b="1" dirty="0">
-                <a:solidFill>
-                  <a:srgbClr val="FFFFFF"/>
-                </a:solidFill>
-                <a:latin typeface="Arial" pitchFamily="34" charset="0"/>
-                <a:ea typeface="Arial" pitchFamily="34" charset="-122"/>
-                <a:cs typeface="Arial" pitchFamily="34" charset="-120"/>
-              </a:rPr>
-              <a:t>감사합니다</a:t>
-            </a:r>
-            <a:endParaRPr lang="en-US" sz="4000" dirty="0"/>
-          </a:p>
-        </p:txBody>
-      </p:sp>
-      <p:sp>
-        <p:nvSpPr>
-          <p:cNvPr id="3" name="Text 1"/>
-          <p:cNvSpPr/>
-          <p:nvPr/>
-        </p:nvSpPr>
-        <p:spPr>
-          <a:xfrm>
-            <a:off x="640080" y="2468880"/>
-            <a:ext cx="10058400" cy="457200"/>
-          </a:xfrm>
-          <a:prstGeom prst="rect">
-            <a:avLst/>
-          </a:prstGeom>
-          <a:noFill/>
-          <a:ln/>
-        </p:spPr>
-        <p:txBody>
-          <a:bodyPr wrap="square" lIns="0" tIns="0" rIns="0" bIns="0" rtlCol="0" anchor="ctr"/>
-          <a:lstStyle/>
-          <a:p>
-            <a:pPr indent="0" marL="0">
-              <a:buNone/>
-            </a:pPr>
-            <a:r>
-              <a:rPr lang="en-US" sz="1800" dirty="0">
-                <a:solidFill>
-                  <a:srgbClr val="C3C6E6"/>
-                </a:solidFill>
-                <a:latin typeface="Arial" pitchFamily="34" charset="0"/>
-                <a:ea typeface="Arial" pitchFamily="34" charset="-122"/>
-                <a:cs typeface="Arial" pitchFamily="34" charset="-120"/>
-              </a:rPr>
-              <a:t>고성모 · Software Developer</a:t>
-            </a:r>
-            <a:endParaRPr lang="en-US" sz="1800" dirty="0"/>
-          </a:p>
-        </p:txBody>
-      </p:sp>
-      <p:sp>
-        <p:nvSpPr>
-          <p:cNvPr id="4" name="Text 2"/>
-          <p:cNvSpPr/>
-          <p:nvPr/>
-        </p:nvSpPr>
-        <p:spPr>
-          <a:xfrm>
-            <a:off x="640080" y="3383280"/>
-            <a:ext cx="10515600" cy="347472"/>
-          </a:xfrm>
-          <a:prstGeom prst="rect">
-            <a:avLst/>
-          </a:prstGeom>
-          <a:noFill/>
-          <a:ln/>
-        </p:spPr>
-        <p:txBody>
-          <a:bodyPr wrap="square" lIns="0" tIns="0" rIns="0" bIns="0" rtlCol="0" anchor="ctr"/>
-          <a:lstStyle/>
-          <a:p>
-            <a:pPr indent="0" marL="0">
-              <a:buNone/>
-            </a:pPr>
-            <a:r>
-              <a:rPr lang="en-US" sz="1250" b="1" dirty="0">
-                <a:solidFill>
-                  <a:srgbClr val="9AA0D8"/>
-                </a:solidFill>
-                <a:latin typeface="Arial" pitchFamily="34" charset="0"/>
-                <a:ea typeface="Arial" pitchFamily="34" charset="-122"/>
-                <a:cs typeface="Arial" pitchFamily="34" charset="-120"/>
-              </a:rPr>
-              <a:t>포트폴리오 (웹)   </a:t>
-            </a:r>
-            <a:pPr indent="0" marL="0">
-              <a:buNone/>
-            </a:pPr>
-            <a:r>
-              <a:rPr lang="en-US" sz="1250" dirty="0">
-                <a:solidFill>
-                  <a:srgbClr val="E7E7EF"/>
-                </a:solidFill>
-                <a:latin typeface="Arial" pitchFamily="34" charset="0"/>
-                <a:ea typeface="Arial" pitchFamily="34" charset="-122"/>
-                <a:cs typeface="Arial" pitchFamily="34" charset="-120"/>
-              </a:rPr>
-              <a:t>g0sun9m0.github.io/portfolio</a:t>
-            </a:r>
-            <a:endParaRPr lang="en-US" sz="1250" dirty="0"/>
-          </a:p>
-        </p:txBody>
-      </p:sp>
-      <p:sp>
-        <p:nvSpPr>
-          <p:cNvPr id="5" name="Text 3"/>
-          <p:cNvSpPr/>
-          <p:nvPr/>
-        </p:nvSpPr>
-        <p:spPr>
-          <a:xfrm>
-            <a:off x="640080" y="3767328"/>
-            <a:ext cx="10515600" cy="347472"/>
-          </a:xfrm>
-          <a:prstGeom prst="rect">
-            <a:avLst/>
-          </a:prstGeom>
-          <a:noFill/>
-          <a:ln/>
-        </p:spPr>
-        <p:txBody>
-          <a:bodyPr wrap="square" lIns="0" tIns="0" rIns="0" bIns="0" rtlCol="0" anchor="ctr"/>
-          <a:lstStyle/>
-          <a:p>
-            <a:pPr indent="0" marL="0">
-              <a:buNone/>
-            </a:pPr>
-            <a:r>
-              <a:rPr lang="en-US" sz="1250" b="1" dirty="0">
-                <a:solidFill>
-                  <a:srgbClr val="9AA0D8"/>
-                </a:solidFill>
-                <a:latin typeface="Arial" pitchFamily="34" charset="0"/>
-                <a:ea typeface="Arial" pitchFamily="34" charset="-122"/>
-                <a:cs typeface="Arial" pitchFamily="34" charset="-120"/>
-              </a:rPr>
-              <a:t>INSPECTOR (팀)   </a:t>
-            </a:r>
-            <a:pPr indent="0" marL="0">
-              <a:buNone/>
-            </a:pPr>
-            <a:r>
-              <a:rPr lang="en-US" sz="1250" dirty="0">
-                <a:solidFill>
-                  <a:srgbClr val="E7E7EF"/>
-                </a:solidFill>
-                <a:latin typeface="Arial" pitchFamily="34" charset="0"/>
-                <a:ea typeface="Arial" pitchFamily="34" charset="-122"/>
-                <a:cs typeface="Arial" pitchFamily="34" charset="-120"/>
-              </a:rPr>
-              <a:t>github.com/se0sangh0/capstone-dark-horror-deckbuilder</a:t>
-            </a:r>
-            <a:endParaRPr lang="en-US" sz="1250" dirty="0"/>
-          </a:p>
-        </p:txBody>
-      </p:sp>
-      <p:sp>
-        <p:nvSpPr>
-          <p:cNvPr id="6" name="Text 4"/>
-          <p:cNvSpPr/>
-          <p:nvPr/>
-        </p:nvSpPr>
-        <p:spPr>
-          <a:xfrm>
-            <a:off x="640080" y="4151376"/>
-            <a:ext cx="10515600" cy="347472"/>
-          </a:xfrm>
-          <a:prstGeom prst="rect">
-            <a:avLst/>
-          </a:prstGeom>
-          <a:noFill/>
-          <a:ln/>
-        </p:spPr>
-        <p:txBody>
-          <a:bodyPr wrap="square" lIns="0" tIns="0" rIns="0" bIns="0" rtlCol="0" anchor="ctr"/>
-          <a:lstStyle/>
-          <a:p>
-            <a:pPr indent="0" marL="0">
-              <a:buNone/>
-            </a:pPr>
-            <a:r>
-              <a:rPr lang="en-US" sz="1250" b="1" dirty="0">
-                <a:solidFill>
-                  <a:srgbClr val="9AA0D8"/>
-                </a:solidFill>
-                <a:latin typeface="Arial" pitchFamily="34" charset="0"/>
-                <a:ea typeface="Arial" pitchFamily="34" charset="-122"/>
-                <a:cs typeface="Arial" pitchFamily="34" charset="-120"/>
-              </a:rPr>
-              <a:t>바른자세 코치봇   </a:t>
-            </a:r>
-            <a:pPr indent="0" marL="0">
-              <a:buNone/>
-            </a:pPr>
-            <a:r>
-              <a:rPr lang="en-US" sz="1250" dirty="0">
-                <a:solidFill>
-                  <a:srgbClr val="E7E7EF"/>
-                </a:solidFill>
-                <a:latin typeface="Arial" pitchFamily="34" charset="0"/>
-                <a:ea typeface="Arial" pitchFamily="34" charset="-122"/>
-                <a:cs typeface="Arial" pitchFamily="34" charset="-120"/>
-              </a:rPr>
-              <a:t>github.com/G0Sun9M0/busan-ai-posture-coach-robot</a:t>
-            </a:r>
-            <a:endParaRPr lang="en-US" sz="1250" dirty="0"/>
-          </a:p>
-        </p:txBody>
-      </p:sp>
-      <p:sp>
-        <p:nvSpPr>
-          <p:cNvPr id="7" name="Text 5"/>
-          <p:cNvSpPr/>
-          <p:nvPr/>
-        </p:nvSpPr>
-        <p:spPr>
-          <a:xfrm>
-            <a:off x="640080" y="4535424"/>
-            <a:ext cx="10515600" cy="347472"/>
-          </a:xfrm>
-          <a:prstGeom prst="rect">
-            <a:avLst/>
-          </a:prstGeom>
-          <a:noFill/>
-          <a:ln/>
-        </p:spPr>
-        <p:txBody>
-          <a:bodyPr wrap="square" lIns="0" tIns="0" rIns="0" bIns="0" rtlCol="0" anchor="ctr"/>
-          <a:lstStyle/>
-          <a:p>
-            <a:pPr indent="0" marL="0">
-              <a:buNone/>
-            </a:pPr>
-            <a:r>
-              <a:rPr lang="en-US" sz="1250" b="1" dirty="0">
-                <a:solidFill>
-                  <a:srgbClr val="9AA0D8"/>
-                </a:solidFill>
-                <a:latin typeface="Arial" pitchFamily="34" charset="0"/>
-                <a:ea typeface="Arial" pitchFamily="34" charset="-122"/>
-                <a:cs typeface="Arial" pitchFamily="34" charset="-120"/>
-              </a:rPr>
-              <a:t>로보틱스   </a:t>
-            </a:r>
-            <a:pPr indent="0" marL="0">
-              <a:buNone/>
-            </a:pPr>
-            <a:r>
-              <a:rPr lang="en-US" sz="1250" dirty="0">
-                <a:solidFill>
-                  <a:srgbClr val="E7E7EF"/>
-                </a:solidFill>
-                <a:latin typeface="Arial" pitchFamily="34" charset="0"/>
-                <a:ea typeface="Arial" pitchFamily="34" charset="-122"/>
-                <a:cs typeface="Arial" pitchFamily="34" charset="-120"/>
-              </a:rPr>
-              <a:t>github.com/G0Sun9M0/robotics-project</a:t>
-            </a:r>
-            <a:endParaRPr lang="en-US" sz="1250" dirty="0"/>
-          </a:p>
-        </p:txBody>
-      </p:sp>
-      <p:sp>
-        <p:nvSpPr>
-          <p:cNvPr id="8" name="Shape 6"/>
-          <p:cNvSpPr/>
-          <p:nvPr/>
-        </p:nvSpPr>
-        <p:spPr>
-          <a:xfrm>
-            <a:off x="640080" y="5806440"/>
-            <a:ext cx="10908792" cy="0"/>
-          </a:xfrm>
-          <a:prstGeom prst="line">
-            <a:avLst/>
-          </a:prstGeom>
-          <a:noFill/>
-          <a:ln w="12700">
-            <a:solidFill>
-              <a:srgbClr val="3A3D6E"/>
-            </a:solidFill>
-            <a:prstDash val="solid"/>
-          </a:ln>
-        </p:spPr>
-      </p:sp>
-      <p:sp>
-        <p:nvSpPr>
-          <p:cNvPr id="9" name="Text 7"/>
-          <p:cNvSpPr/>
-          <p:nvPr/>
-        </p:nvSpPr>
-        <p:spPr>
-          <a:xfrm>
-            <a:off x="640080" y="5943600"/>
-            <a:ext cx="10972800" cy="365760"/>
-          </a:xfrm>
-          <a:prstGeom prst="rect">
-            <a:avLst/>
-          </a:prstGeom>
-          <a:noFill/>
-          <a:ln/>
-        </p:spPr>
-        <p:txBody>
-          <a:bodyPr wrap="square" lIns="0" tIns="0" rIns="0" bIns="0" rtlCol="0" anchor="ctr"/>
-          <a:lstStyle/>
-          <a:p>
-            <a:pPr indent="0" marL="0">
-              <a:buNone/>
-            </a:pPr>
-            <a:r>
-              <a:rPr lang="en-US" sz="1150" b="1" dirty="0">
-                <a:solidFill>
-                  <a:srgbClr val="D3D5EE"/>
-                </a:solidFill>
-                <a:latin typeface="Arial" pitchFamily="34" charset="0"/>
-                <a:ea typeface="Arial" pitchFamily="34" charset="-122"/>
-                <a:cs typeface="Arial" pitchFamily="34" charset="-120"/>
-              </a:rPr>
-              <a:t>수료  </a:t>
-            </a:r>
-            <a:pPr indent="0" marL="0">
-              <a:buNone/>
-            </a:pPr>
-            <a:r>
-              <a:rPr lang="en-US" sz="1150" dirty="0">
-                <a:solidFill>
-                  <a:srgbClr val="9AA0D8"/>
-                </a:solidFill>
-                <a:latin typeface="Arial" pitchFamily="34" charset="0"/>
-                <a:ea typeface="Arial" pitchFamily="34" charset="-122"/>
-                <a:cs typeface="Arial" pitchFamily="34" charset="-120"/>
-              </a:rPr>
-              <a:t>산업체 수요특화형 AI교육 15h 수료 (영남이공대학교, 2026)   </a:t>
-            </a:r>
-            <a:pPr indent="0" marL="0">
-              <a:buNone/>
-            </a:pPr>
-            <a:r>
-              <a:rPr lang="en-US" sz="1150" dirty="0">
-                <a:solidFill>
-                  <a:srgbClr val="9AA0D8"/>
-                </a:solidFill>
-                <a:latin typeface="Arial" pitchFamily="34" charset="0"/>
-                <a:ea typeface="Arial" pitchFamily="34" charset="-122"/>
-                <a:cs typeface="Arial" pitchFamily="34" charset="-120"/>
-              </a:rPr>
-              <a:t>·  gsm9384@gmail.com</a:t>
-            </a:r>
-            <a:endParaRPr lang="en-US" sz="1150" dirty="0"/>
           </a:p>
         </p:txBody>
       </p:sp>
@@ -4122,7 +2059,7 @@
         </p:nvSpPr>
         <p:spPr>
           <a:xfrm>
-            <a:off x="640080" y="384048"/>
+            <a:off x="640080" y="411480"/>
             <a:ext cx="10908792" cy="566928"/>
           </a:xfrm>
           <a:prstGeom prst="rect">
@@ -4161,7 +2098,7 @@
         </p:nvSpPr>
         <p:spPr>
           <a:xfrm>
-            <a:off x="640080" y="969264"/>
+            <a:off x="640080" y="987552"/>
             <a:ext cx="10908792" cy="384048"/>
           </a:xfrm>
           <a:prstGeom prst="rect">
@@ -4186,7 +2123,7 @@
                 <a:ea typeface="Arial" pitchFamily="34" charset="-122"/>
                 <a:cs typeface="Arial" pitchFamily="34" charset="-120"/>
               </a:rPr>
-              <a:t>한 언어·한 분야에 머물지 않고, ‘무엇을 만들든 구조를 설계하고 끝까지 동작시킨다’는 방식으로 여러 도메인을 관통하는 공통 역량을 쌓았습니다.</a:t>
+              <a:t>한 분야에 머물지 않고, 무엇을 만들든 구조를 설계하고 끝까지 동작시키는 방식으로 여러 도메인의 프로젝트를 완주했습니다.</a:t>
             </a:r>
             <a:endParaRPr lang="en-US" sz="1250" dirty="0"/>
           </a:p>
@@ -4207,7 +2144,7 @@
           </p:nvPr>
         </p:nvGraphicFramePr>
         <p:xfrm>
-          <a:off x="640080" y="1417320"/>
+          <a:off x="640080" y="1508760"/>
           <a:ext cx="10908792" cy="914400"/>
         </p:xfrm>
         <a:graphic>
@@ -4215,10 +2152,10 @@
             <a:tbl>
               <a:tblPr/>
               <a:tblGrid>
-                <a:gridCol w="2286000"/>
-                <a:gridCol w="8622792"/>
+                <a:gridCol w="2651760"/>
+                <a:gridCol w="8257032"/>
               </a:tblGrid>
-              <a:tr h="347472">
+              <a:tr h="502920">
                 <a:tc>
                   <a:txBody>
                     <a:bodyPr/>
@@ -4228,7 +2165,7 @@
                         <a:buNone/>
                       </a:pPr>
                       <a:r>
-                        <a:rPr lang="en-US" sz="1080" b="1" dirty="0">
+                        <a:rPr lang="en-US" sz="1250" b="1" dirty="0">
                           <a:solidFill>
                             <a:srgbClr val="FFFFFF"/>
                           </a:solidFill>
@@ -4238,14 +2175,14 @@
                         </a:rPr>
                         <a:t>구분</a:t>
                       </a:r>
-                      <a:endParaRPr lang="en-US" sz="1080" dirty="0">
+                      <a:endParaRPr lang="en-US" sz="1250" dirty="0">
                         <a:latin typeface="Arial" charset="0"/>
                         <a:ea typeface="Arial" charset="0"/>
                         <a:cs typeface="Arial" charset="0"/>
                       </a:endParaRPr>
                     </a:p>
                   </a:txBody>
-                  <a:tcPr marL="63500" marR="63500" marT="12700" marB="12700" anchor="ctr">
+                  <a:tcPr marL="88900" marR="88900" marT="38100" marB="38100" anchor="ctr">
                     <a:lnL w="6350" cap="flat" cmpd="sng" algn="ctr">
                       <a:solidFill>
                         <a:srgbClr val="E3E3EA"/>
@@ -4296,7 +2233,7 @@
                         <a:buNone/>
                       </a:pPr>
                       <a:r>
-                        <a:rPr lang="en-US" sz="1080" b="1" dirty="0">
+                        <a:rPr lang="en-US" sz="1250" b="1" dirty="0">
                           <a:solidFill>
                             <a:srgbClr val="FFFFFF"/>
                           </a:solidFill>
@@ -4304,16 +2241,16 @@
                           <a:ea typeface="Arial" pitchFamily="34" charset="-122"/>
                           <a:cs typeface="Arial" pitchFamily="34" charset="-120"/>
                         </a:rPr>
-                        <a:t>보유 스킬  (★ = 집중 영역)</a:t>
+                        <a:t>보유 스킬</a:t>
                       </a:r>
-                      <a:endParaRPr lang="en-US" sz="1080" dirty="0">
+                      <a:endParaRPr lang="en-US" sz="1250" dirty="0">
                         <a:latin typeface="Arial" charset="0"/>
                         <a:ea typeface="Arial" charset="0"/>
                         <a:cs typeface="Arial" charset="0"/>
                       </a:endParaRPr>
                     </a:p>
                   </a:txBody>
-                  <a:tcPr marL="63500" marR="63500" marT="12700" marB="12700" anchor="ctr">
+                  <a:tcPr marL="88900" marR="88900" marT="38100" marB="38100" anchor="ctr">
                     <a:lnL w="6350" cap="flat" cmpd="sng" algn="ctr">
                       <a:solidFill>
                         <a:srgbClr val="E3E3EA"/>
@@ -4356,7 +2293,7 @@
                   </a:tcPr>
                 </a:tc>
               </a:tr>
-              <a:tr h="347472">
+              <a:tr h="502920">
                 <a:tc>
                   <a:txBody>
                     <a:bodyPr/>
@@ -4366,7 +2303,7 @@
                         <a:buNone/>
                       </a:pPr>
                       <a:r>
-                        <a:rPr lang="en-US" sz="1080" dirty="0">
+                        <a:rPr lang="en-US" sz="1250" dirty="0">
                           <a:solidFill>
                             <a:srgbClr val="1B1B21"/>
                           </a:solidFill>
@@ -4376,14 +2313,14 @@
                         </a:rPr>
                         <a:t>언어</a:t>
                       </a:r>
-                      <a:endParaRPr lang="en-US" sz="1080" dirty="0">
+                      <a:endParaRPr lang="en-US" sz="1250" dirty="0">
                         <a:latin typeface="Arial" charset="0"/>
                         <a:ea typeface="Arial" charset="0"/>
                         <a:cs typeface="Arial" charset="0"/>
                       </a:endParaRPr>
                     </a:p>
                   </a:txBody>
-                  <a:tcPr marL="63500" marR="63500" marT="12700" marB="12700" anchor="ctr">
+                  <a:tcPr marL="88900" marR="88900" marT="38100" marB="38100" anchor="ctr">
                     <a:lnL w="6350" cap="flat" cmpd="sng" algn="ctr">
                       <a:solidFill>
                         <a:srgbClr val="E3E3EA"/>
@@ -4434,7 +2371,7 @@
                         <a:buNone/>
                       </a:pPr>
                       <a:r>
-                        <a:rPr lang="en-US" sz="1080" dirty="0">
+                        <a:rPr lang="en-US" sz="1250" dirty="0">
                           <a:solidFill>
                             <a:srgbClr val="1B1B21"/>
                           </a:solidFill>
@@ -4442,16 +2379,16 @@
                           <a:ea typeface="Arial" pitchFamily="34" charset="-122"/>
                           <a:cs typeface="Arial" pitchFamily="34" charset="-120"/>
                         </a:rPr>
-                        <a:t>C# ★ · C / C++ ★ (임베디드) · JavaScript · PHP · Python</a:t>
+                        <a:t>C#, C/C++, JavaScript, PHP, Python</a:t>
                       </a:r>
-                      <a:endParaRPr lang="en-US" sz="1080" dirty="0">
+                      <a:endParaRPr lang="en-US" sz="1250" dirty="0">
                         <a:latin typeface="Arial" charset="0"/>
                         <a:ea typeface="Arial" charset="0"/>
                         <a:cs typeface="Arial" charset="0"/>
                       </a:endParaRPr>
                     </a:p>
                   </a:txBody>
-                  <a:tcPr marL="63500" marR="63500" marT="12700" marB="12700" anchor="ctr">
+                  <a:tcPr marL="88900" marR="88900" marT="38100" marB="38100" anchor="ctr">
                     <a:lnL w="6350" cap="flat" cmpd="sng" algn="ctr">
                       <a:solidFill>
                         <a:srgbClr val="E3E3EA"/>
@@ -4494,7 +2431,7 @@
                   </a:tcPr>
                 </a:tc>
               </a:tr>
-              <a:tr h="347472">
+              <a:tr h="502920">
                 <a:tc>
                   <a:txBody>
                     <a:bodyPr/>
@@ -4504,7 +2441,7 @@
                         <a:buNone/>
                       </a:pPr>
                       <a:r>
-                        <a:rPr lang="en-US" sz="1080" dirty="0">
+                        <a:rPr lang="en-US" sz="1250" dirty="0">
                           <a:solidFill>
                             <a:srgbClr val="1B1B21"/>
                           </a:solidFill>
@@ -4512,16 +2449,16 @@
                           <a:ea typeface="Arial" pitchFamily="34" charset="-122"/>
                           <a:cs typeface="Arial" pitchFamily="34" charset="-120"/>
                         </a:rPr>
-                        <a:t>엔진 · 프레임워크</a:t>
+                        <a:t>엔진, 프레임워크</a:t>
                       </a:r>
-                      <a:endParaRPr lang="en-US" sz="1080" dirty="0">
+                      <a:endParaRPr lang="en-US" sz="1250" dirty="0">
                         <a:latin typeface="Arial" charset="0"/>
                         <a:ea typeface="Arial" charset="0"/>
                         <a:cs typeface="Arial" charset="0"/>
                       </a:endParaRPr>
                     </a:p>
                   </a:txBody>
-                  <a:tcPr marL="63500" marR="63500" marT="12700" marB="12700" anchor="ctr">
+                  <a:tcPr marL="88900" marR="88900" marT="38100" marB="38100" anchor="ctr">
                     <a:lnL w="6350" cap="flat" cmpd="sng" algn="ctr">
                       <a:solidFill>
                         <a:srgbClr val="E3E3EA"/>
@@ -4572,7 +2509,7 @@
                         <a:buNone/>
                       </a:pPr>
                       <a:r>
-                        <a:rPr lang="en-US" sz="1080" dirty="0">
+                        <a:rPr lang="en-US" sz="1250" dirty="0">
                           <a:solidFill>
                             <a:srgbClr val="1B1B21"/>
                           </a:solidFill>
@@ -4580,16 +2517,16 @@
                           <a:ea typeface="Arial" pitchFamily="34" charset="-122"/>
                           <a:cs typeface="Arial" pitchFamily="34" charset="-120"/>
                         </a:rPr>
-                        <a:t>Unity ★ · ESP-IDF / FreeRTOS ★ · 바닐라 JS · PHP</a:t>
+                        <a:t>Unity, ESP-IDF, FreeRTOS, 바닐라 JS, PHP</a:t>
                       </a:r>
-                      <a:endParaRPr lang="en-US" sz="1080" dirty="0">
+                      <a:endParaRPr lang="en-US" sz="1250" dirty="0">
                         <a:latin typeface="Arial" charset="0"/>
                         <a:ea typeface="Arial" charset="0"/>
                         <a:cs typeface="Arial" charset="0"/>
                       </a:endParaRPr>
                     </a:p>
                   </a:txBody>
-                  <a:tcPr marL="63500" marR="63500" marT="12700" marB="12700" anchor="ctr">
+                  <a:tcPr marL="88900" marR="88900" marT="38100" marB="38100" anchor="ctr">
                     <a:lnL w="6350" cap="flat" cmpd="sng" algn="ctr">
                       <a:solidFill>
                         <a:srgbClr val="E3E3EA"/>
@@ -4632,7 +2569,7 @@
                   </a:tcPr>
                 </a:tc>
               </a:tr>
-              <a:tr h="347472">
+              <a:tr h="502920">
                 <a:tc>
                   <a:txBody>
                     <a:bodyPr/>
@@ -4642,7 +2579,7 @@
                         <a:buNone/>
                       </a:pPr>
                       <a:r>
-                        <a:rPr lang="en-US" sz="1080" dirty="0">
+                        <a:rPr lang="en-US" sz="1250" dirty="0">
                           <a:solidFill>
                             <a:srgbClr val="1B1B21"/>
                           </a:solidFill>
@@ -4650,16 +2587,16 @@
                           <a:ea typeface="Arial" pitchFamily="34" charset="-122"/>
                           <a:cs typeface="Arial" pitchFamily="34" charset="-120"/>
                         </a:rPr>
-                        <a:t>설계 · 패턴</a:t>
+                        <a:t>설계, 패턴</a:t>
                       </a:r>
-                      <a:endParaRPr lang="en-US" sz="1080" dirty="0">
+                      <a:endParaRPr lang="en-US" sz="1250" dirty="0">
                         <a:latin typeface="Arial" charset="0"/>
                         <a:ea typeface="Arial" charset="0"/>
                         <a:cs typeface="Arial" charset="0"/>
                       </a:endParaRPr>
                     </a:p>
                   </a:txBody>
-                  <a:tcPr marL="63500" marR="63500" marT="12700" marB="12700" anchor="ctr">
+                  <a:tcPr marL="88900" marR="88900" marT="38100" marB="38100" anchor="ctr">
                     <a:lnL w="6350" cap="flat" cmpd="sng" algn="ctr">
                       <a:solidFill>
                         <a:srgbClr val="E3E3EA"/>
@@ -4710,7 +2647,7 @@
                         <a:buNone/>
                       </a:pPr>
                       <a:r>
-                        <a:rPr lang="en-US" sz="1080" dirty="0">
+                        <a:rPr lang="en-US" sz="1250" dirty="0">
                           <a:solidFill>
                             <a:srgbClr val="1B1B21"/>
                           </a:solidFill>
@@ -4718,16 +2655,16 @@
                           <a:ea typeface="Arial" pitchFamily="34" charset="-122"/>
                           <a:cs typeface="Arial" pitchFamily="34" charset="-120"/>
                         </a:rPr>
-                        <a:t>상태 머신(FSM) · 싱글톤 / CRTP 제네릭 · 데이터 주도 설계 · partial class · 이벤트 기반 결합</a:t>
+                        <a:t>상태 머신, 싱글톤, 제네릭, 데이터 주도 설계, 이벤트 기반 결합</a:t>
                       </a:r>
-                      <a:endParaRPr lang="en-US" sz="1080" dirty="0">
+                      <a:endParaRPr lang="en-US" sz="1250" dirty="0">
                         <a:latin typeface="Arial" charset="0"/>
                         <a:ea typeface="Arial" charset="0"/>
                         <a:cs typeface="Arial" charset="0"/>
                       </a:endParaRPr>
                     </a:p>
                   </a:txBody>
-                  <a:tcPr marL="63500" marR="63500" marT="12700" marB="12700" anchor="ctr">
+                  <a:tcPr marL="88900" marR="88900" marT="38100" marB="38100" anchor="ctr">
                     <a:lnL w="6350" cap="flat" cmpd="sng" algn="ctr">
                       <a:solidFill>
                         <a:srgbClr val="E3E3EA"/>
@@ -4770,7 +2707,7 @@
                   </a:tcPr>
                 </a:tc>
               </a:tr>
-              <a:tr h="347472">
+              <a:tr h="502920">
                 <a:tc>
                   <a:txBody>
                     <a:bodyPr/>
@@ -4780,7 +2717,7 @@
                         <a:buNone/>
                       </a:pPr>
                       <a:r>
-                        <a:rPr lang="en-US" sz="1080" dirty="0">
+                        <a:rPr lang="en-US" sz="1250" dirty="0">
                           <a:solidFill>
                             <a:srgbClr val="1B1B21"/>
                           </a:solidFill>
@@ -4788,16 +2725,16 @@
                           <a:ea typeface="Arial" pitchFamily="34" charset="-122"/>
                           <a:cs typeface="Arial" pitchFamily="34" charset="-120"/>
                         </a:rPr>
-                        <a:t>데이터 · 저장</a:t>
+                        <a:t>데이터, 저장</a:t>
                       </a:r>
-                      <a:endParaRPr lang="en-US" sz="1080" dirty="0">
+                      <a:endParaRPr lang="en-US" sz="1250" dirty="0">
                         <a:latin typeface="Arial" charset="0"/>
                         <a:ea typeface="Arial" charset="0"/>
                         <a:cs typeface="Arial" charset="0"/>
                       </a:endParaRPr>
                     </a:p>
                   </a:txBody>
-                  <a:tcPr marL="63500" marR="63500" marT="12700" marB="12700" anchor="ctr">
+                  <a:tcPr marL="88900" marR="88900" marT="38100" marB="38100" anchor="ctr">
                     <a:lnL w="6350" cap="flat" cmpd="sng" algn="ctr">
                       <a:solidFill>
                         <a:srgbClr val="E3E3EA"/>
@@ -4848,7 +2785,7 @@
                         <a:buNone/>
                       </a:pPr>
                       <a:r>
-                        <a:rPr lang="en-US" sz="1080" dirty="0">
+                        <a:rPr lang="en-US" sz="1250" dirty="0">
                           <a:solidFill>
                             <a:srgbClr val="1B1B21"/>
                           </a:solidFill>
@@ -4856,16 +2793,16 @@
                           <a:ea typeface="Arial" pitchFamily="34" charset="-122"/>
                           <a:cs typeface="Arial" pitchFamily="34" charset="-120"/>
                         </a:rPr>
-                        <a:t>JSON · ScriptableObject · PlayerPrefs · CSV 로깅 · PHP 세션 · 회원 인증</a:t>
+                        <a:t>JSON, ScriptableObject, PlayerPrefs, CSV 로깅, PHP 세션</a:t>
                       </a:r>
-                      <a:endParaRPr lang="en-US" sz="1080" dirty="0">
+                      <a:endParaRPr lang="en-US" sz="1250" dirty="0">
                         <a:latin typeface="Arial" charset="0"/>
                         <a:ea typeface="Arial" charset="0"/>
                         <a:cs typeface="Arial" charset="0"/>
                       </a:endParaRPr>
                     </a:p>
                   </a:txBody>
-                  <a:tcPr marL="63500" marR="63500" marT="12700" marB="12700" anchor="ctr">
+                  <a:tcPr marL="88900" marR="88900" marT="38100" marB="38100" anchor="ctr">
                     <a:lnL w="6350" cap="flat" cmpd="sng" algn="ctr">
                       <a:solidFill>
                         <a:srgbClr val="E3E3EA"/>
@@ -4908,7 +2845,7 @@
                   </a:tcPr>
                 </a:tc>
               </a:tr>
-              <a:tr h="347472">
+              <a:tr h="502920">
                 <a:tc>
                   <a:txBody>
                     <a:bodyPr/>
@@ -4918,7 +2855,7 @@
                         <a:buNone/>
                       </a:pPr>
                       <a:r>
-                        <a:rPr lang="en-US" sz="1080" dirty="0">
+                        <a:rPr lang="en-US" sz="1250" dirty="0">
                           <a:solidFill>
                             <a:srgbClr val="1B1B21"/>
                           </a:solidFill>
@@ -4926,16 +2863,16 @@
                           <a:ea typeface="Arial" pitchFamily="34" charset="-122"/>
                           <a:cs typeface="Arial" pitchFamily="34" charset="-120"/>
                         </a:rPr>
-                        <a:t>하드웨어 · 통신</a:t>
+                        <a:t>하드웨어, 통신</a:t>
                       </a:r>
-                      <a:endParaRPr lang="en-US" sz="1080" dirty="0">
+                      <a:endParaRPr lang="en-US" sz="1250" dirty="0">
                         <a:latin typeface="Arial" charset="0"/>
                         <a:ea typeface="Arial" charset="0"/>
                         <a:cs typeface="Arial" charset="0"/>
                       </a:endParaRPr>
                     </a:p>
                   </a:txBody>
-                  <a:tcPr marL="63500" marR="63500" marT="12700" marB="12700" anchor="ctr">
+                  <a:tcPr marL="88900" marR="88900" marT="38100" marB="38100" anchor="ctr">
                     <a:lnL w="6350" cap="flat" cmpd="sng" algn="ctr">
                       <a:solidFill>
                         <a:srgbClr val="E3E3EA"/>
@@ -4986,7 +2923,7 @@
                         <a:buNone/>
                       </a:pPr>
                       <a:r>
-                        <a:rPr lang="en-US" sz="1080" dirty="0">
+                        <a:rPr lang="en-US" sz="1250" dirty="0">
                           <a:solidFill>
                             <a:srgbClr val="1B1B21"/>
                           </a:solidFill>
@@ -4994,16 +2931,16 @@
                           <a:ea typeface="Arial" pitchFamily="34" charset="-122"/>
                           <a:cs typeface="Arial" pitchFamily="34" charset="-120"/>
                         </a:rPr>
-                        <a:t>I2C (MPU6050) · I2S (INMP441 · MAX98357A) · GPIO / PWM · UART</a:t>
+                        <a:t>I2C (MPU6050), I2S (마이크, 스피커), GPIO, PWM, UART</a:t>
                       </a:r>
-                      <a:endParaRPr lang="en-US" sz="1080" dirty="0">
+                      <a:endParaRPr lang="en-US" sz="1250" dirty="0">
                         <a:latin typeface="Arial" charset="0"/>
                         <a:ea typeface="Arial" charset="0"/>
                         <a:cs typeface="Arial" charset="0"/>
                       </a:endParaRPr>
                     </a:p>
                   </a:txBody>
-                  <a:tcPr marL="63500" marR="63500" marT="12700" marB="12700" anchor="ctr">
+                  <a:tcPr marL="88900" marR="88900" marT="38100" marB="38100" anchor="ctr">
                     <a:lnL w="6350" cap="flat" cmpd="sng" algn="ctr">
                       <a:solidFill>
                         <a:srgbClr val="E3E3EA"/>
@@ -5046,7 +2983,7 @@
                   </a:tcPr>
                 </a:tc>
               </a:tr>
-              <a:tr h="347472">
+              <a:tr h="502920">
                 <a:tc>
                   <a:txBody>
                     <a:bodyPr/>
@@ -5056,7 +2993,7 @@
                         <a:buNone/>
                       </a:pPr>
                       <a:r>
-                        <a:rPr lang="en-US" sz="1080" dirty="0">
+                        <a:rPr lang="en-US" sz="1250" dirty="0">
                           <a:solidFill>
                             <a:srgbClr val="1B1B21"/>
                           </a:solidFill>
@@ -5064,16 +3001,16 @@
                           <a:ea typeface="Arial" pitchFamily="34" charset="-122"/>
                           <a:cs typeface="Arial" pitchFamily="34" charset="-120"/>
                         </a:rPr>
-                        <a:t>도구 · 협업</a:t>
+                        <a:t>도구, 협업</a:t>
                       </a:r>
-                      <a:endParaRPr lang="en-US" sz="1080" dirty="0">
+                      <a:endParaRPr lang="en-US" sz="1250" dirty="0">
                         <a:latin typeface="Arial" charset="0"/>
                         <a:ea typeface="Arial" charset="0"/>
                         <a:cs typeface="Arial" charset="0"/>
                       </a:endParaRPr>
                     </a:p>
                   </a:txBody>
-                  <a:tcPr marL="63500" marR="63500" marT="12700" marB="12700" anchor="ctr">
+                  <a:tcPr marL="88900" marR="88900" marT="38100" marB="38100" anchor="ctr">
                     <a:lnL w="6350" cap="flat" cmpd="sng" algn="ctr">
                       <a:solidFill>
                         <a:srgbClr val="E3E3EA"/>
@@ -5124,7 +3061,7 @@
                         <a:buNone/>
                       </a:pPr>
                       <a:r>
-                        <a:rPr lang="en-US" sz="1080" dirty="0">
+                        <a:rPr lang="en-US" sz="1250" dirty="0">
                           <a:solidFill>
                             <a:srgbClr val="1B1B21"/>
                           </a:solidFill>
@@ -5132,16 +3069,16 @@
                           <a:ea typeface="Arial" pitchFamily="34" charset="-122"/>
                           <a:cs typeface="Arial" pitchFamily="34" charset="-120"/>
                         </a:rPr>
-                        <a:t>Git / GitHub 브랜치 전략 · PR 리뷰 · 크로스플랫폼 빌드(macOS ↔ Windows) · QA / 디버깅</a:t>
+                        <a:t>Git, GitHub 브랜치 전략, PR 리뷰, 크로스플랫폼 빌드</a:t>
                       </a:r>
-                      <a:endParaRPr lang="en-US" sz="1080" dirty="0">
+                      <a:endParaRPr lang="en-US" sz="1250" dirty="0">
                         <a:latin typeface="Arial" charset="0"/>
                         <a:ea typeface="Arial" charset="0"/>
                         <a:cs typeface="Arial" charset="0"/>
                       </a:endParaRPr>
                     </a:p>
                   </a:txBody>
-                  <a:tcPr marL="63500" marR="63500" marT="12700" marB="12700" anchor="ctr">
+                  <a:tcPr marL="88900" marR="88900" marT="38100" marB="38100" anchor="ctr">
                     <a:lnL w="6350" cap="flat" cmpd="sng" algn="ctr">
                       <a:solidFill>
                         <a:srgbClr val="E3E3EA"/>
@@ -5184,7 +3121,7 @@
                   </a:tcPr>
                 </a:tc>
               </a:tr>
-              <a:tr h="347472">
+              <a:tr h="502920">
                 <a:tc>
                   <a:txBody>
                     <a:bodyPr/>
@@ -5194,7 +3131,7 @@
                         <a:buNone/>
                       </a:pPr>
                       <a:r>
-                        <a:rPr lang="en-US" sz="1080" b="1" dirty="0">
+                        <a:rPr lang="en-US" sz="1250" b="1" dirty="0">
                           <a:solidFill>
                             <a:srgbClr val="B1462C"/>
                           </a:solidFill>
@@ -5202,16 +3139,16 @@
                           <a:ea typeface="Arial" pitchFamily="34" charset="-122"/>
                           <a:cs typeface="Arial" pitchFamily="34" charset="-120"/>
                         </a:rPr>
-                        <a:t>학습 중 · 관심</a:t>
+                        <a:t>학습 중</a:t>
                       </a:r>
-                      <a:endParaRPr lang="en-US" sz="1080" dirty="0">
+                      <a:endParaRPr lang="en-US" sz="1250" dirty="0">
                         <a:latin typeface="Arial" charset="0"/>
                         <a:ea typeface="Arial" charset="0"/>
                         <a:cs typeface="Arial" charset="0"/>
                       </a:endParaRPr>
                     </a:p>
                   </a:txBody>
-                  <a:tcPr marL="63500" marR="63500" marT="12700" marB="12700" anchor="ctr">
+                  <a:tcPr marL="88900" marR="88900" marT="38100" marB="38100" anchor="ctr">
                     <a:lnL w="6350" cap="flat" cmpd="sng" algn="ctr">
                       <a:solidFill>
                         <a:srgbClr val="E3E3EA"/>
@@ -5262,7 +3199,7 @@
                         <a:buNone/>
                       </a:pPr>
                       <a:r>
-                        <a:rPr lang="en-US" sz="1080" dirty="0">
+                        <a:rPr lang="en-US" sz="1250" dirty="0">
                           <a:solidFill>
                             <a:srgbClr val="1B1B21"/>
                           </a:solidFill>
@@ -5270,16 +3207,16 @@
                           <a:ea typeface="Arial" pitchFamily="34" charset="-122"/>
                           <a:cs typeface="Arial" pitchFamily="34" charset="-120"/>
                         </a:rPr>
-                        <a:t>ROS2 · 로봇 제어(기구학 · PID) · 자료구조 · 알고리즘 심화 · 임베디드 저수준 원리</a:t>
+                        <a:t>ROS2, 로봇 제어, 자료구조와 알고리즘, 임베디드 저수준 원리</a:t>
                       </a:r>
-                      <a:endParaRPr lang="en-US" sz="1080" dirty="0">
+                      <a:endParaRPr lang="en-US" sz="1250" dirty="0">
                         <a:latin typeface="Arial" charset="0"/>
                         <a:ea typeface="Arial" charset="0"/>
                         <a:cs typeface="Arial" charset="0"/>
                       </a:endParaRPr>
                     </a:p>
                   </a:txBody>
-                  <a:tcPr marL="63500" marR="63500" marT="12700" marB="12700" anchor="ctr">
+                  <a:tcPr marL="88900" marR="88900" marT="38100" marB="38100" anchor="ctr">
                     <a:lnL w="6350" cap="flat" cmpd="sng" algn="ctr">
                       <a:solidFill>
                         <a:srgbClr val="E3E3EA"/>
@@ -5328,48 +3265,14 @@
       </p:graphicFrame>
       <p:sp>
         <p:nvSpPr>
-          <p:cNvPr id="5" name="Shape 2"/>
+          <p:cNvPr id="5" name="Text 2"/>
           <p:cNvSpPr/>
           <p:nvPr/>
         </p:nvSpPr>
         <p:spPr>
           <a:xfrm>
-            <a:off x="640080" y="4983480"/>
-            <a:ext cx="3422904" cy="1371600"/>
-          </a:xfrm>
-          <a:prstGeom prst="roundRect">
-            <a:avLst>
-              <a:gd name="adj" fmla="val 6000"/>
-            </a:avLst>
-          </a:prstGeom>
-          <a:solidFill>
-            <a:srgbClr val="F7F7FA"/>
-          </a:solidFill>
-          <a:ln w="12700">
-            <a:solidFill>
-              <a:srgbClr val="E3E3EA"/>
-            </a:solidFill>
-            <a:prstDash val="solid"/>
-          </a:ln>
-          <a:effectLst>
-            <a:outerShdw sx="100000" sy="100000" kx="0" ky="0" algn="bl" rotWithShape="0" blurRad="76200" dist="25400" dir="5400000">
-              <a:srgbClr val="000000">
-                <a:alpha val="10000"/>
-              </a:srgbClr>
-            </a:outerShdw>
-          </a:effectLst>
-        </p:spPr>
-      </p:sp>
-      <p:sp>
-        <p:nvSpPr>
-          <p:cNvPr id="6" name="Text 3"/>
-          <p:cNvSpPr/>
-          <p:nvPr/>
-        </p:nvSpPr>
-        <p:spPr>
-          <a:xfrm>
-            <a:off x="868680" y="5148072"/>
-            <a:ext cx="2965704" cy="365760"/>
+            <a:off x="640080" y="5989320"/>
+            <a:ext cx="10908792" cy="365760"/>
           </a:xfrm>
           <a:prstGeom prst="rect">
             <a:avLst/>
@@ -5385,46 +3288,7 @@
               <a:buNone/>
             </a:pPr>
             <a:r>
-              <a:rPr lang="en-US" sz="1300" b="1" dirty="0">
-                <a:solidFill>
-                  <a:srgbClr val="33386E"/>
-                </a:solidFill>
-                <a:latin typeface="Arial" pitchFamily="34" charset="0"/>
-                <a:ea typeface="Arial" pitchFamily="34" charset="-122"/>
-                <a:cs typeface="Arial" pitchFamily="34" charset="-120"/>
-              </a:rPr>
-              <a:t>깊이 — 게임 아키텍처</a:t>
-            </a:r>
-            <a:endParaRPr lang="en-US" sz="1300" dirty="0"/>
-          </a:p>
-        </p:txBody>
-      </p:sp>
-      <p:sp>
-        <p:nvSpPr>
-          <p:cNvPr id="7" name="Text 4"/>
-          <p:cNvSpPr/>
-          <p:nvPr/>
-        </p:nvSpPr>
-        <p:spPr>
-          <a:xfrm>
-            <a:off x="868680" y="5532120"/>
-            <a:ext cx="2965704" cy="777240"/>
-          </a:xfrm>
-          <a:prstGeom prst="rect">
-            <a:avLst/>
-          </a:prstGeom>
-          <a:noFill/>
-          <a:ln/>
-        </p:spPr>
-        <p:txBody>
-          <a:bodyPr wrap="square" lIns="0" tIns="0" rIns="0" bIns="0" rtlCol="0" anchor="ctr"/>
-          <a:lstStyle/>
-          <a:p>
-            <a:pPr indent="0" marL="0">
-              <a:buNone/>
-            </a:pPr>
-            <a:r>
-              <a:rPr lang="en-US" sz="1100" dirty="0">
+              <a:rPr lang="en-US" sz="1150" i="1" dirty="0">
                 <a:solidFill>
                   <a:srgbClr val="565663"/>
                 </a:solidFill>
@@ -5432,233 +3296,9 @@
                 <a:ea typeface="Arial" pitchFamily="34" charset="-122"/>
                 <a:cs typeface="Arial" pitchFamily="34" charset="-120"/>
               </a:rPr>
-              <a:t>약 19,500줄 전투 시스템을 partial class·제네릭·데이터 주도로 설계. 대규모 코드를 나누는 힘.</a:t>
+              <a:t>집중 영역은 게임 클라이언트 아키텍처(Unity, C#)와 임베디드 하드웨어 브링업(ESP-IDF, C)입니다.</a:t>
             </a:r>
-            <a:endParaRPr lang="en-US" sz="1100" dirty="0"/>
-          </a:p>
-        </p:txBody>
-      </p:sp>
-      <p:sp>
-        <p:nvSpPr>
-          <p:cNvPr id="8" name="Shape 5"/>
-          <p:cNvSpPr/>
-          <p:nvPr/>
-        </p:nvSpPr>
-        <p:spPr>
-          <a:xfrm>
-            <a:off x="4383024" y="4983480"/>
-            <a:ext cx="3422904" cy="1371600"/>
-          </a:xfrm>
-          <a:prstGeom prst="roundRect">
-            <a:avLst>
-              <a:gd name="adj" fmla="val 6000"/>
-            </a:avLst>
-          </a:prstGeom>
-          <a:solidFill>
-            <a:srgbClr val="F7F7FA"/>
-          </a:solidFill>
-          <a:ln w="12700">
-            <a:solidFill>
-              <a:srgbClr val="E3E3EA"/>
-            </a:solidFill>
-            <a:prstDash val="solid"/>
-          </a:ln>
-          <a:effectLst>
-            <a:outerShdw sx="100000" sy="100000" kx="0" ky="0" algn="bl" rotWithShape="0" blurRad="76200" dist="25400" dir="5400000">
-              <a:srgbClr val="000000">
-                <a:alpha val="10000"/>
-              </a:srgbClr>
-            </a:outerShdw>
-          </a:effectLst>
-        </p:spPr>
-      </p:sp>
-      <p:sp>
-        <p:nvSpPr>
-          <p:cNvPr id="9" name="Text 6"/>
-          <p:cNvSpPr/>
-          <p:nvPr/>
-        </p:nvSpPr>
-        <p:spPr>
-          <a:xfrm>
-            <a:off x="4611624" y="5148072"/>
-            <a:ext cx="2965704" cy="365760"/>
-          </a:xfrm>
-          <a:prstGeom prst="rect">
-            <a:avLst/>
-          </a:prstGeom>
-          <a:noFill/>
-          <a:ln/>
-        </p:spPr>
-        <p:txBody>
-          <a:bodyPr wrap="square" lIns="0" tIns="0" rIns="0" bIns="0" rtlCol="0" anchor="ctr"/>
-          <a:lstStyle/>
-          <a:p>
-            <a:pPr indent="0" marL="0">
-              <a:buNone/>
-            </a:pPr>
-            <a:r>
-              <a:rPr lang="en-US" sz="1300" b="1" dirty="0">
-                <a:solidFill>
-                  <a:srgbClr val="B1462C"/>
-                </a:solidFill>
-                <a:latin typeface="Arial" pitchFamily="34" charset="0"/>
-                <a:ea typeface="Arial" pitchFamily="34" charset="-122"/>
-                <a:cs typeface="Arial" pitchFamily="34" charset="-120"/>
-              </a:rPr>
-              <a:t>폭 — 하드웨어 브링업</a:t>
-            </a:r>
-            <a:endParaRPr lang="en-US" sz="1300" dirty="0"/>
-          </a:p>
-        </p:txBody>
-      </p:sp>
-      <p:sp>
-        <p:nvSpPr>
-          <p:cNvPr id="10" name="Text 7"/>
-          <p:cNvSpPr/>
-          <p:nvPr/>
-        </p:nvSpPr>
-        <p:spPr>
-          <a:xfrm>
-            <a:off x="4611624" y="5532120"/>
-            <a:ext cx="2965704" cy="777240"/>
-          </a:xfrm>
-          <a:prstGeom prst="rect">
-            <a:avLst/>
-          </a:prstGeom>
-          <a:noFill/>
-          <a:ln/>
-        </p:spPr>
-        <p:txBody>
-          <a:bodyPr wrap="square" lIns="0" tIns="0" rIns="0" bIns="0" rtlCol="0" anchor="ctr"/>
-          <a:lstStyle/>
-          <a:p>
-            <a:pPr indent="0" marL="0">
-              <a:buNone/>
-            </a:pPr>
-            <a:r>
-              <a:rPr lang="en-US" sz="1100" dirty="0">
-                <a:solidFill>
-                  <a:srgbClr val="565663"/>
-                </a:solidFill>
-                <a:latin typeface="Arial" pitchFamily="34" charset="0"/>
-                <a:ea typeface="Arial" pitchFamily="34" charset="-122"/>
-                <a:cs typeface="Arial" pitchFamily="34" charset="-120"/>
-              </a:rPr>
-              <a:t>I2S 오디오·MPU6050·AI 음성을 베어메탈 C로 통합. 불필요한 서보/보행은 과감히 제거.</a:t>
-            </a:r>
-            <a:endParaRPr lang="en-US" sz="1100" dirty="0"/>
-          </a:p>
-        </p:txBody>
-      </p:sp>
-      <p:sp>
-        <p:nvSpPr>
-          <p:cNvPr id="11" name="Shape 8"/>
-          <p:cNvSpPr/>
-          <p:nvPr/>
-        </p:nvSpPr>
-        <p:spPr>
-          <a:xfrm>
-            <a:off x="8125968" y="4983480"/>
-            <a:ext cx="3422904" cy="1371600"/>
-          </a:xfrm>
-          <a:prstGeom prst="roundRect">
-            <a:avLst>
-              <a:gd name="adj" fmla="val 6000"/>
-            </a:avLst>
-          </a:prstGeom>
-          <a:solidFill>
-            <a:srgbClr val="F7F7FA"/>
-          </a:solidFill>
-          <a:ln w="12700">
-            <a:solidFill>
-              <a:srgbClr val="E3E3EA"/>
-            </a:solidFill>
-            <a:prstDash val="solid"/>
-          </a:ln>
-          <a:effectLst>
-            <a:outerShdw sx="100000" sy="100000" kx="0" ky="0" algn="bl" rotWithShape="0" blurRad="76200" dist="25400" dir="5400000">
-              <a:srgbClr val="000000">
-                <a:alpha val="10000"/>
-              </a:srgbClr>
-            </a:outerShdw>
-          </a:effectLst>
-        </p:spPr>
-      </p:sp>
-      <p:sp>
-        <p:nvSpPr>
-          <p:cNvPr id="12" name="Text 9"/>
-          <p:cNvSpPr/>
-          <p:nvPr/>
-        </p:nvSpPr>
-        <p:spPr>
-          <a:xfrm>
-            <a:off x="8354568" y="5148072"/>
-            <a:ext cx="2965704" cy="365760"/>
-          </a:xfrm>
-          <a:prstGeom prst="rect">
-            <a:avLst/>
-          </a:prstGeom>
-          <a:noFill/>
-          <a:ln/>
-        </p:spPr>
-        <p:txBody>
-          <a:bodyPr wrap="square" lIns="0" tIns="0" rIns="0" bIns="0" rtlCol="0" anchor="ctr"/>
-          <a:lstStyle/>
-          <a:p>
-            <a:pPr indent="0" marL="0">
-              <a:buNone/>
-            </a:pPr>
-            <a:r>
-              <a:rPr lang="en-US" sz="1300" b="1" dirty="0">
-                <a:solidFill>
-                  <a:srgbClr val="1F6F6B"/>
-                </a:solidFill>
-                <a:latin typeface="Arial" pitchFamily="34" charset="0"/>
-                <a:ea typeface="Arial" pitchFamily="34" charset="-122"/>
-                <a:cs typeface="Arial" pitchFamily="34" charset="-120"/>
-              </a:rPr>
-              <a:t>기초 — 웹 · CS 펀더멘털</a:t>
-            </a:r>
-            <a:endParaRPr lang="en-US" sz="1300" dirty="0"/>
-          </a:p>
-        </p:txBody>
-      </p:sp>
-      <p:sp>
-        <p:nvSpPr>
-          <p:cNvPr id="13" name="Text 10"/>
-          <p:cNvSpPr/>
-          <p:nvPr/>
-        </p:nvSpPr>
-        <p:spPr>
-          <a:xfrm>
-            <a:off x="8354568" y="5532120"/>
-            <a:ext cx="2965704" cy="777240"/>
-          </a:xfrm>
-          <a:prstGeom prst="rect">
-            <a:avLst/>
-          </a:prstGeom>
-          <a:noFill/>
-          <a:ln/>
-        </p:spPr>
-        <p:txBody>
-          <a:bodyPr wrap="square" lIns="0" tIns="0" rIns="0" bIns="0" rtlCol="0" anchor="ctr"/>
-          <a:lstStyle/>
-          <a:p>
-            <a:pPr indent="0" marL="0">
-              <a:buNone/>
-            </a:pPr>
-            <a:r>
-              <a:rPr lang="en-US" sz="1100" dirty="0">
-                <a:solidFill>
-                  <a:srgbClr val="565663"/>
-                </a:solidFill>
-                <a:latin typeface="Arial" pitchFamily="34" charset="0"/>
-                <a:ea typeface="Arial" pitchFamily="34" charset="-122"/>
-                <a:cs typeface="Arial" pitchFamily="34" charset="-120"/>
-              </a:rPr>
-              <a:t>JS 게임 로직·PHP 회원 인증·로봇 기구학 등 분야를 가리지 않는 기본기.</a:t>
-            </a:r>
-            <a:endParaRPr lang="en-US" sz="1100" dirty="0"/>
+            <a:endParaRPr lang="en-US" sz="1150" dirty="0"/>
           </a:p>
         </p:txBody>
       </p:sp>
@@ -5702,7 +3342,7 @@
         </p:nvSpPr>
         <p:spPr>
           <a:xfrm>
-            <a:off x="640080" y="384048"/>
+            <a:off x="640080" y="411480"/>
             <a:ext cx="10908792" cy="566928"/>
           </a:xfrm>
           <a:prstGeom prst="rect">
@@ -5727,7 +3367,7 @@
                 <a:ea typeface="Arial" pitchFamily="34" charset="-122"/>
                 <a:cs typeface="Arial" pitchFamily="34" charset="-120"/>
               </a:rPr>
-              <a:t>대표 프로젝트 한눈에</a:t>
+              <a:t>대표 프로젝트</a:t>
             </a:r>
             <a:endParaRPr lang="en-US" sz="2600" dirty="0"/>
           </a:p>
@@ -5741,7 +3381,7 @@
         </p:nvSpPr>
         <p:spPr>
           <a:xfrm>
-            <a:off x="640080" y="969264"/>
+            <a:off x="640080" y="987552"/>
             <a:ext cx="10908792" cy="384048"/>
           </a:xfrm>
           <a:prstGeom prst="rect">
@@ -5766,7 +3406,7 @@
                 <a:ea typeface="Arial" pitchFamily="34" charset="-122"/>
                 <a:cs typeface="Arial" pitchFamily="34" charset="-120"/>
               </a:rPr>
-              <a:t>모두 GitHub 공개 — 게임 · 임베디드 · 로보틱스 · 웹</a:t>
+              <a:t>모두 GitHub 공개</a:t>
             </a:r>
             <a:endParaRPr lang="en-US" sz="1250" dirty="0"/>
           </a:p>
@@ -5795,12 +3435,12 @@
             <a:tbl>
               <a:tblPr/>
               <a:tblGrid>
-                <a:gridCol w="2926080"/>
-                <a:gridCol w="2103120"/>
-                <a:gridCol w="4846320"/>
-                <a:gridCol w="1920240"/>
+                <a:gridCol w="3017520"/>
+                <a:gridCol w="2194560"/>
+                <a:gridCol w="4754880"/>
+                <a:gridCol w="1828800"/>
               </a:tblGrid>
-              <a:tr h="566928">
+              <a:tr h="594360">
                 <a:tc>
                   <a:txBody>
                     <a:bodyPr/>
@@ -5810,7 +3450,7 @@
                         <a:buNone/>
                       </a:pPr>
                       <a:r>
-                        <a:rPr lang="en-US" sz="1200" b="1" dirty="0">
+                        <a:rPr lang="en-US" sz="1250" b="1" dirty="0">
                           <a:solidFill>
                             <a:srgbClr val="FFFFFF"/>
                           </a:solidFill>
@@ -5820,7 +3460,7 @@
                         </a:rPr>
                         <a:t>프로젝트</a:t>
                       </a:r>
-                      <a:endParaRPr lang="en-US" sz="1200" dirty="0">
+                      <a:endParaRPr lang="en-US" sz="1250" dirty="0">
                         <a:latin typeface="Arial" charset="0"/>
                         <a:ea typeface="Arial" charset="0"/>
                         <a:cs typeface="Arial" charset="0"/>
@@ -5878,7 +3518,7 @@
                         <a:buNone/>
                       </a:pPr>
                       <a:r>
-                        <a:rPr lang="en-US" sz="1200" b="1" dirty="0">
+                        <a:rPr lang="en-US" sz="1250" b="1" dirty="0">
                           <a:solidFill>
                             <a:srgbClr val="FFFFFF"/>
                           </a:solidFill>
@@ -5888,7 +3528,7 @@
                         </a:rPr>
                         <a:t>유형</a:t>
                       </a:r>
-                      <a:endParaRPr lang="en-US" sz="1200" dirty="0">
+                      <a:endParaRPr lang="en-US" sz="1250" dirty="0">
                         <a:latin typeface="Arial" charset="0"/>
                         <a:ea typeface="Arial" charset="0"/>
                         <a:cs typeface="Arial" charset="0"/>
@@ -5946,7 +3586,7 @@
                         <a:buNone/>
                       </a:pPr>
                       <a:r>
-                        <a:rPr lang="en-US" sz="1200" b="1" dirty="0">
+                        <a:rPr lang="en-US" sz="1250" b="1" dirty="0">
                           <a:solidFill>
                             <a:srgbClr val="FFFFFF"/>
                           </a:solidFill>
@@ -5954,9 +3594,9 @@
                           <a:ea typeface="Arial" pitchFamily="34" charset="-122"/>
                           <a:cs typeface="Arial" pitchFamily="34" charset="-120"/>
                         </a:rPr>
-                        <a:t>스택 · 핵심</a:t>
+                        <a:t>스택과 핵심</a:t>
                       </a:r>
-                      <a:endParaRPr lang="en-US" sz="1200" dirty="0">
+                      <a:endParaRPr lang="en-US" sz="1250" dirty="0">
                         <a:latin typeface="Arial" charset="0"/>
                         <a:ea typeface="Arial" charset="0"/>
                         <a:cs typeface="Arial" charset="0"/>
@@ -6014,7 +3654,7 @@
                         <a:buNone/>
                       </a:pPr>
                       <a:r>
-                        <a:rPr lang="en-US" sz="1200" b="1" dirty="0">
+                        <a:rPr lang="en-US" sz="1250" b="1" dirty="0">
                           <a:solidFill>
                             <a:srgbClr val="FFFFFF"/>
                           </a:solidFill>
@@ -6024,7 +3664,7 @@
                         </a:rPr>
                         <a:t>역할</a:t>
                       </a:r>
-                      <a:endParaRPr lang="en-US" sz="1200" dirty="0">
+                      <a:endParaRPr lang="en-US" sz="1250" dirty="0">
                         <a:latin typeface="Arial" charset="0"/>
                         <a:ea typeface="Arial" charset="0"/>
                         <a:cs typeface="Arial" charset="0"/>
@@ -6074,7 +3714,7 @@
                   </a:tcPr>
                 </a:tc>
               </a:tr>
-              <a:tr h="566928">
+              <a:tr h="594360">
                 <a:tc>
                   <a:txBody>
                     <a:bodyPr/>
@@ -6084,7 +3724,7 @@
                         <a:buNone/>
                       </a:pPr>
                       <a:r>
-                        <a:rPr lang="en-US" sz="1200" b="1" dirty="0">
+                        <a:rPr lang="en-US" sz="1250" b="1" dirty="0">
                           <a:solidFill>
                             <a:srgbClr val="1B1B21"/>
                           </a:solidFill>
@@ -6092,9 +3732,9 @@
                           <a:ea typeface="Arial" pitchFamily="34" charset="-122"/>
                           <a:cs typeface="Arial" pitchFamily="34" charset="-120"/>
                         </a:rPr>
-                        <a:t>괴이탐사국: INSPECTOR</a:t>
+                        <a:t>괴이탐사국 INSPECTOR</a:t>
                       </a:r>
-                      <a:endParaRPr lang="en-US" sz="1200" dirty="0">
+                      <a:endParaRPr lang="en-US" sz="1250" dirty="0">
                         <a:latin typeface="Arial" charset="0"/>
                         <a:ea typeface="Arial" charset="0"/>
                         <a:cs typeface="Arial" charset="0"/>
@@ -6149,7 +3789,7 @@
                         <a:buNone/>
                       </a:pPr>
                       <a:r>
-                        <a:rPr lang="en-US" sz="1200" dirty="0">
+                        <a:rPr lang="en-US" sz="1250" dirty="0">
                           <a:solidFill>
                             <a:srgbClr val="1B1B21"/>
                           </a:solidFill>
@@ -6157,9 +3797,9 @@
                           <a:ea typeface="Arial" pitchFamily="34" charset="-122"/>
                           <a:cs typeface="Arial" pitchFamily="34" charset="-120"/>
                         </a:rPr>
-                        <a:t>팀 · 캡스톤 게임</a:t>
+                        <a:t>팀 캡스톤 게임</a:t>
                       </a:r>
-                      <a:endParaRPr lang="en-US" sz="1200" dirty="0">
+                      <a:endParaRPr lang="en-US" sz="1250" dirty="0">
                         <a:latin typeface="Arial" charset="0"/>
                         <a:ea typeface="Arial" charset="0"/>
                         <a:cs typeface="Arial" charset="0"/>
@@ -6214,7 +3854,7 @@
                         <a:buNone/>
                       </a:pPr>
                       <a:r>
-                        <a:rPr lang="en-US" sz="1200" dirty="0">
+                        <a:rPr lang="en-US" sz="1250" dirty="0">
                           <a:solidFill>
                             <a:srgbClr val="1B1B21"/>
                           </a:solidFill>
@@ -6222,9 +3862,9 @@
                           <a:ea typeface="Arial" pitchFamily="34" charset="-122"/>
                           <a:cs typeface="Arial" pitchFamily="34" charset="-120"/>
                         </a:rPr>
-                        <a:t>Unity · C# — 전투 엔진 / 데이터 주도 아키텍처</a:t>
+                        <a:t>Unity, C#, 전투 엔진과 데이터 주도 설계</a:t>
                       </a:r>
-                      <a:endParaRPr lang="en-US" sz="1200" dirty="0">
+                      <a:endParaRPr lang="en-US" sz="1250" dirty="0">
                         <a:latin typeface="Arial" charset="0"/>
                         <a:ea typeface="Arial" charset="0"/>
                         <a:cs typeface="Arial" charset="0"/>
@@ -6279,7 +3919,7 @@
                         <a:buNone/>
                       </a:pPr>
                       <a:r>
-                        <a:rPr lang="en-US" sz="1200" dirty="0">
+                        <a:rPr lang="en-US" sz="1250" dirty="0">
                           <a:solidFill>
                             <a:srgbClr val="1B1B21"/>
                           </a:solidFill>
@@ -6287,9 +3927,9 @@
                           <a:ea typeface="Arial" pitchFamily="34" charset="-122"/>
                           <a:cs typeface="Arial" pitchFamily="34" charset="-120"/>
                         </a:rPr>
-                        <a:t>클라이언트 개발 (단독)</a:t>
+                        <a:t>클라이언트 개발</a:t>
                       </a:r>
-                      <a:endParaRPr lang="en-US" sz="1200" dirty="0">
+                      <a:endParaRPr lang="en-US" sz="1250" dirty="0">
                         <a:latin typeface="Arial" charset="0"/>
                         <a:ea typeface="Arial" charset="0"/>
                         <a:cs typeface="Arial" charset="0"/>
@@ -6336,7 +3976,7 @@
                   </a:tcPr>
                 </a:tc>
               </a:tr>
-              <a:tr h="566928">
+              <a:tr h="594360">
                 <a:tc>
                   <a:txBody>
                     <a:bodyPr/>
@@ -6346,7 +3986,7 @@
                         <a:buNone/>
                       </a:pPr>
                       <a:r>
-                        <a:rPr lang="en-US" sz="1200" b="1" dirty="0">
+                        <a:rPr lang="en-US" sz="1250" b="1" dirty="0">
                           <a:solidFill>
                             <a:srgbClr val="1B1B21"/>
                           </a:solidFill>
@@ -6356,7 +3996,7 @@
                         </a:rPr>
                         <a:t>바른자세 코치봇</a:t>
                       </a:r>
-                      <a:endParaRPr lang="en-US" sz="1200" dirty="0">
+                      <a:endParaRPr lang="en-US" sz="1250" dirty="0">
                         <a:latin typeface="Arial" charset="0"/>
                         <a:ea typeface="Arial" charset="0"/>
                         <a:cs typeface="Arial" charset="0"/>
@@ -6411,7 +4051,7 @@
                         <a:buNone/>
                       </a:pPr>
                       <a:r>
-                        <a:rPr lang="en-US" sz="1200" dirty="0">
+                        <a:rPr lang="en-US" sz="1250" dirty="0">
                           <a:solidFill>
                             <a:srgbClr val="1B1B21"/>
                           </a:solidFill>
@@ -6421,7 +4061,7 @@
                         </a:rPr>
                         <a:t>임베디드 AI 로봇</a:t>
                       </a:r>
-                      <a:endParaRPr lang="en-US" sz="1200" dirty="0">
+                      <a:endParaRPr lang="en-US" sz="1250" dirty="0">
                         <a:latin typeface="Arial" charset="0"/>
                         <a:ea typeface="Arial" charset="0"/>
                         <a:cs typeface="Arial" charset="0"/>
@@ -6476,7 +4116,7 @@
                         <a:buNone/>
                       </a:pPr>
                       <a:r>
-                        <a:rPr lang="en-US" sz="1200" dirty="0">
+                        <a:rPr lang="en-US" sz="1250" dirty="0">
                           <a:solidFill>
                             <a:srgbClr val="1B1B21"/>
                           </a:solidFill>
@@ -6484,9 +4124,9 @@
                           <a:ea typeface="Arial" pitchFamily="34" charset="-122"/>
                           <a:cs typeface="Arial" pitchFamily="34" charset="-120"/>
                         </a:rPr>
-                        <a:t>ESP32-S3 · C — MPU6050 자세 감지 / AI 음성</a:t>
+                        <a:t>ESP32, C, 자세 감지와 AI 음성</a:t>
                       </a:r>
-                      <a:endParaRPr lang="en-US" sz="1200" dirty="0">
+                      <a:endParaRPr lang="en-US" sz="1250" dirty="0">
                         <a:latin typeface="Arial" charset="0"/>
                         <a:ea typeface="Arial" charset="0"/>
                         <a:cs typeface="Arial" charset="0"/>
@@ -6541,7 +4181,7 @@
                         <a:buNone/>
                       </a:pPr>
                       <a:r>
-                        <a:rPr lang="en-US" sz="1200" dirty="0">
+                        <a:rPr lang="en-US" sz="1250" dirty="0">
                           <a:solidFill>
                             <a:srgbClr val="1B1B21"/>
                           </a:solidFill>
@@ -6549,9 +4189,9 @@
                           <a:ea typeface="Arial" pitchFamily="34" charset="-122"/>
                           <a:cs typeface="Arial" pitchFamily="34" charset="-120"/>
                         </a:rPr>
-                        <a:t>펌웨어 · 브링업</a:t>
+                        <a:t>펌웨어, 브링업</a:t>
                       </a:r>
-                      <a:endParaRPr lang="en-US" sz="1200" dirty="0">
+                      <a:endParaRPr lang="en-US" sz="1250" dirty="0">
                         <a:latin typeface="Arial" charset="0"/>
                         <a:ea typeface="Arial" charset="0"/>
                         <a:cs typeface="Arial" charset="0"/>
@@ -6598,7 +4238,7 @@
                   </a:tcPr>
                 </a:tc>
               </a:tr>
-              <a:tr h="566928">
+              <a:tr h="594360">
                 <a:tc>
                   <a:txBody>
                     <a:bodyPr/>
@@ -6608,7 +4248,7 @@
                         <a:buNone/>
                       </a:pPr>
                       <a:r>
-                        <a:rPr lang="en-US" sz="1200" b="1" dirty="0">
+                        <a:rPr lang="en-US" sz="1250" b="1" dirty="0">
                           <a:solidFill>
                             <a:srgbClr val="1B1B21"/>
                           </a:solidFill>
@@ -6616,9 +4256,9 @@
                           <a:ea typeface="Arial" pitchFamily="34" charset="-122"/>
                           <a:cs typeface="Arial" pitchFamily="34" charset="-120"/>
                         </a:rPr>
-                        <a:t>운반 로봇(AGV) 설계</a:t>
+                        <a:t>운반 로봇 설계</a:t>
                       </a:r>
-                      <a:endParaRPr lang="en-US" sz="1200" dirty="0">
+                      <a:endParaRPr lang="en-US" sz="1250" dirty="0">
                         <a:latin typeface="Arial" charset="0"/>
                         <a:ea typeface="Arial" charset="0"/>
                         <a:cs typeface="Arial" charset="0"/>
@@ -6673,7 +4313,7 @@
                         <a:buNone/>
                       </a:pPr>
                       <a:r>
-                        <a:rPr lang="en-US" sz="1200" dirty="0">
+                        <a:rPr lang="en-US" sz="1250" dirty="0">
                           <a:solidFill>
                             <a:srgbClr val="1B1B21"/>
                           </a:solidFill>
@@ -6681,9 +4321,9 @@
                           <a:ea typeface="Arial" pitchFamily="34" charset="-122"/>
                           <a:cs typeface="Arial" pitchFamily="34" charset="-120"/>
                         </a:rPr>
-                        <a:t>로보틱스 학습(팀)</a:t>
+                        <a:t>로보틱스 학습</a:t>
                       </a:r>
-                      <a:endParaRPr lang="en-US" sz="1200" dirty="0">
+                      <a:endParaRPr lang="en-US" sz="1250" dirty="0">
                         <a:latin typeface="Arial" charset="0"/>
                         <a:ea typeface="Arial" charset="0"/>
                         <a:cs typeface="Arial" charset="0"/>
@@ -6738,7 +4378,7 @@
                         <a:buNone/>
                       </a:pPr>
                       <a:r>
-                        <a:rPr lang="en-US" sz="1200" dirty="0">
+                        <a:rPr lang="en-US" sz="1250" dirty="0">
                           <a:solidFill>
                             <a:srgbClr val="1B1B21"/>
                           </a:solidFill>
@@ -6746,9 +4386,9 @@
                           <a:ea typeface="Arial" pitchFamily="34" charset="-122"/>
                           <a:cs typeface="Arial" pitchFamily="34" charset="-120"/>
                         </a:rPr>
-                        <a:t>문제정의 · 차동구동 조사 (ROS2 학습 중)</a:t>
+                        <a:t>문제정의와 차동구동 조사 (ROS2 학습 중)</a:t>
                       </a:r>
-                      <a:endParaRPr lang="en-US" sz="1200" dirty="0">
+                      <a:endParaRPr lang="en-US" sz="1250" dirty="0">
                         <a:latin typeface="Arial" charset="0"/>
                         <a:ea typeface="Arial" charset="0"/>
                         <a:cs typeface="Arial" charset="0"/>
@@ -6803,7 +4443,7 @@
                         <a:buNone/>
                       </a:pPr>
                       <a:r>
-                        <a:rPr lang="en-US" sz="1200" dirty="0">
+                        <a:rPr lang="en-US" sz="1250" dirty="0">
                           <a:solidFill>
                             <a:srgbClr val="1B1B21"/>
                           </a:solidFill>
@@ -6811,9 +4451,9 @@
                           <a:ea typeface="Arial" pitchFamily="34" charset="-122"/>
                           <a:cs typeface="Arial" pitchFamily="34" charset="-120"/>
                         </a:rPr>
-                        <a:t>문제정의 · 조사</a:t>
+                        <a:t>문제정의, 조사</a:t>
                       </a:r>
-                      <a:endParaRPr lang="en-US" sz="1200" dirty="0">
+                      <a:endParaRPr lang="en-US" sz="1250" dirty="0">
                         <a:latin typeface="Arial" charset="0"/>
                         <a:ea typeface="Arial" charset="0"/>
                         <a:cs typeface="Arial" charset="0"/>
@@ -6860,7 +4500,7 @@
                   </a:tcPr>
                 </a:tc>
               </a:tr>
-              <a:tr h="566928">
+              <a:tr h="594360">
                 <a:tc>
                   <a:txBody>
                     <a:bodyPr/>
@@ -6870,7 +4510,7 @@
                         <a:buNone/>
                       </a:pPr>
                       <a:r>
-                        <a:rPr lang="en-US" sz="1200" b="1" dirty="0">
+                        <a:rPr lang="en-US" sz="1250" b="1" dirty="0">
                           <a:solidFill>
                             <a:srgbClr val="1B1B21"/>
                           </a:solidFill>
@@ -6880,7 +4520,7 @@
                         </a:rPr>
                         <a:t>꼬들 (make_world)</a:t>
                       </a:r>
-                      <a:endParaRPr lang="en-US" sz="1200" dirty="0">
+                      <a:endParaRPr lang="en-US" sz="1250" dirty="0">
                         <a:latin typeface="Arial" charset="0"/>
                         <a:ea typeface="Arial" charset="0"/>
                         <a:cs typeface="Arial" charset="0"/>
@@ -6935,7 +4575,7 @@
                         <a:buNone/>
                       </a:pPr>
                       <a:r>
-                        <a:rPr lang="en-US" sz="1200" dirty="0">
+                        <a:rPr lang="en-US" sz="1250" dirty="0">
                           <a:solidFill>
                             <a:srgbClr val="1B1B21"/>
                           </a:solidFill>
@@ -6945,7 +4585,7 @@
                         </a:rPr>
                         <a:t>웹 게임</a:t>
                       </a:r>
-                      <a:endParaRPr lang="en-US" sz="1200" dirty="0">
+                      <a:endParaRPr lang="en-US" sz="1250" dirty="0">
                         <a:latin typeface="Arial" charset="0"/>
                         <a:ea typeface="Arial" charset="0"/>
                         <a:cs typeface="Arial" charset="0"/>
@@ -7000,7 +4640,7 @@
                         <a:buNone/>
                       </a:pPr>
                       <a:r>
-                        <a:rPr lang="en-US" sz="1200" dirty="0">
+                        <a:rPr lang="en-US" sz="1250" dirty="0">
                           <a:solidFill>
                             <a:srgbClr val="1B1B21"/>
                           </a:solidFill>
@@ -7008,9 +4648,9 @@
                           <a:ea typeface="Arial" pitchFamily="34" charset="-122"/>
                           <a:cs typeface="Arial" pitchFamily="34" charset="-120"/>
                         </a:rPr>
-                        <a:t>JavaScript — 한글 Wordle 게임 로직 / 단어 DB</a:t>
+                        <a:t>JavaScript, 한글 Wordle 게임</a:t>
                       </a:r>
-                      <a:endParaRPr lang="en-US" sz="1200" dirty="0">
+                      <a:endParaRPr lang="en-US" sz="1250" dirty="0">
                         <a:latin typeface="Arial" charset="0"/>
                         <a:ea typeface="Arial" charset="0"/>
                         <a:cs typeface="Arial" charset="0"/>
@@ -7065,7 +4705,7 @@
                         <a:buNone/>
                       </a:pPr>
                       <a:r>
-                        <a:rPr lang="en-US" sz="1200" dirty="0">
+                        <a:rPr lang="en-US" sz="1250" dirty="0">
                           <a:solidFill>
                             <a:srgbClr val="1B1B21"/>
                           </a:solidFill>
@@ -7075,7 +4715,7 @@
                         </a:rPr>
                         <a:t>개인 구현</a:t>
                       </a:r>
-                      <a:endParaRPr lang="en-US" sz="1200" dirty="0">
+                      <a:endParaRPr lang="en-US" sz="1250" dirty="0">
                         <a:latin typeface="Arial" charset="0"/>
                         <a:ea typeface="Arial" charset="0"/>
                         <a:cs typeface="Arial" charset="0"/>
@@ -7122,7 +4762,7 @@
                   </a:tcPr>
                 </a:tc>
               </a:tr>
-              <a:tr h="566928">
+              <a:tr h="594360">
                 <a:tc>
                   <a:txBody>
                     <a:bodyPr/>
@@ -7132,7 +4772,7 @@
                         <a:buNone/>
                       </a:pPr>
                       <a:r>
-                        <a:rPr lang="en-US" sz="1200" b="1" dirty="0">
+                        <a:rPr lang="en-US" sz="1250" b="1" dirty="0">
                           <a:solidFill>
                             <a:srgbClr val="1B1B21"/>
                           </a:solidFill>
@@ -7142,7 +4782,7 @@
                         </a:rPr>
                         <a:t>PHP 회원 인증 웹앱</a:t>
                       </a:r>
-                      <a:endParaRPr lang="en-US" sz="1200" dirty="0">
+                      <a:endParaRPr lang="en-US" sz="1250" dirty="0">
                         <a:latin typeface="Arial" charset="0"/>
                         <a:ea typeface="Arial" charset="0"/>
                         <a:cs typeface="Arial" charset="0"/>
@@ -7197,7 +4837,7 @@
                         <a:buNone/>
                       </a:pPr>
                       <a:r>
-                        <a:rPr lang="en-US" sz="1200" dirty="0">
+                        <a:rPr lang="en-US" sz="1250" dirty="0">
                           <a:solidFill>
                             <a:srgbClr val="1B1B21"/>
                           </a:solidFill>
@@ -7207,7 +4847,7 @@
                         </a:rPr>
                         <a:t>웹</a:t>
                       </a:r>
-                      <a:endParaRPr lang="en-US" sz="1200" dirty="0">
+                      <a:endParaRPr lang="en-US" sz="1250" dirty="0">
                         <a:latin typeface="Arial" charset="0"/>
                         <a:ea typeface="Arial" charset="0"/>
                         <a:cs typeface="Arial" charset="0"/>
@@ -7262,7 +4902,7 @@
                         <a:buNone/>
                       </a:pPr>
                       <a:r>
-                        <a:rPr lang="en-US" sz="1200" dirty="0">
+                        <a:rPr lang="en-US" sz="1250" dirty="0">
                           <a:solidFill>
                             <a:srgbClr val="1B1B21"/>
                           </a:solidFill>
@@ -7270,9 +4910,9 @@
                           <a:ea typeface="Arial" pitchFamily="34" charset="-122"/>
                           <a:cs typeface="Arial" pitchFamily="34" charset="-120"/>
                         </a:rPr>
-                        <a:t>PHP — 로그인 · 회원가입 · 중복확인 · 세션</a:t>
+                        <a:t>PHP, 로그인과 회원가입, 세션</a:t>
                       </a:r>
-                      <a:endParaRPr lang="en-US" sz="1200" dirty="0">
+                      <a:endParaRPr lang="en-US" sz="1250" dirty="0">
                         <a:latin typeface="Arial" charset="0"/>
                         <a:ea typeface="Arial" charset="0"/>
                         <a:cs typeface="Arial" charset="0"/>
@@ -7327,7 +4967,7 @@
                         <a:buNone/>
                       </a:pPr>
                       <a:r>
-                        <a:rPr lang="en-US" sz="1200" dirty="0">
+                        <a:rPr lang="en-US" sz="1250" dirty="0">
                           <a:solidFill>
                             <a:srgbClr val="1B1B21"/>
                           </a:solidFill>
@@ -7337,7 +4977,7 @@
                         </a:rPr>
                         <a:t>개인 구현</a:t>
                       </a:r>
-                      <a:endParaRPr lang="en-US" sz="1200" dirty="0">
+                      <a:endParaRPr lang="en-US" sz="1250" dirty="0">
                         <a:latin typeface="Arial" charset="0"/>
                         <a:ea typeface="Arial" charset="0"/>
                         <a:cs typeface="Arial" charset="0"/>
@@ -7388,45 +5028,6 @@
           </a:graphicData>
         </a:graphic>
       </p:graphicFrame>
-      <p:sp>
-        <p:nvSpPr>
-          <p:cNvPr id="5" name="Text 2"/>
-          <p:cNvSpPr/>
-          <p:nvPr/>
-        </p:nvSpPr>
-        <p:spPr>
-          <a:xfrm>
-            <a:off x="640080" y="6126480"/>
-            <a:ext cx="9144000" cy="320040"/>
-          </a:xfrm>
-          <a:prstGeom prst="rect">
-            <a:avLst/>
-          </a:prstGeom>
-          <a:noFill/>
-          <a:ln/>
-        </p:spPr>
-        <p:txBody>
-          <a:bodyPr wrap="square" lIns="0" tIns="0" rIns="0" bIns="0" rtlCol="0" anchor="ctr"/>
-          <a:lstStyle/>
-          <a:p>
-            <a:pPr indent="0" marL="0">
-              <a:buNone/>
-            </a:pPr>
-            <a:r>
-              <a:rPr lang="en-US" sz="1000" i="1" dirty="0">
-                <a:solidFill>
-                  <a:srgbClr val="565663"/>
-                </a:solidFill>
-                <a:latin typeface="Arial" pitchFamily="34" charset="0"/>
-                <a:ea typeface="Arial" pitchFamily="34" charset="-122"/>
-                <a:cs typeface="Arial" pitchFamily="34" charset="-120"/>
-              </a:rPr>
-              <a:t>각 저장소 링크는 마지막 슬라이드 참고</a:t>
-            </a:r>
-            <a:endParaRPr lang="en-US" sz="1000" dirty="0"/>
-          </a:p>
-        </p:txBody>
-      </p:sp>
     </p:spTree>
   </p:cSld>
   <p:clrMapOvr>
@@ -7467,7 +5068,7 @@
         </p:nvSpPr>
         <p:spPr>
           <a:xfrm>
-            <a:off x="640080" y="384048"/>
+            <a:off x="640080" y="411480"/>
             <a:ext cx="10908792" cy="566928"/>
           </a:xfrm>
           <a:prstGeom prst="rect">
@@ -7492,7 +5093,7 @@
                 <a:ea typeface="Arial" pitchFamily="34" charset="-122"/>
                 <a:cs typeface="Arial" pitchFamily="34" charset="-120"/>
               </a:rPr>
-              <a:t>괴이탐사국: INSPECTOR</a:t>
+              <a:t>괴이탐사국 INSPECTOR</a:t>
             </a:r>
             <a:endParaRPr lang="en-US" sz="2600" dirty="0"/>
           </a:p>
@@ -7506,7 +5107,7 @@
         </p:nvSpPr>
         <p:spPr>
           <a:xfrm>
-            <a:off x="640080" y="969264"/>
+            <a:off x="640080" y="987552"/>
             <a:ext cx="10908792" cy="384048"/>
           </a:xfrm>
           <a:prstGeom prst="rect">
@@ -7531,7 +5132,7 @@
                 <a:ea typeface="Arial" pitchFamily="34" charset="-122"/>
                 <a:cs typeface="Arial" pitchFamily="34" charset="-120"/>
               </a:rPr>
-              <a:t>로그라이크 덱빌딩 오토배틀러 · Unity · C# · 팀 578(3인) 캡스톤 · 클라이언트 개발 단독 담당 · 2026.03–06</a:t>
+              <a:t>로그라이크 덱빌딩 오토배틀러, Unity, C#, 팀 캡스톤(3인), 클라이언트 개발 담당, 2026</a:t>
             </a:r>
             <a:endParaRPr lang="en-US" sz="1250" dirty="0"/>
           </a:p>
@@ -7570,7 +5171,7 @@
                 <a:ea typeface="Arial" pitchFamily="34" charset="-122"/>
                 <a:cs typeface="Arial" pitchFamily="34" charset="-120"/>
               </a:rPr>
-              <a:t>카드는 전투 변수(스택)만 만들고 동료가 자동으로 싸우는 ‘간접 전투’ 게임. 기획 명세를 실제 동작하는 전투 엔진·시스템 코드로 단독 구현.</a:t>
+              <a:t>카드로 자원을 만들면 동료가 자동으로 싸우는 게임입니다. 기획 명세를 실제 동작하는 전투 시스템 코드로 구현했습니다.</a:t>
             </a:r>
             <a:endParaRPr lang="en-US" sz="1250" dirty="0"/>
           </a:p>
@@ -7584,16 +5185,16 @@
         </p:nvSpPr>
         <p:spPr>
           <a:xfrm>
-            <a:off x="640080" y="2011680"/>
-            <a:ext cx="5271516" cy="1600200"/>
+            <a:off x="640080" y="2148840"/>
+            <a:ext cx="3422904" cy="2651760"/>
           </a:xfrm>
           <a:prstGeom prst="roundRect">
             <a:avLst>
-              <a:gd name="adj" fmla="val 5143"/>
+              <a:gd name="adj" fmla="val 3103"/>
             </a:avLst>
           </a:prstGeom>
           <a:solidFill>
-            <a:srgbClr val="FFFFFF"/>
+            <a:srgbClr val="F7F7FA"/>
           </a:solidFill>
           <a:ln w="12700">
             <a:solidFill>
@@ -7612,14 +5213,34 @@
       </p:sp>
       <p:sp>
         <p:nvSpPr>
-          <p:cNvPr id="6" name="Text 4"/>
+          <p:cNvPr id="6" name="Shape 4"/>
           <p:cNvSpPr/>
           <p:nvPr/>
         </p:nvSpPr>
         <p:spPr>
           <a:xfrm>
-            <a:off x="896112" y="2194560"/>
-            <a:ext cx="4759452" cy="365760"/>
+            <a:off x="896112" y="2423160"/>
+            <a:ext cx="137160" cy="137160"/>
+          </a:xfrm>
+          <a:prstGeom prst="ellipse">
+            <a:avLst/>
+          </a:prstGeom>
+          <a:solidFill>
+            <a:srgbClr val="33386E"/>
+          </a:solidFill>
+          <a:ln/>
+        </p:spPr>
+      </p:sp>
+      <p:sp>
+        <p:nvSpPr>
+          <p:cNvPr id="7" name="Text 5"/>
+          <p:cNvSpPr/>
+          <p:nvPr/>
+        </p:nvSpPr>
+        <p:spPr>
+          <a:xfrm>
+            <a:off x="896112" y="2715768"/>
+            <a:ext cx="2910840" cy="640080"/>
           </a:xfrm>
           <a:prstGeom prst="rect">
             <a:avLst/>
@@ -7635,7 +5256,7 @@
               <a:buNone/>
             </a:pPr>
             <a:r>
-              <a:rPr lang="en-US" sz="1350" b="1" dirty="0">
+              <a:rPr lang="en-US" sz="1400" b="1" dirty="0">
                 <a:solidFill>
                   <a:srgbClr val="33386E"/>
                 </a:solidFill>
@@ -7643,22 +5264,22 @@
                 <a:ea typeface="Arial" pitchFamily="34" charset="-122"/>
                 <a:cs typeface="Arial" pitchFamily="34" charset="-120"/>
               </a:rPr>
-              <a:t>① 전투 엔진을 partial class로 분리</a:t>
+              <a:t>커진 코드를 파일로 나누기</a:t>
             </a:r>
-            <a:endParaRPr lang="en-US" sz="1350" dirty="0"/>
+            <a:endParaRPr lang="en-US" sz="1400" dirty="0"/>
           </a:p>
         </p:txBody>
       </p:sp>
       <p:sp>
         <p:nvSpPr>
-          <p:cNvPr id="7" name="Text 5"/>
+          <p:cNvPr id="8" name="Text 6"/>
           <p:cNvSpPr/>
           <p:nvPr/>
         </p:nvSpPr>
         <p:spPr>
           <a:xfrm>
-            <a:off x="896112" y="2633472"/>
-            <a:ext cx="4759452" cy="868680"/>
+            <a:off x="896112" y="3383280"/>
+            <a:ext cx="2910840" cy="1188720"/>
           </a:xfrm>
           <a:prstGeom prst="rect">
             <a:avLst/>
@@ -7674,7 +5295,7 @@
               <a:buNone/>
             </a:pPr>
             <a:r>
-              <a:rPr lang="en-US" sz="1150" dirty="0">
+              <a:rPr lang="en-US" sz="1200" dirty="0">
                 <a:solidFill>
                   <a:srgbClr val="565663"/>
                 </a:solidFill>
@@ -7682,30 +5303,30 @@
                 <a:ea typeface="Arial" pitchFamily="34" charset="-122"/>
                 <a:cs typeface="Arial" pitchFamily="34" charset="-120"/>
               </a:rPr>
-              <a:t>약 2,665줄 BattleManager를 5개 파일로 책임 분리 — 흐름·전투 계산·적 AI를 격리해 유지보수성 확보.</a:t>
+              <a:t>2천 줄이 넘은 전투 매니저를 역할에 따라 여러 파일로 나눠, 흐름과 계산과 적 행동을 분리했습니다.</a:t>
             </a:r>
-            <a:endParaRPr lang="en-US" sz="1150" dirty="0"/>
+            <a:endParaRPr lang="en-US" sz="1200" dirty="0"/>
           </a:p>
         </p:txBody>
       </p:sp>
       <p:sp>
         <p:nvSpPr>
-          <p:cNvPr id="8" name="Shape 6"/>
+          <p:cNvPr id="9" name="Shape 7"/>
           <p:cNvSpPr/>
           <p:nvPr/>
         </p:nvSpPr>
         <p:spPr>
           <a:xfrm>
-            <a:off x="6277356" y="2011680"/>
-            <a:ext cx="5271516" cy="1600200"/>
+            <a:off x="4383024" y="2148840"/>
+            <a:ext cx="3422904" cy="2651760"/>
           </a:xfrm>
           <a:prstGeom prst="roundRect">
             <a:avLst>
-              <a:gd name="adj" fmla="val 5143"/>
+              <a:gd name="adj" fmla="val 3103"/>
             </a:avLst>
           </a:prstGeom>
           <a:solidFill>
-            <a:srgbClr val="FFFFFF"/>
+            <a:srgbClr val="F7F7FA"/>
           </a:solidFill>
           <a:ln w="12700">
             <a:solidFill>
@@ -7724,14 +5345,34 @@
       </p:sp>
       <p:sp>
         <p:nvSpPr>
-          <p:cNvPr id="9" name="Text 7"/>
+          <p:cNvPr id="10" name="Shape 8"/>
           <p:cNvSpPr/>
           <p:nvPr/>
         </p:nvSpPr>
         <p:spPr>
           <a:xfrm>
-            <a:off x="6533388" y="2194560"/>
-            <a:ext cx="4759452" cy="365760"/>
+            <a:off x="4639056" y="2423160"/>
+            <a:ext cx="137160" cy="137160"/>
+          </a:xfrm>
+          <a:prstGeom prst="ellipse">
+            <a:avLst/>
+          </a:prstGeom>
+          <a:solidFill>
+            <a:srgbClr val="B1462C"/>
+          </a:solidFill>
+          <a:ln/>
+        </p:spPr>
+      </p:sp>
+      <p:sp>
+        <p:nvSpPr>
+          <p:cNvPr id="11" name="Text 9"/>
+          <p:cNvSpPr/>
+          <p:nvPr/>
+        </p:nvSpPr>
+        <p:spPr>
+          <a:xfrm>
+            <a:off x="4639056" y="2715768"/>
+            <a:ext cx="2910840" cy="640080"/>
           </a:xfrm>
           <a:prstGeom prst="rect">
             <a:avLst/>
@@ -7747,7 +5388,7 @@
               <a:buNone/>
             </a:pPr>
             <a:r>
-              <a:rPr lang="en-US" sz="1350" b="1" dirty="0">
+              <a:rPr lang="en-US" sz="1400" b="1" dirty="0">
                 <a:solidFill>
                   <a:srgbClr val="B1462C"/>
                 </a:solidFill>
@@ -7755,22 +5396,22 @@
                 <a:ea typeface="Arial" pitchFamily="34" charset="-122"/>
                 <a:cs typeface="Arial" pitchFamily="34" charset="-120"/>
               </a:rPr>
-              <a:t>② 반복 패턴을 CRTP 제네릭으로 일반화</a:t>
+              <a:t>반복되는 코드를 제네릭으로 묶기</a:t>
             </a:r>
-            <a:endParaRPr lang="en-US" sz="1350" dirty="0"/>
+            <a:endParaRPr lang="en-US" sz="1400" dirty="0"/>
           </a:p>
         </p:txBody>
       </p:sp>
       <p:sp>
         <p:nvSpPr>
-          <p:cNvPr id="10" name="Text 8"/>
+          <p:cNvPr id="12" name="Text 10"/>
           <p:cNvSpPr/>
           <p:nvPr/>
         </p:nvSpPr>
         <p:spPr>
           <a:xfrm>
-            <a:off x="6533388" y="2633472"/>
-            <a:ext cx="4759452" cy="868680"/>
+            <a:off x="4639056" y="3383280"/>
+            <a:ext cx="2910840" cy="1188720"/>
           </a:xfrm>
           <a:prstGeom prst="rect">
             <a:avLst/>
@@ -7786,7 +5427,7 @@
               <a:buNone/>
             </a:pPr>
             <a:r>
-              <a:rPr lang="en-US" sz="1150" dirty="0">
+              <a:rPr lang="en-US" sz="1200" dirty="0">
                 <a:solidFill>
                   <a:srgbClr val="565663"/>
                 </a:solidFill>
@@ -7794,30 +5435,30 @@
                 <a:ea typeface="Arial" pitchFamily="34" charset="-122"/>
                 <a:cs typeface="Arial" pitchFamily="34" charset="-120"/>
               </a:rPr>
-              <a:t>Singleton&lt;T&gt; · BaseCurrency&lt;T&gt; · RoleCostBase&lt;T&gt;로 인스턴스 관리·저장·UI 갱신 중복 제거.</a:t>
+              <a:t>싱글톤, 재화, 스택에서 반복되던 관리 코드를 제네릭 공통 코드로 묶어 중복을 줄였습니다.</a:t>
             </a:r>
-            <a:endParaRPr lang="en-US" sz="1150" dirty="0"/>
+            <a:endParaRPr lang="en-US" sz="1200" dirty="0"/>
           </a:p>
         </p:txBody>
       </p:sp>
       <p:sp>
         <p:nvSpPr>
-          <p:cNvPr id="11" name="Shape 9"/>
+          <p:cNvPr id="13" name="Shape 11"/>
           <p:cNvSpPr/>
           <p:nvPr/>
         </p:nvSpPr>
         <p:spPr>
           <a:xfrm>
-            <a:off x="640080" y="3931920"/>
-            <a:ext cx="5271516" cy="1600200"/>
+            <a:off x="8125968" y="2148840"/>
+            <a:ext cx="3422904" cy="2651760"/>
           </a:xfrm>
           <a:prstGeom prst="roundRect">
             <a:avLst>
-              <a:gd name="adj" fmla="val 5143"/>
+              <a:gd name="adj" fmla="val 3103"/>
             </a:avLst>
           </a:prstGeom>
           <a:solidFill>
-            <a:srgbClr val="FFFFFF"/>
+            <a:srgbClr val="F7F7FA"/>
           </a:solidFill>
           <a:ln w="12700">
             <a:solidFill>
@@ -7836,14 +5477,34 @@
       </p:sp>
       <p:sp>
         <p:nvSpPr>
-          <p:cNvPr id="12" name="Text 10"/>
+          <p:cNvPr id="14" name="Shape 12"/>
           <p:cNvSpPr/>
           <p:nvPr/>
         </p:nvSpPr>
         <p:spPr>
           <a:xfrm>
-            <a:off x="896112" y="4114800"/>
-            <a:ext cx="4759452" cy="365760"/>
+            <a:off x="8382000" y="2423160"/>
+            <a:ext cx="137160" cy="137160"/>
+          </a:xfrm>
+          <a:prstGeom prst="ellipse">
+            <a:avLst/>
+          </a:prstGeom>
+          <a:solidFill>
+            <a:srgbClr val="1F6F6B"/>
+          </a:solidFill>
+          <a:ln/>
+        </p:spPr>
+      </p:sp>
+      <p:sp>
+        <p:nvSpPr>
+          <p:cNvPr id="15" name="Text 13"/>
+          <p:cNvSpPr/>
+          <p:nvPr/>
+        </p:nvSpPr>
+        <p:spPr>
+          <a:xfrm>
+            <a:off x="8382000" y="2715768"/>
+            <a:ext cx="2910840" cy="640080"/>
           </a:xfrm>
           <a:prstGeom prst="rect">
             <a:avLst/>
@@ -7859,7 +5520,7 @@
               <a:buNone/>
             </a:pPr>
             <a:r>
-              <a:rPr lang="en-US" sz="1350" b="1" dirty="0">
+              <a:rPr lang="en-US" sz="1400" b="1" dirty="0">
                 <a:solidFill>
                   <a:srgbClr val="1F6F6B"/>
                 </a:solidFill>
@@ -7867,22 +5528,61 @@
                 <a:ea typeface="Arial" pitchFamily="34" charset="-122"/>
                 <a:cs typeface="Arial" pitchFamily="34" charset="-120"/>
               </a:rPr>
-              <a:t>③ 데이터 주도 설계 (JSON + SO)</a:t>
+              <a:t>데이터를 JSON으로 분리</a:t>
             </a:r>
-            <a:endParaRPr lang="en-US" sz="1350" dirty="0"/>
+            <a:endParaRPr lang="en-US" sz="1400" dirty="0"/>
           </a:p>
         </p:txBody>
       </p:sp>
       <p:sp>
         <p:nvSpPr>
-          <p:cNvPr id="13" name="Text 11"/>
+          <p:cNvPr id="16" name="Text 14"/>
           <p:cNvSpPr/>
           <p:nvPr/>
         </p:nvSpPr>
         <p:spPr>
           <a:xfrm>
-            <a:off x="896112" y="4553712"/>
-            <a:ext cx="4759452" cy="868680"/>
+            <a:off x="8382000" y="3383280"/>
+            <a:ext cx="2910840" cy="1188720"/>
+          </a:xfrm>
+          <a:prstGeom prst="rect">
+            <a:avLst/>
+          </a:prstGeom>
+          <a:noFill/>
+          <a:ln/>
+        </p:spPr>
+        <p:txBody>
+          <a:bodyPr wrap="square" lIns="0" tIns="0" rIns="0" bIns="0" rtlCol="0" anchor="ctr"/>
+          <a:lstStyle/>
+          <a:p>
+            <a:pPr indent="0" marL="0">
+              <a:buNone/>
+            </a:pPr>
+            <a:r>
+              <a:rPr lang="en-US" sz="1200" dirty="0">
+                <a:solidFill>
+                  <a:srgbClr val="565663"/>
+                </a:solidFill>
+                <a:latin typeface="Arial" pitchFamily="34" charset="0"/>
+                <a:ea typeface="Arial" pitchFamily="34" charset="-122"/>
+                <a:cs typeface="Arial" pitchFamily="34" charset="-120"/>
+              </a:rPr>
+              <a:t>동료와 스킬, 적 정보를 JSON으로 빼내 기획자가 코드 없이 수치를 조정할 수 있게 했습니다.</a:t>
+            </a:r>
+            <a:endParaRPr lang="en-US" sz="1200" dirty="0"/>
+          </a:p>
+        </p:txBody>
+      </p:sp>
+      <p:sp>
+        <p:nvSpPr>
+          <p:cNvPr id="17" name="Text 15"/>
+          <p:cNvSpPr/>
+          <p:nvPr/>
+        </p:nvSpPr>
+        <p:spPr>
+          <a:xfrm>
+            <a:off x="640080" y="5074920"/>
+            <a:ext cx="10908792" cy="365760"/>
           </a:xfrm>
           <a:prstGeom prst="rect">
             <a:avLst/>
@@ -7906,174 +5606,9 @@
                 <a:ea typeface="Arial" pitchFamily="34" charset="-122"/>
                 <a:cs typeface="Arial" pitchFamily="34" charset="-120"/>
               </a:rPr>
-              <a:t>동료·스킬·적 정의를 JSON으로 분리해 기획자가 코드 없이 밸런싱. DB는 조회·생성만 담당.</a:t>
+              <a:t>사용: C#, Unity, 상태 머신, 데이터 주도 설계, Git 브랜치와 PR</a:t>
             </a:r>
             <a:endParaRPr lang="en-US" sz="1150" dirty="0"/>
-          </a:p>
-        </p:txBody>
-      </p:sp>
-      <p:sp>
-        <p:nvSpPr>
-          <p:cNvPr id="14" name="Shape 12"/>
-          <p:cNvSpPr/>
-          <p:nvPr/>
-        </p:nvSpPr>
-        <p:spPr>
-          <a:xfrm>
-            <a:off x="6277356" y="3931920"/>
-            <a:ext cx="5271516" cy="1600200"/>
-          </a:xfrm>
-          <a:prstGeom prst="roundRect">
-            <a:avLst>
-              <a:gd name="adj" fmla="val 5143"/>
-            </a:avLst>
-          </a:prstGeom>
-          <a:solidFill>
-            <a:srgbClr val="FFFFFF"/>
-          </a:solidFill>
-          <a:ln w="12700">
-            <a:solidFill>
-              <a:srgbClr val="E3E3EA"/>
-            </a:solidFill>
-            <a:prstDash val="solid"/>
-          </a:ln>
-          <a:effectLst>
-            <a:outerShdw sx="100000" sy="100000" kx="0" ky="0" algn="bl" rotWithShape="0" blurRad="76200" dist="25400" dir="5400000">
-              <a:srgbClr val="000000">
-                <a:alpha val="10000"/>
-              </a:srgbClr>
-            </a:outerShdw>
-          </a:effectLst>
-        </p:spPr>
-      </p:sp>
-      <p:sp>
-        <p:nvSpPr>
-          <p:cNvPr id="15" name="Text 13"/>
-          <p:cNvSpPr/>
-          <p:nvPr/>
-        </p:nvSpPr>
-        <p:spPr>
-          <a:xfrm>
-            <a:off x="6533388" y="4114800"/>
-            <a:ext cx="4759452" cy="365760"/>
-          </a:xfrm>
-          <a:prstGeom prst="rect">
-            <a:avLst/>
-          </a:prstGeom>
-          <a:noFill/>
-          <a:ln/>
-        </p:spPr>
-        <p:txBody>
-          <a:bodyPr wrap="square" lIns="0" tIns="0" rIns="0" bIns="0" rtlCol="0" anchor="ctr"/>
-          <a:lstStyle/>
-          <a:p>
-            <a:pPr indent="0" marL="0">
-              <a:buNone/>
-            </a:pPr>
-            <a:r>
-              <a:rPr lang="en-US" sz="1350" b="1" dirty="0">
-                <a:solidFill>
-                  <a:srgbClr val="33386E"/>
-                </a:solidFill>
-                <a:latin typeface="Arial" pitchFamily="34" charset="0"/>
-                <a:ea typeface="Arial" pitchFamily="34" charset="-122"/>
-                <a:cs typeface="Arial" pitchFamily="34" charset="-120"/>
-              </a:rPr>
-              <a:t>④ 데이터로 조종하는 적 AI</a:t>
-            </a:r>
-            <a:endParaRPr lang="en-US" sz="1350" dirty="0"/>
-          </a:p>
-        </p:txBody>
-      </p:sp>
-      <p:sp>
-        <p:nvSpPr>
-          <p:cNvPr id="16" name="Text 14"/>
-          <p:cNvSpPr/>
-          <p:nvPr/>
-        </p:nvSpPr>
-        <p:spPr>
-          <a:xfrm>
-            <a:off x="6533388" y="4553712"/>
-            <a:ext cx="4759452" cy="868680"/>
-          </a:xfrm>
-          <a:prstGeom prst="rect">
-            <a:avLst/>
-          </a:prstGeom>
-          <a:noFill/>
-          <a:ln/>
-        </p:spPr>
-        <p:txBody>
-          <a:bodyPr wrap="square" lIns="0" tIns="0" rIns="0" bIns="0" rtlCol="0" anchor="ctr"/>
-          <a:lstStyle/>
-          <a:p>
-            <a:pPr indent="0" marL="0">
-              <a:buNone/>
-            </a:pPr>
-            <a:r>
-              <a:rPr lang="en-US" sz="1150" dirty="0">
-                <a:solidFill>
-                  <a:srgbClr val="565663"/>
-                </a:solidFill>
-                <a:latin typeface="Arial" pitchFamily="34" charset="0"/>
-                <a:ea typeface="Arial" pitchFamily="34" charset="-122"/>
-                <a:cs typeface="Arial" pitchFamily="34" charset="-120"/>
-              </a:rPr>
-              <a:t>가중치 랜덤 스킬 선택 + 타겟팅 매트릭스(도발·소환·독). 값만 바꾸면 AI 재구성. 4스킬 보스.</a:t>
-            </a:r>
-            <a:endParaRPr lang="en-US" sz="1150" dirty="0"/>
-          </a:p>
-        </p:txBody>
-      </p:sp>
-      <p:sp>
-        <p:nvSpPr>
-          <p:cNvPr id="17" name="Text 15"/>
-          <p:cNvSpPr/>
-          <p:nvPr/>
-        </p:nvSpPr>
-        <p:spPr>
-          <a:xfrm>
-            <a:off x="640080" y="6126480"/>
-            <a:ext cx="10908792" cy="365760"/>
-          </a:xfrm>
-          <a:prstGeom prst="rect">
-            <a:avLst/>
-          </a:prstGeom>
-          <a:noFill/>
-          <a:ln/>
-        </p:spPr>
-        <p:txBody>
-          <a:bodyPr wrap="square" lIns="0" tIns="0" rIns="0" bIns="0" rtlCol="0" anchor="ctr"/>
-          <a:lstStyle/>
-          <a:p>
-            <a:pPr indent="0" marL="0">
-              <a:buNone/>
-            </a:pPr>
-            <a:r>
-              <a:rPr lang="en-US" sz="1100" b="1" dirty="0">
-                <a:solidFill>
-                  <a:srgbClr val="33386E"/>
-                </a:solidFill>
-                <a:latin typeface="Arial" pitchFamily="34" charset="0"/>
-                <a:ea typeface="Arial" pitchFamily="34" charset="-122"/>
-                <a:cs typeface="Arial" pitchFamily="34" charset="-120"/>
-              </a:rPr>
-              <a:t>사용 스킬  </a:t>
-            </a:r>
-            <a:pPr indent="0" marL="0">
-              <a:buNone/>
-            </a:pPr>
-            <a:r>
-              <a:rPr lang="en-US" sz="1100" dirty="0">
-                <a:solidFill>
-                  <a:srgbClr val="565663"/>
-                </a:solidFill>
-                <a:latin typeface="Arial" pitchFamily="34" charset="0"/>
-                <a:ea typeface="Arial" pitchFamily="34" charset="-122"/>
-                <a:cs typeface="Arial" pitchFamily="34" charset="-120"/>
-              </a:rPr>
-              <a:t>C# · Unity · partial class · CRTP 제네릭 · 데이터 주도(JSON+SO) · 상태 머신 · 이벤트 기반 결합 · Git 브랜치·PR</a:t>
-            </a:r>
-            <a:endParaRPr lang="en-US" sz="1100" dirty="0"/>
           </a:p>
         </p:txBody>
       </p:sp>
@@ -8117,7 +5652,7 @@
         </p:nvSpPr>
         <p:spPr>
           <a:xfrm>
-            <a:off x="640080" y="384048"/>
+            <a:off x="640080" y="411480"/>
             <a:ext cx="10908792" cy="566928"/>
           </a:xfrm>
           <a:prstGeom prst="rect">
@@ -8156,7 +5691,7 @@
         </p:nvSpPr>
         <p:spPr>
           <a:xfrm>
-            <a:off x="640080" y="969264"/>
+            <a:off x="640080" y="987552"/>
             <a:ext cx="10908792" cy="384048"/>
           </a:xfrm>
           <a:prstGeom prst="rect">
@@ -8181,7 +5716,7 @@
                 <a:ea typeface="Arial" pitchFamily="34" charset="-122"/>
                 <a:cs typeface="Arial" pitchFamily="34" charset="-120"/>
               </a:rPr>
-              <a:t>ESP32-S3 기반 AI 자세 코치 로봇 · ESP-IDF v5.5.4 · C/C++ · FreeRTOS · Xiaozhi AI</a:t>
+              <a:t>ESP32 기반 AI 자세 코치 로봇, ESP-IDF, C, FreeRTOS</a:t>
             </a:r>
             <a:endParaRPr lang="en-US" sz="1250" dirty="0"/>
           </a:p>
@@ -8220,7 +5755,7 @@
                 <a:ea typeface="Arial" pitchFamily="34" charset="-122"/>
                 <a:cs typeface="Arial" pitchFamily="34" charset="-120"/>
               </a:rPr>
-              <a:t>기울기 센서(MPU6050)로 앞으로 숙인 자세를 감지하면 AI 음성으로 교정. 원래 키트의 4족 보행은 목적에 불필요해 서보를 제거하고 자세 감지·음성에 집중.</a:t>
+              <a:t>기울기 센서(MPU6050)로 앞으로 숙인 자세를 감지하면 AI 음성으로 알려줍니다. 키트에 있던 4족 보행은 필요 없어 서보를 떼어냈습니다.</a:t>
             </a:r>
             <a:endParaRPr lang="en-US" sz="1250" dirty="0"/>
           </a:p>
@@ -8234,8 +5769,8 @@
         </p:nvSpPr>
         <p:spPr>
           <a:xfrm>
-            <a:off x="640080" y="2103120"/>
-            <a:ext cx="2514600" cy="868680"/>
+            <a:off x="640080" y="2148840"/>
+            <a:ext cx="2377440" cy="868680"/>
           </a:xfrm>
           <a:prstGeom prst="roundRect">
             <a:avLst>
@@ -8261,8 +5796,8 @@
         </p:nvSpPr>
         <p:spPr>
           <a:xfrm>
-            <a:off x="731520" y="2103120"/>
-            <a:ext cx="2331720" cy="868680"/>
+            <a:off x="731520" y="2148840"/>
+            <a:ext cx="2194560" cy="868680"/>
           </a:xfrm>
           <a:prstGeom prst="rect">
             <a:avLst/>
@@ -8278,7 +5813,7 @@
               <a:buNone/>
             </a:pPr>
             <a:r>
-              <a:rPr lang="en-US" sz="1250" b="1" dirty="0">
+              <a:rPr lang="en-US" sz="1300" b="1" dirty="0">
                 <a:solidFill>
                   <a:srgbClr val="B1462C"/>
                 </a:solidFill>
@@ -8286,16 +5821,16 @@
                 <a:ea typeface="Arial" pitchFamily="34" charset="-122"/>
                 <a:cs typeface="Arial" pitchFamily="34" charset="-120"/>
               </a:rPr>
-              <a:t>MPU6050</a:t>
+              <a:t>기울기 센서</a:t>
             </a:r>
-            <a:endParaRPr lang="en-US" sz="1250" dirty="0"/>
+            <a:endParaRPr lang="en-US" sz="1300" dirty="0"/>
           </a:p>
           <a:p>
             <a:pPr algn="ctr" indent="0" marL="0">
               <a:buNone/>
             </a:pPr>
             <a:r>
-              <a:rPr lang="en-US" sz="900" dirty="0">
+              <a:rPr lang="en-US" sz="1000" dirty="0">
                 <a:solidFill>
                   <a:srgbClr val="565663"/>
                 </a:solidFill>
@@ -8303,50 +5838,35 @@
                 <a:ea typeface="Arial" pitchFamily="34" charset="-122"/>
                 <a:cs typeface="Arial" pitchFamily="34" charset="-120"/>
               </a:rPr>
-              <a:t>기울기 센서·자세</a:t>
+              <a:t>자세 감지</a:t>
             </a:r>
-            <a:endParaRPr lang="en-US" sz="1250" dirty="0"/>
+            <a:endParaRPr lang="en-US" sz="1300" dirty="0"/>
           </a:p>
         </p:txBody>
       </p:sp>
       <p:sp>
         <p:nvSpPr>
-          <p:cNvPr id="7" name="Text 5"/>
+          <p:cNvPr id="7" name="Shape 5"/>
           <p:cNvSpPr/>
           <p:nvPr/>
         </p:nvSpPr>
         <p:spPr>
           <a:xfrm>
-            <a:off x="3154680" y="2103120"/>
-            <a:ext cx="283464" cy="868680"/>
-          </a:xfrm>
-          <a:prstGeom prst="rect">
+            <a:off x="3127248" y="2583180"/>
+            <a:ext cx="246888" cy="0"/>
+          </a:xfrm>
+          <a:prstGeom prst="line">
             <a:avLst/>
           </a:prstGeom>
           <a:noFill/>
-          <a:ln/>
-        </p:spPr>
-        <p:txBody>
-          <a:bodyPr wrap="square" lIns="0" tIns="0" rIns="0" bIns="0" rtlCol="0" anchor="ctr"/>
-          <a:lstStyle/>
-          <a:p>
-            <a:pPr algn="ctr" indent="0" marL="0">
-              <a:buNone/>
-            </a:pPr>
-            <a:r>
-              <a:rPr lang="en-US" sz="1800" b="1" dirty="0">
-                <a:solidFill>
-                  <a:srgbClr val="B1462C"/>
-                </a:solidFill>
-                <a:latin typeface="Arial" pitchFamily="34" charset="0"/>
-                <a:ea typeface="Arial" pitchFamily="34" charset="-122"/>
-                <a:cs typeface="Arial" pitchFamily="34" charset="-120"/>
-              </a:rPr>
-              <a:t>→</a:t>
-            </a:r>
-            <a:endParaRPr lang="en-US" sz="1800" dirty="0"/>
-          </a:p>
-        </p:txBody>
+          <a:ln w="22225">
+            <a:solidFill>
+              <a:srgbClr val="33386E"/>
+            </a:solidFill>
+            <a:prstDash val="solid"/>
+            <a:tailEnd type="triangle"/>
+          </a:ln>
+        </p:spPr>
       </p:sp>
       <p:sp>
         <p:nvSpPr>
@@ -8356,8 +5876,8 @@
         </p:nvSpPr>
         <p:spPr>
           <a:xfrm>
-            <a:off x="3438144" y="2103120"/>
-            <a:ext cx="2514600" cy="868680"/>
+            <a:off x="3483864" y="2148840"/>
+            <a:ext cx="2377440" cy="868680"/>
           </a:xfrm>
           <a:prstGeom prst="roundRect">
             <a:avLst>
@@ -8383,8 +5903,8 @@
         </p:nvSpPr>
         <p:spPr>
           <a:xfrm>
-            <a:off x="3529584" y="2103120"/>
-            <a:ext cx="2331720" cy="868680"/>
+            <a:off x="3575304" y="2148840"/>
+            <a:ext cx="2194560" cy="868680"/>
           </a:xfrm>
           <a:prstGeom prst="rect">
             <a:avLst/>
@@ -8400,7 +5920,7 @@
               <a:buNone/>
             </a:pPr>
             <a:r>
-              <a:rPr lang="en-US" sz="1250" b="1" dirty="0">
+              <a:rPr lang="en-US" sz="1300" b="1" dirty="0">
                 <a:solidFill>
                   <a:srgbClr val="1B1B21"/>
                 </a:solidFill>
@@ -8408,16 +5928,16 @@
                 <a:ea typeface="Arial" pitchFamily="34" charset="-122"/>
                 <a:cs typeface="Arial" pitchFamily="34" charset="-120"/>
               </a:rPr>
-              <a:t>ESP32-S3</a:t>
+              <a:t>ESP32</a:t>
             </a:r>
-            <a:endParaRPr lang="en-US" sz="1250" dirty="0"/>
+            <a:endParaRPr lang="en-US" sz="1300" dirty="0"/>
           </a:p>
           <a:p>
             <a:pPr algn="ctr" indent="0" marL="0">
               <a:buNone/>
             </a:pPr>
             <a:r>
-              <a:rPr lang="en-US" sz="900" dirty="0">
+              <a:rPr lang="en-US" sz="1000" dirty="0">
                 <a:solidFill>
                   <a:srgbClr val="565663"/>
                 </a:solidFill>
@@ -8425,50 +5945,35 @@
                 <a:ea typeface="Arial" pitchFamily="34" charset="-122"/>
                 <a:cs typeface="Arial" pitchFamily="34" charset="-120"/>
               </a:rPr>
-              <a:t>자세 판단·FreeRTOS</a:t>
+              <a:t>자세 판단</a:t>
             </a:r>
-            <a:endParaRPr lang="en-US" sz="1250" dirty="0"/>
+            <a:endParaRPr lang="en-US" sz="1300" dirty="0"/>
           </a:p>
         </p:txBody>
       </p:sp>
       <p:sp>
         <p:nvSpPr>
-          <p:cNvPr id="10" name="Text 8"/>
+          <p:cNvPr id="10" name="Shape 8"/>
           <p:cNvSpPr/>
           <p:nvPr/>
         </p:nvSpPr>
         <p:spPr>
           <a:xfrm>
-            <a:off x="5952744" y="2103120"/>
-            <a:ext cx="283464" cy="868680"/>
-          </a:xfrm>
-          <a:prstGeom prst="rect">
+            <a:off x="5971032" y="2583180"/>
+            <a:ext cx="246888" cy="0"/>
+          </a:xfrm>
+          <a:prstGeom prst="line">
             <a:avLst/>
           </a:prstGeom>
           <a:noFill/>
-          <a:ln/>
-        </p:spPr>
-        <p:txBody>
-          <a:bodyPr wrap="square" lIns="0" tIns="0" rIns="0" bIns="0" rtlCol="0" anchor="ctr"/>
-          <a:lstStyle/>
-          <a:p>
-            <a:pPr algn="ctr" indent="0" marL="0">
-              <a:buNone/>
-            </a:pPr>
-            <a:r>
-              <a:rPr lang="en-US" sz="1800" b="1" dirty="0">
-                <a:solidFill>
-                  <a:srgbClr val="B1462C"/>
-                </a:solidFill>
-                <a:latin typeface="Arial" pitchFamily="34" charset="0"/>
-                <a:ea typeface="Arial" pitchFamily="34" charset="-122"/>
-                <a:cs typeface="Arial" pitchFamily="34" charset="-120"/>
-              </a:rPr>
-              <a:t>→</a:t>
-            </a:r>
-            <a:endParaRPr lang="en-US" sz="1800" dirty="0"/>
-          </a:p>
-        </p:txBody>
+          <a:ln w="22225">
+            <a:solidFill>
+              <a:srgbClr val="33386E"/>
+            </a:solidFill>
+            <a:prstDash val="solid"/>
+            <a:tailEnd type="triangle"/>
+          </a:ln>
+        </p:spPr>
       </p:sp>
       <p:sp>
         <p:nvSpPr>
@@ -8478,8 +5983,8 @@
         </p:nvSpPr>
         <p:spPr>
           <a:xfrm>
-            <a:off x="6236208" y="2103120"/>
-            <a:ext cx="2514600" cy="868680"/>
+            <a:off x="6327648" y="2148840"/>
+            <a:ext cx="2377440" cy="868680"/>
           </a:xfrm>
           <a:prstGeom prst="roundRect">
             <a:avLst>
@@ -8505,8 +6010,8 @@
         </p:nvSpPr>
         <p:spPr>
           <a:xfrm>
-            <a:off x="6327648" y="2103120"/>
-            <a:ext cx="2331720" cy="868680"/>
+            <a:off x="6419088" y="2148840"/>
+            <a:ext cx="2194560" cy="868680"/>
           </a:xfrm>
           <a:prstGeom prst="rect">
             <a:avLst/>
@@ -8522,7 +6027,7 @@
               <a:buNone/>
             </a:pPr>
             <a:r>
-              <a:rPr lang="en-US" sz="1250" b="1" dirty="0">
+              <a:rPr lang="en-US" sz="1300" b="1" dirty="0">
                 <a:solidFill>
                   <a:srgbClr val="1B1B21"/>
                 </a:solidFill>
@@ -8530,16 +6035,16 @@
                 <a:ea typeface="Arial" pitchFamily="34" charset="-122"/>
                 <a:cs typeface="Arial" pitchFamily="34" charset="-120"/>
               </a:rPr>
-              <a:t>I2S 마이크·스피커</a:t>
+              <a:t>마이크, 스피커</a:t>
             </a:r>
-            <a:endParaRPr lang="en-US" sz="1250" dirty="0"/>
+            <a:endParaRPr lang="en-US" sz="1300" dirty="0"/>
           </a:p>
           <a:p>
             <a:pPr algn="ctr" indent="0" marL="0">
               <a:buNone/>
             </a:pPr>
             <a:r>
-              <a:rPr lang="en-US" sz="900" dirty="0">
+              <a:rPr lang="en-US" sz="1000" dirty="0">
                 <a:solidFill>
                   <a:srgbClr val="565663"/>
                 </a:solidFill>
@@ -8547,50 +6052,35 @@
                 <a:ea typeface="Arial" pitchFamily="34" charset="-122"/>
                 <a:cs typeface="Arial" pitchFamily="34" charset="-120"/>
               </a:rPr>
-              <a:t>INMP441 · MAX98357A</a:t>
+              <a:t>I2S 오디오</a:t>
             </a:r>
-            <a:endParaRPr lang="en-US" sz="1250" dirty="0"/>
+            <a:endParaRPr lang="en-US" sz="1300" dirty="0"/>
           </a:p>
         </p:txBody>
       </p:sp>
       <p:sp>
         <p:nvSpPr>
-          <p:cNvPr id="13" name="Text 11"/>
+          <p:cNvPr id="13" name="Shape 11"/>
           <p:cNvSpPr/>
           <p:nvPr/>
         </p:nvSpPr>
         <p:spPr>
           <a:xfrm>
-            <a:off x="8750808" y="2103120"/>
-            <a:ext cx="283464" cy="868680"/>
-          </a:xfrm>
-          <a:prstGeom prst="rect">
+            <a:off x="8814816" y="2583180"/>
+            <a:ext cx="246888" cy="0"/>
+          </a:xfrm>
+          <a:prstGeom prst="line">
             <a:avLst/>
           </a:prstGeom>
           <a:noFill/>
-          <a:ln/>
-        </p:spPr>
-        <p:txBody>
-          <a:bodyPr wrap="square" lIns="0" tIns="0" rIns="0" bIns="0" rtlCol="0" anchor="ctr"/>
-          <a:lstStyle/>
-          <a:p>
-            <a:pPr algn="ctr" indent="0" marL="0">
-              <a:buNone/>
-            </a:pPr>
-            <a:r>
-              <a:rPr lang="en-US" sz="1800" b="1" dirty="0">
-                <a:solidFill>
-                  <a:srgbClr val="B1462C"/>
-                </a:solidFill>
-                <a:latin typeface="Arial" pitchFamily="34" charset="0"/>
-                <a:ea typeface="Arial" pitchFamily="34" charset="-122"/>
-                <a:cs typeface="Arial" pitchFamily="34" charset="-120"/>
-              </a:rPr>
-              <a:t>→</a:t>
-            </a:r>
-            <a:endParaRPr lang="en-US" sz="1800" dirty="0"/>
-          </a:p>
-        </p:txBody>
+          <a:ln w="22225">
+            <a:solidFill>
+              <a:srgbClr val="33386E"/>
+            </a:solidFill>
+            <a:prstDash val="solid"/>
+            <a:tailEnd type="triangle"/>
+          </a:ln>
+        </p:spPr>
       </p:sp>
       <p:sp>
         <p:nvSpPr>
@@ -8600,8 +6090,8 @@
         </p:nvSpPr>
         <p:spPr>
           <a:xfrm>
-            <a:off x="9034272" y="2103120"/>
-            <a:ext cx="2514600" cy="868680"/>
+            <a:off x="9171432" y="2148840"/>
+            <a:ext cx="2377440" cy="868680"/>
           </a:xfrm>
           <a:prstGeom prst="roundRect">
             <a:avLst>
@@ -8627,8 +6117,8 @@
         </p:nvSpPr>
         <p:spPr>
           <a:xfrm>
-            <a:off x="9125712" y="2103120"/>
-            <a:ext cx="2331720" cy="868680"/>
+            <a:off x="9262872" y="2148840"/>
+            <a:ext cx="2194560" cy="868680"/>
           </a:xfrm>
           <a:prstGeom prst="rect">
             <a:avLst/>
@@ -8644,7 +6134,7 @@
               <a:buNone/>
             </a:pPr>
             <a:r>
-              <a:rPr lang="en-US" sz="1250" b="1" dirty="0">
+              <a:rPr lang="en-US" sz="1300" b="1" dirty="0">
                 <a:solidFill>
                   <a:srgbClr val="FFFFFF"/>
                 </a:solidFill>
@@ -8652,16 +6142,16 @@
                 <a:ea typeface="Arial" pitchFamily="34" charset="-122"/>
                 <a:cs typeface="Arial" pitchFamily="34" charset="-120"/>
               </a:rPr>
-              <a:t>Xiaozhi AI 음성</a:t>
+              <a:t>AI 음성</a:t>
             </a:r>
-            <a:endParaRPr lang="en-US" sz="1250" dirty="0"/>
+            <a:endParaRPr lang="en-US" sz="1300" dirty="0"/>
           </a:p>
           <a:p>
             <a:pPr algn="ctr" indent="0" marL="0">
               <a:buNone/>
             </a:pPr>
             <a:r>
-              <a:rPr lang="en-US" sz="900" dirty="0">
+              <a:rPr lang="en-US" sz="1000" dirty="0">
                 <a:solidFill>
                   <a:srgbClr val="9AA0D8"/>
                 </a:solidFill>
@@ -8669,9 +6159,9 @@
                 <a:ea typeface="Arial" pitchFamily="34" charset="-122"/>
                 <a:cs typeface="Arial" pitchFamily="34" charset="-120"/>
               </a:rPr>
-              <a:t>자세 교정 안내</a:t>
+              <a:t>자세 알림</a:t>
             </a:r>
-            <a:endParaRPr lang="en-US" sz="1250" dirty="0"/>
+            <a:endParaRPr lang="en-US" sz="1300" dirty="0"/>
           </a:p>
         </p:txBody>
       </p:sp>
@@ -8683,92 +6173,12 @@
         </p:nvSpPr>
         <p:spPr>
           <a:xfrm>
-            <a:off x="640080" y="3200400"/>
-            <a:ext cx="10908792" cy="502920"/>
+            <a:off x="640080" y="3429000"/>
+            <a:ext cx="3422904" cy="1600200"/>
           </a:xfrm>
           <a:prstGeom prst="roundRect">
             <a:avLst>
-              <a:gd name="adj" fmla="val 10909"/>
-            </a:avLst>
-          </a:prstGeom>
-          <a:solidFill>
-            <a:srgbClr val="F4F4F6"/>
-          </a:solidFill>
-          <a:ln w="12700">
-            <a:solidFill>
-              <a:srgbClr val="C9C9D2"/>
-            </a:solidFill>
-            <a:prstDash val="dash"/>
-          </a:ln>
-        </p:spPr>
-      </p:sp>
-      <p:sp>
-        <p:nvSpPr>
-          <p:cNvPr id="17" name="Text 15"/>
-          <p:cNvSpPr/>
-          <p:nvPr/>
-        </p:nvSpPr>
-        <p:spPr>
-          <a:xfrm>
-            <a:off x="822960" y="3200400"/>
-            <a:ext cx="10543032" cy="502920"/>
-          </a:xfrm>
-          <a:prstGeom prst="rect">
-            <a:avLst/>
-          </a:prstGeom>
-          <a:noFill/>
-          <a:ln/>
-        </p:spPr>
-        <p:txBody>
-          <a:bodyPr wrap="square" lIns="0" tIns="0" rIns="0" bIns="0" rtlCol="0" anchor="ctr"/>
-          <a:lstStyle/>
-          <a:p>
-            <a:pPr indent="0" marL="0">
-              <a:buNone/>
-            </a:pPr>
-            <a:r>
-              <a:rPr lang="en-US" sz="1050" b="1" dirty="0">
-                <a:solidFill>
-                  <a:srgbClr val="8A8A95"/>
-                </a:solidFill>
-                <a:latin typeface="Arial" pitchFamily="34" charset="0"/>
-                <a:ea typeface="Arial" pitchFamily="34" charset="-122"/>
-                <a:cs typeface="Arial" pitchFamily="34" charset="-120"/>
-              </a:rPr>
-              <a:t>✕ 제거  </a:t>
-            </a:r>
-            <a:pPr indent="0" marL="0">
-              <a:buNone/>
-            </a:pPr>
-            <a:r>
-              <a:rPr lang="en-US" sz="1050" dirty="0">
-                <a:solidFill>
-                  <a:srgbClr val="8A8A95"/>
-                </a:solidFill>
-                <a:latin typeface="Arial" pitchFamily="34" charset="0"/>
-                <a:ea typeface="Arial" pitchFamily="34" charset="-122"/>
-                <a:cs typeface="Arial" pitchFamily="34" charset="-120"/>
-              </a:rPr>
-              <a:t>원래 키트의 서보(PCA9685)·4족 보행 게이트 — 자세 코치엔 불필요 → 데드 하드웨어/코드로 정리 (남길 것·버릴 것을 구분한 설계 판단)</a:t>
-            </a:r>
-            <a:endParaRPr lang="en-US" sz="1050" dirty="0"/>
-          </a:p>
-        </p:txBody>
-      </p:sp>
-      <p:sp>
-        <p:nvSpPr>
-          <p:cNvPr id="18" name="Shape 16"/>
-          <p:cNvSpPr/>
-          <p:nvPr/>
-        </p:nvSpPr>
-        <p:spPr>
-          <a:xfrm>
-            <a:off x="640080" y="3977640"/>
-            <a:ext cx="3422904" cy="1508760"/>
-          </a:xfrm>
-          <a:prstGeom prst="roundRect">
-            <a:avLst>
-              <a:gd name="adj" fmla="val 5455"/>
+              <a:gd name="adj" fmla="val 5143"/>
             </a:avLst>
           </a:prstGeom>
           <a:solidFill>
@@ -8791,13 +6201,13 @@
       </p:sp>
       <p:sp>
         <p:nvSpPr>
-          <p:cNvPr id="19" name="Text 17"/>
+          <p:cNvPr id="17" name="Text 15"/>
           <p:cNvSpPr/>
           <p:nvPr/>
         </p:nvSpPr>
         <p:spPr>
           <a:xfrm>
-            <a:off x="868680" y="4160520"/>
+            <a:off x="868680" y="3611880"/>
             <a:ext cx="2965704" cy="365760"/>
           </a:xfrm>
           <a:prstGeom prst="rect">
@@ -8814,7 +6224,7 @@
               <a:buNone/>
             </a:pPr>
             <a:r>
-              <a:rPr lang="en-US" sz="1250" b="1" dirty="0">
+              <a:rPr lang="en-US" sz="1300" b="1" dirty="0">
                 <a:solidFill>
                   <a:srgbClr val="B1462C"/>
                 </a:solidFill>
@@ -8822,22 +6232,22 @@
                 <a:ea typeface="Arial" pitchFamily="34" charset="-122"/>
                 <a:cs typeface="Arial" pitchFamily="34" charset="-120"/>
               </a:rPr>
-              <a:t>MPU6050 자세 감지</a:t>
+              <a:t>자세 감지</a:t>
             </a:r>
-            <a:endParaRPr lang="en-US" sz="1250" dirty="0"/>
+            <a:endParaRPr lang="en-US" sz="1300" dirty="0"/>
           </a:p>
         </p:txBody>
       </p:sp>
       <p:sp>
         <p:nvSpPr>
-          <p:cNvPr id="20" name="Text 18"/>
+          <p:cNvPr id="18" name="Text 16"/>
           <p:cNvSpPr/>
           <p:nvPr/>
         </p:nvSpPr>
         <p:spPr>
           <a:xfrm>
-            <a:off x="868680" y="4572000"/>
-            <a:ext cx="2965704" cy="822960"/>
+            <a:off x="868680" y="4023360"/>
+            <a:ext cx="2965704" cy="914400"/>
           </a:xfrm>
           <a:prstGeom prst="rect">
             <a:avLst/>
@@ -8853,7 +6263,7 @@
               <a:buNone/>
             </a:pPr>
             <a:r>
-              <a:rPr lang="en-US" sz="1050" dirty="0">
+              <a:rPr lang="en-US" sz="1150" dirty="0">
                 <a:solidFill>
                   <a:srgbClr val="565663"/>
                 </a:solidFill>
@@ -8861,26 +6271,26 @@
                 <a:ea typeface="Arial" pitchFamily="34" charset="-122"/>
                 <a:cs typeface="Arial" pitchFamily="34" charset="-120"/>
               </a:rPr>
-              <a:t>자이로·가속도 IMU를 I2C로 읽어 숙인 각도 판정 → 코칭 이벤트 발생.</a:t>
+              <a:t>기울기 센서를 I2C로 읽어 숙인 각도를 판단합니다.</a:t>
             </a:r>
-            <a:endParaRPr lang="en-US" sz="1050" dirty="0"/>
+            <a:endParaRPr lang="en-US" sz="1150" dirty="0"/>
           </a:p>
         </p:txBody>
       </p:sp>
       <p:sp>
         <p:nvSpPr>
-          <p:cNvPr id="21" name="Shape 19"/>
+          <p:cNvPr id="19" name="Shape 17"/>
           <p:cNvSpPr/>
           <p:nvPr/>
         </p:nvSpPr>
         <p:spPr>
           <a:xfrm>
-            <a:off x="4383024" y="3977640"/>
-            <a:ext cx="3422904" cy="1508760"/>
+            <a:off x="4383024" y="3429000"/>
+            <a:ext cx="3422904" cy="1600200"/>
           </a:xfrm>
           <a:prstGeom prst="roundRect">
             <a:avLst>
-              <a:gd name="adj" fmla="val 5455"/>
+              <a:gd name="adj" fmla="val 5143"/>
             </a:avLst>
           </a:prstGeom>
           <a:solidFill>
@@ -8903,13 +6313,13 @@
       </p:sp>
       <p:sp>
         <p:nvSpPr>
-          <p:cNvPr id="22" name="Text 20"/>
+          <p:cNvPr id="20" name="Text 18"/>
           <p:cNvSpPr/>
           <p:nvPr/>
         </p:nvSpPr>
         <p:spPr>
           <a:xfrm>
-            <a:off x="4611624" y="4160520"/>
+            <a:off x="4611624" y="3611880"/>
             <a:ext cx="2965704" cy="365760"/>
           </a:xfrm>
           <a:prstGeom prst="rect">
@@ -8926,7 +6336,7 @@
               <a:buNone/>
             </a:pPr>
             <a:r>
-              <a:rPr lang="en-US" sz="1250" b="1" dirty="0">
+              <a:rPr lang="en-US" sz="1300" b="1" dirty="0">
                 <a:solidFill>
                   <a:srgbClr val="33386E"/>
                 </a:solidFill>
@@ -8934,22 +6344,22 @@
                 <a:ea typeface="Arial" pitchFamily="34" charset="-122"/>
                 <a:cs typeface="Arial" pitchFamily="34" charset="-120"/>
               </a:rPr>
-              <a:t>I2S 오디오 입출력</a:t>
+              <a:t>소리 입출력</a:t>
             </a:r>
-            <a:endParaRPr lang="en-US" sz="1250" dirty="0"/>
+            <a:endParaRPr lang="en-US" sz="1300" dirty="0"/>
           </a:p>
         </p:txBody>
       </p:sp>
       <p:sp>
         <p:nvSpPr>
-          <p:cNvPr id="23" name="Text 21"/>
+          <p:cNvPr id="21" name="Text 19"/>
           <p:cNvSpPr/>
           <p:nvPr/>
         </p:nvSpPr>
         <p:spPr>
           <a:xfrm>
-            <a:off x="4611624" y="4572000"/>
-            <a:ext cx="2965704" cy="822960"/>
+            <a:off x="4611624" y="4023360"/>
+            <a:ext cx="2965704" cy="914400"/>
           </a:xfrm>
           <a:prstGeom prst="rect">
             <a:avLst/>
@@ -8965,7 +6375,7 @@
               <a:buNone/>
             </a:pPr>
             <a:r>
-              <a:rPr lang="en-US" sz="1050" dirty="0">
+              <a:rPr lang="en-US" sz="1150" dirty="0">
                 <a:solidFill>
                   <a:srgbClr val="565663"/>
                 </a:solidFill>
@@ -8973,26 +6383,26 @@
                 <a:ea typeface="Arial" pitchFamily="34" charset="-122"/>
                 <a:cs typeface="Arial" pitchFamily="34" charset="-120"/>
               </a:rPr>
-              <a:t>INMP441 마이크·MAX98357A 스피커. 포트 하나를 번갈아 사용해 충돌 회피.</a:t>
+              <a:t>마이크와 스피커를 하나의 오디오 포트로 번갈아 사용합니다.</a:t>
             </a:r>
-            <a:endParaRPr lang="en-US" sz="1050" dirty="0"/>
+            <a:endParaRPr lang="en-US" sz="1150" dirty="0"/>
           </a:p>
         </p:txBody>
       </p:sp>
       <p:sp>
         <p:nvSpPr>
-          <p:cNvPr id="24" name="Shape 22"/>
+          <p:cNvPr id="22" name="Shape 20"/>
           <p:cNvSpPr/>
           <p:nvPr/>
         </p:nvSpPr>
         <p:spPr>
           <a:xfrm>
-            <a:off x="8125968" y="3977640"/>
-            <a:ext cx="3422904" cy="1508760"/>
+            <a:off x="8125968" y="3429000"/>
+            <a:ext cx="3422904" cy="1600200"/>
           </a:xfrm>
           <a:prstGeom prst="roundRect">
             <a:avLst>
-              <a:gd name="adj" fmla="val 5455"/>
+              <a:gd name="adj" fmla="val 5143"/>
             </a:avLst>
           </a:prstGeom>
           <a:solidFill>
@@ -9015,13 +6425,13 @@
       </p:sp>
       <p:sp>
         <p:nvSpPr>
-          <p:cNvPr id="25" name="Text 23"/>
+          <p:cNvPr id="23" name="Text 21"/>
           <p:cNvSpPr/>
           <p:nvPr/>
         </p:nvSpPr>
         <p:spPr>
           <a:xfrm>
-            <a:off x="8354568" y="4160520"/>
+            <a:off x="8354568" y="3611880"/>
             <a:ext cx="2965704" cy="365760"/>
           </a:xfrm>
           <a:prstGeom prst="rect">
@@ -9038,7 +6448,7 @@
               <a:buNone/>
             </a:pPr>
             <a:r>
-              <a:rPr lang="en-US" sz="1250" b="1" dirty="0">
+              <a:rPr lang="en-US" sz="1300" b="1" dirty="0">
                 <a:solidFill>
                   <a:srgbClr val="1F6F6B"/>
                 </a:solidFill>
@@ -9046,22 +6456,22 @@
                 <a:ea typeface="Arial" pitchFamily="34" charset="-122"/>
                 <a:cs typeface="Arial" pitchFamily="34" charset="-120"/>
               </a:rPr>
-              <a:t>AI 이식 · 크로스빌드</a:t>
+              <a:t>환경 이식</a:t>
             </a:r>
-            <a:endParaRPr lang="en-US" sz="1250" dirty="0"/>
+            <a:endParaRPr lang="en-US" sz="1300" dirty="0"/>
           </a:p>
         </p:txBody>
       </p:sp>
       <p:sp>
         <p:nvSpPr>
-          <p:cNvPr id="26" name="Text 24"/>
+          <p:cNvPr id="24" name="Text 22"/>
           <p:cNvSpPr/>
           <p:nvPr/>
         </p:nvSpPr>
         <p:spPr>
           <a:xfrm>
-            <a:off x="8354568" y="4572000"/>
-            <a:ext cx="2965704" cy="822960"/>
+            <a:off x="8354568" y="4023360"/>
+            <a:ext cx="2965704" cy="914400"/>
           </a:xfrm>
           <a:prstGeom prst="rect">
             <a:avLst/>
@@ -9077,7 +6487,7 @@
               <a:buNone/>
             </a:pPr>
             <a:r>
-              <a:rPr lang="en-US" sz="1050" dirty="0">
+              <a:rPr lang="en-US" sz="1150" dirty="0">
                 <a:solidFill>
                   <a:srgbClr val="565663"/>
                 </a:solidFill>
@@ -9085,21 +6495,21 @@
                 <a:ea typeface="Arial" pitchFamily="34" charset="-122"/>
                 <a:cs typeface="Arial" pitchFamily="34" charset="-120"/>
               </a:rPr>
-              <a:t>Xiaozhi 펌웨어(상태머신·MCP·OTA)를 Windows→macOS 이식, ESP-IDF v5.5.4 빌드.</a:t>
+              <a:t>윈도우 기준 자료를 맥에서 빌드되도록 옮겼습니다.</a:t>
             </a:r>
-            <a:endParaRPr lang="en-US" sz="1050" dirty="0"/>
+            <a:endParaRPr lang="en-US" sz="1150" dirty="0"/>
           </a:p>
         </p:txBody>
       </p:sp>
       <p:sp>
         <p:nvSpPr>
-          <p:cNvPr id="27" name="Text 25"/>
+          <p:cNvPr id="25" name="Text 23"/>
           <p:cNvSpPr/>
           <p:nvPr/>
         </p:nvSpPr>
         <p:spPr>
           <a:xfrm>
-            <a:off x="640080" y="6080760"/>
+            <a:off x="640080" y="5257800"/>
             <a:ext cx="10908792" cy="365760"/>
           </a:xfrm>
           <a:prstGeom prst="rect">
@@ -9116,21 +6526,7 @@
               <a:buNone/>
             </a:pPr>
             <a:r>
-              <a:rPr lang="en-US" sz="1100" b="1" dirty="0">
-                <a:solidFill>
-                  <a:srgbClr val="33386E"/>
-                </a:solidFill>
-                <a:latin typeface="Arial" pitchFamily="34" charset="0"/>
-                <a:ea typeface="Arial" pitchFamily="34" charset="-122"/>
-                <a:cs typeface="Arial" pitchFamily="34" charset="-120"/>
-              </a:rPr>
-              <a:t>사용 스킬  </a:t>
-            </a:r>
-            <a:pPr indent="0" marL="0">
-              <a:buNone/>
-            </a:pPr>
-            <a:r>
-              <a:rPr lang="en-US" sz="1100" dirty="0">
+              <a:rPr lang="en-US" sz="1150" dirty="0">
                 <a:solidFill>
                   <a:srgbClr val="565663"/>
                 </a:solidFill>
@@ -9138,9 +6534,9 @@
                 <a:ea typeface="Arial" pitchFamily="34" charset="-122"/>
                 <a:cs typeface="Arial" pitchFamily="34" charset="-120"/>
               </a:rPr>
-              <a:t>C/C++ · ESP-IDF · FreeRTOS · I2C(MPU6050) · I2S 오디오 · 크로스플랫폼 빌드 · Bash 자동화 · AI 음성 연동</a:t>
+              <a:t>사용: C/C++, ESP-IDF, FreeRTOS, I2C, I2S, 크로스플랫폼 빌드</a:t>
             </a:r>
-            <a:endParaRPr lang="en-US" sz="1100" dirty="0"/>
+            <a:endParaRPr lang="en-US" sz="1150" dirty="0"/>
           </a:p>
         </p:txBody>
       </p:sp>
@@ -9184,7 +6580,7 @@
         </p:nvSpPr>
         <p:spPr>
           <a:xfrm>
-            <a:off x="640080" y="384048"/>
+            <a:off x="640080" y="411480"/>
             <a:ext cx="10908792" cy="566928"/>
           </a:xfrm>
           <a:prstGeom prst="rect">
@@ -9209,7 +6605,7 @@
                 <a:ea typeface="Arial" pitchFamily="34" charset="-122"/>
                 <a:cs typeface="Arial" pitchFamily="34" charset="-120"/>
               </a:rPr>
-              <a:t>로보틱스 · 웹 게임 · 웹</a:t>
+              <a:t>로보틱스, 웹 게임, 웹</a:t>
             </a:r>
             <a:endParaRPr lang="en-US" sz="2600" dirty="0"/>
           </a:p>
@@ -9223,7 +6619,7 @@
         </p:nvSpPr>
         <p:spPr>
           <a:xfrm>
-            <a:off x="640080" y="969264"/>
+            <a:off x="640080" y="987552"/>
             <a:ext cx="10908792" cy="384048"/>
           </a:xfrm>
           <a:prstGeom prst="rect">
@@ -9248,7 +6644,7 @@
                 <a:ea typeface="Arial" pitchFamily="34" charset="-122"/>
                 <a:cs typeface="Arial" pitchFamily="34" charset="-120"/>
               </a:rPr>
-              <a:t>대표 프로젝트 외 폭넓은 CS 기본기 — ROS2는 아직 학습 과정이라 정직하게 ‘학습 중’으로 표기</a:t>
+              <a:t>ROS2는 아직 배우는 중이라 정직하게 학습 중으로 표기했습니다.</a:t>
             </a:r>
             <a:endParaRPr lang="en-US" sz="1250" dirty="0"/>
           </a:p>
@@ -9262,12 +6658,12 @@
         </p:nvSpPr>
         <p:spPr>
           <a:xfrm>
-            <a:off x="640080" y="1645920"/>
-            <a:ext cx="3422904" cy="4297680"/>
+            <a:off x="640080" y="1691640"/>
+            <a:ext cx="3422904" cy="3383280"/>
           </a:xfrm>
           <a:prstGeom prst="roundRect">
             <a:avLst>
-              <a:gd name="adj" fmla="val 2404"/>
+              <a:gd name="adj" fmla="val 2432"/>
             </a:avLst>
           </a:prstGeom>
           <a:solidFill>
@@ -9296,7 +6692,7 @@
         </p:nvSpPr>
         <p:spPr>
           <a:xfrm>
-            <a:off x="896112" y="1883664"/>
+            <a:off x="896112" y="1929384"/>
             <a:ext cx="146304" cy="146304"/>
           </a:xfrm>
           <a:prstGeom prst="ellipse">
@@ -9316,7 +6712,7 @@
         </p:nvSpPr>
         <p:spPr>
           <a:xfrm>
-            <a:off x="1115568" y="1783080"/>
+            <a:off x="1115568" y="1828800"/>
             <a:ext cx="2782824" cy="365760"/>
           </a:xfrm>
           <a:prstGeom prst="rect">
@@ -9355,8 +6751,8 @@
         </p:nvSpPr>
         <p:spPr>
           <a:xfrm>
-            <a:off x="932688" y="2377440"/>
-            <a:ext cx="2874264" cy="2743200"/>
+            <a:off x="932688" y="2423160"/>
+            <a:ext cx="2874264" cy="2468880"/>
           </a:xfrm>
           <a:prstGeom prst="rect">
             <a:avLst/>
@@ -9370,7 +6766,7 @@
           <a:p>
             <a:pPr marL="177800" indent="-177800">
               <a:spcAft>
-                <a:spcPts val="1600"/>
+                <a:spcPts val="1400"/>
               </a:spcAft>
               <a:buSzPct val="100000"/>
               <a:buChar char="•"/>
@@ -9384,14 +6780,14 @@
                 <a:ea typeface="Arial" pitchFamily="34" charset="-122"/>
                 <a:cs typeface="Arial" pitchFamily="34" charset="-120"/>
               </a:rPr>
-              <a:t>운반 로봇(AGV) 문제정의·요구사항 설계 — 라인트레이싱·CSV 로깅·안전정지·MES/PLC 규격</a:t>
+              <a:t>운반 로봇 문제정의와 요구사항 정리</a:t>
             </a:r>
             <a:endParaRPr lang="en-US" sz="1250" dirty="0"/>
           </a:p>
           <a:p>
             <a:pPr marL="177800" indent="-177800">
               <a:spcAft>
-                <a:spcPts val="1600"/>
+                <a:spcPts val="1400"/>
               </a:spcAft>
               <a:buSzPct val="100000"/>
               <a:buChar char="•"/>
@@ -9405,14 +6801,14 @@
                 <a:ea typeface="Arial" pitchFamily="34" charset="-122"/>
                 <a:cs typeface="Arial" pitchFamily="34" charset="-120"/>
               </a:rPr>
-              <a:t>차동구동 등 9주제 기구학 조사</a:t>
+              <a:t>차동구동 등 기구학 조사</a:t>
             </a:r>
             <a:endParaRPr lang="en-US" sz="1250" dirty="0"/>
           </a:p>
           <a:p>
             <a:pPr marL="177800" indent="-177800">
               <a:spcAft>
-                <a:spcPts val="1600"/>
+                <a:spcPts val="1400"/>
               </a:spcAft>
               <a:buSzPct val="100000"/>
               <a:buChar char="•"/>
@@ -9426,7 +6822,7 @@
                 <a:ea typeface="Arial" pitchFamily="34" charset="-122"/>
                 <a:cs typeface="Arial" pitchFamily="34" charset="-120"/>
               </a:rPr>
-              <a:t>ROS2 실제 구현은 앞으로 학습 목표</a:t>
+              <a:t>ROS2 구현은 앞으로 학습 목표</a:t>
             </a:r>
             <a:endParaRPr lang="en-US" sz="1250" dirty="0"/>
           </a:p>
@@ -9434,71 +6830,18 @@
       </p:sp>
       <p:sp>
         <p:nvSpPr>
-          <p:cNvPr id="8" name="Text 6"/>
+          <p:cNvPr id="8" name="Shape 6"/>
           <p:cNvSpPr/>
           <p:nvPr/>
         </p:nvSpPr>
         <p:spPr>
           <a:xfrm>
-            <a:off x="932688" y="5440680"/>
-            <a:ext cx="2837688" cy="365760"/>
-          </a:xfrm>
-          <a:prstGeom prst="rect">
-            <a:avLst/>
-          </a:prstGeom>
-          <a:noFill/>
-          <a:ln/>
-        </p:spPr>
-        <p:txBody>
-          <a:bodyPr wrap="square" lIns="0" tIns="0" rIns="0" bIns="0" rtlCol="0" anchor="ctr"/>
-          <a:lstStyle/>
-          <a:p>
-            <a:pPr indent="0" marL="0">
-              <a:buNone/>
-            </a:pPr>
-            <a:r>
-              <a:rPr lang="en-US" sz="1050" b="1" dirty="0">
-                <a:solidFill>
-                  <a:srgbClr val="B1462C"/>
-                </a:solidFill>
-                <a:latin typeface="Arial" pitchFamily="34" charset="0"/>
-                <a:ea typeface="Arial" pitchFamily="34" charset="-122"/>
-                <a:cs typeface="Arial" pitchFamily="34" charset="-120"/>
-              </a:rPr>
-              <a:t>스킬  </a:t>
-            </a:r>
-            <a:pPr indent="0" marL="0">
-              <a:buNone/>
-            </a:pPr>
-            <a:r>
-              <a:rPr lang="en-US" sz="1050" dirty="0">
-                <a:solidFill>
-                  <a:srgbClr val="565663"/>
-                </a:solidFill>
-                <a:latin typeface="Arial" pitchFamily="34" charset="0"/>
-                <a:ea typeface="Arial" pitchFamily="34" charset="-122"/>
-                <a:cs typeface="Arial" pitchFamily="34" charset="-120"/>
-              </a:rPr>
-              <a:t>ROS2 · AGV 설계 · 차동구동 기구학</a:t>
-            </a:r>
-            <a:endParaRPr lang="en-US" sz="1050" dirty="0"/>
-          </a:p>
-        </p:txBody>
-      </p:sp>
-      <p:sp>
-        <p:nvSpPr>
-          <p:cNvPr id="9" name="Shape 7"/>
-          <p:cNvSpPr/>
-          <p:nvPr/>
-        </p:nvSpPr>
-        <p:spPr>
-          <a:xfrm>
-            <a:off x="4383024" y="1645920"/>
-            <a:ext cx="3422904" cy="4297680"/>
+            <a:off x="4383024" y="1691640"/>
+            <a:ext cx="3422904" cy="3383280"/>
           </a:xfrm>
           <a:prstGeom prst="roundRect">
             <a:avLst>
-              <a:gd name="adj" fmla="val 2404"/>
+              <a:gd name="adj" fmla="val 2432"/>
             </a:avLst>
           </a:prstGeom>
           <a:solidFill>
@@ -9521,13 +6864,13 @@
       </p:sp>
       <p:sp>
         <p:nvSpPr>
-          <p:cNvPr id="10" name="Shape 8"/>
+          <p:cNvPr id="9" name="Shape 7"/>
           <p:cNvSpPr/>
           <p:nvPr/>
         </p:nvSpPr>
         <p:spPr>
           <a:xfrm>
-            <a:off x="4639056" y="1883664"/>
+            <a:off x="4639056" y="1929384"/>
             <a:ext cx="146304" cy="146304"/>
           </a:xfrm>
           <a:prstGeom prst="ellipse">
@@ -9541,13 +6884,13 @@
       </p:sp>
       <p:sp>
         <p:nvSpPr>
-          <p:cNvPr id="11" name="Text 9"/>
+          <p:cNvPr id="10" name="Text 8"/>
           <p:cNvSpPr/>
           <p:nvPr/>
         </p:nvSpPr>
         <p:spPr>
           <a:xfrm>
-            <a:off x="4858512" y="1783080"/>
+            <a:off x="4858512" y="1828800"/>
             <a:ext cx="2782824" cy="365760"/>
           </a:xfrm>
           <a:prstGeom prst="rect">
@@ -9580,14 +6923,14 @@
       </p:sp>
       <p:sp>
         <p:nvSpPr>
-          <p:cNvPr id="12" name="Text 10"/>
+          <p:cNvPr id="11" name="Text 9"/>
           <p:cNvSpPr/>
           <p:nvPr/>
         </p:nvSpPr>
         <p:spPr>
           <a:xfrm>
-            <a:off x="4675632" y="2377440"/>
-            <a:ext cx="2874264" cy="2743200"/>
+            <a:off x="4675632" y="2423160"/>
+            <a:ext cx="2874264" cy="2468880"/>
           </a:xfrm>
           <a:prstGeom prst="rect">
             <a:avLst/>
@@ -9601,7 +6944,7 @@
           <a:p>
             <a:pPr marL="177800" indent="-177800">
               <a:spcAft>
-                <a:spcPts val="1600"/>
+                <a:spcPts val="1400"/>
               </a:spcAft>
               <a:buSzPct val="100000"/>
               <a:buChar char="•"/>
@@ -9622,7 +6965,7 @@
           <a:p>
             <a:pPr marL="177800" indent="-177800">
               <a:spcAft>
-                <a:spcPts val="1600"/>
+                <a:spcPts val="1400"/>
               </a:spcAft>
               <a:buSzPct val="100000"/>
               <a:buChar char="•"/>
@@ -9636,14 +6979,14 @@
                 <a:ea typeface="Arial" pitchFamily="34" charset="-122"/>
                 <a:cs typeface="Arial" pitchFamily="34" charset="-120"/>
               </a:rPr>
-              <a:t>한글 자모·쌍자음 분해, 단어 DB, 타이머·모드</a:t>
+              <a:t>한글 자모 분해, 단어 데이터</a:t>
             </a:r>
             <a:endParaRPr lang="en-US" sz="1250" dirty="0"/>
           </a:p>
           <a:p>
             <a:pPr marL="177800" indent="-177800">
               <a:spcAft>
-                <a:spcPts val="1600"/>
+                <a:spcPts val="1400"/>
               </a:spcAft>
               <a:buSzPct val="100000"/>
               <a:buChar char="•"/>
@@ -9657,7 +7000,7 @@
                 <a:ea typeface="Arial" pitchFamily="34" charset="-122"/>
                 <a:cs typeface="Arial" pitchFamily="34" charset="-120"/>
               </a:rPr>
-              <a:t>world.js 게임 로직 + worldlist.js</a:t>
+              <a:t>게임 로직 직접 구현</a:t>
             </a:r>
             <a:endParaRPr lang="en-US" sz="1250" dirty="0"/>
           </a:p>
@@ -9665,71 +7008,18 @@
       </p:sp>
       <p:sp>
         <p:nvSpPr>
-          <p:cNvPr id="13" name="Text 11"/>
+          <p:cNvPr id="12" name="Shape 10"/>
           <p:cNvSpPr/>
           <p:nvPr/>
         </p:nvSpPr>
         <p:spPr>
           <a:xfrm>
-            <a:off x="4675632" y="5440680"/>
-            <a:ext cx="2837688" cy="365760"/>
-          </a:xfrm>
-          <a:prstGeom prst="rect">
-            <a:avLst/>
-          </a:prstGeom>
-          <a:noFill/>
-          <a:ln/>
-        </p:spPr>
-        <p:txBody>
-          <a:bodyPr wrap="square" lIns="0" tIns="0" rIns="0" bIns="0" rtlCol="0" anchor="ctr"/>
-          <a:lstStyle/>
-          <a:p>
-            <a:pPr indent="0" marL="0">
-              <a:buNone/>
-            </a:pPr>
-            <a:r>
-              <a:rPr lang="en-US" sz="1050" b="1" dirty="0">
-                <a:solidFill>
-                  <a:srgbClr val="33386E"/>
-                </a:solidFill>
-                <a:latin typeface="Arial" pitchFamily="34" charset="0"/>
-                <a:ea typeface="Arial" pitchFamily="34" charset="-122"/>
-                <a:cs typeface="Arial" pitchFamily="34" charset="-120"/>
-              </a:rPr>
-              <a:t>스킬  </a:t>
-            </a:r>
-            <a:pPr indent="0" marL="0">
-              <a:buNone/>
-            </a:pPr>
-            <a:r>
-              <a:rPr lang="en-US" sz="1050" dirty="0">
-                <a:solidFill>
-                  <a:srgbClr val="565663"/>
-                </a:solidFill>
-                <a:latin typeface="Arial" pitchFamily="34" charset="0"/>
-                <a:ea typeface="Arial" pitchFamily="34" charset="-122"/>
-                <a:cs typeface="Arial" pitchFamily="34" charset="-120"/>
-              </a:rPr>
-              <a:t>JavaScript · 게임 로직 · 상태 관리</a:t>
-            </a:r>
-            <a:endParaRPr lang="en-US" sz="1050" dirty="0"/>
-          </a:p>
-        </p:txBody>
-      </p:sp>
-      <p:sp>
-        <p:nvSpPr>
-          <p:cNvPr id="14" name="Shape 12"/>
-          <p:cNvSpPr/>
-          <p:nvPr/>
-        </p:nvSpPr>
-        <p:spPr>
-          <a:xfrm>
-            <a:off x="8125968" y="1645920"/>
-            <a:ext cx="3422904" cy="4297680"/>
+            <a:off x="8125968" y="1691640"/>
+            <a:ext cx="3422904" cy="3383280"/>
           </a:xfrm>
           <a:prstGeom prst="roundRect">
             <a:avLst>
-              <a:gd name="adj" fmla="val 2404"/>
+              <a:gd name="adj" fmla="val 2432"/>
             </a:avLst>
           </a:prstGeom>
           <a:solidFill>
@@ -9752,13 +7042,13 @@
       </p:sp>
       <p:sp>
         <p:nvSpPr>
-          <p:cNvPr id="15" name="Shape 13"/>
+          <p:cNvPr id="13" name="Shape 11"/>
           <p:cNvSpPr/>
           <p:nvPr/>
         </p:nvSpPr>
         <p:spPr>
           <a:xfrm>
-            <a:off x="8382000" y="1883664"/>
+            <a:off x="8382000" y="1929384"/>
             <a:ext cx="146304" cy="146304"/>
           </a:xfrm>
           <a:prstGeom prst="ellipse">
@@ -9772,13 +7062,13 @@
       </p:sp>
       <p:sp>
         <p:nvSpPr>
-          <p:cNvPr id="16" name="Text 14"/>
+          <p:cNvPr id="14" name="Text 12"/>
           <p:cNvSpPr/>
           <p:nvPr/>
         </p:nvSpPr>
         <p:spPr>
           <a:xfrm>
-            <a:off x="8601456" y="1783080"/>
+            <a:off x="8601456" y="1828800"/>
             <a:ext cx="2782824" cy="365760"/>
           </a:xfrm>
           <a:prstGeom prst="rect">
@@ -9811,14 +7101,14 @@
       </p:sp>
       <p:sp>
         <p:nvSpPr>
-          <p:cNvPr id="17" name="Text 15"/>
+          <p:cNvPr id="15" name="Text 13"/>
           <p:cNvSpPr/>
           <p:nvPr/>
         </p:nvSpPr>
         <p:spPr>
           <a:xfrm>
-            <a:off x="8418576" y="2377440"/>
-            <a:ext cx="2874264" cy="2743200"/>
+            <a:off x="8418576" y="2423160"/>
+            <a:ext cx="2874264" cy="2468880"/>
           </a:xfrm>
           <a:prstGeom prst="rect">
             <a:avLst/>
@@ -9832,7 +7122,7 @@
           <a:p>
             <a:pPr marL="177800" indent="-177800">
               <a:spcAft>
-                <a:spcPts val="1600"/>
+                <a:spcPts val="1400"/>
               </a:spcAft>
               <a:buSzPct val="100000"/>
               <a:buChar char="•"/>
@@ -9853,7 +7143,7 @@
           <a:p>
             <a:pPr marL="177800" indent="-177800">
               <a:spcAft>
-                <a:spcPts val="1600"/>
+                <a:spcPts val="1400"/>
               </a:spcAft>
               <a:buSzPct val="100000"/>
               <a:buChar char="•"/>
@@ -9867,14 +7157,14 @@
                 <a:ea typeface="Arial" pitchFamily="34" charset="-122"/>
                 <a:cs typeface="Arial" pitchFamily="34" charset="-120"/>
               </a:rPr>
-              <a:t>로그인·로그아웃·회원가입·아이디 중복확인</a:t>
+              <a:t>로그인, 회원가입, 중복확인</a:t>
             </a:r>
             <a:endParaRPr lang="en-US" sz="1250" dirty="0"/>
           </a:p>
           <a:p>
             <a:pPr marL="177800" indent="-177800">
               <a:spcAft>
-                <a:spcPts val="1600"/>
+                <a:spcPts val="1400"/>
               </a:spcAft>
               <a:buSzPct val="100000"/>
               <a:buChar char="•"/>
@@ -9888,62 +7178,9 @@
                 <a:ea typeface="Arial" pitchFamily="34" charset="-122"/>
                 <a:cs typeface="Arial" pitchFamily="34" charset="-120"/>
               </a:rPr>
-              <a:t>세션 기반 인증 흐름</a:t>
+              <a:t>세션 기반 인증</a:t>
             </a:r>
             <a:endParaRPr lang="en-US" sz="1250" dirty="0"/>
-          </a:p>
-        </p:txBody>
-      </p:sp>
-      <p:sp>
-        <p:nvSpPr>
-          <p:cNvPr id="18" name="Text 16"/>
-          <p:cNvSpPr/>
-          <p:nvPr/>
-        </p:nvSpPr>
-        <p:spPr>
-          <a:xfrm>
-            <a:off x="8418576" y="5440680"/>
-            <a:ext cx="2837688" cy="365760"/>
-          </a:xfrm>
-          <a:prstGeom prst="rect">
-            <a:avLst/>
-          </a:prstGeom>
-          <a:noFill/>
-          <a:ln/>
-        </p:spPr>
-        <p:txBody>
-          <a:bodyPr wrap="square" lIns="0" tIns="0" rIns="0" bIns="0" rtlCol="0" anchor="ctr"/>
-          <a:lstStyle/>
-          <a:p>
-            <a:pPr indent="0" marL="0">
-              <a:buNone/>
-            </a:pPr>
-            <a:r>
-              <a:rPr lang="en-US" sz="1050" b="1" dirty="0">
-                <a:solidFill>
-                  <a:srgbClr val="1F6F6B"/>
-                </a:solidFill>
-                <a:latin typeface="Arial" pitchFamily="34" charset="0"/>
-                <a:ea typeface="Arial" pitchFamily="34" charset="-122"/>
-                <a:cs typeface="Arial" pitchFamily="34" charset="-120"/>
-              </a:rPr>
-              <a:t>스킬  </a:t>
-            </a:r>
-            <a:pPr indent="0" marL="0">
-              <a:buNone/>
-            </a:pPr>
-            <a:r>
-              <a:rPr lang="en-US" sz="1050" dirty="0">
-                <a:solidFill>
-                  <a:srgbClr val="565663"/>
-                </a:solidFill>
-                <a:latin typeface="Arial" pitchFamily="34" charset="0"/>
-                <a:ea typeface="Arial" pitchFamily="34" charset="-122"/>
-                <a:cs typeface="Arial" pitchFamily="34" charset="-120"/>
-              </a:rPr>
-              <a:t>PHP · 세션 인증 · SQL</a:t>
-            </a:r>
-            <a:endParaRPr lang="en-US" sz="1050" dirty="0"/>
           </a:p>
         </p:txBody>
       </p:sp>
@@ -9987,7 +7224,7 @@
         </p:nvSpPr>
         <p:spPr>
           <a:xfrm>
-            <a:off x="640080" y="384048"/>
+            <a:off x="640080" y="411480"/>
             <a:ext cx="10908792" cy="566928"/>
           </a:xfrm>
           <a:prstGeom prst="rect">
@@ -10012,7 +7249,7 @@
                 <a:ea typeface="Arial" pitchFamily="34" charset="-122"/>
                 <a:cs typeface="Arial" pitchFamily="34" charset="-120"/>
               </a:rPr>
-              <a:t>집중 스킬</a:t>
+              <a:t>개발 방식과 학습</a:t>
             </a:r>
             <a:endParaRPr lang="en-US" sz="2600" dirty="0"/>
           </a:p>
@@ -10026,7 +7263,7 @@
         </p:nvSpPr>
         <p:spPr>
           <a:xfrm>
-            <a:off x="640080" y="969264"/>
+            <a:off x="640080" y="987552"/>
             <a:ext cx="10908792" cy="384048"/>
           </a:xfrm>
           <a:prstGeom prst="rect">
@@ -10051,7 +7288,7 @@
                 <a:ea typeface="Arial" pitchFamily="34" charset="-122"/>
                 <a:cs typeface="Arial" pitchFamily="34" charset="-120"/>
               </a:rPr>
-              <a:t>여러 프로젝트를 관통하는 세 가지 핵심 강점</a:t>
+              <a:t>AI와 함께 빠르게 만들되, 밑바닥 기본기는 따로 공부해 채워갑니다.</a:t>
             </a:r>
             <a:endParaRPr lang="en-US" sz="1250" dirty="0"/>
           </a:p>
@@ -10065,12 +7302,12 @@
         </p:nvSpPr>
         <p:spPr>
           <a:xfrm>
-            <a:off x="640080" y="1463040"/>
-            <a:ext cx="10908792" cy="1481328"/>
+            <a:off x="640080" y="1600200"/>
+            <a:ext cx="5271516" cy="4023360"/>
           </a:xfrm>
           <a:prstGeom prst="roundRect">
             <a:avLst>
-              <a:gd name="adj" fmla="val 5556"/>
+              <a:gd name="adj" fmla="val 2045"/>
             </a:avLst>
           </a:prstGeom>
           <a:solidFill>
@@ -10099,8 +7336,8 @@
         </p:nvSpPr>
         <p:spPr>
           <a:xfrm>
-            <a:off x="914400" y="1591056"/>
-            <a:ext cx="10360152" cy="365760"/>
+            <a:off x="932688" y="1783080"/>
+            <a:ext cx="4686300" cy="365760"/>
           </a:xfrm>
           <a:prstGeom prst="rect">
             <a:avLst/>
@@ -10116,7 +7353,7 @@
               <a:buNone/>
             </a:pPr>
             <a:r>
-              <a:rPr lang="en-US" sz="1400" b="1" dirty="0">
+              <a:rPr lang="en-US" sz="1500" b="1" dirty="0">
                 <a:solidFill>
                   <a:srgbClr val="33386E"/>
                 </a:solidFill>
@@ -10124,23 +7361,9 @@
                 <a:ea typeface="Arial" pitchFamily="34" charset="-122"/>
                 <a:cs typeface="Arial" pitchFamily="34" charset="-120"/>
               </a:rPr>
-              <a:t>① 대규모 코드를 ‘나누는’ 아키텍처 감각  </a:t>
+              <a:t>AI 협업 개발</a:t>
             </a:r>
-            <a:pPr indent="0" marL="0">
-              <a:buNone/>
-            </a:pPr>
-            <a:r>
-              <a:rPr lang="en-US" sz="1050" dirty="0">
-                <a:solidFill>
-                  <a:srgbClr val="565663"/>
-                </a:solidFill>
-                <a:latin typeface="Arial" pitchFamily="34" charset="0"/>
-                <a:ea typeface="Arial" pitchFamily="34" charset="-122"/>
-                <a:cs typeface="Arial" pitchFamily="34" charset="-120"/>
-              </a:rPr>
-              <a:t>— 가장 깊은 역량</a:t>
-            </a:r>
-            <a:endParaRPr lang="en-US" sz="1400" dirty="0"/>
+            <a:endParaRPr lang="en-US" sz="1500" dirty="0"/>
           </a:p>
         </p:txBody>
       </p:sp>
@@ -10152,8 +7375,8 @@
         </p:nvSpPr>
         <p:spPr>
           <a:xfrm>
-            <a:off x="960120" y="1993392"/>
-            <a:ext cx="7068312" cy="868680"/>
+            <a:off x="932688" y="2286000"/>
+            <a:ext cx="4686300" cy="3108960"/>
           </a:xfrm>
           <a:prstGeom prst="rect">
             <a:avLst/>
@@ -10166,11 +7389,14 @@
           <a:lstStyle/>
           <a:p>
             <a:pPr marL="177800" indent="-177800">
+              <a:spcAft>
+                <a:spcPts val="1200"/>
+              </a:spcAft>
               <a:buSzPct val="100000"/>
               <a:buChar char="•"/>
             </a:pPr>
             <a:r>
-              <a:rPr lang="en-US" sz="1100" dirty="0">
+              <a:rPr lang="en-US" sz="1250" dirty="0">
                 <a:solidFill>
                   <a:srgbClr val="1B1B21"/>
                 </a:solidFill>
@@ -10178,17 +7404,20 @@
                 <a:ea typeface="Arial" pitchFamily="34" charset="-122"/>
                 <a:cs typeface="Arial" pitchFamily="34" charset="-120"/>
               </a:rPr>
-              <a:t>모듈 분리: 2,665줄 전투 시스템을 partial class 5개로 분할</a:t>
+              <a:t>상당 부분을 Claude Code와 함께 만들었습니다.</a:t>
             </a:r>
-            <a:endParaRPr lang="en-US" sz="1100" dirty="0"/>
+            <a:endParaRPr lang="en-US" sz="1250" dirty="0"/>
           </a:p>
           <a:p>
             <a:pPr marL="177800" indent="-177800">
+              <a:spcAft>
+                <a:spcPts val="1200"/>
+              </a:spcAft>
               <a:buSzPct val="100000"/>
               <a:buChar char="•"/>
             </a:pPr>
             <a:r>
-              <a:rPr lang="en-US" sz="1100" dirty="0">
+              <a:rPr lang="en-US" sz="1250" dirty="0">
                 <a:solidFill>
                   <a:srgbClr val="1B1B21"/>
                 </a:solidFill>
@@ -10196,9 +7425,9 @@
                 <a:ea typeface="Arial" pitchFamily="34" charset="-122"/>
                 <a:cs typeface="Arial" pitchFamily="34" charset="-120"/>
               </a:rPr>
-              <a:t>중복 일반화: 싱글톤·재화·스택을 CRTP 제네릭으로 추출</a:t>
+              <a:t>제 역할은 무엇을 왜 만들지 정하고, 결과를 검증하고 디버깅하는 일이었습니다.</a:t>
             </a:r>
-            <a:endParaRPr lang="en-US" sz="1100" dirty="0"/>
+            <a:endParaRPr lang="en-US" sz="1250" dirty="0"/>
           </a:p>
           <a:p>
             <a:pPr marL="177800" indent="-177800">
@@ -10206,7 +7435,7 @@
               <a:buChar char="•"/>
             </a:pPr>
             <a:r>
-              <a:rPr lang="en-US" sz="1100" dirty="0">
+              <a:rPr lang="en-US" sz="1250" dirty="0">
                 <a:solidFill>
                   <a:srgbClr val="1B1B21"/>
                 </a:solidFill>
@@ -10214,65 +7443,26 @@
                 <a:ea typeface="Arial" pitchFamily="34" charset="-122"/>
                 <a:cs typeface="Arial" pitchFamily="34" charset="-120"/>
               </a:rPr>
-              <a:t>관심사 분리: 정의(JSON)와 상태(SO), 로직과 표현(이벤트) 분리</a:t>
+              <a:t>빠르게 만든 것과 완전히 이해한 것 사이의 간극은 아래 학습으로 메웁니다.</a:t>
             </a:r>
-            <a:endParaRPr lang="en-US" sz="1100" dirty="0"/>
+            <a:endParaRPr lang="en-US" sz="1250" dirty="0"/>
           </a:p>
         </p:txBody>
       </p:sp>
       <p:sp>
         <p:nvSpPr>
-          <p:cNvPr id="7" name="Text 5"/>
+          <p:cNvPr id="7" name="Shape 5"/>
           <p:cNvSpPr/>
           <p:nvPr/>
         </p:nvSpPr>
         <p:spPr>
           <a:xfrm>
-            <a:off x="7982712" y="2011680"/>
-            <a:ext cx="3291840" cy="822960"/>
-          </a:xfrm>
-          <a:prstGeom prst="rect">
-            <a:avLst/>
-          </a:prstGeom>
-          <a:noFill/>
-          <a:ln/>
-        </p:spPr>
-        <p:txBody>
-          <a:bodyPr wrap="square" lIns="0" tIns="0" rIns="0" bIns="0" rtlCol="0" anchor="ctr"/>
-          <a:lstStyle/>
-          <a:p>
-            <a:pPr algn="r" indent="0" marL="0">
-              <a:buNone/>
-            </a:pPr>
-            <a:r>
-              <a:rPr lang="en-US" sz="1050" i="1" dirty="0">
-                <a:solidFill>
-                  <a:srgbClr val="33386E"/>
-                </a:solidFill>
-                <a:latin typeface="Arial" pitchFamily="34" charset="0"/>
-                <a:ea typeface="Arial" pitchFamily="34" charset="-122"/>
-                <a:cs typeface="Arial" pitchFamily="34" charset="-120"/>
-              </a:rPr>
-              <a:t>관련 프로젝트 — INSPECTOR</a:t>
-            </a:r>
-            <a:endParaRPr lang="en-US" sz="1050" dirty="0"/>
-          </a:p>
-        </p:txBody>
-      </p:sp>
-      <p:sp>
-        <p:nvSpPr>
-          <p:cNvPr id="8" name="Shape 6"/>
-          <p:cNvSpPr/>
-          <p:nvPr/>
-        </p:nvSpPr>
-        <p:spPr>
-          <a:xfrm>
-            <a:off x="640080" y="3200400"/>
-            <a:ext cx="10908792" cy="1481328"/>
+            <a:off x="6277356" y="1600200"/>
+            <a:ext cx="5271516" cy="4023360"/>
           </a:xfrm>
           <a:prstGeom prst="roundRect">
             <a:avLst>
-              <a:gd name="adj" fmla="val 5556"/>
+              <a:gd name="adj" fmla="val 2045"/>
             </a:avLst>
           </a:prstGeom>
           <a:solidFill>
@@ -10295,14 +7485,14 @@
       </p:sp>
       <p:sp>
         <p:nvSpPr>
-          <p:cNvPr id="9" name="Text 7"/>
+          <p:cNvPr id="8" name="Text 6"/>
           <p:cNvSpPr/>
           <p:nvPr/>
         </p:nvSpPr>
         <p:spPr>
           <a:xfrm>
-            <a:off x="914400" y="3328416"/>
-            <a:ext cx="10360152" cy="365760"/>
+            <a:off x="6569964" y="1783080"/>
+            <a:ext cx="4686300" cy="365760"/>
           </a:xfrm>
           <a:prstGeom prst="rect">
             <a:avLst/>
@@ -10318,7 +7508,7 @@
               <a:buNone/>
             </a:pPr>
             <a:r>
-              <a:rPr lang="en-US" sz="1400" b="1" dirty="0">
+              <a:rPr lang="en-US" sz="1500" b="1" dirty="0">
                 <a:solidFill>
                   <a:srgbClr val="B1462C"/>
                 </a:solidFill>
@@ -10326,36 +7516,22 @@
                 <a:ea typeface="Arial" pitchFamily="34" charset="-122"/>
                 <a:cs typeface="Arial" pitchFamily="34" charset="-120"/>
               </a:rPr>
-              <a:t>② 하드웨어를 바닥부터 올리는 임베디드 브링업  </a:t>
+              <a:t>앞으로 배울 것</a:t>
             </a:r>
-            <a:pPr indent="0" marL="0">
-              <a:buNone/>
-            </a:pPr>
-            <a:r>
-              <a:rPr lang="en-US" sz="1050" dirty="0">
-                <a:solidFill>
-                  <a:srgbClr val="565663"/>
-                </a:solidFill>
-                <a:latin typeface="Arial" pitchFamily="34" charset="0"/>
-                <a:ea typeface="Arial" pitchFamily="34" charset="-122"/>
-                <a:cs typeface="Arial" pitchFamily="34" charset="-120"/>
-              </a:rPr>
-              <a:t>— 두 번째 집중 영역</a:t>
-            </a:r>
-            <a:endParaRPr lang="en-US" sz="1400" dirty="0"/>
+            <a:endParaRPr lang="en-US" sz="1500" dirty="0"/>
           </a:p>
         </p:txBody>
       </p:sp>
       <p:sp>
         <p:nvSpPr>
-          <p:cNvPr id="10" name="Text 8"/>
+          <p:cNvPr id="9" name="Text 7"/>
           <p:cNvSpPr/>
           <p:nvPr/>
         </p:nvSpPr>
         <p:spPr>
           <a:xfrm>
-            <a:off x="960120" y="3730752"/>
-            <a:ext cx="7068312" cy="868680"/>
+            <a:off x="6569964" y="2286000"/>
+            <a:ext cx="4686300" cy="3108960"/>
           </a:xfrm>
           <a:prstGeom prst="rect">
             <a:avLst/>
@@ -10368,11 +7544,14 @@
           <a:lstStyle/>
           <a:p>
             <a:pPr marL="177800" indent="-177800">
+              <a:spcAft>
+                <a:spcPts val="1100"/>
+              </a:spcAft>
               <a:buSzPct val="100000"/>
               <a:buChar char="•"/>
             </a:pPr>
             <a:r>
-              <a:rPr lang="en-US" sz="1100" dirty="0">
+              <a:rPr lang="en-US" sz="1250" dirty="0">
                 <a:solidFill>
                   <a:srgbClr val="1B1B21"/>
                 </a:solidFill>
@@ -10380,17 +7559,20 @@
                 <a:ea typeface="Arial" pitchFamily="34" charset="-122"/>
                 <a:cs typeface="Arial" pitchFamily="34" charset="-120"/>
               </a:rPr>
-              <a:t>단계적 검증: 보드→OLED→스피커→마이크→반응→AI를 독립 프로젝트로</a:t>
+              <a:t>C# 언어와 제네릭의 원리</a:t>
             </a:r>
-            <a:endParaRPr lang="en-US" sz="1100" dirty="0"/>
+            <a:endParaRPr lang="en-US" sz="1250" dirty="0"/>
           </a:p>
           <a:p>
             <a:pPr marL="177800" indent="-177800">
+              <a:spcAft>
+                <a:spcPts val="1100"/>
+              </a:spcAft>
               <a:buSzPct val="100000"/>
               <a:buChar char="•"/>
             </a:pPr>
             <a:r>
-              <a:rPr lang="en-US" sz="1100" dirty="0">
+              <a:rPr lang="en-US" sz="1250" dirty="0">
                 <a:solidFill>
                   <a:srgbClr val="1B1B21"/>
                 </a:solidFill>
@@ -10398,17 +7580,20 @@
                 <a:ea typeface="Arial" pitchFamily="34" charset="-122"/>
                 <a:cs typeface="Arial" pitchFamily="34" charset="-120"/>
               </a:rPr>
-              <a:t>저수준 통신: i2s_std로 마이크·스피커 직접 구동</a:t>
+              <a:t>자료구조와 알고리즘 직접 구현</a:t>
             </a:r>
-            <a:endParaRPr lang="en-US" sz="1100" dirty="0"/>
+            <a:endParaRPr lang="en-US" sz="1250" dirty="0"/>
           </a:p>
           <a:p>
             <a:pPr marL="177800" indent="-177800">
+              <a:spcAft>
+                <a:spcPts val="1100"/>
+              </a:spcAft>
               <a:buSzPct val="100000"/>
               <a:buChar char="•"/>
             </a:pPr>
             <a:r>
-              <a:rPr lang="en-US" sz="1100" dirty="0">
+              <a:rPr lang="en-US" sz="1250" dirty="0">
                 <a:solidFill>
                   <a:srgbClr val="1B1B21"/>
                 </a:solidFill>
@@ -10416,165 +7601,20 @@
                 <a:ea typeface="Arial" pitchFamily="34" charset="-122"/>
                 <a:cs typeface="Arial" pitchFamily="34" charset="-120"/>
               </a:rPr>
-              <a:t>목적 중심 정리: 불필요한 서보·보행 제거</a:t>
+              <a:t>디자인 패턴의 의도와 트레이드오프</a:t>
             </a:r>
-            <a:endParaRPr lang="en-US" sz="1100" dirty="0"/>
-          </a:p>
-        </p:txBody>
-      </p:sp>
-      <p:sp>
-        <p:nvSpPr>
-          <p:cNvPr id="11" name="Text 9"/>
-          <p:cNvSpPr/>
-          <p:nvPr/>
-        </p:nvSpPr>
-        <p:spPr>
-          <a:xfrm>
-            <a:off x="7982712" y="3749040"/>
-            <a:ext cx="3291840" cy="822960"/>
-          </a:xfrm>
-          <a:prstGeom prst="rect">
-            <a:avLst/>
-          </a:prstGeom>
-          <a:noFill/>
-          <a:ln/>
-        </p:spPr>
-        <p:txBody>
-          <a:bodyPr wrap="square" lIns="0" tIns="0" rIns="0" bIns="0" rtlCol="0" anchor="ctr"/>
-          <a:lstStyle/>
-          <a:p>
-            <a:pPr algn="r" indent="0" marL="0">
-              <a:buNone/>
-            </a:pPr>
-            <a:r>
-              <a:rPr lang="en-US" sz="1050" i="1" dirty="0">
-                <a:solidFill>
-                  <a:srgbClr val="B1462C"/>
-                </a:solidFill>
-                <a:latin typeface="Arial" pitchFamily="34" charset="0"/>
-                <a:ea typeface="Arial" pitchFamily="34" charset="-122"/>
-                <a:cs typeface="Arial" pitchFamily="34" charset="-120"/>
-              </a:rPr>
-              <a:t>관련 프로젝트 — 바른자세 코치봇</a:t>
-            </a:r>
-            <a:endParaRPr lang="en-US" sz="1050" dirty="0"/>
-          </a:p>
-        </p:txBody>
-      </p:sp>
-      <p:sp>
-        <p:nvSpPr>
-          <p:cNvPr id="12" name="Shape 10"/>
-          <p:cNvSpPr/>
-          <p:nvPr/>
-        </p:nvSpPr>
-        <p:spPr>
-          <a:xfrm>
-            <a:off x="640080" y="4937760"/>
-            <a:ext cx="10908792" cy="1481328"/>
-          </a:xfrm>
-          <a:prstGeom prst="roundRect">
-            <a:avLst>
-              <a:gd name="adj" fmla="val 5556"/>
-            </a:avLst>
-          </a:prstGeom>
-          <a:solidFill>
-            <a:srgbClr val="F7F7FA"/>
-          </a:solidFill>
-          <a:ln w="12700">
-            <a:solidFill>
-              <a:srgbClr val="E3E3EA"/>
-            </a:solidFill>
-            <a:prstDash val="solid"/>
-          </a:ln>
-          <a:effectLst>
-            <a:outerShdw sx="100000" sy="100000" kx="0" ky="0" algn="bl" rotWithShape="0" blurRad="76200" dist="25400" dir="5400000">
-              <a:srgbClr val="000000">
-                <a:alpha val="10000"/>
-              </a:srgbClr>
-            </a:outerShdw>
-          </a:effectLst>
-        </p:spPr>
-      </p:sp>
-      <p:sp>
-        <p:nvSpPr>
-          <p:cNvPr id="13" name="Text 11"/>
-          <p:cNvSpPr/>
-          <p:nvPr/>
-        </p:nvSpPr>
-        <p:spPr>
-          <a:xfrm>
-            <a:off x="914400" y="5065776"/>
-            <a:ext cx="10360152" cy="365760"/>
-          </a:xfrm>
-          <a:prstGeom prst="rect">
-            <a:avLst/>
-          </a:prstGeom>
-          <a:noFill/>
-          <a:ln/>
-        </p:spPr>
-        <p:txBody>
-          <a:bodyPr wrap="square" lIns="0" tIns="0" rIns="0" bIns="0" rtlCol="0" anchor="ctr"/>
-          <a:lstStyle/>
-          <a:p>
-            <a:pPr indent="0" marL="0">
-              <a:buNone/>
-            </a:pPr>
-            <a:r>
-              <a:rPr lang="en-US" sz="1400" b="1" dirty="0">
-                <a:solidFill>
-                  <a:srgbClr val="1F6F6B"/>
-                </a:solidFill>
-                <a:latin typeface="Arial" pitchFamily="34" charset="0"/>
-                <a:ea typeface="Arial" pitchFamily="34" charset="-122"/>
-                <a:cs typeface="Arial" pitchFamily="34" charset="-120"/>
-              </a:rPr>
-              <a:t>③ 분야를 가리지 않는 CS 기본기 &amp; 협업  </a:t>
-            </a:r>
-            <a:pPr indent="0" marL="0">
-              <a:buNone/>
-            </a:pPr>
-            <a:r>
-              <a:rPr lang="en-US" sz="1050" dirty="0">
-                <a:solidFill>
-                  <a:srgbClr val="565663"/>
-                </a:solidFill>
-                <a:latin typeface="Arial" pitchFamily="34" charset="0"/>
-                <a:ea typeface="Arial" pitchFamily="34" charset="-122"/>
-                <a:cs typeface="Arial" pitchFamily="34" charset="-120"/>
-              </a:rPr>
-              <a:t>— 넓은 기반</a:t>
-            </a:r>
-            <a:endParaRPr lang="en-US" sz="1400" dirty="0"/>
-          </a:p>
-        </p:txBody>
-      </p:sp>
-      <p:sp>
-        <p:nvSpPr>
-          <p:cNvPr id="14" name="Text 12"/>
-          <p:cNvSpPr/>
-          <p:nvPr/>
-        </p:nvSpPr>
-        <p:spPr>
-          <a:xfrm>
-            <a:off x="960120" y="5468112"/>
-            <a:ext cx="7068312" cy="868680"/>
-          </a:xfrm>
-          <a:prstGeom prst="rect">
-            <a:avLst/>
-          </a:prstGeom>
-          <a:noFill/>
-          <a:ln/>
-        </p:spPr>
-        <p:txBody>
-          <a:bodyPr wrap="square" lIns="0" tIns="0" rIns="0" bIns="0" rtlCol="0" anchor="ctr"/>
-          <a:lstStyle/>
+            <a:endParaRPr lang="en-US" sz="1250" dirty="0"/>
+          </a:p>
           <a:p>
             <a:pPr marL="177800" indent="-177800">
+              <a:spcAft>
+                <a:spcPts val="1100"/>
+              </a:spcAft>
               <a:buSzPct val="100000"/>
               <a:buChar char="•"/>
             </a:pPr>
             <a:r>
-              <a:rPr lang="en-US" sz="1100" dirty="0">
+              <a:rPr lang="en-US" sz="1250" dirty="0">
                 <a:solidFill>
                   <a:srgbClr val="1B1B21"/>
                 </a:solidFill>
@@ -10582,9 +7622,9 @@
                 <a:ea typeface="Arial" pitchFamily="34" charset="-122"/>
                 <a:cs typeface="Arial" pitchFamily="34" charset="-120"/>
               </a:rPr>
-              <a:t>상태 머신을 게임 전투·게임 AI·디바이스 제어에 반복 적용</a:t>
+              <a:t>임베디드 C의 포인터와 메모리</a:t>
             </a:r>
-            <a:endParaRPr lang="en-US" sz="1100" dirty="0"/>
+            <a:endParaRPr lang="en-US" sz="1250" dirty="0"/>
           </a:p>
           <a:p>
             <a:pPr marL="177800" indent="-177800">
@@ -10592,7 +7632,7 @@
               <a:buChar char="•"/>
             </a:pPr>
             <a:r>
-              <a:rPr lang="en-US" sz="1100" dirty="0">
+              <a:rPr lang="en-US" sz="1250" dirty="0">
                 <a:solidFill>
                   <a:srgbClr val="1B1B21"/>
                 </a:solidFill>
@@ -10600,66 +7640,9 @@
                 <a:ea typeface="Arial" pitchFamily="34" charset="-122"/>
                 <a:cs typeface="Arial" pitchFamily="34" charset="-120"/>
               </a:rPr>
-              <a:t>데이터 계층을 JSON·CSV·PHP 세션·DB로 상황에 맞게 선택</a:t>
+              <a:t>ROS2와 로봇 제어</a:t>
             </a:r>
-            <a:endParaRPr lang="en-US" sz="1100" dirty="0"/>
-          </a:p>
-          <a:p>
-            <a:pPr marL="177800" indent="-177800">
-              <a:buSzPct val="100000"/>
-              <a:buChar char="•"/>
-            </a:pPr>
-            <a:r>
-              <a:rPr lang="en-US" sz="1100" dirty="0">
-                <a:solidFill>
-                  <a:srgbClr val="1B1B21"/>
-                </a:solidFill>
-                <a:latin typeface="Arial" pitchFamily="34" charset="0"/>
-                <a:ea typeface="Arial" pitchFamily="34" charset="-122"/>
-                <a:cs typeface="Arial" pitchFamily="34" charset="-120"/>
-              </a:rPr>
-              <a:t>Git 브랜치·PR, QA 피드백 15+항목 반복 반영</a:t>
-            </a:r>
-            <a:endParaRPr lang="en-US" sz="1100" dirty="0"/>
-          </a:p>
-        </p:txBody>
-      </p:sp>
-      <p:sp>
-        <p:nvSpPr>
-          <p:cNvPr id="15" name="Text 13"/>
-          <p:cNvSpPr/>
-          <p:nvPr/>
-        </p:nvSpPr>
-        <p:spPr>
-          <a:xfrm>
-            <a:off x="7982712" y="5486400"/>
-            <a:ext cx="3291840" cy="822960"/>
-          </a:xfrm>
-          <a:prstGeom prst="rect">
-            <a:avLst/>
-          </a:prstGeom>
-          <a:noFill/>
-          <a:ln/>
-        </p:spPr>
-        <p:txBody>
-          <a:bodyPr wrap="square" lIns="0" tIns="0" rIns="0" bIns="0" rtlCol="0" anchor="ctr"/>
-          <a:lstStyle/>
-          <a:p>
-            <a:pPr algn="r" indent="0" marL="0">
-              <a:buNone/>
-            </a:pPr>
-            <a:r>
-              <a:rPr lang="en-US" sz="1050" i="1" dirty="0">
-                <a:solidFill>
-                  <a:srgbClr val="1F6F6B"/>
-                </a:solidFill>
-                <a:latin typeface="Arial" pitchFamily="34" charset="0"/>
-                <a:ea typeface="Arial" pitchFamily="34" charset="-122"/>
-                <a:cs typeface="Arial" pitchFamily="34" charset="-120"/>
-              </a:rPr>
-              <a:t>관련 프로젝트 — 꼬들 · PHP · 로보틱스 · INSPECTOR</a:t>
-            </a:r>
-            <a:endParaRPr lang="en-US" sz="1050" dirty="0"/>
+            <a:endParaRPr lang="en-US" sz="1250" dirty="0"/>
           </a:p>
         </p:txBody>
       </p:sp>
@@ -10703,7 +7686,7 @@
         </p:nvSpPr>
         <p:spPr>
           <a:xfrm>
-            <a:off x="640080" y="384048"/>
+            <a:off x="640080" y="411480"/>
             <a:ext cx="10908792" cy="566928"/>
           </a:xfrm>
           <a:prstGeom prst="rect">
@@ -10728,7 +7711,7 @@
                 <a:ea typeface="Arial" pitchFamily="34" charset="-122"/>
                 <a:cs typeface="Arial" pitchFamily="34" charset="-120"/>
               </a:rPr>
-              <a:t>개발 방식 — AI 협업 개발 (바이브 코딩)</a:t>
+              <a:t>경력과 이력</a:t>
             </a:r>
             <a:endParaRPr lang="en-US" sz="2600" dirty="0"/>
           </a:p>
@@ -10742,7 +7725,7 @@
         </p:nvSpPr>
         <p:spPr>
           <a:xfrm>
-            <a:off x="640080" y="969264"/>
+            <a:off x="640080" y="987552"/>
             <a:ext cx="10908792" cy="384048"/>
           </a:xfrm>
           <a:prstGeom prst="rect">
@@ -10767,9 +7750,48 @@
                 <a:ea typeface="Arial" pitchFamily="34" charset="-122"/>
                 <a:cs typeface="Arial" pitchFamily="34" charset="-120"/>
               </a:rPr>
-              <a:t>상당 부분을 AI 협업으로 구현했고, 그 과정을 하나의 실전 역량이자 학습의 출발점으로 정직하게 정리합니다.</a:t>
+              <a:t>전자와 제조 현장에서 익힌 하드웨어 감각이 임베디드 개발의 바탕이 됩니다.</a:t>
             </a:r>
             <a:endParaRPr lang="en-US" sz="1250" dirty="0"/>
+          </a:p>
+        </p:txBody>
+      </p:sp>
+      <p:sp>
+        <p:nvSpPr>
+          <p:cNvPr id="4" name="Text 2"/>
+          <p:cNvSpPr/>
+          <p:nvPr/>
+        </p:nvSpPr>
+        <p:spPr>
+          <a:xfrm>
+            <a:off x="640080" y="1463040"/>
+            <a:ext cx="5486400" cy="320040"/>
+          </a:xfrm>
+          <a:prstGeom prst="rect">
+            <a:avLst/>
+          </a:prstGeom>
+          <a:noFill/>
+          <a:ln/>
+        </p:spPr>
+        <p:txBody>
+          <a:bodyPr wrap="square" lIns="0" tIns="0" rIns="0" bIns="0" rtlCol="0" anchor="ctr"/>
+          <a:lstStyle/>
+          <a:p>
+            <a:pPr indent="0" marL="0">
+              <a:buNone/>
+            </a:pPr>
+            <a:r>
+              <a:rPr lang="en-US" sz="1300" b="1" dirty="0">
+                <a:solidFill>
+                  <a:srgbClr val="33386E"/>
+                </a:solidFill>
+                <a:latin typeface="Arial" pitchFamily="34" charset="0"/>
+                <a:ea typeface="Arial" pitchFamily="34" charset="-122"/>
+                <a:cs typeface="Arial" pitchFamily="34" charset="-120"/>
+              </a:rPr>
+              <a:t>학력</a:t>
+            </a:r>
+            <a:endParaRPr lang="en-US" sz="1300" dirty="0"/>
           </a:p>
         </p:txBody>
       </p:sp>
@@ -10788,17 +7810,16 @@
           </p:nvPr>
         </p:nvGraphicFramePr>
         <p:xfrm>
-          <a:off x="640080" y="1554480"/>
-          <a:ext cx="6766560" cy="914400"/>
+          <a:off x="640080" y="1783080"/>
+          <a:ext cx="10908792" cy="914400"/>
         </p:xfrm>
         <a:graphic>
           <a:graphicData uri="http://schemas.openxmlformats.org/drawingml/2006/table">
             <a:tbl>
               <a:tblPr/>
               <a:tblGrid>
-                <a:gridCol w="2651760"/>
-                <a:gridCol w="1097280"/>
-                <a:gridCol w="3017520"/>
+                <a:gridCol w="3383280"/>
+                <a:gridCol w="7525512"/>
               </a:tblGrid>
               <a:tr h="457200">
                 <a:tc>
@@ -10810,7 +7831,7 @@
                         <a:buNone/>
                       </a:pPr>
                       <a:r>
-                        <a:rPr lang="en-US" sz="1100" b="1" dirty="0">
+                        <a:rPr lang="en-US" sz="1200" b="1" dirty="0">
                           <a:solidFill>
                             <a:srgbClr val="FFFFFF"/>
                           </a:solidFill>
@@ -10818,84 +7839,16 @@
                           <a:ea typeface="Arial" pitchFamily="34" charset="-122"/>
                           <a:cs typeface="Arial" pitchFamily="34" charset="-120"/>
                         </a:rPr>
-                        <a:t>작업</a:t>
+                        <a:t>기간</a:t>
                       </a:r>
-                      <a:endParaRPr lang="en-US" sz="1100" dirty="0">
+                      <a:endParaRPr lang="en-US" sz="1200" dirty="0">
                         <a:latin typeface="Arial" charset="0"/>
                         <a:ea typeface="Arial" charset="0"/>
                         <a:cs typeface="Arial" charset="0"/>
                       </a:endParaRPr>
                     </a:p>
                   </a:txBody>
-                  <a:tcPr marL="76200" marR="76200" marT="25400" marB="25400" anchor="ctr">
-                    <a:lnL w="6350" cap="flat" cmpd="sng" algn="ctr">
-                      <a:solidFill>
-                        <a:srgbClr val="E3E3EA"/>
-                      </a:solidFill>
-                      <a:prstDash val="solid"/>
-                      <a:round/>
-                      <a:headEnd type="none" w="med" len="med"/>
-                      <a:tailEnd type="none" w="med" len="med"/>
-                    </a:lnL>
-                    <a:lnR w="6350" cap="flat" cmpd="sng" algn="ctr">
-                      <a:solidFill>
-                        <a:srgbClr val="E3E3EA"/>
-                      </a:solidFill>
-                      <a:prstDash val="solid"/>
-                      <a:round/>
-                      <a:headEnd type="none" w="med" len="med"/>
-                      <a:tailEnd type="none" w="med" len="med"/>
-                    </a:lnR>
-                    <a:lnT w="6350" cap="flat" cmpd="sng" algn="ctr">
-                      <a:solidFill>
-                        <a:srgbClr val="E3E3EA"/>
-                      </a:solidFill>
-                      <a:prstDash val="solid"/>
-                      <a:round/>
-                      <a:headEnd type="none" w="med" len="med"/>
-                      <a:tailEnd type="none" w="med" len="med"/>
-                    </a:lnT>
-                    <a:lnB w="6350" cap="flat" cmpd="sng" algn="ctr">
-                      <a:solidFill>
-                        <a:srgbClr val="E3E3EA"/>
-                      </a:solidFill>
-                      <a:prstDash val="solid"/>
-                      <a:round/>
-                      <a:headEnd type="none" w="med" len="med"/>
-                      <a:tailEnd type="none" w="med" len="med"/>
-                    </a:lnB>
-                    <a:solidFill>
-                      <a:srgbClr val="33386E"/>
-                    </a:solidFill>
-                  </a:tcPr>
-                </a:tc>
-                <a:tc>
-                  <a:txBody>
-                    <a:bodyPr/>
-                    <a:lstStyle/>
-                    <a:p>
-                      <a:pPr algn="ctr" indent="0" marL="0">
-                        <a:buNone/>
-                      </a:pPr>
-                      <a:r>
-                        <a:rPr lang="en-US" sz="1100" b="1" dirty="0">
-                          <a:solidFill>
-                            <a:srgbClr val="FFFFFF"/>
-                          </a:solidFill>
-                          <a:latin typeface="Arial" pitchFamily="34" charset="0"/>
-                          <a:ea typeface="Arial" pitchFamily="34" charset="-122"/>
-                          <a:cs typeface="Arial" pitchFamily="34" charset="-120"/>
-                        </a:rPr>
-                        <a:t>주도</a:t>
-                      </a:r>
-                      <a:endParaRPr lang="en-US" sz="1100" dirty="0">
-                        <a:latin typeface="Arial" charset="0"/>
-                        <a:ea typeface="Arial" charset="0"/>
-                        <a:cs typeface="Arial" charset="0"/>
-                      </a:endParaRPr>
-                    </a:p>
-                  </a:txBody>
-                  <a:tcPr marL="76200" marR="76200" marT="25400" marB="25400" anchor="ctr">
+                  <a:tcPr marL="88900" marR="88900" marT="38100" marB="38100" anchor="ctr">
                     <a:lnL w="6350" cap="flat" cmpd="sng" algn="ctr">
                       <a:solidFill>
                         <a:srgbClr val="E3E3EA"/>
@@ -10946,7 +7899,7 @@
                         <a:buNone/>
                       </a:pPr>
                       <a:r>
-                        <a:rPr lang="en-US" sz="1100" b="1" dirty="0">
+                        <a:rPr lang="en-US" sz="1200" b="1" dirty="0">
                           <a:solidFill>
                             <a:srgbClr val="FFFFFF"/>
                           </a:solidFill>
@@ -10954,16 +7907,16 @@
                           <a:ea typeface="Arial" pitchFamily="34" charset="-122"/>
                           <a:cs typeface="Arial" pitchFamily="34" charset="-120"/>
                         </a:rPr>
-                        <a:t>내용</a:t>
+                        <a:t>학교와 학과</a:t>
                       </a:r>
-                      <a:endParaRPr lang="en-US" sz="1100" dirty="0">
+                      <a:endParaRPr lang="en-US" sz="1200" dirty="0">
                         <a:latin typeface="Arial" charset="0"/>
                         <a:ea typeface="Arial" charset="0"/>
                         <a:cs typeface="Arial" charset="0"/>
                       </a:endParaRPr>
                     </a:p>
                   </a:txBody>
-                  <a:tcPr marL="76200" marR="76200" marT="25400" marB="25400" anchor="ctr">
+                  <a:tcPr marL="88900" marR="88900" marT="38100" marB="38100" anchor="ctr">
                     <a:lnL w="6350" cap="flat" cmpd="sng" algn="ctr">
                       <a:solidFill>
                         <a:srgbClr val="E3E3EA"/>
@@ -11016,7 +7969,7 @@
                         <a:buNone/>
                       </a:pPr>
                       <a:r>
-                        <a:rPr lang="en-US" sz="1100" dirty="0">
+                        <a:rPr lang="en-US" sz="1200" dirty="0">
                           <a:solidFill>
                             <a:srgbClr val="1B1B21"/>
                           </a:solidFill>
@@ -11024,81 +7977,16 @@
                           <a:ea typeface="Arial" pitchFamily="34" charset="-122"/>
                           <a:cs typeface="Arial" pitchFamily="34" charset="-120"/>
                         </a:rPr>
-                        <a:t>요구 정의 · 문제 분해</a:t>
+                        <a:t>2024.03 - 2027.02 (졸업예정)</a:t>
                       </a:r>
-                      <a:endParaRPr lang="en-US" sz="1100" dirty="0">
+                      <a:endParaRPr lang="en-US" sz="1200" dirty="0">
                         <a:latin typeface="Arial" charset="0"/>
                         <a:ea typeface="Arial" charset="0"/>
                         <a:cs typeface="Arial" charset="0"/>
                       </a:endParaRPr>
                     </a:p>
                   </a:txBody>
-                  <a:tcPr marL="76200" marR="76200" marT="25400" marB="25400" anchor="ctr">
-                    <a:lnL w="6350" cap="flat" cmpd="sng" algn="ctr">
-                      <a:solidFill>
-                        <a:srgbClr val="E3E3EA"/>
-                      </a:solidFill>
-                      <a:prstDash val="solid"/>
-                      <a:round/>
-                      <a:headEnd type="none" w="med" len="med"/>
-                      <a:tailEnd type="none" w="med" len="med"/>
-                    </a:lnL>
-                    <a:lnR w="6350" cap="flat" cmpd="sng" algn="ctr">
-                      <a:solidFill>
-                        <a:srgbClr val="E3E3EA"/>
-                      </a:solidFill>
-                      <a:prstDash val="solid"/>
-                      <a:round/>
-                      <a:headEnd type="none" w="med" len="med"/>
-                      <a:tailEnd type="none" w="med" len="med"/>
-                    </a:lnR>
-                    <a:lnT w="6350" cap="flat" cmpd="sng" algn="ctr">
-                      <a:solidFill>
-                        <a:srgbClr val="E3E3EA"/>
-                      </a:solidFill>
-                      <a:prstDash val="solid"/>
-                      <a:round/>
-                      <a:headEnd type="none" w="med" len="med"/>
-                      <a:tailEnd type="none" w="med" len="med"/>
-                    </a:lnT>
-                    <a:lnB w="6350" cap="flat" cmpd="sng" algn="ctr">
-                      <a:solidFill>
-                        <a:srgbClr val="E3E3EA"/>
-                      </a:solidFill>
-                      <a:prstDash val="solid"/>
-                      <a:round/>
-                      <a:headEnd type="none" w="med" len="med"/>
-                      <a:tailEnd type="none" w="med" len="med"/>
-                    </a:lnB>
-                  </a:tcPr>
-                </a:tc>
-                <a:tc>
-                  <a:txBody>
-                    <a:bodyPr/>
-                    <a:lstStyle/>
-                    <a:p>
-                      <a:pPr algn="ctr" indent="0" marL="0">
-                        <a:buNone/>
-                      </a:pPr>
-                      <a:r>
-                        <a:rPr lang="en-US" sz="1100" b="1" dirty="0">
-                          <a:solidFill>
-                            <a:srgbClr val="33386E"/>
-                          </a:solidFill>
-                          <a:latin typeface="Arial" pitchFamily="34" charset="0"/>
-                          <a:ea typeface="Arial" pitchFamily="34" charset="-122"/>
-                          <a:cs typeface="Arial" pitchFamily="34" charset="-120"/>
-                        </a:rPr>
-                        <a:t>본인</a:t>
-                      </a:r>
-                      <a:endParaRPr lang="en-US" sz="1100" dirty="0">
-                        <a:latin typeface="Arial" charset="0"/>
-                        <a:ea typeface="Arial" charset="0"/>
-                        <a:cs typeface="Arial" charset="0"/>
-                      </a:endParaRPr>
-                    </a:p>
-                  </a:txBody>
-                  <a:tcPr marL="76200" marR="76200" marT="25400" marB="25400" anchor="ctr">
+                  <a:tcPr marL="88900" marR="88900" marT="38100" marB="38100" anchor="ctr">
                     <a:lnL w="6350" cap="flat" cmpd="sng" algn="ctr">
                       <a:solidFill>
                         <a:srgbClr val="E3E3EA"/>
@@ -11146,7 +8034,7 @@
                         <a:buNone/>
                       </a:pPr>
                       <a:r>
-                        <a:rPr lang="en-US" sz="1100" dirty="0">
+                        <a:rPr lang="en-US" sz="1200" dirty="0">
                           <a:solidFill>
                             <a:srgbClr val="1B1B21"/>
                           </a:solidFill>
@@ -11154,16 +8042,16 @@
                           <a:ea typeface="Arial" pitchFamily="34" charset="-122"/>
                           <a:cs typeface="Arial" pitchFamily="34" charset="-120"/>
                         </a:rPr>
-                        <a:t>무엇을·왜 만들지, 완료 기준 설정</a:t>
+                        <a:t>영남이공대학교 소프트웨어융합과</a:t>
                       </a:r>
-                      <a:endParaRPr lang="en-US" sz="1100" dirty="0">
+                      <a:endParaRPr lang="en-US" sz="1200" dirty="0">
                         <a:latin typeface="Arial" charset="0"/>
                         <a:ea typeface="Arial" charset="0"/>
                         <a:cs typeface="Arial" charset="0"/>
                       </a:endParaRPr>
                     </a:p>
                   </a:txBody>
-                  <a:tcPr marL="76200" marR="76200" marT="25400" marB="25400" anchor="ctr">
+                  <a:tcPr marL="88900" marR="88900" marT="38100" marB="38100" anchor="ctr">
                     <a:lnL w="6350" cap="flat" cmpd="sng" algn="ctr">
                       <a:solidFill>
                         <a:srgbClr val="E3E3EA"/>
@@ -11213,7 +8101,7 @@
                         <a:buNone/>
                       </a:pPr>
                       <a:r>
-                        <a:rPr lang="en-US" sz="1100" dirty="0">
+                        <a:rPr lang="en-US" sz="1200" dirty="0">
                           <a:solidFill>
                             <a:srgbClr val="1B1B21"/>
                           </a:solidFill>
@@ -11221,81 +8109,16 @@
                           <a:ea typeface="Arial" pitchFamily="34" charset="-122"/>
                           <a:cs typeface="Arial" pitchFamily="34" charset="-120"/>
                         </a:rPr>
-                        <a:t>아키텍처 · 구조 설계 판단</a:t>
+                        <a:t>2017.03 - 2020.01</a:t>
                       </a:r>
-                      <a:endParaRPr lang="en-US" sz="1100" dirty="0">
+                      <a:endParaRPr lang="en-US" sz="1200" dirty="0">
                         <a:latin typeface="Arial" charset="0"/>
                         <a:ea typeface="Arial" charset="0"/>
                         <a:cs typeface="Arial" charset="0"/>
                       </a:endParaRPr>
                     </a:p>
                   </a:txBody>
-                  <a:tcPr marL="76200" marR="76200" marT="25400" marB="25400" anchor="ctr">
-                    <a:lnL w="6350" cap="flat" cmpd="sng" algn="ctr">
-                      <a:solidFill>
-                        <a:srgbClr val="E3E3EA"/>
-                      </a:solidFill>
-                      <a:prstDash val="solid"/>
-                      <a:round/>
-                      <a:headEnd type="none" w="med" len="med"/>
-                      <a:tailEnd type="none" w="med" len="med"/>
-                    </a:lnL>
-                    <a:lnR w="6350" cap="flat" cmpd="sng" algn="ctr">
-                      <a:solidFill>
-                        <a:srgbClr val="E3E3EA"/>
-                      </a:solidFill>
-                      <a:prstDash val="solid"/>
-                      <a:round/>
-                      <a:headEnd type="none" w="med" len="med"/>
-                      <a:tailEnd type="none" w="med" len="med"/>
-                    </a:lnR>
-                    <a:lnT w="6350" cap="flat" cmpd="sng" algn="ctr">
-                      <a:solidFill>
-                        <a:srgbClr val="E3E3EA"/>
-                      </a:solidFill>
-                      <a:prstDash val="solid"/>
-                      <a:round/>
-                      <a:headEnd type="none" w="med" len="med"/>
-                      <a:tailEnd type="none" w="med" len="med"/>
-                    </a:lnT>
-                    <a:lnB w="6350" cap="flat" cmpd="sng" algn="ctr">
-                      <a:solidFill>
-                        <a:srgbClr val="E3E3EA"/>
-                      </a:solidFill>
-                      <a:prstDash val="solid"/>
-                      <a:round/>
-                      <a:headEnd type="none" w="med" len="med"/>
-                      <a:tailEnd type="none" w="med" len="med"/>
-                    </a:lnB>
-                  </a:tcPr>
-                </a:tc>
-                <a:tc>
-                  <a:txBody>
-                    <a:bodyPr/>
-                    <a:lstStyle/>
-                    <a:p>
-                      <a:pPr algn="ctr" indent="0" marL="0">
-                        <a:buNone/>
-                      </a:pPr>
-                      <a:r>
-                        <a:rPr lang="en-US" sz="1100" b="1" dirty="0">
-                          <a:solidFill>
-                            <a:srgbClr val="33386E"/>
-                          </a:solidFill>
-                          <a:latin typeface="Arial" pitchFamily="34" charset="0"/>
-                          <a:ea typeface="Arial" pitchFamily="34" charset="-122"/>
-                          <a:cs typeface="Arial" pitchFamily="34" charset="-120"/>
-                        </a:rPr>
-                        <a:t>본인</a:t>
-                      </a:r>
-                      <a:endParaRPr lang="en-US" sz="1100" dirty="0">
-                        <a:latin typeface="Arial" charset="0"/>
-                        <a:ea typeface="Arial" charset="0"/>
-                        <a:cs typeface="Arial" charset="0"/>
-                      </a:endParaRPr>
-                    </a:p>
-                  </a:txBody>
-                  <a:tcPr marL="76200" marR="76200" marT="25400" marB="25400" anchor="ctr">
+                  <a:tcPr marL="88900" marR="88900" marT="38100" marB="38100" anchor="ctr">
                     <a:lnL w="6350" cap="flat" cmpd="sng" algn="ctr">
                       <a:solidFill>
                         <a:srgbClr val="E3E3EA"/>
@@ -11343,7 +8166,7 @@
                         <a:buNone/>
                       </a:pPr>
                       <a:r>
-                        <a:rPr lang="en-US" sz="1100" dirty="0">
+                        <a:rPr lang="en-US" sz="1200" dirty="0">
                           <a:solidFill>
                             <a:srgbClr val="1B1B21"/>
                           </a:solidFill>
@@ -11351,607 +8174,16 @@
                           <a:ea typeface="Arial" pitchFamily="34" charset="-122"/>
                           <a:cs typeface="Arial" pitchFamily="34" charset="-120"/>
                         </a:rPr>
-                        <a:t>partial 분리·데이터 주도·단계별 브링업 결정</a:t>
+                        <a:t>경북기계공업고등학교 전자과</a:t>
                       </a:r>
-                      <a:endParaRPr lang="en-US" sz="1100" dirty="0">
+                      <a:endParaRPr lang="en-US" sz="1200" dirty="0">
                         <a:latin typeface="Arial" charset="0"/>
                         <a:ea typeface="Arial" charset="0"/>
                         <a:cs typeface="Arial" charset="0"/>
                       </a:endParaRPr>
                     </a:p>
                   </a:txBody>
-                  <a:tcPr marL="76200" marR="76200" marT="25400" marB="25400" anchor="ctr">
-                    <a:lnL w="6350" cap="flat" cmpd="sng" algn="ctr">
-                      <a:solidFill>
-                        <a:srgbClr val="E3E3EA"/>
-                      </a:solidFill>
-                      <a:prstDash val="solid"/>
-                      <a:round/>
-                      <a:headEnd type="none" w="med" len="med"/>
-                      <a:tailEnd type="none" w="med" len="med"/>
-                    </a:lnL>
-                    <a:lnR w="6350" cap="flat" cmpd="sng" algn="ctr">
-                      <a:solidFill>
-                        <a:srgbClr val="E3E3EA"/>
-                      </a:solidFill>
-                      <a:prstDash val="solid"/>
-                      <a:round/>
-                      <a:headEnd type="none" w="med" len="med"/>
-                      <a:tailEnd type="none" w="med" len="med"/>
-                    </a:lnR>
-                    <a:lnT w="6350" cap="flat" cmpd="sng" algn="ctr">
-                      <a:solidFill>
-                        <a:srgbClr val="E3E3EA"/>
-                      </a:solidFill>
-                      <a:prstDash val="solid"/>
-                      <a:round/>
-                      <a:headEnd type="none" w="med" len="med"/>
-                      <a:tailEnd type="none" w="med" len="med"/>
-                    </a:lnT>
-                    <a:lnB w="6350" cap="flat" cmpd="sng" algn="ctr">
-                      <a:solidFill>
-                        <a:srgbClr val="E3E3EA"/>
-                      </a:solidFill>
-                      <a:prstDash val="solid"/>
-                      <a:round/>
-                      <a:headEnd type="none" w="med" len="med"/>
-                      <a:tailEnd type="none" w="med" len="med"/>
-                    </a:lnB>
-                  </a:tcPr>
-                </a:tc>
-              </a:tr>
-              <a:tr h="457200">
-                <a:tc>
-                  <a:txBody>
-                    <a:bodyPr/>
-                    <a:lstStyle/>
-                    <a:p>
-                      <a:pPr indent="0" marL="0">
-                        <a:buNone/>
-                      </a:pPr>
-                      <a:r>
-                        <a:rPr lang="en-US" sz="1100" dirty="0">
-                          <a:solidFill>
-                            <a:srgbClr val="1B1B21"/>
-                          </a:solidFill>
-                          <a:latin typeface="Arial" pitchFamily="34" charset="0"/>
-                          <a:ea typeface="Arial" pitchFamily="34" charset="-122"/>
-                          <a:cs typeface="Arial" pitchFamily="34" charset="-120"/>
-                        </a:rPr>
-                        <a:t>반복 구현 · 보일러플레이트</a:t>
-                      </a:r>
-                      <a:endParaRPr lang="en-US" sz="1100" dirty="0">
-                        <a:latin typeface="Arial" charset="0"/>
-                        <a:ea typeface="Arial" charset="0"/>
-                        <a:cs typeface="Arial" charset="0"/>
-                      </a:endParaRPr>
-                    </a:p>
-                  </a:txBody>
-                  <a:tcPr marL="76200" marR="76200" marT="25400" marB="25400" anchor="ctr">
-                    <a:lnL w="6350" cap="flat" cmpd="sng" algn="ctr">
-                      <a:solidFill>
-                        <a:srgbClr val="E3E3EA"/>
-                      </a:solidFill>
-                      <a:prstDash val="solid"/>
-                      <a:round/>
-                      <a:headEnd type="none" w="med" len="med"/>
-                      <a:tailEnd type="none" w="med" len="med"/>
-                    </a:lnL>
-                    <a:lnR w="6350" cap="flat" cmpd="sng" algn="ctr">
-                      <a:solidFill>
-                        <a:srgbClr val="E3E3EA"/>
-                      </a:solidFill>
-                      <a:prstDash val="solid"/>
-                      <a:round/>
-                      <a:headEnd type="none" w="med" len="med"/>
-                      <a:tailEnd type="none" w="med" len="med"/>
-                    </a:lnR>
-                    <a:lnT w="6350" cap="flat" cmpd="sng" algn="ctr">
-                      <a:solidFill>
-                        <a:srgbClr val="E3E3EA"/>
-                      </a:solidFill>
-                      <a:prstDash val="solid"/>
-                      <a:round/>
-                      <a:headEnd type="none" w="med" len="med"/>
-                      <a:tailEnd type="none" w="med" len="med"/>
-                    </a:lnT>
-                    <a:lnB w="6350" cap="flat" cmpd="sng" algn="ctr">
-                      <a:solidFill>
-                        <a:srgbClr val="E3E3EA"/>
-                      </a:solidFill>
-                      <a:prstDash val="solid"/>
-                      <a:round/>
-                      <a:headEnd type="none" w="med" len="med"/>
-                      <a:tailEnd type="none" w="med" len="med"/>
-                    </a:lnB>
-                  </a:tcPr>
-                </a:tc>
-                <a:tc>
-                  <a:txBody>
-                    <a:bodyPr/>
-                    <a:lstStyle/>
-                    <a:p>
-                      <a:pPr algn="ctr" indent="0" marL="0">
-                        <a:buNone/>
-                      </a:pPr>
-                      <a:r>
-                        <a:rPr lang="en-US" sz="1100" dirty="0">
-                          <a:solidFill>
-                            <a:srgbClr val="565663"/>
-                          </a:solidFill>
-                          <a:latin typeface="Arial" pitchFamily="34" charset="0"/>
-                          <a:ea typeface="Arial" pitchFamily="34" charset="-122"/>
-                          <a:cs typeface="Arial" pitchFamily="34" charset="-120"/>
-                        </a:rPr>
-                        <a:t>AI 가속</a:t>
-                      </a:r>
-                      <a:endParaRPr lang="en-US" sz="1100" dirty="0">
-                        <a:latin typeface="Arial" charset="0"/>
-                        <a:ea typeface="Arial" charset="0"/>
-                        <a:cs typeface="Arial" charset="0"/>
-                      </a:endParaRPr>
-                    </a:p>
-                  </a:txBody>
-                  <a:tcPr marL="76200" marR="76200" marT="25400" marB="25400" anchor="ctr">
-                    <a:lnL w="6350" cap="flat" cmpd="sng" algn="ctr">
-                      <a:solidFill>
-                        <a:srgbClr val="E3E3EA"/>
-                      </a:solidFill>
-                      <a:prstDash val="solid"/>
-                      <a:round/>
-                      <a:headEnd type="none" w="med" len="med"/>
-                      <a:tailEnd type="none" w="med" len="med"/>
-                    </a:lnL>
-                    <a:lnR w="6350" cap="flat" cmpd="sng" algn="ctr">
-                      <a:solidFill>
-                        <a:srgbClr val="E3E3EA"/>
-                      </a:solidFill>
-                      <a:prstDash val="solid"/>
-                      <a:round/>
-                      <a:headEnd type="none" w="med" len="med"/>
-                      <a:tailEnd type="none" w="med" len="med"/>
-                    </a:lnR>
-                    <a:lnT w="6350" cap="flat" cmpd="sng" algn="ctr">
-                      <a:solidFill>
-                        <a:srgbClr val="E3E3EA"/>
-                      </a:solidFill>
-                      <a:prstDash val="solid"/>
-                      <a:round/>
-                      <a:headEnd type="none" w="med" len="med"/>
-                      <a:tailEnd type="none" w="med" len="med"/>
-                    </a:lnT>
-                    <a:lnB w="6350" cap="flat" cmpd="sng" algn="ctr">
-                      <a:solidFill>
-                        <a:srgbClr val="E3E3EA"/>
-                      </a:solidFill>
-                      <a:prstDash val="solid"/>
-                      <a:round/>
-                      <a:headEnd type="none" w="med" len="med"/>
-                      <a:tailEnd type="none" w="med" len="med"/>
-                    </a:lnB>
-                  </a:tcPr>
-                </a:tc>
-                <a:tc>
-                  <a:txBody>
-                    <a:bodyPr/>
-                    <a:lstStyle/>
-                    <a:p>
-                      <a:pPr indent="0" marL="0">
-                        <a:buNone/>
-                      </a:pPr>
-                      <a:r>
-                        <a:rPr lang="en-US" sz="1100" dirty="0">
-                          <a:solidFill>
-                            <a:srgbClr val="1B1B21"/>
-                          </a:solidFill>
-                          <a:latin typeface="Arial" pitchFamily="34" charset="0"/>
-                          <a:ea typeface="Arial" pitchFamily="34" charset="-122"/>
-                          <a:cs typeface="Arial" pitchFamily="34" charset="-120"/>
-                        </a:rPr>
-                        <a:t>정의된 구조를 코드로 빠르게 채움</a:t>
-                      </a:r>
-                      <a:endParaRPr lang="en-US" sz="1100" dirty="0">
-                        <a:latin typeface="Arial" charset="0"/>
-                        <a:ea typeface="Arial" charset="0"/>
-                        <a:cs typeface="Arial" charset="0"/>
-                      </a:endParaRPr>
-                    </a:p>
-                  </a:txBody>
-                  <a:tcPr marL="76200" marR="76200" marT="25400" marB="25400" anchor="ctr">
-                    <a:lnL w="6350" cap="flat" cmpd="sng" algn="ctr">
-                      <a:solidFill>
-                        <a:srgbClr val="E3E3EA"/>
-                      </a:solidFill>
-                      <a:prstDash val="solid"/>
-                      <a:round/>
-                      <a:headEnd type="none" w="med" len="med"/>
-                      <a:tailEnd type="none" w="med" len="med"/>
-                    </a:lnL>
-                    <a:lnR w="6350" cap="flat" cmpd="sng" algn="ctr">
-                      <a:solidFill>
-                        <a:srgbClr val="E3E3EA"/>
-                      </a:solidFill>
-                      <a:prstDash val="solid"/>
-                      <a:round/>
-                      <a:headEnd type="none" w="med" len="med"/>
-                      <a:tailEnd type="none" w="med" len="med"/>
-                    </a:lnR>
-                    <a:lnT w="6350" cap="flat" cmpd="sng" algn="ctr">
-                      <a:solidFill>
-                        <a:srgbClr val="E3E3EA"/>
-                      </a:solidFill>
-                      <a:prstDash val="solid"/>
-                      <a:round/>
-                      <a:headEnd type="none" w="med" len="med"/>
-                      <a:tailEnd type="none" w="med" len="med"/>
-                    </a:lnT>
-                    <a:lnB w="6350" cap="flat" cmpd="sng" algn="ctr">
-                      <a:solidFill>
-                        <a:srgbClr val="E3E3EA"/>
-                      </a:solidFill>
-                      <a:prstDash val="solid"/>
-                      <a:round/>
-                      <a:headEnd type="none" w="med" len="med"/>
-                      <a:tailEnd type="none" w="med" len="med"/>
-                    </a:lnB>
-                  </a:tcPr>
-                </a:tc>
-              </a:tr>
-              <a:tr h="457200">
-                <a:tc>
-                  <a:txBody>
-                    <a:bodyPr/>
-                    <a:lstStyle/>
-                    <a:p>
-                      <a:pPr indent="0" marL="0">
-                        <a:buNone/>
-                      </a:pPr>
-                      <a:r>
-                        <a:rPr lang="en-US" sz="1100" dirty="0">
-                          <a:solidFill>
-                            <a:srgbClr val="1B1B21"/>
-                          </a:solidFill>
-                          <a:latin typeface="Arial" pitchFamily="34" charset="0"/>
-                          <a:ea typeface="Arial" pitchFamily="34" charset="-122"/>
-                          <a:cs typeface="Arial" pitchFamily="34" charset="-120"/>
-                        </a:rPr>
-                        <a:t>코드 리뷰 · 통합 · 디버깅</a:t>
-                      </a:r>
-                      <a:endParaRPr lang="en-US" sz="1100" dirty="0">
-                        <a:latin typeface="Arial" charset="0"/>
-                        <a:ea typeface="Arial" charset="0"/>
-                        <a:cs typeface="Arial" charset="0"/>
-                      </a:endParaRPr>
-                    </a:p>
-                  </a:txBody>
-                  <a:tcPr marL="76200" marR="76200" marT="25400" marB="25400" anchor="ctr">
-                    <a:lnL w="6350" cap="flat" cmpd="sng" algn="ctr">
-                      <a:solidFill>
-                        <a:srgbClr val="E3E3EA"/>
-                      </a:solidFill>
-                      <a:prstDash val="solid"/>
-                      <a:round/>
-                      <a:headEnd type="none" w="med" len="med"/>
-                      <a:tailEnd type="none" w="med" len="med"/>
-                    </a:lnL>
-                    <a:lnR w="6350" cap="flat" cmpd="sng" algn="ctr">
-                      <a:solidFill>
-                        <a:srgbClr val="E3E3EA"/>
-                      </a:solidFill>
-                      <a:prstDash val="solid"/>
-                      <a:round/>
-                      <a:headEnd type="none" w="med" len="med"/>
-                      <a:tailEnd type="none" w="med" len="med"/>
-                    </a:lnR>
-                    <a:lnT w="6350" cap="flat" cmpd="sng" algn="ctr">
-                      <a:solidFill>
-                        <a:srgbClr val="E3E3EA"/>
-                      </a:solidFill>
-                      <a:prstDash val="solid"/>
-                      <a:round/>
-                      <a:headEnd type="none" w="med" len="med"/>
-                      <a:tailEnd type="none" w="med" len="med"/>
-                    </a:lnT>
-                    <a:lnB w="6350" cap="flat" cmpd="sng" algn="ctr">
-                      <a:solidFill>
-                        <a:srgbClr val="E3E3EA"/>
-                      </a:solidFill>
-                      <a:prstDash val="solid"/>
-                      <a:round/>
-                      <a:headEnd type="none" w="med" len="med"/>
-                      <a:tailEnd type="none" w="med" len="med"/>
-                    </a:lnB>
-                  </a:tcPr>
-                </a:tc>
-                <a:tc>
-                  <a:txBody>
-                    <a:bodyPr/>
-                    <a:lstStyle/>
-                    <a:p>
-                      <a:pPr algn="ctr" indent="0" marL="0">
-                        <a:buNone/>
-                      </a:pPr>
-                      <a:r>
-                        <a:rPr lang="en-US" sz="1100" b="1" dirty="0">
-                          <a:solidFill>
-                            <a:srgbClr val="33386E"/>
-                          </a:solidFill>
-                          <a:latin typeface="Arial" pitchFamily="34" charset="0"/>
-                          <a:ea typeface="Arial" pitchFamily="34" charset="-122"/>
-                          <a:cs typeface="Arial" pitchFamily="34" charset="-120"/>
-                        </a:rPr>
-                        <a:t>본인</a:t>
-                      </a:r>
-                      <a:endParaRPr lang="en-US" sz="1100" dirty="0">
-                        <a:latin typeface="Arial" charset="0"/>
-                        <a:ea typeface="Arial" charset="0"/>
-                        <a:cs typeface="Arial" charset="0"/>
-                      </a:endParaRPr>
-                    </a:p>
-                  </a:txBody>
-                  <a:tcPr marL="76200" marR="76200" marT="25400" marB="25400" anchor="ctr">
-                    <a:lnL w="6350" cap="flat" cmpd="sng" algn="ctr">
-                      <a:solidFill>
-                        <a:srgbClr val="E3E3EA"/>
-                      </a:solidFill>
-                      <a:prstDash val="solid"/>
-                      <a:round/>
-                      <a:headEnd type="none" w="med" len="med"/>
-                      <a:tailEnd type="none" w="med" len="med"/>
-                    </a:lnL>
-                    <a:lnR w="6350" cap="flat" cmpd="sng" algn="ctr">
-                      <a:solidFill>
-                        <a:srgbClr val="E3E3EA"/>
-                      </a:solidFill>
-                      <a:prstDash val="solid"/>
-                      <a:round/>
-                      <a:headEnd type="none" w="med" len="med"/>
-                      <a:tailEnd type="none" w="med" len="med"/>
-                    </a:lnR>
-                    <a:lnT w="6350" cap="flat" cmpd="sng" algn="ctr">
-                      <a:solidFill>
-                        <a:srgbClr val="E3E3EA"/>
-                      </a:solidFill>
-                      <a:prstDash val="solid"/>
-                      <a:round/>
-                      <a:headEnd type="none" w="med" len="med"/>
-                      <a:tailEnd type="none" w="med" len="med"/>
-                    </a:lnT>
-                    <a:lnB w="6350" cap="flat" cmpd="sng" algn="ctr">
-                      <a:solidFill>
-                        <a:srgbClr val="E3E3EA"/>
-                      </a:solidFill>
-                      <a:prstDash val="solid"/>
-                      <a:round/>
-                      <a:headEnd type="none" w="med" len="med"/>
-                      <a:tailEnd type="none" w="med" len="med"/>
-                    </a:lnB>
-                  </a:tcPr>
-                </a:tc>
-                <a:tc>
-                  <a:txBody>
-                    <a:bodyPr/>
-                    <a:lstStyle/>
-                    <a:p>
-                      <a:pPr indent="0" marL="0">
-                        <a:buNone/>
-                      </a:pPr>
-                      <a:r>
-                        <a:rPr lang="en-US" sz="1100" dirty="0">
-                          <a:solidFill>
-                            <a:srgbClr val="1B1B21"/>
-                          </a:solidFill>
-                          <a:latin typeface="Arial" pitchFamily="34" charset="0"/>
-                          <a:ea typeface="Arial" pitchFamily="34" charset="-122"/>
-                          <a:cs typeface="Arial" pitchFamily="34" charset="-120"/>
-                        </a:rPr>
-                        <a:t>동작 검증, 버그 추적, 조각 통합</a:t>
-                      </a:r>
-                      <a:endParaRPr lang="en-US" sz="1100" dirty="0">
-                        <a:latin typeface="Arial" charset="0"/>
-                        <a:ea typeface="Arial" charset="0"/>
-                        <a:cs typeface="Arial" charset="0"/>
-                      </a:endParaRPr>
-                    </a:p>
-                  </a:txBody>
-                  <a:tcPr marL="76200" marR="76200" marT="25400" marB="25400" anchor="ctr">
-                    <a:lnL w="6350" cap="flat" cmpd="sng" algn="ctr">
-                      <a:solidFill>
-                        <a:srgbClr val="E3E3EA"/>
-                      </a:solidFill>
-                      <a:prstDash val="solid"/>
-                      <a:round/>
-                      <a:headEnd type="none" w="med" len="med"/>
-                      <a:tailEnd type="none" w="med" len="med"/>
-                    </a:lnL>
-                    <a:lnR w="6350" cap="flat" cmpd="sng" algn="ctr">
-                      <a:solidFill>
-                        <a:srgbClr val="E3E3EA"/>
-                      </a:solidFill>
-                      <a:prstDash val="solid"/>
-                      <a:round/>
-                      <a:headEnd type="none" w="med" len="med"/>
-                      <a:tailEnd type="none" w="med" len="med"/>
-                    </a:lnR>
-                    <a:lnT w="6350" cap="flat" cmpd="sng" algn="ctr">
-                      <a:solidFill>
-                        <a:srgbClr val="E3E3EA"/>
-                      </a:solidFill>
-                      <a:prstDash val="solid"/>
-                      <a:round/>
-                      <a:headEnd type="none" w="med" len="med"/>
-                      <a:tailEnd type="none" w="med" len="med"/>
-                    </a:lnT>
-                    <a:lnB w="6350" cap="flat" cmpd="sng" algn="ctr">
-                      <a:solidFill>
-                        <a:srgbClr val="E3E3EA"/>
-                      </a:solidFill>
-                      <a:prstDash val="solid"/>
-                      <a:round/>
-                      <a:headEnd type="none" w="med" len="med"/>
-                      <a:tailEnd type="none" w="med" len="med"/>
-                    </a:lnB>
-                  </a:tcPr>
-                </a:tc>
-              </a:tr>
-              <a:tr h="457200">
-                <a:tc>
-                  <a:txBody>
-                    <a:bodyPr/>
-                    <a:lstStyle/>
-                    <a:p>
-                      <a:pPr indent="0" marL="0">
-                        <a:buNone/>
-                      </a:pPr>
-                      <a:r>
-                        <a:rPr lang="en-US" sz="1100" dirty="0">
-                          <a:solidFill>
-                            <a:srgbClr val="1B1B21"/>
-                          </a:solidFill>
-                          <a:latin typeface="Arial" pitchFamily="34" charset="0"/>
-                          <a:ea typeface="Arial" pitchFamily="34" charset="-122"/>
-                          <a:cs typeface="Arial" pitchFamily="34" charset="-120"/>
-                        </a:rPr>
-                        <a:t>에디터 · 하드웨어 조작</a:t>
-                      </a:r>
-                      <a:endParaRPr lang="en-US" sz="1100" dirty="0">
-                        <a:latin typeface="Arial" charset="0"/>
-                        <a:ea typeface="Arial" charset="0"/>
-                        <a:cs typeface="Arial" charset="0"/>
-                      </a:endParaRPr>
-                    </a:p>
-                  </a:txBody>
-                  <a:tcPr marL="76200" marR="76200" marT="25400" marB="25400" anchor="ctr">
-                    <a:lnL w="6350" cap="flat" cmpd="sng" algn="ctr">
-                      <a:solidFill>
-                        <a:srgbClr val="E3E3EA"/>
-                      </a:solidFill>
-                      <a:prstDash val="solid"/>
-                      <a:round/>
-                      <a:headEnd type="none" w="med" len="med"/>
-                      <a:tailEnd type="none" w="med" len="med"/>
-                    </a:lnL>
-                    <a:lnR w="6350" cap="flat" cmpd="sng" algn="ctr">
-                      <a:solidFill>
-                        <a:srgbClr val="E3E3EA"/>
-                      </a:solidFill>
-                      <a:prstDash val="solid"/>
-                      <a:round/>
-                      <a:headEnd type="none" w="med" len="med"/>
-                      <a:tailEnd type="none" w="med" len="med"/>
-                    </a:lnR>
-                    <a:lnT w="6350" cap="flat" cmpd="sng" algn="ctr">
-                      <a:solidFill>
-                        <a:srgbClr val="E3E3EA"/>
-                      </a:solidFill>
-                      <a:prstDash val="solid"/>
-                      <a:round/>
-                      <a:headEnd type="none" w="med" len="med"/>
-                      <a:tailEnd type="none" w="med" len="med"/>
-                    </a:lnT>
-                    <a:lnB w="6350" cap="flat" cmpd="sng" algn="ctr">
-                      <a:solidFill>
-                        <a:srgbClr val="E3E3EA"/>
-                      </a:solidFill>
-                      <a:prstDash val="solid"/>
-                      <a:round/>
-                      <a:headEnd type="none" w="med" len="med"/>
-                      <a:tailEnd type="none" w="med" len="med"/>
-                    </a:lnB>
-                  </a:tcPr>
-                </a:tc>
-                <a:tc>
-                  <a:txBody>
-                    <a:bodyPr/>
-                    <a:lstStyle/>
-                    <a:p>
-                      <a:pPr algn="ctr" indent="0" marL="0">
-                        <a:buNone/>
-                      </a:pPr>
-                      <a:r>
-                        <a:rPr lang="en-US" sz="1100" dirty="0">
-                          <a:solidFill>
-                            <a:srgbClr val="565663"/>
-                          </a:solidFill>
-                          <a:latin typeface="Arial" pitchFamily="34" charset="0"/>
-                          <a:ea typeface="Arial" pitchFamily="34" charset="-122"/>
-                          <a:cs typeface="Arial" pitchFamily="34" charset="-120"/>
-                        </a:rPr>
-                        <a:t>MCP</a:t>
-                      </a:r>
-                      <a:endParaRPr lang="en-US" sz="1100" dirty="0">
-                        <a:latin typeface="Arial" charset="0"/>
-                        <a:ea typeface="Arial" charset="0"/>
-                        <a:cs typeface="Arial" charset="0"/>
-                      </a:endParaRPr>
-                    </a:p>
-                  </a:txBody>
-                  <a:tcPr marL="76200" marR="76200" marT="25400" marB="25400" anchor="ctr">
-                    <a:lnL w="6350" cap="flat" cmpd="sng" algn="ctr">
-                      <a:solidFill>
-                        <a:srgbClr val="E3E3EA"/>
-                      </a:solidFill>
-                      <a:prstDash val="solid"/>
-                      <a:round/>
-                      <a:headEnd type="none" w="med" len="med"/>
-                      <a:tailEnd type="none" w="med" len="med"/>
-                    </a:lnL>
-                    <a:lnR w="6350" cap="flat" cmpd="sng" algn="ctr">
-                      <a:solidFill>
-                        <a:srgbClr val="E3E3EA"/>
-                      </a:solidFill>
-                      <a:prstDash val="solid"/>
-                      <a:round/>
-                      <a:headEnd type="none" w="med" len="med"/>
-                      <a:tailEnd type="none" w="med" len="med"/>
-                    </a:lnR>
-                    <a:lnT w="6350" cap="flat" cmpd="sng" algn="ctr">
-                      <a:solidFill>
-                        <a:srgbClr val="E3E3EA"/>
-                      </a:solidFill>
-                      <a:prstDash val="solid"/>
-                      <a:round/>
-                      <a:headEnd type="none" w="med" len="med"/>
-                      <a:tailEnd type="none" w="med" len="med"/>
-                    </a:lnT>
-                    <a:lnB w="6350" cap="flat" cmpd="sng" algn="ctr">
-                      <a:solidFill>
-                        <a:srgbClr val="E3E3EA"/>
-                      </a:solidFill>
-                      <a:prstDash val="solid"/>
-                      <a:round/>
-                      <a:headEnd type="none" w="med" len="med"/>
-                      <a:tailEnd type="none" w="med" len="med"/>
-                    </a:lnB>
-                  </a:tcPr>
-                </a:tc>
-                <a:tc>
-                  <a:txBody>
-                    <a:bodyPr/>
-                    <a:lstStyle/>
-                    <a:p>
-                      <a:pPr indent="0" marL="0">
-                        <a:buNone/>
-                      </a:pPr>
-                      <a:r>
-                        <a:rPr lang="en-US" sz="1100" dirty="0">
-                          <a:solidFill>
-                            <a:srgbClr val="1B1B21"/>
-                          </a:solidFill>
-                          <a:latin typeface="Arial" pitchFamily="34" charset="0"/>
-                          <a:ea typeface="Arial" pitchFamily="34" charset="-122"/>
-                          <a:cs typeface="Arial" pitchFamily="34" charset="-120"/>
-                        </a:rPr>
-                        <a:t>Unity MCP·플래시 스크립트를 내 지시로 실행</a:t>
-                      </a:r>
-                      <a:endParaRPr lang="en-US" sz="1100" dirty="0">
-                        <a:latin typeface="Arial" charset="0"/>
-                        <a:ea typeface="Arial" charset="0"/>
-                        <a:cs typeface="Arial" charset="0"/>
-                      </a:endParaRPr>
-                    </a:p>
-                  </a:txBody>
-                  <a:tcPr marL="76200" marR="76200" marT="25400" marB="25400" anchor="ctr">
+                  <a:tcPr marL="88900" marR="88900" marT="38100" marB="38100" anchor="ctr">
                     <a:lnL w="6350" cap="flat" cmpd="sng" algn="ctr">
                       <a:solidFill>
                         <a:srgbClr val="E3E3EA"/>
@@ -11997,48 +8229,14 @@
       </p:graphicFrame>
       <p:sp>
         <p:nvSpPr>
-          <p:cNvPr id="5" name="Shape 2"/>
-          <p:cNvSpPr/>
-          <p:nvPr/>
-        </p:nvSpPr>
-        <p:spPr>
-          <a:xfrm>
-            <a:off x="7680960" y="1554480"/>
-            <a:ext cx="3867912" cy="1234440"/>
-          </a:xfrm>
-          <a:prstGeom prst="roundRect">
-            <a:avLst>
-              <a:gd name="adj" fmla="val 6667"/>
-            </a:avLst>
-          </a:prstGeom>
-          <a:solidFill>
-            <a:srgbClr val="F7F7FA"/>
-          </a:solidFill>
-          <a:ln w="12700">
-            <a:solidFill>
-              <a:srgbClr val="E3E3EA"/>
-            </a:solidFill>
-            <a:prstDash val="solid"/>
-          </a:ln>
-          <a:effectLst>
-            <a:outerShdw sx="100000" sy="100000" kx="0" ky="0" algn="bl" rotWithShape="0" blurRad="76200" dist="25400" dir="5400000">
-              <a:srgbClr val="000000">
-                <a:alpha val="10000"/>
-              </a:srgbClr>
-            </a:outerShdw>
-          </a:effectLst>
-        </p:spPr>
-      </p:sp>
-      <p:sp>
-        <p:nvSpPr>
           <p:cNvPr id="6" name="Text 3"/>
           <p:cNvSpPr/>
           <p:nvPr/>
         </p:nvSpPr>
         <p:spPr>
           <a:xfrm>
-            <a:off x="7909560" y="1691640"/>
-            <a:ext cx="3566160" cy="320040"/>
+            <a:off x="640080" y="3246120"/>
+            <a:ext cx="5486400" cy="320040"/>
           </a:xfrm>
           <a:prstGeom prst="rect">
             <a:avLst/>
@@ -12054,7 +8252,7 @@
               <a:buNone/>
             </a:pPr>
             <a:r>
-              <a:rPr lang="en-US" sz="1250" b="1" dirty="0">
+              <a:rPr lang="en-US" sz="1300" b="1" dirty="0">
                 <a:solidFill>
                   <a:srgbClr val="33386E"/>
                 </a:solidFill>
@@ -12062,381 +8260,15 @@
                 <a:ea typeface="Arial" pitchFamily="34" charset="-122"/>
                 <a:cs typeface="Arial" pitchFamily="34" charset="-120"/>
               </a:rPr>
-              <a:t>사용한 AI 협업 도구</a:t>
+              <a:t>직장 경력</a:t>
             </a:r>
-            <a:endParaRPr lang="en-US" sz="1250" dirty="0"/>
-          </a:p>
-        </p:txBody>
-      </p:sp>
-      <p:sp>
-        <p:nvSpPr>
-          <p:cNvPr id="7" name="Text 4"/>
-          <p:cNvSpPr/>
-          <p:nvPr/>
-        </p:nvSpPr>
-        <p:spPr>
-          <a:xfrm>
-            <a:off x="7909560" y="2057400"/>
-            <a:ext cx="3410712" cy="640080"/>
-          </a:xfrm>
-          <a:prstGeom prst="rect">
-            <a:avLst/>
-          </a:prstGeom>
-          <a:noFill/>
-          <a:ln/>
-        </p:spPr>
-        <p:txBody>
-          <a:bodyPr wrap="square" lIns="0" tIns="0" rIns="0" bIns="0" rtlCol="0" anchor="ctr"/>
-          <a:lstStyle/>
-          <a:p>
-            <a:pPr indent="0" marL="0">
-              <a:buNone/>
-            </a:pPr>
-            <a:r>
-              <a:rPr lang="en-US" sz="1100" dirty="0">
-                <a:solidFill>
-                  <a:srgbClr val="565663"/>
-                </a:solidFill>
-                <a:latin typeface="Arial" pitchFamily="34" charset="0"/>
-                <a:ea typeface="Arial" pitchFamily="34" charset="-122"/>
-                <a:cs typeface="Arial" pitchFamily="34" charset="-120"/>
-              </a:rPr>
-              <a:t>Claude Code · Unity MCP · ESP-IDF 워크플로우 · execute_code · 플래시/데모 Bash 자동화</a:t>
-            </a:r>
-            <a:endParaRPr lang="en-US" sz="1100" dirty="0"/>
-          </a:p>
-        </p:txBody>
-      </p:sp>
-      <p:sp>
-        <p:nvSpPr>
-          <p:cNvPr id="8" name="Shape 5"/>
-          <p:cNvSpPr/>
-          <p:nvPr/>
-        </p:nvSpPr>
-        <p:spPr>
-          <a:xfrm>
-            <a:off x="7680960" y="2926080"/>
-            <a:ext cx="3867912" cy="1234440"/>
-          </a:xfrm>
-          <a:prstGeom prst="roundRect">
-            <a:avLst>
-              <a:gd name="adj" fmla="val 6667"/>
-            </a:avLst>
-          </a:prstGeom>
-          <a:solidFill>
-            <a:srgbClr val="F7F7FA"/>
-          </a:solidFill>
-          <a:ln w="12700">
-            <a:solidFill>
-              <a:srgbClr val="E3E3EA"/>
-            </a:solidFill>
-            <a:prstDash val="solid"/>
-          </a:ln>
-          <a:effectLst>
-            <a:outerShdw sx="100000" sy="100000" kx="0" ky="0" algn="bl" rotWithShape="0" blurRad="76200" dist="25400" dir="5400000">
-              <a:srgbClr val="000000">
-                <a:alpha val="10000"/>
-              </a:srgbClr>
-            </a:outerShdw>
-          </a:effectLst>
-        </p:spPr>
-      </p:sp>
-      <p:sp>
-        <p:nvSpPr>
-          <p:cNvPr id="9" name="Text 6"/>
-          <p:cNvSpPr/>
-          <p:nvPr/>
-        </p:nvSpPr>
-        <p:spPr>
-          <a:xfrm>
-            <a:off x="7909560" y="3063240"/>
-            <a:ext cx="3566160" cy="320040"/>
-          </a:xfrm>
-          <a:prstGeom prst="rect">
-            <a:avLst/>
-          </a:prstGeom>
-          <a:noFill/>
-          <a:ln/>
-        </p:spPr>
-        <p:txBody>
-          <a:bodyPr wrap="square" lIns="0" tIns="0" rIns="0" bIns="0" rtlCol="0" anchor="ctr"/>
-          <a:lstStyle/>
-          <a:p>
-            <a:pPr indent="0" marL="0">
-              <a:buNone/>
-            </a:pPr>
-            <a:r>
-              <a:rPr lang="en-US" sz="1250" b="1" dirty="0">
-                <a:solidFill>
-                  <a:srgbClr val="B1462C"/>
-                </a:solidFill>
-                <a:latin typeface="Arial" pitchFamily="34" charset="0"/>
-                <a:ea typeface="Arial" pitchFamily="34" charset="-122"/>
-                <a:cs typeface="Arial" pitchFamily="34" charset="-120"/>
-              </a:rPr>
-              <a:t>나의 바이브 코딩 루프</a:t>
-            </a:r>
-            <a:endParaRPr lang="en-US" sz="1250" dirty="0"/>
-          </a:p>
-        </p:txBody>
-      </p:sp>
-      <p:sp>
-        <p:nvSpPr>
-          <p:cNvPr id="10" name="Text 7"/>
-          <p:cNvSpPr/>
-          <p:nvPr/>
-        </p:nvSpPr>
-        <p:spPr>
-          <a:xfrm>
-            <a:off x="7909560" y="3429000"/>
-            <a:ext cx="3410712" cy="640080"/>
-          </a:xfrm>
-          <a:prstGeom prst="rect">
-            <a:avLst/>
-          </a:prstGeom>
-          <a:noFill/>
-          <a:ln/>
-        </p:spPr>
-        <p:txBody>
-          <a:bodyPr wrap="square" lIns="0" tIns="0" rIns="0" bIns="0" rtlCol="0" anchor="ctr"/>
-          <a:lstStyle/>
-          <a:p>
-            <a:pPr indent="0" marL="0">
-              <a:buNone/>
-            </a:pPr>
-            <a:r>
-              <a:rPr lang="en-US" sz="1100" dirty="0">
-                <a:solidFill>
-                  <a:srgbClr val="565663"/>
-                </a:solidFill>
-                <a:latin typeface="Arial" pitchFamily="34" charset="0"/>
-                <a:ea typeface="Arial" pitchFamily="34" charset="-122"/>
-                <a:cs typeface="Arial" pitchFamily="34" charset="-120"/>
-              </a:rPr>
-              <a:t>① 현재 상태 확인 → ② 작업 이해를 내 말로 정리 → ③ 확인·승인 → ④ 실행 후 직접 검증·수정</a:t>
-            </a:r>
-            <a:endParaRPr lang="en-US" sz="1100" dirty="0"/>
-          </a:p>
-        </p:txBody>
-      </p:sp>
-      <p:sp>
-        <p:nvSpPr>
-          <p:cNvPr id="11" name="Shape 8"/>
-          <p:cNvSpPr/>
-          <p:nvPr/>
-        </p:nvSpPr>
-        <p:spPr>
-          <a:xfrm>
-            <a:off x="640080" y="4526280"/>
-            <a:ext cx="10908792" cy="1280160"/>
-          </a:xfrm>
-          <a:prstGeom prst="roundRect">
-            <a:avLst>
-              <a:gd name="adj" fmla="val 5714"/>
-            </a:avLst>
-          </a:prstGeom>
-          <a:solidFill>
-            <a:srgbClr val="F8ECE7"/>
-          </a:solidFill>
-          <a:ln w="12700">
-            <a:solidFill>
-              <a:srgbClr val="E7C9BE"/>
-            </a:solidFill>
-            <a:prstDash val="solid"/>
-          </a:ln>
-        </p:spPr>
-      </p:sp>
-      <p:sp>
-        <p:nvSpPr>
-          <p:cNvPr id="12" name="Text 9"/>
-          <p:cNvSpPr/>
-          <p:nvPr/>
-        </p:nvSpPr>
-        <p:spPr>
-          <a:xfrm>
-            <a:off x="914400" y="4663440"/>
-            <a:ext cx="10058400" cy="320040"/>
-          </a:xfrm>
-          <a:prstGeom prst="rect">
-            <a:avLst/>
-          </a:prstGeom>
-          <a:noFill/>
-          <a:ln/>
-        </p:spPr>
-        <p:txBody>
-          <a:bodyPr wrap="square" lIns="0" tIns="0" rIns="0" bIns="0" rtlCol="0" anchor="ctr"/>
-          <a:lstStyle/>
-          <a:p>
-            <a:pPr indent="0" marL="0">
-              <a:buNone/>
-            </a:pPr>
-            <a:r>
-              <a:rPr lang="en-US" sz="1250" b="1" dirty="0">
-                <a:solidFill>
-                  <a:srgbClr val="B1462C"/>
-                </a:solidFill>
-                <a:latin typeface="Arial" pitchFamily="34" charset="0"/>
-                <a:ea typeface="Arial" pitchFamily="34" charset="-122"/>
-                <a:cs typeface="Arial" pitchFamily="34" charset="-120"/>
-              </a:rPr>
-              <a:t>이 방식을 어떻게 바라보는가 (정직하게)</a:t>
-            </a:r>
-            <a:endParaRPr lang="en-US" sz="1250" dirty="0"/>
-          </a:p>
-        </p:txBody>
-      </p:sp>
-      <p:sp>
-        <p:nvSpPr>
-          <p:cNvPr id="13" name="Text 10"/>
-          <p:cNvSpPr/>
-          <p:nvPr/>
-        </p:nvSpPr>
-        <p:spPr>
-          <a:xfrm>
-            <a:off x="914400" y="5029200"/>
-            <a:ext cx="10360152" cy="731520"/>
-          </a:xfrm>
-          <a:prstGeom prst="rect">
-            <a:avLst/>
-          </a:prstGeom>
-          <a:noFill/>
-          <a:ln/>
-        </p:spPr>
-        <p:txBody>
-          <a:bodyPr wrap="square" lIns="0" tIns="0" rIns="0" bIns="0" rtlCol="0" anchor="ctr"/>
-          <a:lstStyle/>
-          <a:p>
-            <a:pPr indent="0" marL="0">
-              <a:buNone/>
-            </a:pPr>
-            <a:r>
-              <a:rPr lang="en-US" sz="1150" dirty="0">
-                <a:solidFill>
-                  <a:srgbClr val="1B1B21"/>
-                </a:solidFill>
-                <a:latin typeface="Arial" pitchFamily="34" charset="0"/>
-                <a:ea typeface="Arial" pitchFamily="34" charset="-122"/>
-                <a:cs typeface="Arial" pitchFamily="34" charset="-120"/>
-              </a:rPr>
-              <a:t>AI 협업 개발은 도구 오케스트레이션 · 프롬프트 설계 · MCP 자동화라는 실전 역량이라고 생각합니다. 동시에, 이렇게 빠르게 ‘만들 수 있게 된 것’과 ‘밑바닥까지 이해한 것’ 사이엔 아직 간극이 있음을 인정하고, 그 간극을 다음 학습 계획으로 메웁니다.</a:t>
-            </a:r>
-            <a:endParaRPr lang="en-US" sz="1150" dirty="0"/>
-          </a:p>
-        </p:txBody>
-      </p:sp>
-    </p:spTree>
-  </p:cSld>
-  <p:clrMapOvr>
-    <a:masterClrMapping/>
-  </p:clrMapOvr>
-</p:sld>
-</file>
-
-<file path=ppt/slides/slide9.xml><?xml version="1.0" encoding="utf-8"?>
-<p:sld xmlns:a="http://schemas.openxmlformats.org/drawingml/2006/main" xmlns:r="http://schemas.openxmlformats.org/officeDocument/2006/relationships" xmlns:p="http://schemas.openxmlformats.org/presentationml/2006/main">
-  <p:cSld name="Slide 9">
-    <p:bg>
-      <p:bgPr>
-        <a:solidFill>
-          <a:srgbClr val="FFFFFF"/>
-        </a:solidFill>
-      </p:bgPr>
-    </p:bg>
-    <p:spTree>
-      <p:nvGrpSpPr>
-        <p:cNvPr id="1" name=""/>
-        <p:cNvGrpSpPr/>
-        <p:nvPr/>
-      </p:nvGrpSpPr>
-      <p:grpSpPr>
-        <a:xfrm>
-          <a:off x="0" y="0"/>
-          <a:ext cx="0" cy="0"/>
-          <a:chOff x="0" y="0"/>
-          <a:chExt cx="0" cy="0"/>
-        </a:xfrm>
-      </p:grpSpPr>
-      <p:sp>
-        <p:nvSpPr>
-          <p:cNvPr id="2" name="Text 0"/>
-          <p:cNvSpPr/>
-          <p:nvPr/>
-        </p:nvSpPr>
-        <p:spPr>
-          <a:xfrm>
-            <a:off x="640080" y="384048"/>
-            <a:ext cx="10908792" cy="566928"/>
-          </a:xfrm>
-          <a:prstGeom prst="rect">
-            <a:avLst/>
-          </a:prstGeom>
-          <a:noFill/>
-          <a:ln/>
-        </p:spPr>
-        <p:txBody>
-          <a:bodyPr wrap="square" lIns="0" tIns="0" rIns="0" bIns="0" rtlCol="0" anchor="ctr"/>
-          <a:lstStyle/>
-          <a:p>
-            <a:pPr indent="0" marL="0">
-              <a:buNone/>
-            </a:pPr>
-            <a:r>
-              <a:rPr lang="en-US" sz="2600" b="1" dirty="0">
-                <a:solidFill>
-                  <a:srgbClr val="1B1B21"/>
-                </a:solidFill>
-                <a:latin typeface="Arial" pitchFamily="34" charset="0"/>
-                <a:ea typeface="Arial" pitchFamily="34" charset="-122"/>
-                <a:cs typeface="Arial" pitchFamily="34" charset="-120"/>
-              </a:rPr>
-              <a:t>학습 가이드 &amp; 성장 계획</a:t>
-            </a:r>
-            <a:endParaRPr lang="en-US" sz="2600" dirty="0"/>
-          </a:p>
-        </p:txBody>
-      </p:sp>
-      <p:sp>
-        <p:nvSpPr>
-          <p:cNvPr id="3" name="Text 1"/>
-          <p:cNvSpPr/>
-          <p:nvPr/>
-        </p:nvSpPr>
-        <p:spPr>
-          <a:xfrm>
-            <a:off x="640080" y="969264"/>
-            <a:ext cx="10908792" cy="384048"/>
-          </a:xfrm>
-          <a:prstGeom prst="rect">
-            <a:avLst/>
-          </a:prstGeom>
-          <a:noFill/>
-          <a:ln/>
-        </p:spPr>
-        <p:txBody>
-          <a:bodyPr wrap="square" lIns="0" tIns="0" rIns="0" bIns="0" rtlCol="0" anchor="ctr"/>
-          <a:lstStyle/>
-          <a:p>
-            <a:pPr indent="0" marL="0">
-              <a:buNone/>
-            </a:pPr>
-            <a:r>
-              <a:rPr lang="en-US" sz="1250" dirty="0">
-                <a:solidFill>
-                  <a:srgbClr val="565663"/>
-                </a:solidFill>
-                <a:latin typeface="Arial" pitchFamily="34" charset="0"/>
-                <a:ea typeface="Arial" pitchFamily="34" charset="-122"/>
-                <a:cs typeface="Arial" pitchFamily="34" charset="-120"/>
-              </a:rPr>
-              <a:t>‘AI와 함께 만들 수 있다’를 ‘도구 없이 설명하고 스스로 다시 만들 수 있다’로 바꾸는 것이 목표</a:t>
-            </a:r>
-            <a:endParaRPr lang="en-US" sz="1250" dirty="0"/>
+            <a:endParaRPr lang="en-US" sz="1300" dirty="0"/>
           </a:p>
         </p:txBody>
       </p:sp>
       <p:graphicFrame>
         <p:nvGraphicFramePr>
-          <p:cNvPr id="10" name="Table 0"/>
+          <p:cNvPr id="17" name="Table 1"/>
           <p:cNvGraphicFramePr>
             <a:graphicFrameLocks noGrp="1"/>
           </p:cNvGraphicFramePr>
@@ -12449,7 +8281,7 @@
           </p:nvPr>
         </p:nvGraphicFramePr>
         <p:xfrm>
-          <a:off x="640080" y="1508760"/>
+          <a:off x="640080" y="3566160"/>
           <a:ext cx="10908792" cy="914400"/>
         </p:xfrm>
         <a:graphic>
@@ -12457,10 +8289,9 @@
             <a:tbl>
               <a:tblPr/>
               <a:tblGrid>
-                <a:gridCol w="2011680"/>
-                <a:gridCol w="2834640"/>
+                <a:gridCol w="3383280"/>
                 <a:gridCol w="3108960"/>
-                <a:gridCol w="2953512"/>
+                <a:gridCol w="4416552"/>
               </a:tblGrid>
               <a:tr h="457200">
                 <a:tc>
@@ -12472,7 +8303,7 @@
                         <a:buNone/>
                       </a:pPr>
                       <a:r>
-                        <a:rPr lang="en-US" sz="1080" b="1" dirty="0">
+                        <a:rPr lang="en-US" sz="1200" b="1" dirty="0">
                           <a:solidFill>
                             <a:srgbClr val="FFFFFF"/>
                           </a:solidFill>
@@ -12480,16 +8311,16 @@
                           <a:ea typeface="Arial" pitchFamily="34" charset="-122"/>
                           <a:cs typeface="Arial" pitchFamily="34" charset="-120"/>
                         </a:rPr>
-                        <a:t>영역</a:t>
+                        <a:t>기간</a:t>
                       </a:r>
-                      <a:endParaRPr lang="en-US" sz="1080" dirty="0">
+                      <a:endParaRPr lang="en-US" sz="1200" dirty="0">
                         <a:latin typeface="Arial" charset="0"/>
                         <a:ea typeface="Arial" charset="0"/>
                         <a:cs typeface="Arial" charset="0"/>
                       </a:endParaRPr>
                     </a:p>
                   </a:txBody>
-                  <a:tcPr marL="76200" marR="76200" marT="25400" marB="25400" anchor="ctr">
+                  <a:tcPr marL="88900" marR="88900" marT="38100" marB="38100" anchor="ctr">
                     <a:lnL w="6350" cap="flat" cmpd="sng" algn="ctr">
                       <a:solidFill>
                         <a:srgbClr val="E3E3EA"/>
@@ -12540,7 +8371,7 @@
                         <a:buNone/>
                       </a:pPr>
                       <a:r>
-                        <a:rPr lang="en-US" sz="1080" b="1" dirty="0">
+                        <a:rPr lang="en-US" sz="1200" b="1" dirty="0">
                           <a:solidFill>
                             <a:srgbClr val="FFFFFF"/>
                           </a:solidFill>
@@ -12548,16 +8379,16 @@
                           <a:ea typeface="Arial" pitchFamily="34" charset="-122"/>
                           <a:cs typeface="Arial" pitchFamily="34" charset="-120"/>
                         </a:rPr>
-                        <a:t>지금 (바이브로 구현)</a:t>
+                        <a:t>회사</a:t>
                       </a:r>
-                      <a:endParaRPr lang="en-US" sz="1080" dirty="0">
+                      <a:endParaRPr lang="en-US" sz="1200" dirty="0">
                         <a:latin typeface="Arial" charset="0"/>
                         <a:ea typeface="Arial" charset="0"/>
                         <a:cs typeface="Arial" charset="0"/>
                       </a:endParaRPr>
                     </a:p>
                   </a:txBody>
-                  <a:tcPr marL="76200" marR="76200" marT="25400" marB="25400" anchor="ctr">
+                  <a:tcPr marL="88900" marR="88900" marT="38100" marB="38100" anchor="ctr">
                     <a:lnL w="6350" cap="flat" cmpd="sng" algn="ctr">
                       <a:solidFill>
                         <a:srgbClr val="E3E3EA"/>
@@ -12608,7 +8439,7 @@
                         <a:buNone/>
                       </a:pPr>
                       <a:r>
-                        <a:rPr lang="en-US" sz="1080" b="1" dirty="0">
+                        <a:rPr lang="en-US" sz="1200" b="1" dirty="0">
                           <a:solidFill>
                             <a:srgbClr val="FFFFFF"/>
                           </a:solidFill>
@@ -12616,84 +8447,16 @@
                           <a:ea typeface="Arial" pitchFamily="34" charset="-122"/>
                           <a:cs typeface="Arial" pitchFamily="34" charset="-120"/>
                         </a:rPr>
-                        <a:t>학습 목표</a:t>
+                        <a:t>담당 업무</a:t>
                       </a:r>
-                      <a:endParaRPr lang="en-US" sz="1080" dirty="0">
+                      <a:endParaRPr lang="en-US" sz="1200" dirty="0">
                         <a:latin typeface="Arial" charset="0"/>
                         <a:ea typeface="Arial" charset="0"/>
                         <a:cs typeface="Arial" charset="0"/>
                       </a:endParaRPr>
                     </a:p>
                   </a:txBody>
-                  <a:tcPr marL="76200" marR="76200" marT="25400" marB="25400" anchor="ctr">
-                    <a:lnL w="6350" cap="flat" cmpd="sng" algn="ctr">
-                      <a:solidFill>
-                        <a:srgbClr val="E3E3EA"/>
-                      </a:solidFill>
-                      <a:prstDash val="solid"/>
-                      <a:round/>
-                      <a:headEnd type="none" w="med" len="med"/>
-                      <a:tailEnd type="none" w="med" len="med"/>
-                    </a:lnL>
-                    <a:lnR w="6350" cap="flat" cmpd="sng" algn="ctr">
-                      <a:solidFill>
-                        <a:srgbClr val="E3E3EA"/>
-                      </a:solidFill>
-                      <a:prstDash val="solid"/>
-                      <a:round/>
-                      <a:headEnd type="none" w="med" len="med"/>
-                      <a:tailEnd type="none" w="med" len="med"/>
-                    </a:lnR>
-                    <a:lnT w="6350" cap="flat" cmpd="sng" algn="ctr">
-                      <a:solidFill>
-                        <a:srgbClr val="E3E3EA"/>
-                      </a:solidFill>
-                      <a:prstDash val="solid"/>
-                      <a:round/>
-                      <a:headEnd type="none" w="med" len="med"/>
-                      <a:tailEnd type="none" w="med" len="med"/>
-                    </a:lnT>
-                    <a:lnB w="6350" cap="flat" cmpd="sng" algn="ctr">
-                      <a:solidFill>
-                        <a:srgbClr val="E3E3EA"/>
-                      </a:solidFill>
-                      <a:prstDash val="solid"/>
-                      <a:round/>
-                      <a:headEnd type="none" w="med" len="med"/>
-                      <a:tailEnd type="none" w="med" len="med"/>
-                    </a:lnB>
-                    <a:solidFill>
-                      <a:srgbClr val="33386E"/>
-                    </a:solidFill>
-                  </a:tcPr>
-                </a:tc>
-                <a:tc>
-                  <a:txBody>
-                    <a:bodyPr/>
-                    <a:lstStyle/>
-                    <a:p>
-                      <a:pPr indent="0" marL="0">
-                        <a:buNone/>
-                      </a:pPr>
-                      <a:r>
-                        <a:rPr lang="en-US" sz="1080" b="1" dirty="0">
-                          <a:solidFill>
-                            <a:srgbClr val="FFFFFF"/>
-                          </a:solidFill>
-                          <a:latin typeface="Arial" pitchFamily="34" charset="0"/>
-                          <a:ea typeface="Arial" pitchFamily="34" charset="-122"/>
-                          <a:cs typeface="Arial" pitchFamily="34" charset="-120"/>
-                        </a:rPr>
-                        <a:t>방법 · 자료</a:t>
-                      </a:r>
-                      <a:endParaRPr lang="en-US" sz="1080" dirty="0">
-                        <a:latin typeface="Arial" charset="0"/>
-                        <a:ea typeface="Arial" charset="0"/>
-                        <a:cs typeface="Arial" charset="0"/>
-                      </a:endParaRPr>
-                    </a:p>
-                  </a:txBody>
-                  <a:tcPr marL="76200" marR="76200" marT="25400" marB="25400" anchor="ctr">
+                  <a:tcPr marL="88900" marR="88900" marT="38100" marB="38100" anchor="ctr">
                     <a:lnL w="6350" cap="flat" cmpd="sng" algn="ctr">
                       <a:solidFill>
                         <a:srgbClr val="E3E3EA"/>
@@ -12746,7 +8509,7 @@
                         <a:buNone/>
                       </a:pPr>
                       <a:r>
-                        <a:rPr lang="en-US" sz="1080" dirty="0">
+                        <a:rPr lang="en-US" sz="1200" dirty="0">
                           <a:solidFill>
                             <a:srgbClr val="1B1B21"/>
                           </a:solidFill>
@@ -12754,16 +8517,16 @@
                           <a:ea typeface="Arial" pitchFamily="34" charset="-122"/>
                           <a:cs typeface="Arial" pitchFamily="34" charset="-120"/>
                         </a:rPr>
-                        <a:t>C# / OOP</a:t>
+                        <a:t>2019.09 - 2023.12</a:t>
                       </a:r>
-                      <a:endParaRPr lang="en-US" sz="1080" dirty="0">
+                      <a:endParaRPr lang="en-US" sz="1200" dirty="0">
                         <a:latin typeface="Arial" charset="0"/>
                         <a:ea typeface="Arial" charset="0"/>
                         <a:cs typeface="Arial" charset="0"/>
                       </a:endParaRPr>
                     </a:p>
                   </a:txBody>
-                  <a:tcPr marL="76200" marR="76200" marT="25400" marB="25400" anchor="ctr">
+                  <a:tcPr marL="88900" marR="88900" marT="38100" marB="38100" anchor="ctr">
                     <a:lnL w="6350" cap="flat" cmpd="sng" algn="ctr">
                       <a:solidFill>
                         <a:srgbClr val="E3E3EA"/>
@@ -12811,7 +8574,7 @@
                         <a:buNone/>
                       </a:pPr>
                       <a:r>
-                        <a:rPr lang="en-US" sz="1080" dirty="0">
+                        <a:rPr lang="en-US" sz="1200" dirty="0">
                           <a:solidFill>
                             <a:srgbClr val="1B1B21"/>
                           </a:solidFill>
@@ -12819,16 +8582,16 @@
                           <a:ea typeface="Arial" pitchFamily="34" charset="-122"/>
                           <a:cs typeface="Arial" pitchFamily="34" charset="-120"/>
                         </a:rPr>
-                        <a:t>CRTP·제네릭·이벤트 사용</a:t>
+                        <a:t>(주)K&amp;P 2공장</a:t>
                       </a:r>
-                      <a:endParaRPr lang="en-US" sz="1080" dirty="0">
+                      <a:endParaRPr lang="en-US" sz="1200" dirty="0">
                         <a:latin typeface="Arial" charset="0"/>
                         <a:ea typeface="Arial" charset="0"/>
                         <a:cs typeface="Arial" charset="0"/>
                       </a:endParaRPr>
                     </a:p>
                   </a:txBody>
-                  <a:tcPr marL="76200" marR="76200" marT="25400" marB="25400" anchor="ctr">
+                  <a:tcPr marL="88900" marR="88900" marT="38100" marB="38100" anchor="ctr">
                     <a:lnL w="6350" cap="flat" cmpd="sng" algn="ctr">
                       <a:solidFill>
                         <a:srgbClr val="E3E3EA"/>
@@ -12876,7 +8639,7 @@
                         <a:buNone/>
                       </a:pPr>
                       <a:r>
-                        <a:rPr lang="en-US" sz="1080" dirty="0">
+                        <a:rPr lang="en-US" sz="1200" dirty="0">
                           <a:solidFill>
                             <a:srgbClr val="1B1B21"/>
                           </a:solidFill>
@@ -12884,81 +8647,16 @@
                           <a:ea typeface="Arial" pitchFamily="34" charset="-122"/>
                           <a:cs typeface="Arial" pitchFamily="34" charset="-120"/>
                         </a:rPr>
-                        <a:t>제네릭·델리게이트 원리 이해</a:t>
+                        <a:t>전자제품 조립(SMT) 생산</a:t>
                       </a:r>
-                      <a:endParaRPr lang="en-US" sz="1080" dirty="0">
+                      <a:endParaRPr lang="en-US" sz="1200" dirty="0">
                         <a:latin typeface="Arial" charset="0"/>
                         <a:ea typeface="Arial" charset="0"/>
                         <a:cs typeface="Arial" charset="0"/>
                       </a:endParaRPr>
                     </a:p>
                   </a:txBody>
-                  <a:tcPr marL="76200" marR="76200" marT="25400" marB="25400" anchor="ctr">
-                    <a:lnL w="6350" cap="flat" cmpd="sng" algn="ctr">
-                      <a:solidFill>
-                        <a:srgbClr val="E3E3EA"/>
-                      </a:solidFill>
-                      <a:prstDash val="solid"/>
-                      <a:round/>
-                      <a:headEnd type="none" w="med" len="med"/>
-                      <a:tailEnd type="none" w="med" len="med"/>
-                    </a:lnL>
-                    <a:lnR w="6350" cap="flat" cmpd="sng" algn="ctr">
-                      <a:solidFill>
-                        <a:srgbClr val="E3E3EA"/>
-                      </a:solidFill>
-                      <a:prstDash val="solid"/>
-                      <a:round/>
-                      <a:headEnd type="none" w="med" len="med"/>
-                      <a:tailEnd type="none" w="med" len="med"/>
-                    </a:lnR>
-                    <a:lnT w="6350" cap="flat" cmpd="sng" algn="ctr">
-                      <a:solidFill>
-                        <a:srgbClr val="E3E3EA"/>
-                      </a:solidFill>
-                      <a:prstDash val="solid"/>
-                      <a:round/>
-                      <a:headEnd type="none" w="med" len="med"/>
-                      <a:tailEnd type="none" w="med" len="med"/>
-                    </a:lnT>
-                    <a:lnB w="6350" cap="flat" cmpd="sng" algn="ctr">
-                      <a:solidFill>
-                        <a:srgbClr val="E3E3EA"/>
-                      </a:solidFill>
-                      <a:prstDash val="solid"/>
-                      <a:round/>
-                      <a:headEnd type="none" w="med" len="med"/>
-                      <a:tailEnd type="none" w="med" len="med"/>
-                    </a:lnB>
-                  </a:tcPr>
-                </a:tc>
-                <a:tc>
-                  <a:txBody>
-                    <a:bodyPr/>
-                    <a:lstStyle/>
-                    <a:p>
-                      <a:pPr indent="0" marL="0">
-                        <a:buNone/>
-                      </a:pPr>
-                      <a:r>
-                        <a:rPr lang="en-US" sz="1080" dirty="0">
-                          <a:solidFill>
-                            <a:srgbClr val="1B1B21"/>
-                          </a:solidFill>
-                          <a:latin typeface="Arial" pitchFamily="34" charset="0"/>
-                          <a:ea typeface="Arial" pitchFamily="34" charset="-122"/>
-                          <a:cs typeface="Arial" pitchFamily="34" charset="-120"/>
-                        </a:rPr>
-                        <a:t>MS Docs · 『C# in Depth』 · 재구현</a:t>
-                      </a:r>
-                      <a:endParaRPr lang="en-US" sz="1080" dirty="0">
-                        <a:latin typeface="Arial" charset="0"/>
-                        <a:ea typeface="Arial" charset="0"/>
-                        <a:cs typeface="Arial" charset="0"/>
-                      </a:endParaRPr>
-                    </a:p>
-                  </a:txBody>
-                  <a:tcPr marL="76200" marR="76200" marT="25400" marB="25400" anchor="ctr">
+                  <a:tcPr marL="88900" marR="88900" marT="38100" marB="38100" anchor="ctr">
                     <a:lnL w="6350" cap="flat" cmpd="sng" algn="ctr">
                       <a:solidFill>
                         <a:srgbClr val="E3E3EA"/>
@@ -13008,7 +8706,7 @@
                         <a:buNone/>
                       </a:pPr>
                       <a:r>
-                        <a:rPr lang="en-US" sz="1080" dirty="0">
+                        <a:rPr lang="en-US" sz="1200" dirty="0">
                           <a:solidFill>
                             <a:srgbClr val="1B1B21"/>
                           </a:solidFill>
@@ -13016,16 +8714,16 @@
                           <a:ea typeface="Arial" pitchFamily="34" charset="-122"/>
                           <a:cs typeface="Arial" pitchFamily="34" charset="-120"/>
                         </a:rPr>
-                        <a:t>자료구조·알고리즘</a:t>
+                        <a:t>2023.12 - 2024.02</a:t>
                       </a:r>
-                      <a:endParaRPr lang="en-US" sz="1080" dirty="0">
+                      <a:endParaRPr lang="en-US" sz="1200" dirty="0">
                         <a:latin typeface="Arial" charset="0"/>
                         <a:ea typeface="Arial" charset="0"/>
                         <a:cs typeface="Arial" charset="0"/>
                       </a:endParaRPr>
                     </a:p>
                   </a:txBody>
-                  <a:tcPr marL="76200" marR="76200" marT="25400" marB="25400" anchor="ctr">
+                  <a:tcPr marL="88900" marR="88900" marT="38100" marB="38100" anchor="ctr">
                     <a:lnL w="6350" cap="flat" cmpd="sng" algn="ctr">
                       <a:solidFill>
                         <a:srgbClr val="E3E3EA"/>
@@ -13073,7 +8771,7 @@
                         <a:buNone/>
                       </a:pPr>
                       <a:r>
-                        <a:rPr lang="en-US" sz="1080" dirty="0">
+                        <a:rPr lang="en-US" sz="1200" dirty="0">
                           <a:solidFill>
                             <a:srgbClr val="1B1B21"/>
                           </a:solidFill>
@@ -13081,16 +8779,16 @@
                           <a:ea typeface="Arial" pitchFamily="34" charset="-122"/>
                           <a:cs typeface="Arial" pitchFamily="34" charset="-120"/>
                         </a:rPr>
-                        <a:t>List·Dictionary 활용</a:t>
+                        <a:t>(주)대동공업 (계약직)</a:t>
                       </a:r>
-                      <a:endParaRPr lang="en-US" sz="1080" dirty="0">
+                      <a:endParaRPr lang="en-US" sz="1200" dirty="0">
                         <a:latin typeface="Arial" charset="0"/>
                         <a:ea typeface="Arial" charset="0"/>
                         <a:cs typeface="Arial" charset="0"/>
                       </a:endParaRPr>
                     </a:p>
                   </a:txBody>
-                  <a:tcPr marL="76200" marR="76200" marT="25400" marB="25400" anchor="ctr">
+                  <a:tcPr marL="88900" marR="88900" marT="38100" marB="38100" anchor="ctr">
                     <a:lnL w="6350" cap="flat" cmpd="sng" algn="ctr">
                       <a:solidFill>
                         <a:srgbClr val="E3E3EA"/>
@@ -13138,7 +8836,7 @@
                         <a:buNone/>
                       </a:pPr>
                       <a:r>
-                        <a:rPr lang="en-US" sz="1080" dirty="0">
+                        <a:rPr lang="en-US" sz="1200" dirty="0">
                           <a:solidFill>
                             <a:srgbClr val="1B1B21"/>
                           </a:solidFill>
@@ -13146,1129 +8844,16 @@
                           <a:ea typeface="Arial" pitchFamily="34" charset="-122"/>
                           <a:cs typeface="Arial" pitchFamily="34" charset="-120"/>
                         </a:rPr>
-                        <a:t>시간복잡도·자료구조 직접 구현</a:t>
+                        <a:t>소형 트랙터 엔진과 미션 조립반, 단순 조립</a:t>
                       </a:r>
-                      <a:endParaRPr lang="en-US" sz="1080" dirty="0">
+                      <a:endParaRPr lang="en-US" sz="1200" dirty="0">
                         <a:latin typeface="Arial" charset="0"/>
                         <a:ea typeface="Arial" charset="0"/>
                         <a:cs typeface="Arial" charset="0"/>
                       </a:endParaRPr>
                     </a:p>
                   </a:txBody>
-                  <a:tcPr marL="76200" marR="76200" marT="25400" marB="25400" anchor="ctr">
-                    <a:lnL w="6350" cap="flat" cmpd="sng" algn="ctr">
-                      <a:solidFill>
-                        <a:srgbClr val="E3E3EA"/>
-                      </a:solidFill>
-                      <a:prstDash val="solid"/>
-                      <a:round/>
-                      <a:headEnd type="none" w="med" len="med"/>
-                      <a:tailEnd type="none" w="med" len="med"/>
-                    </a:lnL>
-                    <a:lnR w="6350" cap="flat" cmpd="sng" algn="ctr">
-                      <a:solidFill>
-                        <a:srgbClr val="E3E3EA"/>
-                      </a:solidFill>
-                      <a:prstDash val="solid"/>
-                      <a:round/>
-                      <a:headEnd type="none" w="med" len="med"/>
-                      <a:tailEnd type="none" w="med" len="med"/>
-                    </a:lnR>
-                    <a:lnT w="6350" cap="flat" cmpd="sng" algn="ctr">
-                      <a:solidFill>
-                        <a:srgbClr val="E3E3EA"/>
-                      </a:solidFill>
-                      <a:prstDash val="solid"/>
-                      <a:round/>
-                      <a:headEnd type="none" w="med" len="med"/>
-                      <a:tailEnd type="none" w="med" len="med"/>
-                    </a:lnT>
-                    <a:lnB w="6350" cap="flat" cmpd="sng" algn="ctr">
-                      <a:solidFill>
-                        <a:srgbClr val="E3E3EA"/>
-                      </a:solidFill>
-                      <a:prstDash val="solid"/>
-                      <a:round/>
-                      <a:headEnd type="none" w="med" len="med"/>
-                      <a:tailEnd type="none" w="med" len="med"/>
-                    </a:lnB>
-                  </a:tcPr>
-                </a:tc>
-                <a:tc>
-                  <a:txBody>
-                    <a:bodyPr/>
-                    <a:lstStyle/>
-                    <a:p>
-                      <a:pPr indent="0" marL="0">
-                        <a:buNone/>
-                      </a:pPr>
-                      <a:r>
-                        <a:rPr lang="en-US" sz="1080" dirty="0">
-                          <a:solidFill>
-                            <a:srgbClr val="1B1B21"/>
-                          </a:solidFill>
-                          <a:latin typeface="Arial" pitchFamily="34" charset="0"/>
-                          <a:ea typeface="Arial" pitchFamily="34" charset="-122"/>
-                          <a:cs typeface="Arial" pitchFamily="34" charset="-120"/>
-                        </a:rPr>
-                        <a:t>백준·알고리즘 문제 · 노트</a:t>
-                      </a:r>
-                      <a:endParaRPr lang="en-US" sz="1080" dirty="0">
-                        <a:latin typeface="Arial" charset="0"/>
-                        <a:ea typeface="Arial" charset="0"/>
-                        <a:cs typeface="Arial" charset="0"/>
-                      </a:endParaRPr>
-                    </a:p>
-                  </a:txBody>
-                  <a:tcPr marL="76200" marR="76200" marT="25400" marB="25400" anchor="ctr">
-                    <a:lnL w="6350" cap="flat" cmpd="sng" algn="ctr">
-                      <a:solidFill>
-                        <a:srgbClr val="E3E3EA"/>
-                      </a:solidFill>
-                      <a:prstDash val="solid"/>
-                      <a:round/>
-                      <a:headEnd type="none" w="med" len="med"/>
-                      <a:tailEnd type="none" w="med" len="med"/>
-                    </a:lnL>
-                    <a:lnR w="6350" cap="flat" cmpd="sng" algn="ctr">
-                      <a:solidFill>
-                        <a:srgbClr val="E3E3EA"/>
-                      </a:solidFill>
-                      <a:prstDash val="solid"/>
-                      <a:round/>
-                      <a:headEnd type="none" w="med" len="med"/>
-                      <a:tailEnd type="none" w="med" len="med"/>
-                    </a:lnR>
-                    <a:lnT w="6350" cap="flat" cmpd="sng" algn="ctr">
-                      <a:solidFill>
-                        <a:srgbClr val="E3E3EA"/>
-                      </a:solidFill>
-                      <a:prstDash val="solid"/>
-                      <a:round/>
-                      <a:headEnd type="none" w="med" len="med"/>
-                      <a:tailEnd type="none" w="med" len="med"/>
-                    </a:lnT>
-                    <a:lnB w="6350" cap="flat" cmpd="sng" algn="ctr">
-                      <a:solidFill>
-                        <a:srgbClr val="E3E3EA"/>
-                      </a:solidFill>
-                      <a:prstDash val="solid"/>
-                      <a:round/>
-                      <a:headEnd type="none" w="med" len="med"/>
-                      <a:tailEnd type="none" w="med" len="med"/>
-                    </a:lnB>
-                  </a:tcPr>
-                </a:tc>
-              </a:tr>
-              <a:tr h="457200">
-                <a:tc>
-                  <a:txBody>
-                    <a:bodyPr/>
-                    <a:lstStyle/>
-                    <a:p>
-                      <a:pPr indent="0" marL="0">
-                        <a:buNone/>
-                      </a:pPr>
-                      <a:r>
-                        <a:rPr lang="en-US" sz="1080" dirty="0">
-                          <a:solidFill>
-                            <a:srgbClr val="1B1B21"/>
-                          </a:solidFill>
-                          <a:latin typeface="Arial" pitchFamily="34" charset="0"/>
-                          <a:ea typeface="Arial" pitchFamily="34" charset="-122"/>
-                          <a:cs typeface="Arial" pitchFamily="34" charset="-120"/>
-                        </a:rPr>
-                        <a:t>디자인 패턴</a:t>
-                      </a:r>
-                      <a:endParaRPr lang="en-US" sz="1080" dirty="0">
-                        <a:latin typeface="Arial" charset="0"/>
-                        <a:ea typeface="Arial" charset="0"/>
-                        <a:cs typeface="Arial" charset="0"/>
-                      </a:endParaRPr>
-                    </a:p>
-                  </a:txBody>
-                  <a:tcPr marL="76200" marR="76200" marT="25400" marB="25400" anchor="ctr">
-                    <a:lnL w="6350" cap="flat" cmpd="sng" algn="ctr">
-                      <a:solidFill>
-                        <a:srgbClr val="E3E3EA"/>
-                      </a:solidFill>
-                      <a:prstDash val="solid"/>
-                      <a:round/>
-                      <a:headEnd type="none" w="med" len="med"/>
-                      <a:tailEnd type="none" w="med" len="med"/>
-                    </a:lnL>
-                    <a:lnR w="6350" cap="flat" cmpd="sng" algn="ctr">
-                      <a:solidFill>
-                        <a:srgbClr val="E3E3EA"/>
-                      </a:solidFill>
-                      <a:prstDash val="solid"/>
-                      <a:round/>
-                      <a:headEnd type="none" w="med" len="med"/>
-                      <a:tailEnd type="none" w="med" len="med"/>
-                    </a:lnR>
-                    <a:lnT w="6350" cap="flat" cmpd="sng" algn="ctr">
-                      <a:solidFill>
-                        <a:srgbClr val="E3E3EA"/>
-                      </a:solidFill>
-                      <a:prstDash val="solid"/>
-                      <a:round/>
-                      <a:headEnd type="none" w="med" len="med"/>
-                      <a:tailEnd type="none" w="med" len="med"/>
-                    </a:lnT>
-                    <a:lnB w="6350" cap="flat" cmpd="sng" algn="ctr">
-                      <a:solidFill>
-                        <a:srgbClr val="E3E3EA"/>
-                      </a:solidFill>
-                      <a:prstDash val="solid"/>
-                      <a:round/>
-                      <a:headEnd type="none" w="med" len="med"/>
-                      <a:tailEnd type="none" w="med" len="med"/>
-                    </a:lnB>
-                  </a:tcPr>
-                </a:tc>
-                <a:tc>
-                  <a:txBody>
-                    <a:bodyPr/>
-                    <a:lstStyle/>
-                    <a:p>
-                      <a:pPr indent="0" marL="0">
-                        <a:buNone/>
-                      </a:pPr>
-                      <a:r>
-                        <a:rPr lang="en-US" sz="1080" dirty="0">
-                          <a:solidFill>
-                            <a:srgbClr val="1B1B21"/>
-                          </a:solidFill>
-                          <a:latin typeface="Arial" pitchFamily="34" charset="0"/>
-                          <a:ea typeface="Arial" pitchFamily="34" charset="-122"/>
-                          <a:cs typeface="Arial" pitchFamily="34" charset="-120"/>
-                        </a:rPr>
-                        <a:t>싱글톤·상태머신 적용</a:t>
-                      </a:r>
-                      <a:endParaRPr lang="en-US" sz="1080" dirty="0">
-                        <a:latin typeface="Arial" charset="0"/>
-                        <a:ea typeface="Arial" charset="0"/>
-                        <a:cs typeface="Arial" charset="0"/>
-                      </a:endParaRPr>
-                    </a:p>
-                  </a:txBody>
-                  <a:tcPr marL="76200" marR="76200" marT="25400" marB="25400" anchor="ctr">
-                    <a:lnL w="6350" cap="flat" cmpd="sng" algn="ctr">
-                      <a:solidFill>
-                        <a:srgbClr val="E3E3EA"/>
-                      </a:solidFill>
-                      <a:prstDash val="solid"/>
-                      <a:round/>
-                      <a:headEnd type="none" w="med" len="med"/>
-                      <a:tailEnd type="none" w="med" len="med"/>
-                    </a:lnL>
-                    <a:lnR w="6350" cap="flat" cmpd="sng" algn="ctr">
-                      <a:solidFill>
-                        <a:srgbClr val="E3E3EA"/>
-                      </a:solidFill>
-                      <a:prstDash val="solid"/>
-                      <a:round/>
-                      <a:headEnd type="none" w="med" len="med"/>
-                      <a:tailEnd type="none" w="med" len="med"/>
-                    </a:lnR>
-                    <a:lnT w="6350" cap="flat" cmpd="sng" algn="ctr">
-                      <a:solidFill>
-                        <a:srgbClr val="E3E3EA"/>
-                      </a:solidFill>
-                      <a:prstDash val="solid"/>
-                      <a:round/>
-                      <a:headEnd type="none" w="med" len="med"/>
-                      <a:tailEnd type="none" w="med" len="med"/>
-                    </a:lnT>
-                    <a:lnB w="6350" cap="flat" cmpd="sng" algn="ctr">
-                      <a:solidFill>
-                        <a:srgbClr val="E3E3EA"/>
-                      </a:solidFill>
-                      <a:prstDash val="solid"/>
-                      <a:round/>
-                      <a:headEnd type="none" w="med" len="med"/>
-                      <a:tailEnd type="none" w="med" len="med"/>
-                    </a:lnB>
-                  </a:tcPr>
-                </a:tc>
-                <a:tc>
-                  <a:txBody>
-                    <a:bodyPr/>
-                    <a:lstStyle/>
-                    <a:p>
-                      <a:pPr indent="0" marL="0">
-                        <a:buNone/>
-                      </a:pPr>
-                      <a:r>
-                        <a:rPr lang="en-US" sz="1080" dirty="0">
-                          <a:solidFill>
-                            <a:srgbClr val="1B1B21"/>
-                          </a:solidFill>
-                          <a:latin typeface="Arial" pitchFamily="34" charset="0"/>
-                          <a:ea typeface="Arial" pitchFamily="34" charset="-122"/>
-                          <a:cs typeface="Arial" pitchFamily="34" charset="-120"/>
-                        </a:rPr>
-                        <a:t>패턴 의도·트레이드오프 이해</a:t>
-                      </a:r>
-                      <a:endParaRPr lang="en-US" sz="1080" dirty="0">
-                        <a:latin typeface="Arial" charset="0"/>
-                        <a:ea typeface="Arial" charset="0"/>
-                        <a:cs typeface="Arial" charset="0"/>
-                      </a:endParaRPr>
-                    </a:p>
-                  </a:txBody>
-                  <a:tcPr marL="76200" marR="76200" marT="25400" marB="25400" anchor="ctr">
-                    <a:lnL w="6350" cap="flat" cmpd="sng" algn="ctr">
-                      <a:solidFill>
-                        <a:srgbClr val="E3E3EA"/>
-                      </a:solidFill>
-                      <a:prstDash val="solid"/>
-                      <a:round/>
-                      <a:headEnd type="none" w="med" len="med"/>
-                      <a:tailEnd type="none" w="med" len="med"/>
-                    </a:lnL>
-                    <a:lnR w="6350" cap="flat" cmpd="sng" algn="ctr">
-                      <a:solidFill>
-                        <a:srgbClr val="E3E3EA"/>
-                      </a:solidFill>
-                      <a:prstDash val="solid"/>
-                      <a:round/>
-                      <a:headEnd type="none" w="med" len="med"/>
-                      <a:tailEnd type="none" w="med" len="med"/>
-                    </a:lnR>
-                    <a:lnT w="6350" cap="flat" cmpd="sng" algn="ctr">
-                      <a:solidFill>
-                        <a:srgbClr val="E3E3EA"/>
-                      </a:solidFill>
-                      <a:prstDash val="solid"/>
-                      <a:round/>
-                      <a:headEnd type="none" w="med" len="med"/>
-                      <a:tailEnd type="none" w="med" len="med"/>
-                    </a:lnT>
-                    <a:lnB w="6350" cap="flat" cmpd="sng" algn="ctr">
-                      <a:solidFill>
-                        <a:srgbClr val="E3E3EA"/>
-                      </a:solidFill>
-                      <a:prstDash val="solid"/>
-                      <a:round/>
-                      <a:headEnd type="none" w="med" len="med"/>
-                      <a:tailEnd type="none" w="med" len="med"/>
-                    </a:lnB>
-                  </a:tcPr>
-                </a:tc>
-                <a:tc>
-                  <a:txBody>
-                    <a:bodyPr/>
-                    <a:lstStyle/>
-                    <a:p>
-                      <a:pPr indent="0" marL="0">
-                        <a:buNone/>
-                      </a:pPr>
-                      <a:r>
-                        <a:rPr lang="en-US" sz="1080" dirty="0">
-                          <a:solidFill>
-                            <a:srgbClr val="1B1B21"/>
-                          </a:solidFill>
-                          <a:latin typeface="Arial" pitchFamily="34" charset="0"/>
-                          <a:ea typeface="Arial" pitchFamily="34" charset="-122"/>
-                          <a:cs typeface="Arial" pitchFamily="34" charset="-120"/>
-                        </a:rPr>
-                        <a:t>『Head First Design Patterns』</a:t>
-                      </a:r>
-                      <a:endParaRPr lang="en-US" sz="1080" dirty="0">
-                        <a:latin typeface="Arial" charset="0"/>
-                        <a:ea typeface="Arial" charset="0"/>
-                        <a:cs typeface="Arial" charset="0"/>
-                      </a:endParaRPr>
-                    </a:p>
-                  </a:txBody>
-                  <a:tcPr marL="76200" marR="76200" marT="25400" marB="25400" anchor="ctr">
-                    <a:lnL w="6350" cap="flat" cmpd="sng" algn="ctr">
-                      <a:solidFill>
-                        <a:srgbClr val="E3E3EA"/>
-                      </a:solidFill>
-                      <a:prstDash val="solid"/>
-                      <a:round/>
-                      <a:headEnd type="none" w="med" len="med"/>
-                      <a:tailEnd type="none" w="med" len="med"/>
-                    </a:lnL>
-                    <a:lnR w="6350" cap="flat" cmpd="sng" algn="ctr">
-                      <a:solidFill>
-                        <a:srgbClr val="E3E3EA"/>
-                      </a:solidFill>
-                      <a:prstDash val="solid"/>
-                      <a:round/>
-                      <a:headEnd type="none" w="med" len="med"/>
-                      <a:tailEnd type="none" w="med" len="med"/>
-                    </a:lnR>
-                    <a:lnT w="6350" cap="flat" cmpd="sng" algn="ctr">
-                      <a:solidFill>
-                        <a:srgbClr val="E3E3EA"/>
-                      </a:solidFill>
-                      <a:prstDash val="solid"/>
-                      <a:round/>
-                      <a:headEnd type="none" w="med" len="med"/>
-                      <a:tailEnd type="none" w="med" len="med"/>
-                    </a:lnT>
-                    <a:lnB w="6350" cap="flat" cmpd="sng" algn="ctr">
-                      <a:solidFill>
-                        <a:srgbClr val="E3E3EA"/>
-                      </a:solidFill>
-                      <a:prstDash val="solid"/>
-                      <a:round/>
-                      <a:headEnd type="none" w="med" len="med"/>
-                      <a:tailEnd type="none" w="med" len="med"/>
-                    </a:lnB>
-                  </a:tcPr>
-                </a:tc>
-              </a:tr>
-              <a:tr h="457200">
-                <a:tc>
-                  <a:txBody>
-                    <a:bodyPr/>
-                    <a:lstStyle/>
-                    <a:p>
-                      <a:pPr indent="0" marL="0">
-                        <a:buNone/>
-                      </a:pPr>
-                      <a:r>
-                        <a:rPr lang="en-US" sz="1080" dirty="0">
-                          <a:solidFill>
-                            <a:srgbClr val="1B1B21"/>
-                          </a:solidFill>
-                          <a:latin typeface="Arial" pitchFamily="34" charset="0"/>
-                          <a:ea typeface="Arial" pitchFamily="34" charset="-122"/>
-                          <a:cs typeface="Arial" pitchFamily="34" charset="-120"/>
-                        </a:rPr>
-                        <a:t>Unity 내부</a:t>
-                      </a:r>
-                      <a:endParaRPr lang="en-US" sz="1080" dirty="0">
-                        <a:latin typeface="Arial" charset="0"/>
-                        <a:ea typeface="Arial" charset="0"/>
-                        <a:cs typeface="Arial" charset="0"/>
-                      </a:endParaRPr>
-                    </a:p>
-                  </a:txBody>
-                  <a:tcPr marL="76200" marR="76200" marT="25400" marB="25400" anchor="ctr">
-                    <a:lnL w="6350" cap="flat" cmpd="sng" algn="ctr">
-                      <a:solidFill>
-                        <a:srgbClr val="E3E3EA"/>
-                      </a:solidFill>
-                      <a:prstDash val="solid"/>
-                      <a:round/>
-                      <a:headEnd type="none" w="med" len="med"/>
-                      <a:tailEnd type="none" w="med" len="med"/>
-                    </a:lnL>
-                    <a:lnR w="6350" cap="flat" cmpd="sng" algn="ctr">
-                      <a:solidFill>
-                        <a:srgbClr val="E3E3EA"/>
-                      </a:solidFill>
-                      <a:prstDash val="solid"/>
-                      <a:round/>
-                      <a:headEnd type="none" w="med" len="med"/>
-                      <a:tailEnd type="none" w="med" len="med"/>
-                    </a:lnR>
-                    <a:lnT w="6350" cap="flat" cmpd="sng" algn="ctr">
-                      <a:solidFill>
-                        <a:srgbClr val="E3E3EA"/>
-                      </a:solidFill>
-                      <a:prstDash val="solid"/>
-                      <a:round/>
-                      <a:headEnd type="none" w="med" len="med"/>
-                      <a:tailEnd type="none" w="med" len="med"/>
-                    </a:lnT>
-                    <a:lnB w="6350" cap="flat" cmpd="sng" algn="ctr">
-                      <a:solidFill>
-                        <a:srgbClr val="E3E3EA"/>
-                      </a:solidFill>
-                      <a:prstDash val="solid"/>
-                      <a:round/>
-                      <a:headEnd type="none" w="med" len="med"/>
-                      <a:tailEnd type="none" w="med" len="med"/>
-                    </a:lnB>
-                  </a:tcPr>
-                </a:tc>
-                <a:tc>
-                  <a:txBody>
-                    <a:bodyPr/>
-                    <a:lstStyle/>
-                    <a:p>
-                      <a:pPr indent="0" marL="0">
-                        <a:buNone/>
-                      </a:pPr>
-                      <a:r>
-                        <a:rPr lang="en-US" sz="1080" dirty="0">
-                          <a:solidFill>
-                            <a:srgbClr val="1B1B21"/>
-                          </a:solidFill>
-                          <a:latin typeface="Arial" pitchFamily="34" charset="0"/>
-                          <a:ea typeface="Arial" pitchFamily="34" charset="-122"/>
-                          <a:cs typeface="Arial" pitchFamily="34" charset="-120"/>
-                        </a:rPr>
-                        <a:t>MonoBehaviour·SO 사용</a:t>
-                      </a:r>
-                      <a:endParaRPr lang="en-US" sz="1080" dirty="0">
-                        <a:latin typeface="Arial" charset="0"/>
-                        <a:ea typeface="Arial" charset="0"/>
-                        <a:cs typeface="Arial" charset="0"/>
-                      </a:endParaRPr>
-                    </a:p>
-                  </a:txBody>
-                  <a:tcPr marL="76200" marR="76200" marT="25400" marB="25400" anchor="ctr">
-                    <a:lnL w="6350" cap="flat" cmpd="sng" algn="ctr">
-                      <a:solidFill>
-                        <a:srgbClr val="E3E3EA"/>
-                      </a:solidFill>
-                      <a:prstDash val="solid"/>
-                      <a:round/>
-                      <a:headEnd type="none" w="med" len="med"/>
-                      <a:tailEnd type="none" w="med" len="med"/>
-                    </a:lnL>
-                    <a:lnR w="6350" cap="flat" cmpd="sng" algn="ctr">
-                      <a:solidFill>
-                        <a:srgbClr val="E3E3EA"/>
-                      </a:solidFill>
-                      <a:prstDash val="solid"/>
-                      <a:round/>
-                      <a:headEnd type="none" w="med" len="med"/>
-                      <a:tailEnd type="none" w="med" len="med"/>
-                    </a:lnR>
-                    <a:lnT w="6350" cap="flat" cmpd="sng" algn="ctr">
-                      <a:solidFill>
-                        <a:srgbClr val="E3E3EA"/>
-                      </a:solidFill>
-                      <a:prstDash val="solid"/>
-                      <a:round/>
-                      <a:headEnd type="none" w="med" len="med"/>
-                      <a:tailEnd type="none" w="med" len="med"/>
-                    </a:lnT>
-                    <a:lnB w="6350" cap="flat" cmpd="sng" algn="ctr">
-                      <a:solidFill>
-                        <a:srgbClr val="E3E3EA"/>
-                      </a:solidFill>
-                      <a:prstDash val="solid"/>
-                      <a:round/>
-                      <a:headEnd type="none" w="med" len="med"/>
-                      <a:tailEnd type="none" w="med" len="med"/>
-                    </a:lnB>
-                  </a:tcPr>
-                </a:tc>
-                <a:tc>
-                  <a:txBody>
-                    <a:bodyPr/>
-                    <a:lstStyle/>
-                    <a:p>
-                      <a:pPr indent="0" marL="0">
-                        <a:buNone/>
-                      </a:pPr>
-                      <a:r>
-                        <a:rPr lang="en-US" sz="1080" dirty="0">
-                          <a:solidFill>
-                            <a:srgbClr val="1B1B21"/>
-                          </a:solidFill>
-                          <a:latin typeface="Arial" pitchFamily="34" charset="0"/>
-                          <a:ea typeface="Arial" pitchFamily="34" charset="-122"/>
-                          <a:cs typeface="Arial" pitchFamily="34" charset="-120"/>
-                        </a:rPr>
-                        <a:t>생명주기·코루틴·메모리·프로파일링</a:t>
-                      </a:r>
-                      <a:endParaRPr lang="en-US" sz="1080" dirty="0">
-                        <a:latin typeface="Arial" charset="0"/>
-                        <a:ea typeface="Arial" charset="0"/>
-                        <a:cs typeface="Arial" charset="0"/>
-                      </a:endParaRPr>
-                    </a:p>
-                  </a:txBody>
-                  <a:tcPr marL="76200" marR="76200" marT="25400" marB="25400" anchor="ctr">
-                    <a:lnL w="6350" cap="flat" cmpd="sng" algn="ctr">
-                      <a:solidFill>
-                        <a:srgbClr val="E3E3EA"/>
-                      </a:solidFill>
-                      <a:prstDash val="solid"/>
-                      <a:round/>
-                      <a:headEnd type="none" w="med" len="med"/>
-                      <a:tailEnd type="none" w="med" len="med"/>
-                    </a:lnL>
-                    <a:lnR w="6350" cap="flat" cmpd="sng" algn="ctr">
-                      <a:solidFill>
-                        <a:srgbClr val="E3E3EA"/>
-                      </a:solidFill>
-                      <a:prstDash val="solid"/>
-                      <a:round/>
-                      <a:headEnd type="none" w="med" len="med"/>
-                      <a:tailEnd type="none" w="med" len="med"/>
-                    </a:lnR>
-                    <a:lnT w="6350" cap="flat" cmpd="sng" algn="ctr">
-                      <a:solidFill>
-                        <a:srgbClr val="E3E3EA"/>
-                      </a:solidFill>
-                      <a:prstDash val="solid"/>
-                      <a:round/>
-                      <a:headEnd type="none" w="med" len="med"/>
-                      <a:tailEnd type="none" w="med" len="med"/>
-                    </a:lnT>
-                    <a:lnB w="6350" cap="flat" cmpd="sng" algn="ctr">
-                      <a:solidFill>
-                        <a:srgbClr val="E3E3EA"/>
-                      </a:solidFill>
-                      <a:prstDash val="solid"/>
-                      <a:round/>
-                      <a:headEnd type="none" w="med" len="med"/>
-                      <a:tailEnd type="none" w="med" len="med"/>
-                    </a:lnB>
-                  </a:tcPr>
-                </a:tc>
-                <a:tc>
-                  <a:txBody>
-                    <a:bodyPr/>
-                    <a:lstStyle/>
-                    <a:p>
-                      <a:pPr indent="0" marL="0">
-                        <a:buNone/>
-                      </a:pPr>
-                      <a:r>
-                        <a:rPr lang="en-US" sz="1080" dirty="0">
-                          <a:solidFill>
-                            <a:srgbClr val="1B1B21"/>
-                          </a:solidFill>
-                          <a:latin typeface="Arial" pitchFamily="34" charset="0"/>
-                          <a:ea typeface="Arial" pitchFamily="34" charset="-122"/>
-                          <a:cs typeface="Arial" pitchFamily="34" charset="-120"/>
-                        </a:rPr>
-                        <a:t>Unity Learn · 프로파일러</a:t>
-                      </a:r>
-                      <a:endParaRPr lang="en-US" sz="1080" dirty="0">
-                        <a:latin typeface="Arial" charset="0"/>
-                        <a:ea typeface="Arial" charset="0"/>
-                        <a:cs typeface="Arial" charset="0"/>
-                      </a:endParaRPr>
-                    </a:p>
-                  </a:txBody>
-                  <a:tcPr marL="76200" marR="76200" marT="25400" marB="25400" anchor="ctr">
-                    <a:lnL w="6350" cap="flat" cmpd="sng" algn="ctr">
-                      <a:solidFill>
-                        <a:srgbClr val="E3E3EA"/>
-                      </a:solidFill>
-                      <a:prstDash val="solid"/>
-                      <a:round/>
-                      <a:headEnd type="none" w="med" len="med"/>
-                      <a:tailEnd type="none" w="med" len="med"/>
-                    </a:lnL>
-                    <a:lnR w="6350" cap="flat" cmpd="sng" algn="ctr">
-                      <a:solidFill>
-                        <a:srgbClr val="E3E3EA"/>
-                      </a:solidFill>
-                      <a:prstDash val="solid"/>
-                      <a:round/>
-                      <a:headEnd type="none" w="med" len="med"/>
-                      <a:tailEnd type="none" w="med" len="med"/>
-                    </a:lnR>
-                    <a:lnT w="6350" cap="flat" cmpd="sng" algn="ctr">
-                      <a:solidFill>
-                        <a:srgbClr val="E3E3EA"/>
-                      </a:solidFill>
-                      <a:prstDash val="solid"/>
-                      <a:round/>
-                      <a:headEnd type="none" w="med" len="med"/>
-                      <a:tailEnd type="none" w="med" len="med"/>
-                    </a:lnT>
-                    <a:lnB w="6350" cap="flat" cmpd="sng" algn="ctr">
-                      <a:solidFill>
-                        <a:srgbClr val="E3E3EA"/>
-                      </a:solidFill>
-                      <a:prstDash val="solid"/>
-                      <a:round/>
-                      <a:headEnd type="none" w="med" len="med"/>
-                      <a:tailEnd type="none" w="med" len="med"/>
-                    </a:lnB>
-                  </a:tcPr>
-                </a:tc>
-              </a:tr>
-              <a:tr h="457200">
-                <a:tc>
-                  <a:txBody>
-                    <a:bodyPr/>
-                    <a:lstStyle/>
-                    <a:p>
-                      <a:pPr indent="0" marL="0">
-                        <a:buNone/>
-                      </a:pPr>
-                      <a:r>
-                        <a:rPr lang="en-US" sz="1080" dirty="0">
-                          <a:solidFill>
-                            <a:srgbClr val="1B1B21"/>
-                          </a:solidFill>
-                          <a:latin typeface="Arial" pitchFamily="34" charset="0"/>
-                          <a:ea typeface="Arial" pitchFamily="34" charset="-122"/>
-                          <a:cs typeface="Arial" pitchFamily="34" charset="-120"/>
-                        </a:rPr>
-                        <a:t>임베디드 C</a:t>
-                      </a:r>
-                      <a:endParaRPr lang="en-US" sz="1080" dirty="0">
-                        <a:latin typeface="Arial" charset="0"/>
-                        <a:ea typeface="Arial" charset="0"/>
-                        <a:cs typeface="Arial" charset="0"/>
-                      </a:endParaRPr>
-                    </a:p>
-                  </a:txBody>
-                  <a:tcPr marL="76200" marR="76200" marT="25400" marB="25400" anchor="ctr">
-                    <a:lnL w="6350" cap="flat" cmpd="sng" algn="ctr">
-                      <a:solidFill>
-                        <a:srgbClr val="E3E3EA"/>
-                      </a:solidFill>
-                      <a:prstDash val="solid"/>
-                      <a:round/>
-                      <a:headEnd type="none" w="med" len="med"/>
-                      <a:tailEnd type="none" w="med" len="med"/>
-                    </a:lnL>
-                    <a:lnR w="6350" cap="flat" cmpd="sng" algn="ctr">
-                      <a:solidFill>
-                        <a:srgbClr val="E3E3EA"/>
-                      </a:solidFill>
-                      <a:prstDash val="solid"/>
-                      <a:round/>
-                      <a:headEnd type="none" w="med" len="med"/>
-                      <a:tailEnd type="none" w="med" len="med"/>
-                    </a:lnR>
-                    <a:lnT w="6350" cap="flat" cmpd="sng" algn="ctr">
-                      <a:solidFill>
-                        <a:srgbClr val="E3E3EA"/>
-                      </a:solidFill>
-                      <a:prstDash val="solid"/>
-                      <a:round/>
-                      <a:headEnd type="none" w="med" len="med"/>
-                      <a:tailEnd type="none" w="med" len="med"/>
-                    </a:lnT>
-                    <a:lnB w="6350" cap="flat" cmpd="sng" algn="ctr">
-                      <a:solidFill>
-                        <a:srgbClr val="E3E3EA"/>
-                      </a:solidFill>
-                      <a:prstDash val="solid"/>
-                      <a:round/>
-                      <a:headEnd type="none" w="med" len="med"/>
-                      <a:tailEnd type="none" w="med" len="med"/>
-                    </a:lnB>
-                  </a:tcPr>
-                </a:tc>
-                <a:tc>
-                  <a:txBody>
-                    <a:bodyPr/>
-                    <a:lstStyle/>
-                    <a:p>
-                      <a:pPr indent="0" marL="0">
-                        <a:buNone/>
-                      </a:pPr>
-                      <a:r>
-                        <a:rPr lang="en-US" sz="1080" dirty="0">
-                          <a:solidFill>
-                            <a:srgbClr val="1B1B21"/>
-                          </a:solidFill>
-                          <a:latin typeface="Arial" pitchFamily="34" charset="0"/>
-                          <a:ea typeface="Arial" pitchFamily="34" charset="-122"/>
-                          <a:cs typeface="Arial" pitchFamily="34" charset="-120"/>
-                        </a:rPr>
-                        <a:t>I2C/I2S 브링업</a:t>
-                      </a:r>
-                      <a:endParaRPr lang="en-US" sz="1080" dirty="0">
-                        <a:latin typeface="Arial" charset="0"/>
-                        <a:ea typeface="Arial" charset="0"/>
-                        <a:cs typeface="Arial" charset="0"/>
-                      </a:endParaRPr>
-                    </a:p>
-                  </a:txBody>
-                  <a:tcPr marL="76200" marR="76200" marT="25400" marB="25400" anchor="ctr">
-                    <a:lnL w="6350" cap="flat" cmpd="sng" algn="ctr">
-                      <a:solidFill>
-                        <a:srgbClr val="E3E3EA"/>
-                      </a:solidFill>
-                      <a:prstDash val="solid"/>
-                      <a:round/>
-                      <a:headEnd type="none" w="med" len="med"/>
-                      <a:tailEnd type="none" w="med" len="med"/>
-                    </a:lnL>
-                    <a:lnR w="6350" cap="flat" cmpd="sng" algn="ctr">
-                      <a:solidFill>
-                        <a:srgbClr val="E3E3EA"/>
-                      </a:solidFill>
-                      <a:prstDash val="solid"/>
-                      <a:round/>
-                      <a:headEnd type="none" w="med" len="med"/>
-                      <a:tailEnd type="none" w="med" len="med"/>
-                    </a:lnR>
-                    <a:lnT w="6350" cap="flat" cmpd="sng" algn="ctr">
-                      <a:solidFill>
-                        <a:srgbClr val="E3E3EA"/>
-                      </a:solidFill>
-                      <a:prstDash val="solid"/>
-                      <a:round/>
-                      <a:headEnd type="none" w="med" len="med"/>
-                      <a:tailEnd type="none" w="med" len="med"/>
-                    </a:lnT>
-                    <a:lnB w="6350" cap="flat" cmpd="sng" algn="ctr">
-                      <a:solidFill>
-                        <a:srgbClr val="E3E3EA"/>
-                      </a:solidFill>
-                      <a:prstDash val="solid"/>
-                      <a:round/>
-                      <a:headEnd type="none" w="med" len="med"/>
-                      <a:tailEnd type="none" w="med" len="med"/>
-                    </a:lnB>
-                  </a:tcPr>
-                </a:tc>
-                <a:tc>
-                  <a:txBody>
-                    <a:bodyPr/>
-                    <a:lstStyle/>
-                    <a:p>
-                      <a:pPr indent="0" marL="0">
-                        <a:buNone/>
-                      </a:pPr>
-                      <a:r>
-                        <a:rPr lang="en-US" sz="1080" dirty="0">
-                          <a:solidFill>
-                            <a:srgbClr val="1B1B21"/>
-                          </a:solidFill>
-                          <a:latin typeface="Arial" pitchFamily="34" charset="0"/>
-                          <a:ea typeface="Arial" pitchFamily="34" charset="-122"/>
-                          <a:cs typeface="Arial" pitchFamily="34" charset="-120"/>
-                        </a:rPr>
-                        <a:t>포인터·메모리·RTOS 원리</a:t>
-                      </a:r>
-                      <a:endParaRPr lang="en-US" sz="1080" dirty="0">
-                        <a:latin typeface="Arial" charset="0"/>
-                        <a:ea typeface="Arial" charset="0"/>
-                        <a:cs typeface="Arial" charset="0"/>
-                      </a:endParaRPr>
-                    </a:p>
-                  </a:txBody>
-                  <a:tcPr marL="76200" marR="76200" marT="25400" marB="25400" anchor="ctr">
-                    <a:lnL w="6350" cap="flat" cmpd="sng" algn="ctr">
-                      <a:solidFill>
-                        <a:srgbClr val="E3E3EA"/>
-                      </a:solidFill>
-                      <a:prstDash val="solid"/>
-                      <a:round/>
-                      <a:headEnd type="none" w="med" len="med"/>
-                      <a:tailEnd type="none" w="med" len="med"/>
-                    </a:lnL>
-                    <a:lnR w="6350" cap="flat" cmpd="sng" algn="ctr">
-                      <a:solidFill>
-                        <a:srgbClr val="E3E3EA"/>
-                      </a:solidFill>
-                      <a:prstDash val="solid"/>
-                      <a:round/>
-                      <a:headEnd type="none" w="med" len="med"/>
-                      <a:tailEnd type="none" w="med" len="med"/>
-                    </a:lnR>
-                    <a:lnT w="6350" cap="flat" cmpd="sng" algn="ctr">
-                      <a:solidFill>
-                        <a:srgbClr val="E3E3EA"/>
-                      </a:solidFill>
-                      <a:prstDash val="solid"/>
-                      <a:round/>
-                      <a:headEnd type="none" w="med" len="med"/>
-                      <a:tailEnd type="none" w="med" len="med"/>
-                    </a:lnT>
-                    <a:lnB w="6350" cap="flat" cmpd="sng" algn="ctr">
-                      <a:solidFill>
-                        <a:srgbClr val="E3E3EA"/>
-                      </a:solidFill>
-                      <a:prstDash val="solid"/>
-                      <a:round/>
-                      <a:headEnd type="none" w="med" len="med"/>
-                      <a:tailEnd type="none" w="med" len="med"/>
-                    </a:lnB>
-                  </a:tcPr>
-                </a:tc>
-                <a:tc>
-                  <a:txBody>
-                    <a:bodyPr/>
-                    <a:lstStyle/>
-                    <a:p>
-                      <a:pPr indent="0" marL="0">
-                        <a:buNone/>
-                      </a:pPr>
-                      <a:r>
-                        <a:rPr lang="en-US" sz="1080" dirty="0">
-                          <a:solidFill>
-                            <a:srgbClr val="1B1B21"/>
-                          </a:solidFill>
-                          <a:latin typeface="Arial" pitchFamily="34" charset="0"/>
-                          <a:ea typeface="Arial" pitchFamily="34" charset="-122"/>
-                          <a:cs typeface="Arial" pitchFamily="34" charset="-120"/>
-                        </a:rPr>
-                        <a:t>ESP-IDF 문서 · 데이터시트 직독</a:t>
-                      </a:r>
-                      <a:endParaRPr lang="en-US" sz="1080" dirty="0">
-                        <a:latin typeface="Arial" charset="0"/>
-                        <a:ea typeface="Arial" charset="0"/>
-                        <a:cs typeface="Arial" charset="0"/>
-                      </a:endParaRPr>
-                    </a:p>
-                  </a:txBody>
-                  <a:tcPr marL="76200" marR="76200" marT="25400" marB="25400" anchor="ctr">
-                    <a:lnL w="6350" cap="flat" cmpd="sng" algn="ctr">
-                      <a:solidFill>
-                        <a:srgbClr val="E3E3EA"/>
-                      </a:solidFill>
-                      <a:prstDash val="solid"/>
-                      <a:round/>
-                      <a:headEnd type="none" w="med" len="med"/>
-                      <a:tailEnd type="none" w="med" len="med"/>
-                    </a:lnL>
-                    <a:lnR w="6350" cap="flat" cmpd="sng" algn="ctr">
-                      <a:solidFill>
-                        <a:srgbClr val="E3E3EA"/>
-                      </a:solidFill>
-                      <a:prstDash val="solid"/>
-                      <a:round/>
-                      <a:headEnd type="none" w="med" len="med"/>
-                      <a:tailEnd type="none" w="med" len="med"/>
-                    </a:lnR>
-                    <a:lnT w="6350" cap="flat" cmpd="sng" algn="ctr">
-                      <a:solidFill>
-                        <a:srgbClr val="E3E3EA"/>
-                      </a:solidFill>
-                      <a:prstDash val="solid"/>
-                      <a:round/>
-                      <a:headEnd type="none" w="med" len="med"/>
-                      <a:tailEnd type="none" w="med" len="med"/>
-                    </a:lnT>
-                    <a:lnB w="6350" cap="flat" cmpd="sng" algn="ctr">
-                      <a:solidFill>
-                        <a:srgbClr val="E3E3EA"/>
-                      </a:solidFill>
-                      <a:prstDash val="solid"/>
-                      <a:round/>
-                      <a:headEnd type="none" w="med" len="med"/>
-                      <a:tailEnd type="none" w="med" len="med"/>
-                    </a:lnB>
-                  </a:tcPr>
-                </a:tc>
-              </a:tr>
-              <a:tr h="457200">
-                <a:tc>
-                  <a:txBody>
-                    <a:bodyPr/>
-                    <a:lstStyle/>
-                    <a:p>
-                      <a:pPr indent="0" marL="0">
-                        <a:buNone/>
-                      </a:pPr>
-                      <a:r>
-                        <a:rPr lang="en-US" sz="1080" b="1" dirty="0">
-                          <a:solidFill>
-                            <a:srgbClr val="B1462C"/>
-                          </a:solidFill>
-                          <a:latin typeface="Arial" pitchFamily="34" charset="0"/>
-                          <a:ea typeface="Arial" pitchFamily="34" charset="-122"/>
-                          <a:cs typeface="Arial" pitchFamily="34" charset="-120"/>
-                        </a:rPr>
-                        <a:t>ROS2 · 로봇 제어</a:t>
-                      </a:r>
-                      <a:endParaRPr lang="en-US" sz="1080" dirty="0">
-                        <a:latin typeface="Arial" charset="0"/>
-                        <a:ea typeface="Arial" charset="0"/>
-                        <a:cs typeface="Arial" charset="0"/>
-                      </a:endParaRPr>
-                    </a:p>
-                  </a:txBody>
-                  <a:tcPr marL="76200" marR="76200" marT="25400" marB="25400" anchor="ctr">
-                    <a:lnL w="6350" cap="flat" cmpd="sng" algn="ctr">
-                      <a:solidFill>
-                        <a:srgbClr val="E3E3EA"/>
-                      </a:solidFill>
-                      <a:prstDash val="solid"/>
-                      <a:round/>
-                      <a:headEnd type="none" w="med" len="med"/>
-                      <a:tailEnd type="none" w="med" len="med"/>
-                    </a:lnL>
-                    <a:lnR w="6350" cap="flat" cmpd="sng" algn="ctr">
-                      <a:solidFill>
-                        <a:srgbClr val="E3E3EA"/>
-                      </a:solidFill>
-                      <a:prstDash val="solid"/>
-                      <a:round/>
-                      <a:headEnd type="none" w="med" len="med"/>
-                      <a:tailEnd type="none" w="med" len="med"/>
-                    </a:lnR>
-                    <a:lnT w="6350" cap="flat" cmpd="sng" algn="ctr">
-                      <a:solidFill>
-                        <a:srgbClr val="E3E3EA"/>
-                      </a:solidFill>
-                      <a:prstDash val="solid"/>
-                      <a:round/>
-                      <a:headEnd type="none" w="med" len="med"/>
-                      <a:tailEnd type="none" w="med" len="med"/>
-                    </a:lnT>
-                    <a:lnB w="6350" cap="flat" cmpd="sng" algn="ctr">
-                      <a:solidFill>
-                        <a:srgbClr val="E3E3EA"/>
-                      </a:solidFill>
-                      <a:prstDash val="solid"/>
-                      <a:round/>
-                      <a:headEnd type="none" w="med" len="med"/>
-                      <a:tailEnd type="none" w="med" len="med"/>
-                    </a:lnB>
-                  </a:tcPr>
-                </a:tc>
-                <a:tc>
-                  <a:txBody>
-                    <a:bodyPr/>
-                    <a:lstStyle/>
-                    <a:p>
-                      <a:pPr indent="0" marL="0">
-                        <a:buNone/>
-                      </a:pPr>
-                      <a:r>
-                        <a:rPr lang="en-US" sz="1080" dirty="0">
-                          <a:solidFill>
-                            <a:srgbClr val="1B1B21"/>
-                          </a:solidFill>
-                          <a:latin typeface="Arial" pitchFamily="34" charset="0"/>
-                          <a:ea typeface="Arial" pitchFamily="34" charset="-122"/>
-                          <a:cs typeface="Arial" pitchFamily="34" charset="-120"/>
-                        </a:rPr>
-                        <a:t>차동구동 등 9주제 조사</a:t>
-                      </a:r>
-                      <a:endParaRPr lang="en-US" sz="1080" dirty="0">
-                        <a:latin typeface="Arial" charset="0"/>
-                        <a:ea typeface="Arial" charset="0"/>
-                        <a:cs typeface="Arial" charset="0"/>
-                      </a:endParaRPr>
-                    </a:p>
-                  </a:txBody>
-                  <a:tcPr marL="76200" marR="76200" marT="25400" marB="25400" anchor="ctr">
-                    <a:lnL w="6350" cap="flat" cmpd="sng" algn="ctr">
-                      <a:solidFill>
-                        <a:srgbClr val="E3E3EA"/>
-                      </a:solidFill>
-                      <a:prstDash val="solid"/>
-                      <a:round/>
-                      <a:headEnd type="none" w="med" len="med"/>
-                      <a:tailEnd type="none" w="med" len="med"/>
-                    </a:lnL>
-                    <a:lnR w="6350" cap="flat" cmpd="sng" algn="ctr">
-                      <a:solidFill>
-                        <a:srgbClr val="E3E3EA"/>
-                      </a:solidFill>
-                      <a:prstDash val="solid"/>
-                      <a:round/>
-                      <a:headEnd type="none" w="med" len="med"/>
-                      <a:tailEnd type="none" w="med" len="med"/>
-                    </a:lnR>
-                    <a:lnT w="6350" cap="flat" cmpd="sng" algn="ctr">
-                      <a:solidFill>
-                        <a:srgbClr val="E3E3EA"/>
-                      </a:solidFill>
-                      <a:prstDash val="solid"/>
-                      <a:round/>
-                      <a:headEnd type="none" w="med" len="med"/>
-                      <a:tailEnd type="none" w="med" len="med"/>
-                    </a:lnT>
-                    <a:lnB w="6350" cap="flat" cmpd="sng" algn="ctr">
-                      <a:solidFill>
-                        <a:srgbClr val="E3E3EA"/>
-                      </a:solidFill>
-                      <a:prstDash val="solid"/>
-                      <a:round/>
-                      <a:headEnd type="none" w="med" len="med"/>
-                      <a:tailEnd type="none" w="med" len="med"/>
-                    </a:lnB>
-                  </a:tcPr>
-                </a:tc>
-                <a:tc>
-                  <a:txBody>
-                    <a:bodyPr/>
-                    <a:lstStyle/>
-                    <a:p>
-                      <a:pPr indent="0" marL="0">
-                        <a:buNone/>
-                      </a:pPr>
-                      <a:r>
-                        <a:rPr lang="en-US" sz="1080" dirty="0">
-                          <a:solidFill>
-                            <a:srgbClr val="1B1B21"/>
-                          </a:solidFill>
-                          <a:latin typeface="Arial" pitchFamily="34" charset="0"/>
-                          <a:ea typeface="Arial" pitchFamily="34" charset="-122"/>
-                          <a:cs typeface="Arial" pitchFamily="34" charset="-120"/>
-                        </a:rPr>
-                        <a:t>ROS2 노드·기구학·PID 직접 구현</a:t>
-                      </a:r>
-                      <a:endParaRPr lang="en-US" sz="1080" dirty="0">
-                        <a:latin typeface="Arial" charset="0"/>
-                        <a:ea typeface="Arial" charset="0"/>
-                        <a:cs typeface="Arial" charset="0"/>
-                      </a:endParaRPr>
-                    </a:p>
-                  </a:txBody>
-                  <a:tcPr marL="76200" marR="76200" marT="25400" marB="25400" anchor="ctr">
-                    <a:lnL w="6350" cap="flat" cmpd="sng" algn="ctr">
-                      <a:solidFill>
-                        <a:srgbClr val="E3E3EA"/>
-                      </a:solidFill>
-                      <a:prstDash val="solid"/>
-                      <a:round/>
-                      <a:headEnd type="none" w="med" len="med"/>
-                      <a:tailEnd type="none" w="med" len="med"/>
-                    </a:lnL>
-                    <a:lnR w="6350" cap="flat" cmpd="sng" algn="ctr">
-                      <a:solidFill>
-                        <a:srgbClr val="E3E3EA"/>
-                      </a:solidFill>
-                      <a:prstDash val="solid"/>
-                      <a:round/>
-                      <a:headEnd type="none" w="med" len="med"/>
-                      <a:tailEnd type="none" w="med" len="med"/>
-                    </a:lnR>
-                    <a:lnT w="6350" cap="flat" cmpd="sng" algn="ctr">
-                      <a:solidFill>
-                        <a:srgbClr val="E3E3EA"/>
-                      </a:solidFill>
-                      <a:prstDash val="solid"/>
-                      <a:round/>
-                      <a:headEnd type="none" w="med" len="med"/>
-                      <a:tailEnd type="none" w="med" len="med"/>
-                    </a:lnT>
-                    <a:lnB w="6350" cap="flat" cmpd="sng" algn="ctr">
-                      <a:solidFill>
-                        <a:srgbClr val="E3E3EA"/>
-                      </a:solidFill>
-                      <a:prstDash val="solid"/>
-                      <a:round/>
-                      <a:headEnd type="none" w="med" len="med"/>
-                      <a:tailEnd type="none" w="med" len="med"/>
-                    </a:lnB>
-                  </a:tcPr>
-                </a:tc>
-                <a:tc>
-                  <a:txBody>
-                    <a:bodyPr/>
-                    <a:lstStyle/>
-                    <a:p>
-                      <a:pPr indent="0" marL="0">
-                        <a:buNone/>
-                      </a:pPr>
-                      <a:r>
-                        <a:rPr lang="en-US" sz="1080" dirty="0">
-                          <a:solidFill>
-                            <a:srgbClr val="1B1B21"/>
-                          </a:solidFill>
-                          <a:latin typeface="Arial" pitchFamily="34" charset="0"/>
-                          <a:ea typeface="Arial" pitchFamily="34" charset="-122"/>
-                          <a:cs typeface="Arial" pitchFamily="34" charset="-120"/>
-                        </a:rPr>
-                        <a:t>ROS2 공식 튜토리얼 · 제어이론</a:t>
-                      </a:r>
-                      <a:endParaRPr lang="en-US" sz="1080" dirty="0">
-                        <a:latin typeface="Arial" charset="0"/>
-                        <a:ea typeface="Arial" charset="0"/>
-                        <a:cs typeface="Arial" charset="0"/>
-                      </a:endParaRPr>
-                    </a:p>
-                  </a:txBody>
-                  <a:tcPr marL="76200" marR="76200" marT="25400" marB="25400" anchor="ctr">
+                  <a:tcPr marL="88900" marR="88900" marT="38100" marB="38100" anchor="ctr">
                     <a:lnL w="6350" cap="flat" cmpd="sng" algn="ctr">
                       <a:solidFill>
                         <a:srgbClr val="E3E3EA"/>
@@ -14314,14 +8899,14 @@
       </p:graphicFrame>
       <p:sp>
         <p:nvSpPr>
-          <p:cNvPr id="5" name="Text 2"/>
+          <p:cNvPr id="8" name="Text 4"/>
           <p:cNvSpPr/>
           <p:nvPr/>
         </p:nvSpPr>
         <p:spPr>
           <a:xfrm>
             <a:off x="640080" y="5029200"/>
-            <a:ext cx="10058400" cy="320040"/>
+            <a:ext cx="10908792" cy="365760"/>
           </a:xfrm>
           <a:prstGeom prst="rect">
             <a:avLst/>
@@ -14337,7 +8922,7 @@
               <a:buNone/>
             </a:pPr>
             <a:r>
-              <a:rPr lang="en-US" sz="1250" b="1" dirty="0">
+              <a:rPr lang="en-US" sz="1300" b="1" dirty="0">
                 <a:solidFill>
                   <a:srgbClr val="33386E"/>
                 </a:solidFill>
@@ -14345,79 +8930,52 @@
                 <a:ea typeface="Arial" pitchFamily="34" charset="-122"/>
                 <a:cs typeface="Arial" pitchFamily="34" charset="-120"/>
               </a:rPr>
-              <a:t>학습 원칙 — 바이브 코딩을 이해로 전환하는 3단계</a:t>
+              <a:t>자격증   </a:t>
             </a:r>
-            <a:endParaRPr lang="en-US" sz="1250" dirty="0"/>
-          </a:p>
-        </p:txBody>
-      </p:sp>
-      <p:sp>
-        <p:nvSpPr>
-          <p:cNvPr id="6" name="Shape 3"/>
-          <p:cNvSpPr/>
-          <p:nvPr/>
-        </p:nvSpPr>
-        <p:spPr>
-          <a:xfrm>
-            <a:off x="640080" y="5440680"/>
-            <a:ext cx="3291840" cy="822960"/>
-          </a:xfrm>
-          <a:prstGeom prst="roundRect">
-            <a:avLst>
-              <a:gd name="adj" fmla="val 8889"/>
-            </a:avLst>
-          </a:prstGeom>
-          <a:solidFill>
-            <a:srgbClr val="ECEDF7"/>
-          </a:solidFill>
-          <a:ln w="6350">
-            <a:solidFill>
-              <a:srgbClr val="E3E3EA"/>
-            </a:solidFill>
-            <a:prstDash val="solid"/>
-          </a:ln>
-        </p:spPr>
-      </p:sp>
-      <p:sp>
-        <p:nvSpPr>
-          <p:cNvPr id="7" name="Text 4"/>
-          <p:cNvSpPr/>
-          <p:nvPr/>
-        </p:nvSpPr>
-        <p:spPr>
-          <a:xfrm>
-            <a:off x="822960" y="5440680"/>
-            <a:ext cx="2926080" cy="822960"/>
-          </a:xfrm>
-          <a:prstGeom prst="rect">
-            <a:avLst/>
-          </a:prstGeom>
-          <a:noFill/>
-          <a:ln/>
-        </p:spPr>
-        <p:txBody>
-          <a:bodyPr wrap="square" lIns="0" tIns="0" rIns="0" bIns="0" rtlCol="0" anchor="ctr"/>
-          <a:lstStyle/>
-          <a:p>
             <a:pPr indent="0" marL="0">
               <a:buNone/>
             </a:pPr>
             <a:r>
-              <a:rPr lang="en-US" sz="1200" b="1" dirty="0">
+              <a:rPr lang="en-US" sz="1200" dirty="0">
                 <a:solidFill>
-                  <a:srgbClr val="33386E"/>
+                  <a:srgbClr val="1B1B21"/>
                 </a:solidFill>
                 <a:latin typeface="Arial" pitchFamily="34" charset="0"/>
                 <a:ea typeface="Arial" pitchFamily="34" charset="-122"/>
                 <a:cs typeface="Arial" pitchFamily="34" charset="-120"/>
               </a:rPr>
-              <a:t>① 다시 읽기  </a:t>
+              <a:t>전자기능사, 전자캐드기능사, 전자기기기능사</a:t>
             </a:r>
+            <a:endParaRPr lang="en-US" sz="1300" dirty="0"/>
+          </a:p>
+        </p:txBody>
+      </p:sp>
+      <p:sp>
+        <p:nvSpPr>
+          <p:cNvPr id="9" name="Text 5"/>
+          <p:cNvSpPr/>
+          <p:nvPr/>
+        </p:nvSpPr>
+        <p:spPr>
+          <a:xfrm>
+            <a:off x="640080" y="5532120"/>
+            <a:ext cx="10908792" cy="365760"/>
+          </a:xfrm>
+          <a:prstGeom prst="rect">
+            <a:avLst/>
+          </a:prstGeom>
+          <a:noFill/>
+          <a:ln/>
+        </p:spPr>
+        <p:txBody>
+          <a:bodyPr wrap="square" lIns="0" tIns="0" rIns="0" bIns="0" rtlCol="0" anchor="ctr"/>
+          <a:lstStyle/>
+          <a:p>
             <a:pPr indent="0" marL="0">
               <a:buNone/>
             </a:pPr>
             <a:r>
-              <a:rPr lang="en-US" sz="950" dirty="0">
+              <a:rPr lang="en-US" sz="1200" dirty="0">
                 <a:solidFill>
                   <a:srgbClr val="565663"/>
                 </a:solidFill>
@@ -14425,245 +8983,7 @@
                 <a:ea typeface="Arial" pitchFamily="34" charset="-122"/>
                 <a:cs typeface="Arial" pitchFamily="34" charset="-120"/>
               </a:rPr>
-              <a:t>한 줄씩 읽고 모르는 부분 표시</a:t>
-            </a:r>
-            <a:endParaRPr lang="en-US" sz="1200" dirty="0"/>
-          </a:p>
-        </p:txBody>
-      </p:sp>
-      <p:sp>
-        <p:nvSpPr>
-          <p:cNvPr id="8" name="Text 5"/>
-          <p:cNvSpPr/>
-          <p:nvPr/>
-        </p:nvSpPr>
-        <p:spPr>
-          <a:xfrm>
-            <a:off x="3931920" y="5440680"/>
-            <a:ext cx="516636" cy="822960"/>
-          </a:xfrm>
-          <a:prstGeom prst="rect">
-            <a:avLst/>
-          </a:prstGeom>
-          <a:noFill/>
-          <a:ln/>
-        </p:spPr>
-        <p:txBody>
-          <a:bodyPr wrap="square" lIns="0" tIns="0" rIns="0" bIns="0" rtlCol="0" anchor="ctr"/>
-          <a:lstStyle/>
-          <a:p>
-            <a:pPr algn="ctr" indent="0" marL="0">
-              <a:buNone/>
-            </a:pPr>
-            <a:r>
-              <a:rPr lang="en-US" sz="1600" b="1" dirty="0">
-                <a:solidFill>
-                  <a:srgbClr val="33386E"/>
-                </a:solidFill>
-                <a:latin typeface="Arial" pitchFamily="34" charset="0"/>
-                <a:ea typeface="Arial" pitchFamily="34" charset="-122"/>
-                <a:cs typeface="Arial" pitchFamily="34" charset="-120"/>
-              </a:rPr>
-              <a:t>→</a:t>
-            </a:r>
-            <a:endParaRPr lang="en-US" sz="1600" dirty="0"/>
-          </a:p>
-        </p:txBody>
-      </p:sp>
-      <p:sp>
-        <p:nvSpPr>
-          <p:cNvPr id="9" name="Shape 6"/>
-          <p:cNvSpPr/>
-          <p:nvPr/>
-        </p:nvSpPr>
-        <p:spPr>
-          <a:xfrm>
-            <a:off x="4448556" y="5440680"/>
-            <a:ext cx="3291840" cy="822960"/>
-          </a:xfrm>
-          <a:prstGeom prst="roundRect">
-            <a:avLst>
-              <a:gd name="adj" fmla="val 8889"/>
-            </a:avLst>
-          </a:prstGeom>
-          <a:solidFill>
-            <a:srgbClr val="F8ECE7"/>
-          </a:solidFill>
-          <a:ln w="6350">
-            <a:solidFill>
-              <a:srgbClr val="E3E3EA"/>
-            </a:solidFill>
-            <a:prstDash val="solid"/>
-          </a:ln>
-        </p:spPr>
-      </p:sp>
-      <p:sp>
-        <p:nvSpPr>
-          <p:cNvPr id="10" name="Text 7"/>
-          <p:cNvSpPr/>
-          <p:nvPr/>
-        </p:nvSpPr>
-        <p:spPr>
-          <a:xfrm>
-            <a:off x="4631436" y="5440680"/>
-            <a:ext cx="2926080" cy="822960"/>
-          </a:xfrm>
-          <a:prstGeom prst="rect">
-            <a:avLst/>
-          </a:prstGeom>
-          <a:noFill/>
-          <a:ln/>
-        </p:spPr>
-        <p:txBody>
-          <a:bodyPr wrap="square" lIns="0" tIns="0" rIns="0" bIns="0" rtlCol="0" anchor="ctr"/>
-          <a:lstStyle/>
-          <a:p>
-            <a:pPr indent="0" marL="0">
-              <a:buNone/>
-            </a:pPr>
-            <a:r>
-              <a:rPr lang="en-US" sz="1200" b="1" dirty="0">
-                <a:solidFill>
-                  <a:srgbClr val="B1462C"/>
-                </a:solidFill>
-                <a:latin typeface="Arial" pitchFamily="34" charset="0"/>
-                <a:ea typeface="Arial" pitchFamily="34" charset="-122"/>
-                <a:cs typeface="Arial" pitchFamily="34" charset="-120"/>
-              </a:rPr>
-              <a:t>② 개념 학습  </a:t>
-            </a:r>
-            <a:pPr indent="0" marL="0">
-              <a:buNone/>
-            </a:pPr>
-            <a:r>
-              <a:rPr lang="en-US" sz="950" dirty="0">
-                <a:solidFill>
-                  <a:srgbClr val="565663"/>
-                </a:solidFill>
-                <a:latin typeface="Arial" pitchFamily="34" charset="0"/>
-                <a:ea typeface="Arial" pitchFamily="34" charset="-122"/>
-                <a:cs typeface="Arial" pitchFamily="34" charset="-120"/>
-              </a:rPr>
-              <a:t>그 개념만 따로 공부·노트 정리</a:t>
-            </a:r>
-            <a:endParaRPr lang="en-US" sz="1200" dirty="0"/>
-          </a:p>
-        </p:txBody>
-      </p:sp>
-      <p:sp>
-        <p:nvSpPr>
-          <p:cNvPr id="11" name="Text 8"/>
-          <p:cNvSpPr/>
-          <p:nvPr/>
-        </p:nvSpPr>
-        <p:spPr>
-          <a:xfrm>
-            <a:off x="7740396" y="5440680"/>
-            <a:ext cx="516636" cy="822960"/>
-          </a:xfrm>
-          <a:prstGeom prst="rect">
-            <a:avLst/>
-          </a:prstGeom>
-          <a:noFill/>
-          <a:ln/>
-        </p:spPr>
-        <p:txBody>
-          <a:bodyPr wrap="square" lIns="0" tIns="0" rIns="0" bIns="0" rtlCol="0" anchor="ctr"/>
-          <a:lstStyle/>
-          <a:p>
-            <a:pPr algn="ctr" indent="0" marL="0">
-              <a:buNone/>
-            </a:pPr>
-            <a:r>
-              <a:rPr lang="en-US" sz="1600" b="1" dirty="0">
-                <a:solidFill>
-                  <a:srgbClr val="33386E"/>
-                </a:solidFill>
-                <a:latin typeface="Arial" pitchFamily="34" charset="0"/>
-                <a:ea typeface="Arial" pitchFamily="34" charset="-122"/>
-                <a:cs typeface="Arial" pitchFamily="34" charset="-120"/>
-              </a:rPr>
-              <a:t>→</a:t>
-            </a:r>
-            <a:endParaRPr lang="en-US" sz="1600" dirty="0"/>
-          </a:p>
-        </p:txBody>
-      </p:sp>
-      <p:sp>
-        <p:nvSpPr>
-          <p:cNvPr id="12" name="Shape 9"/>
-          <p:cNvSpPr/>
-          <p:nvPr/>
-        </p:nvSpPr>
-        <p:spPr>
-          <a:xfrm>
-            <a:off x="8257032" y="5440680"/>
-            <a:ext cx="3291840" cy="822960"/>
-          </a:xfrm>
-          <a:prstGeom prst="roundRect">
-            <a:avLst>
-              <a:gd name="adj" fmla="val 8889"/>
-            </a:avLst>
-          </a:prstGeom>
-          <a:solidFill>
-            <a:srgbClr val="E7F1F0"/>
-          </a:solidFill>
-          <a:ln w="6350">
-            <a:solidFill>
-              <a:srgbClr val="E3E3EA"/>
-            </a:solidFill>
-            <a:prstDash val="solid"/>
-          </a:ln>
-        </p:spPr>
-      </p:sp>
-      <p:sp>
-        <p:nvSpPr>
-          <p:cNvPr id="13" name="Text 10"/>
-          <p:cNvSpPr/>
-          <p:nvPr/>
-        </p:nvSpPr>
-        <p:spPr>
-          <a:xfrm>
-            <a:off x="8439912" y="5440680"/>
-            <a:ext cx="2926080" cy="822960"/>
-          </a:xfrm>
-          <a:prstGeom prst="rect">
-            <a:avLst/>
-          </a:prstGeom>
-          <a:noFill/>
-          <a:ln/>
-        </p:spPr>
-        <p:txBody>
-          <a:bodyPr wrap="square" lIns="0" tIns="0" rIns="0" bIns="0" rtlCol="0" anchor="ctr"/>
-          <a:lstStyle/>
-          <a:p>
-            <a:pPr indent="0" marL="0">
-              <a:buNone/>
-            </a:pPr>
-            <a:r>
-              <a:rPr lang="en-US" sz="1200" b="1" dirty="0">
-                <a:solidFill>
-                  <a:srgbClr val="1F6F6B"/>
-                </a:solidFill>
-                <a:latin typeface="Arial" pitchFamily="34" charset="0"/>
-                <a:ea typeface="Arial" pitchFamily="34" charset="-122"/>
-                <a:cs typeface="Arial" pitchFamily="34" charset="-120"/>
-              </a:rPr>
-              <a:t>③ 재구현  </a:t>
-            </a:r>
-            <a:pPr indent="0" marL="0">
-              <a:buNone/>
-            </a:pPr>
-            <a:r>
-              <a:rPr lang="en-US" sz="950" dirty="0">
-                <a:solidFill>
-                  <a:srgbClr val="565663"/>
-                </a:solidFill>
-                <a:latin typeface="Arial" pitchFamily="34" charset="0"/>
-                <a:ea typeface="Arial" pitchFamily="34" charset="-122"/>
-                <a:cs typeface="Arial" pitchFamily="34" charset="-120"/>
-              </a:rPr>
-              <a:t>도구 없이 축소판 직접 구현</a:t>
+              <a:t>수료: 산업체 수요특화형 AI교육 15h (영남이공대학교, 2026)</a:t>
             </a:r>
             <a:endParaRPr lang="en-US" sz="1200" dirty="0"/>
           </a:p>
